--- a/presentacion/Presentacion.pptx
+++ b/presentacion/Presentacion.pptx
@@ -10,15 +10,11 @@
   <p:sldIdLst>
     <p:sldId id="256" r:id="rId2"/>
     <p:sldId id="257" r:id="rId3"/>
-    <p:sldId id="258" r:id="rId4"/>
     <p:sldId id="259" r:id="rId5"/>
-    <p:sldId id="260" r:id="rId6"/>
     <p:sldId id="261" r:id="rId7"/>
     <p:sldId id="262" r:id="rId8"/>
     <p:sldId id="263" r:id="rId9"/>
     <p:sldId id="264" r:id="rId10"/>
-    <p:sldId id="265" r:id="rId11"/>
-    <p:sldId id="266" r:id="rId12"/>
     <p:sldId id="267" r:id="rId13"/>
     <p:sldId id="270" r:id="rId14"/>
     <p:sldId id="271" r:id="rId15"/>
@@ -335,174 +331,6 @@
 </p:notes>
 </file>
 
-<file path=ppt/notesSlides/notesSlide10.xml><?xml version="1.0" encoding="utf-8"?>
-<p:notes xmlns:a="http://schemas.openxmlformats.org/drawingml/2006/main" xmlns:r="http://schemas.openxmlformats.org/officeDocument/2006/relationships" xmlns:p="http://schemas.openxmlformats.org/presentationml/2006/main">
-  <p:cSld>
-    <p:spTree>
-      <p:nvGrpSpPr>
-        <p:cNvPr id="1" name=""/>
-        <p:cNvGrpSpPr/>
-        <p:nvPr/>
-      </p:nvGrpSpPr>
-      <p:grpSpPr>
-        <a:xfrm>
-          <a:off x="0" y="0"/>
-          <a:ext cx="0" cy="0"/>
-          <a:chOff x="0" y="0"/>
-          <a:chExt cx="0" cy="0"/>
-        </a:xfrm>
-      </p:grpSpPr>
-      <p:sp>
-        <p:nvSpPr>
-          <p:cNvPr id="2" name="Slide Image Placeholder 1"/>
-          <p:cNvSpPr>
-            <a:spLocks noGrp="1" noRot="1" noChangeAspect="1"/>
-          </p:cNvSpPr>
-          <p:nvPr>
-            <p:ph type="sldImg"/>
-          </p:nvPr>
-        </p:nvSpPr>
-        <p:spPr/>
-      </p:sp>
-      <p:sp>
-        <p:nvSpPr>
-          <p:cNvPr id="3" name="Notes Placeholder 2"/>
-          <p:cNvSpPr>
-            <a:spLocks noGrp="1"/>
-          </p:cNvSpPr>
-          <p:nvPr>
-            <p:ph type="body" idx="1"/>
-          </p:nvPr>
-        </p:nvSpPr>
-        <p:spPr/>
-        <p:txBody>
-          <a:bodyPr/>
-          <a:lstStyle/>
-          <a:p>
-            <a:endParaRPr lang="en-US" dirty="0"/>
-          </a:p>
-        </p:txBody>
-      </p:sp>
-      <p:sp>
-        <p:nvSpPr>
-          <p:cNvPr id="4" name="Slide Number Placeholder 3"/>
-          <p:cNvSpPr>
-            <a:spLocks noGrp="1"/>
-          </p:cNvSpPr>
-          <p:nvPr>
-            <p:ph type="sldNum" sz="quarter" idx="10"/>
-          </p:nvPr>
-        </p:nvSpPr>
-        <p:spPr/>
-        <p:txBody>
-          <a:bodyPr/>
-          <a:lstStyle/>
-          <a:p>
-            <a:fld id="{F7021451-1387-4CA6-816F-3879F97B5CBC}" type="slidenum">
-              <a:rPr lang="en-US"/>
-              <a:t>10</a:t>
-            </a:fld>
-            <a:endParaRPr lang="en-US"/>
-          </a:p>
-        </p:txBody>
-      </p:sp>
-    </p:spTree>
-    <p:extLst>
-      <p:ext uri="{BB962C8B-B14F-4D97-AF65-F5344CB8AC3E}">
-        <p14:creationId xmlns:p14="http://schemas.microsoft.com/office/powerpoint/2010/main" val="1024086991"/>
-      </p:ext>
-    </p:extLst>
-  </p:cSld>
-  <p:clrMapOvr>
-    <a:masterClrMapping/>
-  </p:clrMapOvr>
-</p:notes>
-</file>
-
-<file path=ppt/notesSlides/notesSlide11.xml><?xml version="1.0" encoding="utf-8"?>
-<p:notes xmlns:a="http://schemas.openxmlformats.org/drawingml/2006/main" xmlns:r="http://schemas.openxmlformats.org/officeDocument/2006/relationships" xmlns:p="http://schemas.openxmlformats.org/presentationml/2006/main">
-  <p:cSld>
-    <p:spTree>
-      <p:nvGrpSpPr>
-        <p:cNvPr id="1" name=""/>
-        <p:cNvGrpSpPr/>
-        <p:nvPr/>
-      </p:nvGrpSpPr>
-      <p:grpSpPr>
-        <a:xfrm>
-          <a:off x="0" y="0"/>
-          <a:ext cx="0" cy="0"/>
-          <a:chOff x="0" y="0"/>
-          <a:chExt cx="0" cy="0"/>
-        </a:xfrm>
-      </p:grpSpPr>
-      <p:sp>
-        <p:nvSpPr>
-          <p:cNvPr id="2" name="Slide Image Placeholder 1"/>
-          <p:cNvSpPr>
-            <a:spLocks noGrp="1" noRot="1" noChangeAspect="1"/>
-          </p:cNvSpPr>
-          <p:nvPr>
-            <p:ph type="sldImg"/>
-          </p:nvPr>
-        </p:nvSpPr>
-        <p:spPr/>
-      </p:sp>
-      <p:sp>
-        <p:nvSpPr>
-          <p:cNvPr id="3" name="Notes Placeholder 2"/>
-          <p:cNvSpPr>
-            <a:spLocks noGrp="1"/>
-          </p:cNvSpPr>
-          <p:nvPr>
-            <p:ph type="body" idx="1"/>
-          </p:nvPr>
-        </p:nvSpPr>
-        <p:spPr/>
-        <p:txBody>
-          <a:bodyPr/>
-          <a:lstStyle/>
-          <a:p>
-            <a:endParaRPr lang="en-US" dirty="0"/>
-          </a:p>
-        </p:txBody>
-      </p:sp>
-      <p:sp>
-        <p:nvSpPr>
-          <p:cNvPr id="4" name="Slide Number Placeholder 3"/>
-          <p:cNvSpPr>
-            <a:spLocks noGrp="1"/>
-          </p:cNvSpPr>
-          <p:nvPr>
-            <p:ph type="sldNum" sz="quarter" idx="10"/>
-          </p:nvPr>
-        </p:nvSpPr>
-        <p:spPr/>
-        <p:txBody>
-          <a:bodyPr/>
-          <a:lstStyle/>
-          <a:p>
-            <a:fld id="{F7021451-1387-4CA6-816F-3879F97B5CBC}" type="slidenum">
-              <a:rPr lang="en-US"/>
-              <a:t>11</a:t>
-            </a:fld>
-            <a:endParaRPr lang="en-US"/>
-          </a:p>
-        </p:txBody>
-      </p:sp>
-    </p:spTree>
-    <p:extLst>
-      <p:ext uri="{BB962C8B-B14F-4D97-AF65-F5344CB8AC3E}">
-        <p14:creationId xmlns:p14="http://schemas.microsoft.com/office/powerpoint/2010/main" val="1024086991"/>
-      </p:ext>
-    </p:extLst>
-  </p:cSld>
-  <p:clrMapOvr>
-    <a:masterClrMapping/>
-  </p:clrMapOvr>
-</p:notes>
-</file>
-
 <file path=ppt/notesSlides/notesSlide12.xml><?xml version="1.0" encoding="utf-8"?>
 <p:notes xmlns:a="http://schemas.openxmlformats.org/drawingml/2006/main" xmlns:r="http://schemas.openxmlformats.org/officeDocument/2006/relationships" xmlns:p="http://schemas.openxmlformats.org/presentationml/2006/main">
   <p:cSld>
@@ -971,90 +799,6 @@
 </p:notes>
 </file>
 
-<file path=ppt/notesSlides/notesSlide3.xml><?xml version="1.0" encoding="utf-8"?>
-<p:notes xmlns:a="http://schemas.openxmlformats.org/drawingml/2006/main" xmlns:r="http://schemas.openxmlformats.org/officeDocument/2006/relationships" xmlns:p="http://schemas.openxmlformats.org/presentationml/2006/main">
-  <p:cSld>
-    <p:spTree>
-      <p:nvGrpSpPr>
-        <p:cNvPr id="1" name=""/>
-        <p:cNvGrpSpPr/>
-        <p:nvPr/>
-      </p:nvGrpSpPr>
-      <p:grpSpPr>
-        <a:xfrm>
-          <a:off x="0" y="0"/>
-          <a:ext cx="0" cy="0"/>
-          <a:chOff x="0" y="0"/>
-          <a:chExt cx="0" cy="0"/>
-        </a:xfrm>
-      </p:grpSpPr>
-      <p:sp>
-        <p:nvSpPr>
-          <p:cNvPr id="2" name="Slide Image Placeholder 1"/>
-          <p:cNvSpPr>
-            <a:spLocks noGrp="1" noRot="1" noChangeAspect="1"/>
-          </p:cNvSpPr>
-          <p:nvPr>
-            <p:ph type="sldImg"/>
-          </p:nvPr>
-        </p:nvSpPr>
-        <p:spPr/>
-      </p:sp>
-      <p:sp>
-        <p:nvSpPr>
-          <p:cNvPr id="3" name="Notes Placeholder 2"/>
-          <p:cNvSpPr>
-            <a:spLocks noGrp="1"/>
-          </p:cNvSpPr>
-          <p:nvPr>
-            <p:ph type="body" idx="1"/>
-          </p:nvPr>
-        </p:nvSpPr>
-        <p:spPr/>
-        <p:txBody>
-          <a:bodyPr/>
-          <a:lstStyle/>
-          <a:p>
-            <a:endParaRPr lang="en-US" dirty="0"/>
-          </a:p>
-        </p:txBody>
-      </p:sp>
-      <p:sp>
-        <p:nvSpPr>
-          <p:cNvPr id="4" name="Slide Number Placeholder 3"/>
-          <p:cNvSpPr>
-            <a:spLocks noGrp="1"/>
-          </p:cNvSpPr>
-          <p:nvPr>
-            <p:ph type="sldNum" sz="quarter" idx="10"/>
-          </p:nvPr>
-        </p:nvSpPr>
-        <p:spPr/>
-        <p:txBody>
-          <a:bodyPr/>
-          <a:lstStyle/>
-          <a:p>
-            <a:fld id="{F7021451-1387-4CA6-816F-3879F97B5CBC}" type="slidenum">
-              <a:rPr lang="en-US"/>
-              <a:t>3</a:t>
-            </a:fld>
-            <a:endParaRPr lang="en-US" dirty="0"/>
-          </a:p>
-        </p:txBody>
-      </p:sp>
-    </p:spTree>
-    <p:extLst>
-      <p:ext uri="{BB962C8B-B14F-4D97-AF65-F5344CB8AC3E}">
-        <p14:creationId xmlns:p14="http://schemas.microsoft.com/office/powerpoint/2010/main" val="1024086991"/>
-      </p:ext>
-    </p:extLst>
-  </p:cSld>
-  <p:clrMapOvr>
-    <a:masterClrMapping/>
-  </p:clrMapOvr>
-</p:notes>
-</file>
-
 <file path=ppt/notesSlides/notesSlide4.xml><?xml version="1.0" encoding="utf-8"?>
 <p:notes xmlns:a="http://schemas.openxmlformats.org/drawingml/2006/main" xmlns:r="http://schemas.openxmlformats.org/officeDocument/2006/relationships" xmlns:p="http://schemas.openxmlformats.org/presentationml/2006/main">
   <p:cSld>
@@ -1121,90 +865,6 @@
             <a:fld id="{F7021451-1387-4CA6-816F-3879F97B5CBC}" type="slidenum">
               <a:rPr lang="en-US"/>
               <a:t>4</a:t>
-            </a:fld>
-            <a:endParaRPr lang="en-US"/>
-          </a:p>
-        </p:txBody>
-      </p:sp>
-    </p:spTree>
-    <p:extLst>
-      <p:ext uri="{BB962C8B-B14F-4D97-AF65-F5344CB8AC3E}">
-        <p14:creationId xmlns:p14="http://schemas.microsoft.com/office/powerpoint/2010/main" val="1024086991"/>
-      </p:ext>
-    </p:extLst>
-  </p:cSld>
-  <p:clrMapOvr>
-    <a:masterClrMapping/>
-  </p:clrMapOvr>
-</p:notes>
-</file>
-
-<file path=ppt/notesSlides/notesSlide5.xml><?xml version="1.0" encoding="utf-8"?>
-<p:notes xmlns:a="http://schemas.openxmlformats.org/drawingml/2006/main" xmlns:r="http://schemas.openxmlformats.org/officeDocument/2006/relationships" xmlns:p="http://schemas.openxmlformats.org/presentationml/2006/main">
-  <p:cSld>
-    <p:spTree>
-      <p:nvGrpSpPr>
-        <p:cNvPr id="1" name=""/>
-        <p:cNvGrpSpPr/>
-        <p:nvPr/>
-      </p:nvGrpSpPr>
-      <p:grpSpPr>
-        <a:xfrm>
-          <a:off x="0" y="0"/>
-          <a:ext cx="0" cy="0"/>
-          <a:chOff x="0" y="0"/>
-          <a:chExt cx="0" cy="0"/>
-        </a:xfrm>
-      </p:grpSpPr>
-      <p:sp>
-        <p:nvSpPr>
-          <p:cNvPr id="2" name="Slide Image Placeholder 1"/>
-          <p:cNvSpPr>
-            <a:spLocks noGrp="1" noRot="1" noChangeAspect="1"/>
-          </p:cNvSpPr>
-          <p:nvPr>
-            <p:ph type="sldImg"/>
-          </p:nvPr>
-        </p:nvSpPr>
-        <p:spPr/>
-      </p:sp>
-      <p:sp>
-        <p:nvSpPr>
-          <p:cNvPr id="3" name="Notes Placeholder 2"/>
-          <p:cNvSpPr>
-            <a:spLocks noGrp="1"/>
-          </p:cNvSpPr>
-          <p:nvPr>
-            <p:ph type="body" idx="1"/>
-          </p:nvPr>
-        </p:nvSpPr>
-        <p:spPr/>
-        <p:txBody>
-          <a:bodyPr/>
-          <a:lstStyle/>
-          <a:p>
-            <a:endParaRPr lang="en-US" dirty="0"/>
-          </a:p>
-        </p:txBody>
-      </p:sp>
-      <p:sp>
-        <p:nvSpPr>
-          <p:cNvPr id="4" name="Slide Number Placeholder 3"/>
-          <p:cNvSpPr>
-            <a:spLocks noGrp="1"/>
-          </p:cNvSpPr>
-          <p:nvPr>
-            <p:ph type="sldNum" sz="quarter" idx="10"/>
-          </p:nvPr>
-        </p:nvSpPr>
-        <p:spPr/>
-        <p:txBody>
-          <a:bodyPr/>
-          <a:lstStyle/>
-          <a:p>
-            <a:fld id="{F7021451-1387-4CA6-816F-3879F97B5CBC}" type="slidenum">
-              <a:rPr lang="en-US"/>
-              <a:t>5</a:t>
             </a:fld>
             <a:endParaRPr lang="en-US"/>
           </a:p>
@@ -2338,3129 +1998,6 @@
 </p:sld>
 </file>
 
-<file path=ppt/slides/slide10.xml><?xml version="1.0" encoding="utf-8"?>
-<p:sld xmlns:a="http://schemas.openxmlformats.org/drawingml/2006/main" xmlns:r="http://schemas.openxmlformats.org/officeDocument/2006/relationships" xmlns:p="http://schemas.openxmlformats.org/presentationml/2006/main">
-  <p:cSld name="Slide 10">
-    <p:bg>
-      <p:bgPr>
-        <a:solidFill>
-          <a:srgbClr val="F8FAFC"/>
-        </a:solidFill>
-        <a:effectLst/>
-      </p:bgPr>
-    </p:bg>
-    <p:spTree>
-      <p:nvGrpSpPr>
-        <p:cNvPr id="1" name=""/>
-        <p:cNvGrpSpPr/>
-        <p:nvPr/>
-      </p:nvGrpSpPr>
-      <p:grpSpPr>
-        <a:xfrm>
-          <a:off x="0" y="0"/>
-          <a:ext cx="0" cy="0"/>
-          <a:chOff x="0" y="0"/>
-          <a:chExt cx="0" cy="0"/>
-        </a:xfrm>
-      </p:grpSpPr>
-      <p:sp>
-        <p:nvSpPr>
-          <p:cNvPr id="2" name="Text 0"/>
-          <p:cNvSpPr/>
-          <p:nvPr/>
-        </p:nvSpPr>
-        <p:spPr>
-          <a:xfrm>
-            <a:off x="457200" y="274320"/>
-            <a:ext cx="8229600" cy="274320"/>
-          </a:xfrm>
-          <a:prstGeom prst="rect">
-            <a:avLst/>
-          </a:prstGeom>
-          <a:noFill/>
-          <a:ln/>
-        </p:spPr>
-        <p:txBody>
-          <a:bodyPr wrap="square" lIns="0" tIns="0" rIns="0" bIns="0" rtlCol="0" anchor="ctr"/>
-          <a:lstStyle/>
-          <a:p>
-            <a:pPr marL="0" indent="0">
-              <a:buNone/>
-            </a:pPr>
-            <a:r>
-              <a:rPr lang="es-ES" sz="1100" b="1" kern="0" spc="400" noProof="0" dirty="0">
-                <a:solidFill>
-                  <a:srgbClr val="F59E0B"/>
-                </a:solidFill>
-                <a:latin typeface="Calibri" pitchFamily="34" charset="0"/>
-                <a:ea typeface="Calibri" pitchFamily="34" charset="-122"/>
-                <a:cs typeface="Calibri" pitchFamily="34" charset="-120"/>
-              </a:rPr>
-              <a:t>09 · FORECAST 30 DIAS</a:t>
-            </a:r>
-            <a:endParaRPr lang="es-ES" sz="1100" noProof="0" dirty="0"/>
-          </a:p>
-        </p:txBody>
-      </p:sp>
-      <p:sp>
-        <p:nvSpPr>
-          <p:cNvPr id="3" name="Text 1"/>
-          <p:cNvSpPr/>
-          <p:nvPr/>
-        </p:nvSpPr>
-        <p:spPr>
-          <a:xfrm>
-            <a:off x="457200" y="502920"/>
-            <a:ext cx="8229600" cy="640080"/>
-          </a:xfrm>
-          <a:prstGeom prst="rect">
-            <a:avLst/>
-          </a:prstGeom>
-          <a:noFill/>
-          <a:ln/>
-        </p:spPr>
-        <p:txBody>
-          <a:bodyPr wrap="square" lIns="0" tIns="0" rIns="0" bIns="0" rtlCol="0" anchor="ctr"/>
-          <a:lstStyle/>
-          <a:p>
-            <a:pPr marL="0" indent="0">
-              <a:buNone/>
-            </a:pPr>
-            <a:r>
-              <a:rPr lang="es-ES" sz="2800" b="1" noProof="0" dirty="0">
-                <a:solidFill>
-                  <a:srgbClr val="1E2761"/>
-                </a:solidFill>
-                <a:latin typeface="Calibri" pitchFamily="34" charset="0"/>
-                <a:ea typeface="Calibri" pitchFamily="34" charset="-122"/>
-                <a:cs typeface="Calibri" pitchFamily="34" charset="-120"/>
-              </a:rPr>
-              <a:t>ML.FORECAST con </a:t>
-            </a:r>
-            <a:r>
-              <a:rPr lang="es-ES" sz="2800" b="1" noProof="0" dirty="0" err="1">
-                <a:solidFill>
-                  <a:srgbClr val="1E2761"/>
-                </a:solidFill>
-                <a:latin typeface="Calibri" pitchFamily="34" charset="0"/>
-                <a:ea typeface="Calibri" pitchFamily="34" charset="-122"/>
-                <a:cs typeface="Calibri" pitchFamily="34" charset="-120"/>
-              </a:rPr>
-              <a:t>Snowflake</a:t>
-            </a:r>
-            <a:r>
-              <a:rPr lang="es-ES" sz="2800" b="1" noProof="0" dirty="0">
-                <a:solidFill>
-                  <a:srgbClr val="1E2761"/>
-                </a:solidFill>
-                <a:latin typeface="Calibri" pitchFamily="34" charset="0"/>
-                <a:ea typeface="Calibri" pitchFamily="34" charset="-122"/>
-                <a:cs typeface="Calibri" pitchFamily="34" charset="-120"/>
-              </a:rPr>
-              <a:t> </a:t>
-            </a:r>
-            <a:r>
-              <a:rPr lang="es-ES" sz="2800" b="1" noProof="0" dirty="0" err="1">
-                <a:solidFill>
-                  <a:srgbClr val="1E2761"/>
-                </a:solidFill>
-                <a:latin typeface="Calibri" pitchFamily="34" charset="0"/>
-                <a:ea typeface="Calibri" pitchFamily="34" charset="-122"/>
-                <a:cs typeface="Calibri" pitchFamily="34" charset="-120"/>
-              </a:rPr>
-              <a:t>Cortex</a:t>
-            </a:r>
-            <a:endParaRPr lang="es-ES" sz="2800" noProof="0" dirty="0"/>
-          </a:p>
-        </p:txBody>
-      </p:sp>
-      <p:sp>
-        <p:nvSpPr>
-          <p:cNvPr id="4" name="Shape 2"/>
-          <p:cNvSpPr/>
-          <p:nvPr/>
-        </p:nvSpPr>
-        <p:spPr>
-          <a:xfrm>
-            <a:off x="457200" y="1554480"/>
-            <a:ext cx="1627632" cy="1371600"/>
-          </a:xfrm>
-          <a:prstGeom prst="rect">
-            <a:avLst/>
-          </a:prstGeom>
-          <a:solidFill>
-            <a:srgbClr val="FFFFFF"/>
-          </a:solidFill>
-          <a:ln w="12700">
-            <a:solidFill>
-              <a:srgbClr val="E2E8F0"/>
-            </a:solidFill>
-            <a:prstDash val="solid"/>
-          </a:ln>
-          <a:effectLst>
-            <a:outerShdw blurRad="101600" dist="25400" dir="5400000" algn="bl" rotWithShape="0">
-              <a:srgbClr val="000000">
-                <a:alpha val="12000"/>
-              </a:srgbClr>
-            </a:outerShdw>
-          </a:effectLst>
-        </p:spPr>
-        <p:txBody>
-          <a:bodyPr/>
-          <a:lstStyle/>
-          <a:p>
-            <a:endParaRPr lang="es-ES" noProof="0" dirty="0"/>
-          </a:p>
-        </p:txBody>
-      </p:sp>
-      <p:sp>
-        <p:nvSpPr>
-          <p:cNvPr id="5" name="Shape 3"/>
-          <p:cNvSpPr/>
-          <p:nvPr/>
-        </p:nvSpPr>
-        <p:spPr>
-          <a:xfrm>
-            <a:off x="457200" y="1554480"/>
-            <a:ext cx="1627632" cy="274320"/>
-          </a:xfrm>
-          <a:prstGeom prst="rect">
-            <a:avLst/>
-          </a:prstGeom>
-          <a:solidFill>
-            <a:srgbClr val="2C3E73"/>
-          </a:solidFill>
-          <a:ln/>
-        </p:spPr>
-        <p:txBody>
-          <a:bodyPr/>
-          <a:lstStyle/>
-          <a:p>
-            <a:endParaRPr lang="es-ES" noProof="0" dirty="0"/>
-          </a:p>
-        </p:txBody>
-      </p:sp>
-      <p:sp>
-        <p:nvSpPr>
-          <p:cNvPr id="6" name="Text 4"/>
-          <p:cNvSpPr/>
-          <p:nvPr/>
-        </p:nvSpPr>
-        <p:spPr>
-          <a:xfrm>
-            <a:off x="457200" y="1554480"/>
-            <a:ext cx="1627632" cy="274320"/>
-          </a:xfrm>
-          <a:prstGeom prst="rect">
-            <a:avLst/>
-          </a:prstGeom>
-          <a:noFill/>
-          <a:ln/>
-        </p:spPr>
-        <p:txBody>
-          <a:bodyPr wrap="square" lIns="0" tIns="0" rIns="0" bIns="0" rtlCol="0" anchor="ctr"/>
-          <a:lstStyle/>
-          <a:p>
-            <a:pPr marL="0" indent="0" algn="ctr">
-              <a:buNone/>
-            </a:pPr>
-            <a:r>
-              <a:rPr lang="es-ES" sz="1100" b="1" noProof="0" dirty="0">
-                <a:solidFill>
-                  <a:srgbClr val="FFFFFF"/>
-                </a:solidFill>
-                <a:latin typeface="Calibri" pitchFamily="34" charset="0"/>
-                <a:ea typeface="Calibri" pitchFamily="34" charset="-122"/>
-                <a:cs typeface="Calibri" pitchFamily="34" charset="-120"/>
-              </a:rPr>
-              <a:t>1</a:t>
-            </a:r>
-            <a:endParaRPr lang="es-ES" sz="1100" noProof="0" dirty="0"/>
-          </a:p>
-        </p:txBody>
-      </p:sp>
-      <p:sp>
-        <p:nvSpPr>
-          <p:cNvPr id="7" name="Text 5"/>
-          <p:cNvSpPr/>
-          <p:nvPr/>
-        </p:nvSpPr>
-        <p:spPr>
-          <a:xfrm>
-            <a:off x="548640" y="1874520"/>
-            <a:ext cx="1444752" cy="365760"/>
-          </a:xfrm>
-          <a:prstGeom prst="rect">
-            <a:avLst/>
-          </a:prstGeom>
-          <a:noFill/>
-          <a:ln/>
-        </p:spPr>
-        <p:txBody>
-          <a:bodyPr wrap="square" lIns="0" tIns="0" rIns="0" bIns="0" rtlCol="0" anchor="ctr"/>
-          <a:lstStyle/>
-          <a:p>
-            <a:pPr marL="0" indent="0">
-              <a:buNone/>
-            </a:pPr>
-            <a:r>
-              <a:rPr lang="es-ES" sz="1100" b="1" noProof="0" dirty="0" err="1">
-                <a:solidFill>
-                  <a:srgbClr val="1E2761"/>
-                </a:solidFill>
-                <a:latin typeface="Calibri" pitchFamily="34" charset="0"/>
-                <a:ea typeface="Calibri" pitchFamily="34" charset="-122"/>
-                <a:cs typeface="Calibri" pitchFamily="34" charset="-120"/>
-              </a:rPr>
-              <a:t>fct_trips_daily</a:t>
-            </a:r>
-            <a:endParaRPr lang="es-ES" sz="1100" noProof="0" dirty="0"/>
-          </a:p>
-        </p:txBody>
-      </p:sp>
-      <p:sp>
-        <p:nvSpPr>
-          <p:cNvPr id="8" name="Text 6"/>
-          <p:cNvSpPr/>
-          <p:nvPr/>
-        </p:nvSpPr>
-        <p:spPr>
-          <a:xfrm>
-            <a:off x="548640" y="2240280"/>
-            <a:ext cx="1444752" cy="640080"/>
-          </a:xfrm>
-          <a:prstGeom prst="rect">
-            <a:avLst/>
-          </a:prstGeom>
-          <a:noFill/>
-          <a:ln/>
-        </p:spPr>
-        <p:txBody>
-          <a:bodyPr wrap="square" lIns="0" tIns="0" rIns="0" bIns="0" rtlCol="0" anchor="t"/>
-          <a:lstStyle/>
-          <a:p>
-            <a:pPr marL="0" indent="0">
-              <a:buNone/>
-            </a:pPr>
-            <a:r>
-              <a:rPr lang="es-ES" sz="950" noProof="0" dirty="0" err="1">
-                <a:solidFill>
-                  <a:srgbClr val="1A202C"/>
-                </a:solidFill>
-                <a:latin typeface="Calibri" pitchFamily="34" charset="0"/>
-                <a:ea typeface="Calibri" pitchFamily="34" charset="-122"/>
-                <a:cs typeface="Calibri" pitchFamily="34" charset="-120"/>
-              </a:rPr>
-              <a:t>series_key</a:t>
-            </a:r>
-            <a:r>
-              <a:rPr lang="es-ES" sz="950" noProof="0" dirty="0">
-                <a:solidFill>
-                  <a:srgbClr val="1A202C"/>
-                </a:solidFill>
-                <a:latin typeface="Calibri" pitchFamily="34" charset="0"/>
-                <a:ea typeface="Calibri" pitchFamily="34" charset="-122"/>
-                <a:cs typeface="Calibri" pitchFamily="34" charset="-120"/>
-              </a:rPr>
-              <a:t> = </a:t>
-            </a:r>
-            <a:r>
-              <a:rPr lang="es-ES" sz="950" noProof="0" dirty="0" err="1">
-                <a:solidFill>
-                  <a:srgbClr val="1A202C"/>
-                </a:solidFill>
-                <a:latin typeface="Calibri" pitchFamily="34" charset="0"/>
-                <a:ea typeface="Calibri" pitchFamily="34" charset="-122"/>
-                <a:cs typeface="Calibri" pitchFamily="34" charset="-120"/>
-              </a:rPr>
-              <a:t>city|bike|user</a:t>
-            </a:r>
-            <a:r>
-              <a:rPr lang="es-ES" sz="950" noProof="0" dirty="0">
-                <a:solidFill>
-                  <a:srgbClr val="1A202C"/>
-                </a:solidFill>
-                <a:latin typeface="Calibri" pitchFamily="34" charset="0"/>
-                <a:ea typeface="Calibri" pitchFamily="34" charset="-122"/>
-                <a:cs typeface="Calibri" pitchFamily="34" charset="-120"/>
-              </a:rPr>
-              <a:t> → 8 series. </a:t>
-            </a:r>
-            <a:r>
-              <a:rPr lang="es-ES" sz="950" noProof="0" dirty="0" err="1">
-                <a:solidFill>
-                  <a:srgbClr val="1A202C"/>
-                </a:solidFill>
-                <a:latin typeface="Calibri" pitchFamily="34" charset="0"/>
-                <a:ea typeface="Calibri" pitchFamily="34" charset="-122"/>
-                <a:cs typeface="Calibri" pitchFamily="34" charset="-120"/>
-              </a:rPr>
-              <a:t>n_trips</a:t>
-            </a:r>
-            <a:r>
-              <a:rPr lang="es-ES" sz="950" noProof="0" dirty="0">
-                <a:solidFill>
-                  <a:srgbClr val="1A202C"/>
-                </a:solidFill>
-                <a:latin typeface="Calibri" pitchFamily="34" charset="0"/>
-                <a:ea typeface="Calibri" pitchFamily="34" charset="-122"/>
-                <a:cs typeface="Calibri" pitchFamily="34" charset="-120"/>
-              </a:rPr>
-              <a:t> por </a:t>
-            </a:r>
-            <a:r>
-              <a:rPr lang="es-ES" sz="950" noProof="0" dirty="0" err="1">
-                <a:solidFill>
-                  <a:srgbClr val="1A202C"/>
-                </a:solidFill>
-                <a:latin typeface="Calibri" pitchFamily="34" charset="0"/>
-                <a:ea typeface="Calibri" pitchFamily="34" charset="-122"/>
-                <a:cs typeface="Calibri" pitchFamily="34" charset="-120"/>
-              </a:rPr>
-              <a:t>dia</a:t>
-            </a:r>
-            <a:r>
-              <a:rPr lang="es-ES" sz="950" noProof="0" dirty="0">
-                <a:solidFill>
-                  <a:srgbClr val="1A202C"/>
-                </a:solidFill>
-                <a:latin typeface="Calibri" pitchFamily="34" charset="0"/>
-                <a:ea typeface="Calibri" pitchFamily="34" charset="-122"/>
-                <a:cs typeface="Calibri" pitchFamily="34" charset="-120"/>
-              </a:rPr>
-              <a:t>.</a:t>
-            </a:r>
-            <a:endParaRPr lang="es-ES" sz="950" noProof="0" dirty="0"/>
-          </a:p>
-        </p:txBody>
-      </p:sp>
-      <p:sp>
-        <p:nvSpPr>
-          <p:cNvPr id="9" name="Shape 7"/>
-          <p:cNvSpPr/>
-          <p:nvPr/>
-        </p:nvSpPr>
-        <p:spPr>
-          <a:xfrm>
-            <a:off x="2176272" y="1554480"/>
-            <a:ext cx="1627632" cy="1371600"/>
-          </a:xfrm>
-          <a:prstGeom prst="rect">
-            <a:avLst/>
-          </a:prstGeom>
-          <a:solidFill>
-            <a:srgbClr val="FFFFFF"/>
-          </a:solidFill>
-          <a:ln w="12700">
-            <a:solidFill>
-              <a:srgbClr val="E2E8F0"/>
-            </a:solidFill>
-            <a:prstDash val="solid"/>
-          </a:ln>
-          <a:effectLst>
-            <a:outerShdw blurRad="101600" dist="25400" dir="5400000" algn="bl" rotWithShape="0">
-              <a:srgbClr val="000000">
-                <a:alpha val="12000"/>
-              </a:srgbClr>
-            </a:outerShdw>
-          </a:effectLst>
-        </p:spPr>
-        <p:txBody>
-          <a:bodyPr/>
-          <a:lstStyle/>
-          <a:p>
-            <a:endParaRPr lang="es-ES" noProof="0" dirty="0"/>
-          </a:p>
-        </p:txBody>
-      </p:sp>
-      <p:sp>
-        <p:nvSpPr>
-          <p:cNvPr id="10" name="Shape 8"/>
-          <p:cNvSpPr/>
-          <p:nvPr/>
-        </p:nvSpPr>
-        <p:spPr>
-          <a:xfrm>
-            <a:off x="2176272" y="1554480"/>
-            <a:ext cx="1627632" cy="274320"/>
-          </a:xfrm>
-          <a:prstGeom prst="rect">
-            <a:avLst/>
-          </a:prstGeom>
-          <a:solidFill>
-            <a:srgbClr val="2C3E73"/>
-          </a:solidFill>
-          <a:ln/>
-        </p:spPr>
-        <p:txBody>
-          <a:bodyPr/>
-          <a:lstStyle/>
-          <a:p>
-            <a:endParaRPr lang="es-ES" noProof="0" dirty="0"/>
-          </a:p>
-        </p:txBody>
-      </p:sp>
-      <p:sp>
-        <p:nvSpPr>
-          <p:cNvPr id="11" name="Text 9"/>
-          <p:cNvSpPr/>
-          <p:nvPr/>
-        </p:nvSpPr>
-        <p:spPr>
-          <a:xfrm>
-            <a:off x="2176272" y="1554480"/>
-            <a:ext cx="1627632" cy="274320"/>
-          </a:xfrm>
-          <a:prstGeom prst="rect">
-            <a:avLst/>
-          </a:prstGeom>
-          <a:noFill/>
-          <a:ln/>
-        </p:spPr>
-        <p:txBody>
-          <a:bodyPr wrap="square" lIns="0" tIns="0" rIns="0" bIns="0" rtlCol="0" anchor="ctr"/>
-          <a:lstStyle/>
-          <a:p>
-            <a:pPr marL="0" indent="0" algn="ctr">
-              <a:buNone/>
-            </a:pPr>
-            <a:r>
-              <a:rPr lang="es-ES" sz="1100" b="1" noProof="0" dirty="0">
-                <a:solidFill>
-                  <a:srgbClr val="FFFFFF"/>
-                </a:solidFill>
-                <a:latin typeface="Calibri" pitchFamily="34" charset="0"/>
-                <a:ea typeface="Calibri" pitchFamily="34" charset="-122"/>
-                <a:cs typeface="Calibri" pitchFamily="34" charset="-120"/>
-              </a:rPr>
-              <a:t>2</a:t>
-            </a:r>
-            <a:endParaRPr lang="es-ES" sz="1100" noProof="0" dirty="0"/>
-          </a:p>
-        </p:txBody>
-      </p:sp>
-      <p:sp>
-        <p:nvSpPr>
-          <p:cNvPr id="12" name="Text 10"/>
-          <p:cNvSpPr/>
-          <p:nvPr/>
-        </p:nvSpPr>
-        <p:spPr>
-          <a:xfrm>
-            <a:off x="2267712" y="1874520"/>
-            <a:ext cx="1444752" cy="365760"/>
-          </a:xfrm>
-          <a:prstGeom prst="rect">
-            <a:avLst/>
-          </a:prstGeom>
-          <a:noFill/>
-          <a:ln/>
-        </p:spPr>
-        <p:txBody>
-          <a:bodyPr wrap="square" lIns="0" tIns="0" rIns="0" bIns="0" rtlCol="0" anchor="ctr"/>
-          <a:lstStyle/>
-          <a:p>
-            <a:pPr marL="0" indent="0">
-              <a:buNone/>
-            </a:pPr>
-            <a:r>
-              <a:rPr lang="es-ES" sz="1100" b="1" noProof="0" dirty="0">
-                <a:solidFill>
-                  <a:srgbClr val="1E2761"/>
-                </a:solidFill>
-                <a:latin typeface="Calibri" pitchFamily="34" charset="0"/>
-                <a:ea typeface="Calibri" pitchFamily="34" charset="-122"/>
-                <a:cs typeface="Calibri" pitchFamily="34" charset="-120"/>
-              </a:rPr>
-              <a:t>IA_PREP_DATA</a:t>
-            </a:r>
-            <a:endParaRPr lang="es-ES" sz="1100" noProof="0" dirty="0"/>
-          </a:p>
-        </p:txBody>
-      </p:sp>
-      <p:sp>
-        <p:nvSpPr>
-          <p:cNvPr id="13" name="Text 11"/>
-          <p:cNvSpPr/>
-          <p:nvPr/>
-        </p:nvSpPr>
-        <p:spPr>
-          <a:xfrm>
-            <a:off x="2267712" y="2240280"/>
-            <a:ext cx="1444752" cy="640080"/>
-          </a:xfrm>
-          <a:prstGeom prst="rect">
-            <a:avLst/>
-          </a:prstGeom>
-          <a:noFill/>
-          <a:ln/>
-        </p:spPr>
-        <p:txBody>
-          <a:bodyPr wrap="square" lIns="0" tIns="0" rIns="0" bIns="0" rtlCol="0" anchor="t"/>
-          <a:lstStyle/>
-          <a:p>
-            <a:pPr marL="0" indent="0">
-              <a:buNone/>
-            </a:pPr>
-            <a:r>
-              <a:rPr lang="es-ES" sz="950" noProof="0" dirty="0">
-                <a:solidFill>
-                  <a:srgbClr val="1A202C"/>
-                </a:solidFill>
-                <a:latin typeface="Calibri" pitchFamily="34" charset="0"/>
-                <a:ea typeface="Calibri" pitchFamily="34" charset="-122"/>
-                <a:cs typeface="Calibri" pitchFamily="34" charset="-120"/>
-              </a:rPr>
-              <a:t>Filtra </a:t>
-            </a:r>
-            <a:r>
-              <a:rPr lang="es-ES" sz="950" noProof="0" dirty="0" err="1">
-                <a:solidFill>
-                  <a:srgbClr val="1A202C"/>
-                </a:solidFill>
-                <a:latin typeface="Calibri" pitchFamily="34" charset="0"/>
-                <a:ea typeface="Calibri" pitchFamily="34" charset="-122"/>
-                <a:cs typeface="Calibri" pitchFamily="34" charset="-120"/>
-              </a:rPr>
-              <a:t>outliers</a:t>
-            </a:r>
-            <a:r>
-              <a:rPr lang="es-ES" sz="950" noProof="0" dirty="0">
-                <a:solidFill>
-                  <a:srgbClr val="1A202C"/>
-                </a:solidFill>
-                <a:latin typeface="Calibri" pitchFamily="34" charset="0"/>
-                <a:ea typeface="Calibri" pitchFamily="34" charset="-122"/>
-                <a:cs typeface="Calibri" pitchFamily="34" charset="-120"/>
-              </a:rPr>
-              <a:t> (</a:t>
-            </a:r>
-            <a:r>
-              <a:rPr lang="es-ES" sz="950" noProof="0" dirty="0" err="1">
-                <a:solidFill>
-                  <a:srgbClr val="1A202C"/>
-                </a:solidFill>
-                <a:latin typeface="Calibri" pitchFamily="34" charset="0"/>
-                <a:ea typeface="Calibri" pitchFamily="34" charset="-122"/>
-                <a:cs typeface="Calibri" pitchFamily="34" charset="-120"/>
-              </a:rPr>
-              <a:t>duration</a:t>
-            </a:r>
-            <a:r>
-              <a:rPr lang="es-ES" sz="950" noProof="0" dirty="0">
-                <a:solidFill>
-                  <a:srgbClr val="1A202C"/>
-                </a:solidFill>
-                <a:latin typeface="Calibri" pitchFamily="34" charset="0"/>
-                <a:ea typeface="Calibri" pitchFamily="34" charset="-122"/>
-                <a:cs typeface="Calibri" pitchFamily="34" charset="-120"/>
-              </a:rPr>
-              <a:t>, </a:t>
-            </a:r>
-            <a:r>
-              <a:rPr lang="es-ES" sz="950" noProof="0" dirty="0" err="1">
-                <a:solidFill>
-                  <a:srgbClr val="1A202C"/>
-                </a:solidFill>
-                <a:latin typeface="Calibri" pitchFamily="34" charset="0"/>
-                <a:ea typeface="Calibri" pitchFamily="34" charset="-122"/>
-                <a:cs typeface="Calibri" pitchFamily="34" charset="-120"/>
-              </a:rPr>
-              <a:t>distance</a:t>
-            </a:r>
-            <a:r>
-              <a:rPr lang="es-ES" sz="950" noProof="0" dirty="0">
-                <a:solidFill>
-                  <a:srgbClr val="1A202C"/>
-                </a:solidFill>
-                <a:latin typeface="Calibri" pitchFamily="34" charset="0"/>
-                <a:ea typeface="Calibri" pitchFamily="34" charset="-122"/>
-                <a:cs typeface="Calibri" pitchFamily="34" charset="-120"/>
-              </a:rPr>
-              <a:t>), formatea </a:t>
-            </a:r>
-            <a:r>
-              <a:rPr lang="es-ES" sz="950" noProof="0" dirty="0" err="1">
-                <a:solidFill>
-                  <a:srgbClr val="1A202C"/>
-                </a:solidFill>
-                <a:latin typeface="Calibri" pitchFamily="34" charset="0"/>
-                <a:ea typeface="Calibri" pitchFamily="34" charset="-122"/>
-                <a:cs typeface="Calibri" pitchFamily="34" charset="-120"/>
-              </a:rPr>
-              <a:t>timestamp</a:t>
-            </a:r>
-            <a:r>
-              <a:rPr lang="es-ES" sz="950" noProof="0" dirty="0">
-                <a:solidFill>
-                  <a:srgbClr val="1A202C"/>
-                </a:solidFill>
-                <a:latin typeface="Calibri" pitchFamily="34" charset="0"/>
-                <a:ea typeface="Calibri" pitchFamily="34" charset="-122"/>
-                <a:cs typeface="Calibri" pitchFamily="34" charset="-120"/>
-              </a:rPr>
-              <a:t>.</a:t>
-            </a:r>
-            <a:endParaRPr lang="es-ES" sz="950" noProof="0" dirty="0"/>
-          </a:p>
-        </p:txBody>
-      </p:sp>
-      <p:sp>
-        <p:nvSpPr>
-          <p:cNvPr id="14" name="Shape 12"/>
-          <p:cNvSpPr/>
-          <p:nvPr/>
-        </p:nvSpPr>
-        <p:spPr>
-          <a:xfrm>
-            <a:off x="3895344" y="1554480"/>
-            <a:ext cx="1627632" cy="1371600"/>
-          </a:xfrm>
-          <a:prstGeom prst="rect">
-            <a:avLst/>
-          </a:prstGeom>
-          <a:solidFill>
-            <a:srgbClr val="FFFFFF"/>
-          </a:solidFill>
-          <a:ln w="12700">
-            <a:solidFill>
-              <a:srgbClr val="E2E8F0"/>
-            </a:solidFill>
-            <a:prstDash val="solid"/>
-          </a:ln>
-          <a:effectLst>
-            <a:outerShdw blurRad="101600" dist="25400" dir="5400000" algn="bl" rotWithShape="0">
-              <a:srgbClr val="000000">
-                <a:alpha val="12000"/>
-              </a:srgbClr>
-            </a:outerShdw>
-          </a:effectLst>
-        </p:spPr>
-        <p:txBody>
-          <a:bodyPr/>
-          <a:lstStyle/>
-          <a:p>
-            <a:endParaRPr lang="es-ES" noProof="0" dirty="0"/>
-          </a:p>
-        </p:txBody>
-      </p:sp>
-      <p:sp>
-        <p:nvSpPr>
-          <p:cNvPr id="15" name="Shape 13"/>
-          <p:cNvSpPr/>
-          <p:nvPr/>
-        </p:nvSpPr>
-        <p:spPr>
-          <a:xfrm>
-            <a:off x="3895344" y="1554480"/>
-            <a:ext cx="1627632" cy="274320"/>
-          </a:xfrm>
-          <a:prstGeom prst="rect">
-            <a:avLst/>
-          </a:prstGeom>
-          <a:solidFill>
-            <a:srgbClr val="F59E0B"/>
-          </a:solidFill>
-          <a:ln/>
-        </p:spPr>
-        <p:txBody>
-          <a:bodyPr/>
-          <a:lstStyle/>
-          <a:p>
-            <a:endParaRPr lang="es-ES" noProof="0" dirty="0"/>
-          </a:p>
-        </p:txBody>
-      </p:sp>
-      <p:sp>
-        <p:nvSpPr>
-          <p:cNvPr id="16" name="Text 14"/>
-          <p:cNvSpPr/>
-          <p:nvPr/>
-        </p:nvSpPr>
-        <p:spPr>
-          <a:xfrm>
-            <a:off x="3895344" y="1554480"/>
-            <a:ext cx="1627632" cy="274320"/>
-          </a:xfrm>
-          <a:prstGeom prst="rect">
-            <a:avLst/>
-          </a:prstGeom>
-          <a:noFill/>
-          <a:ln/>
-        </p:spPr>
-        <p:txBody>
-          <a:bodyPr wrap="square" lIns="0" tIns="0" rIns="0" bIns="0" rtlCol="0" anchor="ctr"/>
-          <a:lstStyle/>
-          <a:p>
-            <a:pPr marL="0" indent="0" algn="ctr">
-              <a:buNone/>
-            </a:pPr>
-            <a:r>
-              <a:rPr lang="es-ES" sz="1100" b="1" noProof="0" dirty="0">
-                <a:solidFill>
-                  <a:srgbClr val="FFFFFF"/>
-                </a:solidFill>
-                <a:latin typeface="Calibri" pitchFamily="34" charset="0"/>
-                <a:ea typeface="Calibri" pitchFamily="34" charset="-122"/>
-                <a:cs typeface="Calibri" pitchFamily="34" charset="-120"/>
-              </a:rPr>
-              <a:t>3</a:t>
-            </a:r>
-            <a:endParaRPr lang="es-ES" sz="1100" noProof="0" dirty="0"/>
-          </a:p>
-        </p:txBody>
-      </p:sp>
-      <p:sp>
-        <p:nvSpPr>
-          <p:cNvPr id="17" name="Text 15"/>
-          <p:cNvSpPr/>
-          <p:nvPr/>
-        </p:nvSpPr>
-        <p:spPr>
-          <a:xfrm>
-            <a:off x="3986784" y="1874520"/>
-            <a:ext cx="1444752" cy="365760"/>
-          </a:xfrm>
-          <a:prstGeom prst="rect">
-            <a:avLst/>
-          </a:prstGeom>
-          <a:noFill/>
-          <a:ln/>
-        </p:spPr>
-        <p:txBody>
-          <a:bodyPr wrap="square" lIns="0" tIns="0" rIns="0" bIns="0" rtlCol="0" anchor="ctr"/>
-          <a:lstStyle/>
-          <a:p>
-            <a:pPr marL="0" indent="0">
-              <a:buNone/>
-            </a:pPr>
-            <a:r>
-              <a:rPr lang="es-ES" sz="1100" b="1" noProof="0" dirty="0">
-                <a:solidFill>
-                  <a:srgbClr val="1E2761"/>
-                </a:solidFill>
-                <a:latin typeface="Calibri" pitchFamily="34" charset="0"/>
-                <a:ea typeface="Calibri" pitchFamily="34" charset="-122"/>
-                <a:cs typeface="Calibri" pitchFamily="34" charset="-120"/>
-              </a:rPr>
-              <a:t>SNOWFLAKE.ML.FORECAST</a:t>
-            </a:r>
-            <a:endParaRPr lang="es-ES" sz="1100" noProof="0" dirty="0"/>
-          </a:p>
-        </p:txBody>
-      </p:sp>
-      <p:sp>
-        <p:nvSpPr>
-          <p:cNvPr id="18" name="Text 16"/>
-          <p:cNvSpPr/>
-          <p:nvPr/>
-        </p:nvSpPr>
-        <p:spPr>
-          <a:xfrm>
-            <a:off x="3986784" y="2240280"/>
-            <a:ext cx="1444752" cy="640080"/>
-          </a:xfrm>
-          <a:prstGeom prst="rect">
-            <a:avLst/>
-          </a:prstGeom>
-          <a:noFill/>
-          <a:ln/>
-        </p:spPr>
-        <p:txBody>
-          <a:bodyPr wrap="square" lIns="0" tIns="0" rIns="0" bIns="0" rtlCol="0" anchor="t"/>
-          <a:lstStyle/>
-          <a:p>
-            <a:pPr marL="0" indent="0">
-              <a:buNone/>
-            </a:pPr>
-            <a:r>
-              <a:rPr lang="es-ES" sz="950" noProof="0" dirty="0">
-                <a:solidFill>
-                  <a:srgbClr val="1A202C"/>
-                </a:solidFill>
-                <a:latin typeface="Calibri" pitchFamily="34" charset="0"/>
-                <a:ea typeface="Calibri" pitchFamily="34" charset="-122"/>
-                <a:cs typeface="Calibri" pitchFamily="34" charset="-120"/>
-              </a:rPr>
-              <a:t>Modelo </a:t>
-            </a:r>
-            <a:r>
-              <a:rPr lang="es-ES" sz="950" noProof="0" dirty="0" err="1">
-                <a:solidFill>
-                  <a:srgbClr val="1A202C"/>
-                </a:solidFill>
-                <a:latin typeface="Calibri" pitchFamily="34" charset="0"/>
-                <a:ea typeface="Calibri" pitchFamily="34" charset="-122"/>
-                <a:cs typeface="Calibri" pitchFamily="34" charset="-120"/>
-              </a:rPr>
-              <a:t>Cortex</a:t>
-            </a:r>
-            <a:r>
-              <a:rPr lang="es-ES" sz="950" noProof="0" dirty="0">
-                <a:solidFill>
-                  <a:srgbClr val="1A202C"/>
-                </a:solidFill>
-                <a:latin typeface="Calibri" pitchFamily="34" charset="0"/>
-                <a:ea typeface="Calibri" pitchFamily="34" charset="-122"/>
-                <a:cs typeface="Calibri" pitchFamily="34" charset="-120"/>
-              </a:rPr>
-              <a:t> sobre 10 series top + CALL </a:t>
-            </a:r>
-            <a:r>
-              <a:rPr lang="es-ES" sz="950" noProof="0" dirty="0" err="1">
-                <a:solidFill>
-                  <a:srgbClr val="1A202C"/>
-                </a:solidFill>
-                <a:latin typeface="Calibri" pitchFamily="34" charset="0"/>
-                <a:ea typeface="Calibri" pitchFamily="34" charset="-122"/>
-                <a:cs typeface="Calibri" pitchFamily="34" charset="-120"/>
-              </a:rPr>
-              <a:t>forecast</a:t>
-            </a:r>
-            <a:r>
-              <a:rPr lang="es-ES" sz="950" noProof="0" dirty="0">
-                <a:solidFill>
-                  <a:srgbClr val="1A202C"/>
-                </a:solidFill>
-                <a:latin typeface="Calibri" pitchFamily="34" charset="0"/>
-                <a:ea typeface="Calibri" pitchFamily="34" charset="-122"/>
-                <a:cs typeface="Calibri" pitchFamily="34" charset="-120"/>
-              </a:rPr>
-              <a:t> 30 </a:t>
-            </a:r>
-            <a:r>
-              <a:rPr lang="es-ES" sz="950" noProof="0" dirty="0" err="1">
-                <a:solidFill>
-                  <a:srgbClr val="1A202C"/>
-                </a:solidFill>
-                <a:latin typeface="Calibri" pitchFamily="34" charset="0"/>
-                <a:ea typeface="Calibri" pitchFamily="34" charset="-122"/>
-                <a:cs typeface="Calibri" pitchFamily="34" charset="-120"/>
-              </a:rPr>
-              <a:t>dias</a:t>
-            </a:r>
-            <a:r>
-              <a:rPr lang="es-ES" sz="950" noProof="0" dirty="0">
-                <a:solidFill>
-                  <a:srgbClr val="1A202C"/>
-                </a:solidFill>
-                <a:latin typeface="Calibri" pitchFamily="34" charset="0"/>
-                <a:ea typeface="Calibri" pitchFamily="34" charset="-122"/>
-                <a:cs typeface="Calibri" pitchFamily="34" charset="-120"/>
-              </a:rPr>
-              <a:t>.</a:t>
-            </a:r>
-            <a:endParaRPr lang="es-ES" sz="950" noProof="0" dirty="0"/>
-          </a:p>
-        </p:txBody>
-      </p:sp>
-      <p:sp>
-        <p:nvSpPr>
-          <p:cNvPr id="19" name="Shape 17"/>
-          <p:cNvSpPr/>
-          <p:nvPr/>
-        </p:nvSpPr>
-        <p:spPr>
-          <a:xfrm>
-            <a:off x="5614416" y="1554480"/>
-            <a:ext cx="1627632" cy="1371600"/>
-          </a:xfrm>
-          <a:prstGeom prst="rect">
-            <a:avLst/>
-          </a:prstGeom>
-          <a:solidFill>
-            <a:srgbClr val="FFFFFF"/>
-          </a:solidFill>
-          <a:ln w="12700">
-            <a:solidFill>
-              <a:srgbClr val="E2E8F0"/>
-            </a:solidFill>
-            <a:prstDash val="solid"/>
-          </a:ln>
-          <a:effectLst>
-            <a:outerShdw blurRad="101600" dist="25400" dir="5400000" algn="bl" rotWithShape="0">
-              <a:srgbClr val="000000">
-                <a:alpha val="12000"/>
-              </a:srgbClr>
-            </a:outerShdw>
-          </a:effectLst>
-        </p:spPr>
-        <p:txBody>
-          <a:bodyPr/>
-          <a:lstStyle/>
-          <a:p>
-            <a:endParaRPr lang="es-ES" noProof="0" dirty="0"/>
-          </a:p>
-        </p:txBody>
-      </p:sp>
-      <p:sp>
-        <p:nvSpPr>
-          <p:cNvPr id="20" name="Shape 18"/>
-          <p:cNvSpPr/>
-          <p:nvPr/>
-        </p:nvSpPr>
-        <p:spPr>
-          <a:xfrm>
-            <a:off x="5614416" y="1554480"/>
-            <a:ext cx="1627632" cy="274320"/>
-          </a:xfrm>
-          <a:prstGeom prst="rect">
-            <a:avLst/>
-          </a:prstGeom>
-          <a:solidFill>
-            <a:srgbClr val="2C3E73"/>
-          </a:solidFill>
-          <a:ln/>
-        </p:spPr>
-        <p:txBody>
-          <a:bodyPr/>
-          <a:lstStyle/>
-          <a:p>
-            <a:endParaRPr lang="es-ES" noProof="0" dirty="0"/>
-          </a:p>
-        </p:txBody>
-      </p:sp>
-      <p:sp>
-        <p:nvSpPr>
-          <p:cNvPr id="21" name="Text 19"/>
-          <p:cNvSpPr/>
-          <p:nvPr/>
-        </p:nvSpPr>
-        <p:spPr>
-          <a:xfrm>
-            <a:off x="5614416" y="1554480"/>
-            <a:ext cx="1627632" cy="274320"/>
-          </a:xfrm>
-          <a:prstGeom prst="rect">
-            <a:avLst/>
-          </a:prstGeom>
-          <a:noFill/>
-          <a:ln/>
-        </p:spPr>
-        <p:txBody>
-          <a:bodyPr wrap="square" lIns="0" tIns="0" rIns="0" bIns="0" rtlCol="0" anchor="ctr"/>
-          <a:lstStyle/>
-          <a:p>
-            <a:pPr marL="0" indent="0" algn="ctr">
-              <a:buNone/>
-            </a:pPr>
-            <a:r>
-              <a:rPr lang="es-ES" sz="1100" b="1" noProof="0" dirty="0">
-                <a:solidFill>
-                  <a:srgbClr val="FFFFFF"/>
-                </a:solidFill>
-                <a:latin typeface="Calibri" pitchFamily="34" charset="0"/>
-                <a:ea typeface="Calibri" pitchFamily="34" charset="-122"/>
-                <a:cs typeface="Calibri" pitchFamily="34" charset="-120"/>
-              </a:rPr>
-              <a:t>4</a:t>
-            </a:r>
-            <a:endParaRPr lang="es-ES" sz="1100" noProof="0" dirty="0"/>
-          </a:p>
-        </p:txBody>
-      </p:sp>
-      <p:sp>
-        <p:nvSpPr>
-          <p:cNvPr id="22" name="Text 20"/>
-          <p:cNvSpPr/>
-          <p:nvPr/>
-        </p:nvSpPr>
-        <p:spPr>
-          <a:xfrm>
-            <a:off x="5705856" y="1874520"/>
-            <a:ext cx="1444752" cy="365760"/>
-          </a:xfrm>
-          <a:prstGeom prst="rect">
-            <a:avLst/>
-          </a:prstGeom>
-          <a:noFill/>
-          <a:ln/>
-        </p:spPr>
-        <p:txBody>
-          <a:bodyPr wrap="square" lIns="0" tIns="0" rIns="0" bIns="0" rtlCol="0" anchor="ctr"/>
-          <a:lstStyle/>
-          <a:p>
-            <a:pPr marL="0" indent="0">
-              <a:buNone/>
-            </a:pPr>
-            <a:r>
-              <a:rPr lang="es-ES" sz="1100" b="1" noProof="0" dirty="0">
-                <a:solidFill>
-                  <a:srgbClr val="1E2761"/>
-                </a:solidFill>
-                <a:latin typeface="Calibri" pitchFamily="34" charset="0"/>
-                <a:ea typeface="Calibri" pitchFamily="34" charset="-122"/>
-                <a:cs typeface="Calibri" pitchFamily="34" charset="-120"/>
-              </a:rPr>
-              <a:t>PRONOSTICO_FINAL</a:t>
-            </a:r>
-            <a:endParaRPr lang="es-ES" sz="1100" noProof="0" dirty="0"/>
-          </a:p>
-        </p:txBody>
-      </p:sp>
-      <p:sp>
-        <p:nvSpPr>
-          <p:cNvPr id="23" name="Text 21"/>
-          <p:cNvSpPr/>
-          <p:nvPr/>
-        </p:nvSpPr>
-        <p:spPr>
-          <a:xfrm>
-            <a:off x="5705856" y="2240280"/>
-            <a:ext cx="1444752" cy="640080"/>
-          </a:xfrm>
-          <a:prstGeom prst="rect">
-            <a:avLst/>
-          </a:prstGeom>
-          <a:noFill/>
-          <a:ln/>
-        </p:spPr>
-        <p:txBody>
-          <a:bodyPr wrap="square" lIns="0" tIns="0" rIns="0" bIns="0" rtlCol="0" anchor="t"/>
-          <a:lstStyle/>
-          <a:p>
-            <a:pPr marL="0" indent="0">
-              <a:buNone/>
-            </a:pPr>
-            <a:r>
-              <a:rPr lang="es-ES" sz="950" noProof="0" dirty="0">
-                <a:solidFill>
-                  <a:srgbClr val="1A202C"/>
-                </a:solidFill>
-                <a:latin typeface="Calibri" pitchFamily="34" charset="0"/>
-                <a:ea typeface="Calibri" pitchFamily="34" charset="-122"/>
-                <a:cs typeface="Calibri" pitchFamily="34" charset="-120"/>
-              </a:rPr>
-              <a:t>Tabla </a:t>
-            </a:r>
-            <a:r>
-              <a:rPr lang="es-ES" sz="950" noProof="0" dirty="0" err="1">
-                <a:solidFill>
-                  <a:srgbClr val="1A202C"/>
-                </a:solidFill>
-                <a:latin typeface="Calibri" pitchFamily="34" charset="0"/>
-                <a:ea typeface="Calibri" pitchFamily="34" charset="-122"/>
-                <a:cs typeface="Calibri" pitchFamily="34" charset="-120"/>
-              </a:rPr>
-              <a:t>fisica</a:t>
-            </a:r>
-            <a:r>
-              <a:rPr lang="es-ES" sz="950" noProof="0" dirty="0">
-                <a:solidFill>
-                  <a:srgbClr val="1A202C"/>
-                </a:solidFill>
-                <a:latin typeface="Calibri" pitchFamily="34" charset="0"/>
-                <a:ea typeface="Calibri" pitchFamily="34" charset="-122"/>
-                <a:cs typeface="Calibri" pitchFamily="34" charset="-120"/>
-              </a:rPr>
-              <a:t> con SERIES/TS/FORECAST/LOWER/UPPER.</a:t>
-            </a:r>
-            <a:endParaRPr lang="es-ES" sz="950" noProof="0" dirty="0"/>
-          </a:p>
-        </p:txBody>
-      </p:sp>
-      <p:sp>
-        <p:nvSpPr>
-          <p:cNvPr id="24" name="Shape 22"/>
-          <p:cNvSpPr/>
-          <p:nvPr/>
-        </p:nvSpPr>
-        <p:spPr>
-          <a:xfrm>
-            <a:off x="7333488" y="1554480"/>
-            <a:ext cx="1627632" cy="1371600"/>
-          </a:xfrm>
-          <a:prstGeom prst="rect">
-            <a:avLst/>
-          </a:prstGeom>
-          <a:solidFill>
-            <a:srgbClr val="FFFFFF"/>
-          </a:solidFill>
-          <a:ln w="12700">
-            <a:solidFill>
-              <a:srgbClr val="E2E8F0"/>
-            </a:solidFill>
-            <a:prstDash val="solid"/>
-          </a:ln>
-          <a:effectLst>
-            <a:outerShdw blurRad="101600" dist="25400" dir="5400000" algn="bl" rotWithShape="0">
-              <a:srgbClr val="000000">
-                <a:alpha val="12000"/>
-              </a:srgbClr>
-            </a:outerShdw>
-          </a:effectLst>
-        </p:spPr>
-        <p:txBody>
-          <a:bodyPr/>
-          <a:lstStyle/>
-          <a:p>
-            <a:endParaRPr lang="es-ES" noProof="0" dirty="0"/>
-          </a:p>
-        </p:txBody>
-      </p:sp>
-      <p:sp>
-        <p:nvSpPr>
-          <p:cNvPr id="25" name="Shape 23"/>
-          <p:cNvSpPr/>
-          <p:nvPr/>
-        </p:nvSpPr>
-        <p:spPr>
-          <a:xfrm>
-            <a:off x="7333488" y="1554480"/>
-            <a:ext cx="1627632" cy="274320"/>
-          </a:xfrm>
-          <a:prstGeom prst="rect">
-            <a:avLst/>
-          </a:prstGeom>
-          <a:solidFill>
-            <a:srgbClr val="2C3E73"/>
-          </a:solidFill>
-          <a:ln/>
-        </p:spPr>
-        <p:txBody>
-          <a:bodyPr/>
-          <a:lstStyle/>
-          <a:p>
-            <a:endParaRPr lang="es-ES" noProof="0" dirty="0"/>
-          </a:p>
-        </p:txBody>
-      </p:sp>
-      <p:sp>
-        <p:nvSpPr>
-          <p:cNvPr id="26" name="Text 24"/>
-          <p:cNvSpPr/>
-          <p:nvPr/>
-        </p:nvSpPr>
-        <p:spPr>
-          <a:xfrm>
-            <a:off x="7333488" y="1554480"/>
-            <a:ext cx="1627632" cy="274320"/>
-          </a:xfrm>
-          <a:prstGeom prst="rect">
-            <a:avLst/>
-          </a:prstGeom>
-          <a:noFill/>
-          <a:ln/>
-        </p:spPr>
-        <p:txBody>
-          <a:bodyPr wrap="square" lIns="0" tIns="0" rIns="0" bIns="0" rtlCol="0" anchor="ctr"/>
-          <a:lstStyle/>
-          <a:p>
-            <a:pPr marL="0" indent="0" algn="ctr">
-              <a:buNone/>
-            </a:pPr>
-            <a:r>
-              <a:rPr lang="es-ES" sz="1100" b="1" noProof="0" dirty="0">
-                <a:solidFill>
-                  <a:srgbClr val="FFFFFF"/>
-                </a:solidFill>
-                <a:latin typeface="Calibri" pitchFamily="34" charset="0"/>
-                <a:ea typeface="Calibri" pitchFamily="34" charset="-122"/>
-                <a:cs typeface="Calibri" pitchFamily="34" charset="-120"/>
-              </a:rPr>
-              <a:t>5</a:t>
-            </a:r>
-            <a:endParaRPr lang="es-ES" sz="1100" noProof="0" dirty="0"/>
-          </a:p>
-        </p:txBody>
-      </p:sp>
-      <p:sp>
-        <p:nvSpPr>
-          <p:cNvPr id="27" name="Text 25"/>
-          <p:cNvSpPr/>
-          <p:nvPr/>
-        </p:nvSpPr>
-        <p:spPr>
-          <a:xfrm>
-            <a:off x="7424928" y="1874520"/>
-            <a:ext cx="1444752" cy="365760"/>
-          </a:xfrm>
-          <a:prstGeom prst="rect">
-            <a:avLst/>
-          </a:prstGeom>
-          <a:noFill/>
-          <a:ln/>
-        </p:spPr>
-        <p:txBody>
-          <a:bodyPr wrap="square" lIns="0" tIns="0" rIns="0" bIns="0" rtlCol="0" anchor="ctr"/>
-          <a:lstStyle/>
-          <a:p>
-            <a:pPr marL="0" indent="0">
-              <a:buNone/>
-            </a:pPr>
-            <a:r>
-              <a:rPr lang="es-ES" sz="1100" b="1" noProof="0" dirty="0" err="1">
-                <a:solidFill>
-                  <a:srgbClr val="1E2761"/>
-                </a:solidFill>
-                <a:latin typeface="Calibri" pitchFamily="34" charset="0"/>
-                <a:ea typeface="Calibri" pitchFamily="34" charset="-122"/>
-                <a:cs typeface="Calibri" pitchFamily="34" charset="-120"/>
-              </a:rPr>
-              <a:t>fct_forecast_trips</a:t>
-            </a:r>
-            <a:endParaRPr lang="es-ES" sz="1100" noProof="0" dirty="0"/>
-          </a:p>
-        </p:txBody>
-      </p:sp>
-      <p:sp>
-        <p:nvSpPr>
-          <p:cNvPr id="28" name="Text 26"/>
-          <p:cNvSpPr/>
-          <p:nvPr/>
-        </p:nvSpPr>
-        <p:spPr>
-          <a:xfrm>
-            <a:off x="7424928" y="2240280"/>
-            <a:ext cx="1444752" cy="640080"/>
-          </a:xfrm>
-          <a:prstGeom prst="rect">
-            <a:avLst/>
-          </a:prstGeom>
-          <a:noFill/>
-          <a:ln/>
-        </p:spPr>
-        <p:txBody>
-          <a:bodyPr wrap="square" lIns="0" tIns="0" rIns="0" bIns="0" rtlCol="0" anchor="t"/>
-          <a:lstStyle/>
-          <a:p>
-            <a:pPr marL="0" indent="0">
-              <a:buNone/>
-            </a:pPr>
-            <a:r>
-              <a:rPr lang="es-ES" sz="950" noProof="0" dirty="0" err="1">
-                <a:solidFill>
-                  <a:srgbClr val="1A202C"/>
-                </a:solidFill>
-                <a:latin typeface="Calibri" pitchFamily="34" charset="0"/>
-                <a:ea typeface="Calibri" pitchFamily="34" charset="-122"/>
-                <a:cs typeface="Calibri" pitchFamily="34" charset="-120"/>
-              </a:rPr>
-              <a:t>dbt</a:t>
-            </a:r>
-            <a:r>
-              <a:rPr lang="es-ES" sz="950" noProof="0" dirty="0">
-                <a:solidFill>
-                  <a:srgbClr val="1A202C"/>
-                </a:solidFill>
-                <a:latin typeface="Calibri" pitchFamily="34" charset="0"/>
-                <a:ea typeface="Calibri" pitchFamily="34" charset="-122"/>
-                <a:cs typeface="Calibri" pitchFamily="34" charset="-120"/>
-              </a:rPr>
-              <a:t> </a:t>
-            </a:r>
-            <a:r>
-              <a:rPr lang="es-ES" sz="950" noProof="0" dirty="0" err="1">
-                <a:solidFill>
-                  <a:srgbClr val="1A202C"/>
-                </a:solidFill>
-                <a:latin typeface="Calibri" pitchFamily="34" charset="0"/>
-                <a:ea typeface="Calibri" pitchFamily="34" charset="-122"/>
-                <a:cs typeface="Calibri" pitchFamily="34" charset="-120"/>
-              </a:rPr>
-              <a:t>model</a:t>
-            </a:r>
-            <a:r>
-              <a:rPr lang="es-ES" sz="950" noProof="0" dirty="0">
-                <a:solidFill>
-                  <a:srgbClr val="1A202C"/>
-                </a:solidFill>
-                <a:latin typeface="Calibri" pitchFamily="34" charset="0"/>
-                <a:ea typeface="Calibri" pitchFamily="34" charset="-122"/>
-                <a:cs typeface="Calibri" pitchFamily="34" charset="-120"/>
-              </a:rPr>
-              <a:t>: </a:t>
-            </a:r>
-            <a:r>
-              <a:rPr lang="es-ES" sz="950" noProof="0" dirty="0" err="1">
-                <a:solidFill>
-                  <a:srgbClr val="1A202C"/>
-                </a:solidFill>
-                <a:latin typeface="Calibri" pitchFamily="34" charset="0"/>
-                <a:ea typeface="Calibri" pitchFamily="34" charset="-122"/>
-                <a:cs typeface="Calibri" pitchFamily="34" charset="-120"/>
-              </a:rPr>
-              <a:t>denormaliza</a:t>
-            </a:r>
-            <a:r>
-              <a:rPr lang="es-ES" sz="950" noProof="0" dirty="0">
-                <a:solidFill>
-                  <a:srgbClr val="1A202C"/>
-                </a:solidFill>
-                <a:latin typeface="Calibri" pitchFamily="34" charset="0"/>
-                <a:ea typeface="Calibri" pitchFamily="34" charset="-122"/>
-                <a:cs typeface="Calibri" pitchFamily="34" charset="-120"/>
-              </a:rPr>
-              <a:t> vs </a:t>
-            </a:r>
-            <a:r>
-              <a:rPr lang="es-ES" sz="950" noProof="0" dirty="0" err="1">
-                <a:solidFill>
-                  <a:srgbClr val="1A202C"/>
-                </a:solidFill>
-                <a:latin typeface="Calibri" pitchFamily="34" charset="0"/>
-                <a:ea typeface="Calibri" pitchFamily="34" charset="-122"/>
-                <a:cs typeface="Calibri" pitchFamily="34" charset="-120"/>
-              </a:rPr>
-              <a:t>dim_city</a:t>
-            </a:r>
-            <a:r>
-              <a:rPr lang="es-ES" sz="950" noProof="0" dirty="0">
-                <a:solidFill>
-                  <a:srgbClr val="1A202C"/>
-                </a:solidFill>
-                <a:latin typeface="Calibri" pitchFamily="34" charset="0"/>
-                <a:ea typeface="Calibri" pitchFamily="34" charset="-122"/>
-                <a:cs typeface="Calibri" pitchFamily="34" charset="-120"/>
-              </a:rPr>
-              <a:t>/</a:t>
-            </a:r>
-            <a:r>
-              <a:rPr lang="es-ES" sz="950" noProof="0" dirty="0" err="1">
-                <a:solidFill>
-                  <a:srgbClr val="1A202C"/>
-                </a:solidFill>
-                <a:latin typeface="Calibri" pitchFamily="34" charset="0"/>
-                <a:ea typeface="Calibri" pitchFamily="34" charset="-122"/>
-                <a:cs typeface="Calibri" pitchFamily="34" charset="-120"/>
-              </a:rPr>
-              <a:t>bike</a:t>
-            </a:r>
-            <a:r>
-              <a:rPr lang="es-ES" sz="950" noProof="0" dirty="0">
-                <a:solidFill>
-                  <a:srgbClr val="1A202C"/>
-                </a:solidFill>
-                <a:latin typeface="Calibri" pitchFamily="34" charset="0"/>
-                <a:ea typeface="Calibri" pitchFamily="34" charset="-122"/>
-                <a:cs typeface="Calibri" pitchFamily="34" charset="-120"/>
-              </a:rPr>
-              <a:t>/</a:t>
-            </a:r>
-            <a:r>
-              <a:rPr lang="es-ES" sz="950" noProof="0" dirty="0" err="1">
-                <a:solidFill>
-                  <a:srgbClr val="1A202C"/>
-                </a:solidFill>
-                <a:latin typeface="Calibri" pitchFamily="34" charset="0"/>
-                <a:ea typeface="Calibri" pitchFamily="34" charset="-122"/>
-                <a:cs typeface="Calibri" pitchFamily="34" charset="-120"/>
-              </a:rPr>
-              <a:t>user</a:t>
-            </a:r>
-            <a:r>
-              <a:rPr lang="es-ES" sz="950" noProof="0" dirty="0">
-                <a:solidFill>
-                  <a:srgbClr val="1A202C"/>
-                </a:solidFill>
-                <a:latin typeface="Calibri" pitchFamily="34" charset="0"/>
-                <a:ea typeface="Calibri" pitchFamily="34" charset="-122"/>
-                <a:cs typeface="Calibri" pitchFamily="34" charset="-120"/>
-              </a:rPr>
-              <a:t>/fecha.</a:t>
-            </a:r>
-            <a:endParaRPr lang="es-ES" sz="950" noProof="0" dirty="0"/>
-          </a:p>
-        </p:txBody>
-      </p:sp>
-      <p:sp>
-        <p:nvSpPr>
-          <p:cNvPr id="29" name="Text 27"/>
-          <p:cNvSpPr/>
-          <p:nvPr/>
-        </p:nvSpPr>
-        <p:spPr>
-          <a:xfrm>
-            <a:off x="2039112" y="2103120"/>
-            <a:ext cx="182880" cy="274320"/>
-          </a:xfrm>
-          <a:prstGeom prst="rect">
-            <a:avLst/>
-          </a:prstGeom>
-          <a:noFill/>
-          <a:ln/>
-        </p:spPr>
-        <p:txBody>
-          <a:bodyPr wrap="square" lIns="0" tIns="0" rIns="0" bIns="0" rtlCol="0" anchor="ctr"/>
-          <a:lstStyle/>
-          <a:p>
-            <a:pPr marL="0" indent="0" algn="ctr">
-              <a:buNone/>
-            </a:pPr>
-            <a:r>
-              <a:rPr lang="es-ES" sz="1400" b="1" noProof="0" dirty="0">
-                <a:solidFill>
-                  <a:srgbClr val="F59E0B"/>
-                </a:solidFill>
-                <a:latin typeface="Calibri" pitchFamily="34" charset="0"/>
-                <a:ea typeface="Calibri" pitchFamily="34" charset="-122"/>
-                <a:cs typeface="Calibri" pitchFamily="34" charset="-120"/>
-              </a:rPr>
-              <a:t>▶</a:t>
-            </a:r>
-            <a:endParaRPr lang="es-ES" sz="1400" noProof="0" dirty="0"/>
-          </a:p>
-        </p:txBody>
-      </p:sp>
-      <p:sp>
-        <p:nvSpPr>
-          <p:cNvPr id="30" name="Text 28"/>
-          <p:cNvSpPr/>
-          <p:nvPr/>
-        </p:nvSpPr>
-        <p:spPr>
-          <a:xfrm>
-            <a:off x="3758184" y="2103120"/>
-            <a:ext cx="182880" cy="274320"/>
-          </a:xfrm>
-          <a:prstGeom prst="rect">
-            <a:avLst/>
-          </a:prstGeom>
-          <a:noFill/>
-          <a:ln/>
-        </p:spPr>
-        <p:txBody>
-          <a:bodyPr wrap="square" lIns="0" tIns="0" rIns="0" bIns="0" rtlCol="0" anchor="ctr"/>
-          <a:lstStyle/>
-          <a:p>
-            <a:pPr marL="0" indent="0" algn="ctr">
-              <a:buNone/>
-            </a:pPr>
-            <a:r>
-              <a:rPr lang="es-ES" sz="1400" b="1" noProof="0" dirty="0">
-                <a:solidFill>
-                  <a:srgbClr val="F59E0B"/>
-                </a:solidFill>
-                <a:latin typeface="Calibri" pitchFamily="34" charset="0"/>
-                <a:ea typeface="Calibri" pitchFamily="34" charset="-122"/>
-                <a:cs typeface="Calibri" pitchFamily="34" charset="-120"/>
-              </a:rPr>
-              <a:t>▶</a:t>
-            </a:r>
-            <a:endParaRPr lang="es-ES" sz="1400" noProof="0" dirty="0"/>
-          </a:p>
-        </p:txBody>
-      </p:sp>
-      <p:sp>
-        <p:nvSpPr>
-          <p:cNvPr id="31" name="Text 29"/>
-          <p:cNvSpPr/>
-          <p:nvPr/>
-        </p:nvSpPr>
-        <p:spPr>
-          <a:xfrm>
-            <a:off x="5477256" y="2103120"/>
-            <a:ext cx="182880" cy="274320"/>
-          </a:xfrm>
-          <a:prstGeom prst="rect">
-            <a:avLst/>
-          </a:prstGeom>
-          <a:noFill/>
-          <a:ln/>
-        </p:spPr>
-        <p:txBody>
-          <a:bodyPr wrap="square" lIns="0" tIns="0" rIns="0" bIns="0" rtlCol="0" anchor="ctr"/>
-          <a:lstStyle/>
-          <a:p>
-            <a:pPr marL="0" indent="0" algn="ctr">
-              <a:buNone/>
-            </a:pPr>
-            <a:r>
-              <a:rPr lang="es-ES" sz="1400" b="1" noProof="0" dirty="0">
-                <a:solidFill>
-                  <a:srgbClr val="F59E0B"/>
-                </a:solidFill>
-                <a:latin typeface="Calibri" pitchFamily="34" charset="0"/>
-                <a:ea typeface="Calibri" pitchFamily="34" charset="-122"/>
-                <a:cs typeface="Calibri" pitchFamily="34" charset="-120"/>
-              </a:rPr>
-              <a:t>▶</a:t>
-            </a:r>
-            <a:endParaRPr lang="es-ES" sz="1400" noProof="0" dirty="0"/>
-          </a:p>
-        </p:txBody>
-      </p:sp>
-      <p:sp>
-        <p:nvSpPr>
-          <p:cNvPr id="32" name="Text 30"/>
-          <p:cNvSpPr/>
-          <p:nvPr/>
-        </p:nvSpPr>
-        <p:spPr>
-          <a:xfrm>
-            <a:off x="7196328" y="2103120"/>
-            <a:ext cx="182880" cy="274320"/>
-          </a:xfrm>
-          <a:prstGeom prst="rect">
-            <a:avLst/>
-          </a:prstGeom>
-          <a:noFill/>
-          <a:ln/>
-        </p:spPr>
-        <p:txBody>
-          <a:bodyPr wrap="square" lIns="0" tIns="0" rIns="0" bIns="0" rtlCol="0" anchor="ctr"/>
-          <a:lstStyle/>
-          <a:p>
-            <a:pPr marL="0" indent="0" algn="ctr">
-              <a:buNone/>
-            </a:pPr>
-            <a:r>
-              <a:rPr lang="es-ES" sz="1400" b="1" noProof="0" dirty="0">
-                <a:solidFill>
-                  <a:srgbClr val="F59E0B"/>
-                </a:solidFill>
-                <a:latin typeface="Calibri" pitchFamily="34" charset="0"/>
-                <a:ea typeface="Calibri" pitchFamily="34" charset="-122"/>
-                <a:cs typeface="Calibri" pitchFamily="34" charset="-120"/>
-              </a:rPr>
-              <a:t>▶</a:t>
-            </a:r>
-            <a:endParaRPr lang="es-ES" sz="1400" noProof="0" dirty="0"/>
-          </a:p>
-        </p:txBody>
-      </p:sp>
-      <p:sp>
-        <p:nvSpPr>
-          <p:cNvPr id="33" name="Shape 31"/>
-          <p:cNvSpPr/>
-          <p:nvPr/>
-        </p:nvSpPr>
-        <p:spPr>
-          <a:xfrm>
-            <a:off x="457200" y="3200400"/>
-            <a:ext cx="8229600" cy="1417320"/>
-          </a:xfrm>
-          <a:prstGeom prst="rect">
-            <a:avLst/>
-          </a:prstGeom>
-          <a:solidFill>
-            <a:srgbClr val="FFFFFF"/>
-          </a:solidFill>
-          <a:ln w="12700">
-            <a:solidFill>
-              <a:srgbClr val="E2E8F0"/>
-            </a:solidFill>
-            <a:prstDash val="solid"/>
-          </a:ln>
-          <a:effectLst>
-            <a:outerShdw blurRad="101600" dist="25400" dir="5400000" algn="bl" rotWithShape="0">
-              <a:srgbClr val="000000">
-                <a:alpha val="12000"/>
-              </a:srgbClr>
-            </a:outerShdw>
-          </a:effectLst>
-        </p:spPr>
-        <p:txBody>
-          <a:bodyPr/>
-          <a:lstStyle/>
-          <a:p>
-            <a:endParaRPr lang="es-ES" noProof="0" dirty="0"/>
-          </a:p>
-        </p:txBody>
-      </p:sp>
-      <p:sp>
-        <p:nvSpPr>
-          <p:cNvPr id="34" name="Shape 32"/>
-          <p:cNvSpPr/>
-          <p:nvPr/>
-        </p:nvSpPr>
-        <p:spPr>
-          <a:xfrm>
-            <a:off x="457200" y="3200400"/>
-            <a:ext cx="73152" cy="1417320"/>
-          </a:xfrm>
-          <a:prstGeom prst="rect">
-            <a:avLst/>
-          </a:prstGeom>
-          <a:solidFill>
-            <a:srgbClr val="F59E0B"/>
-          </a:solidFill>
-          <a:ln/>
-        </p:spPr>
-        <p:txBody>
-          <a:bodyPr/>
-          <a:lstStyle/>
-          <a:p>
-            <a:endParaRPr lang="es-ES" noProof="0" dirty="0"/>
-          </a:p>
-        </p:txBody>
-      </p:sp>
-      <p:sp>
-        <p:nvSpPr>
-          <p:cNvPr id="35" name="Text 33"/>
-          <p:cNvSpPr/>
-          <p:nvPr/>
-        </p:nvSpPr>
-        <p:spPr>
-          <a:xfrm>
-            <a:off x="731520" y="3291840"/>
-            <a:ext cx="7772400" cy="365760"/>
-          </a:xfrm>
-          <a:prstGeom prst="rect">
-            <a:avLst/>
-          </a:prstGeom>
-          <a:noFill/>
-          <a:ln/>
-        </p:spPr>
-        <p:txBody>
-          <a:bodyPr wrap="square" lIns="0" tIns="0" rIns="0" bIns="0" rtlCol="0" anchor="ctr"/>
-          <a:lstStyle/>
-          <a:p>
-            <a:pPr marL="0" indent="0">
-              <a:buNone/>
-            </a:pPr>
-            <a:r>
-              <a:rPr lang="es-ES" sz="1400" b="1" noProof="0" dirty="0" err="1">
-                <a:solidFill>
-                  <a:srgbClr val="1E2761"/>
-                </a:solidFill>
-                <a:latin typeface="Calibri" pitchFamily="34" charset="0"/>
-                <a:ea typeface="Calibri" pitchFamily="34" charset="-122"/>
-                <a:cs typeface="Calibri" pitchFamily="34" charset="-120"/>
-              </a:rPr>
-              <a:t>rep_top_forecast_trips_monthly</a:t>
-            </a:r>
-            <a:endParaRPr lang="es-ES" sz="1400" noProof="0" dirty="0"/>
-          </a:p>
-        </p:txBody>
-      </p:sp>
-      <p:sp>
-        <p:nvSpPr>
-          <p:cNvPr id="36" name="Text 34"/>
-          <p:cNvSpPr/>
-          <p:nvPr/>
-        </p:nvSpPr>
-        <p:spPr>
-          <a:xfrm>
-            <a:off x="731520" y="3657600"/>
-            <a:ext cx="7772400" cy="914400"/>
-          </a:xfrm>
-          <a:prstGeom prst="rect">
-            <a:avLst/>
-          </a:prstGeom>
-          <a:noFill/>
-          <a:ln/>
-        </p:spPr>
-        <p:txBody>
-          <a:bodyPr wrap="square" lIns="0" tIns="0" rIns="0" bIns="0" rtlCol="0" anchor="t"/>
-          <a:lstStyle/>
-          <a:p>
-            <a:pPr marL="0" indent="0">
-              <a:spcAft>
-                <a:spcPts val="400"/>
-              </a:spcAft>
-              <a:buNone/>
-            </a:pPr>
-            <a:r>
-              <a:rPr lang="es-ES" sz="1100" noProof="0" dirty="0">
-                <a:solidFill>
-                  <a:srgbClr val="1A202C"/>
-                </a:solidFill>
-                <a:latin typeface="Calibri" pitchFamily="34" charset="0"/>
-                <a:ea typeface="Calibri" pitchFamily="34" charset="-122"/>
-                <a:cs typeface="Calibri" pitchFamily="34" charset="-120"/>
-              </a:rPr>
-              <a:t>View en ANALYTICS: </a:t>
-            </a:r>
-            <a:r>
-              <a:rPr lang="es-ES" sz="1100" noProof="0" dirty="0" err="1">
-                <a:solidFill>
-                  <a:srgbClr val="1A202C"/>
-                </a:solidFill>
-                <a:latin typeface="Calibri" pitchFamily="34" charset="0"/>
-                <a:ea typeface="Calibri" pitchFamily="34" charset="-122"/>
-                <a:cs typeface="Calibri" pitchFamily="34" charset="-120"/>
-              </a:rPr>
-              <a:t>row_number</a:t>
-            </a:r>
-            <a:r>
-              <a:rPr lang="es-ES" sz="1100" noProof="0" dirty="0">
-                <a:solidFill>
-                  <a:srgbClr val="1A202C"/>
-                </a:solidFill>
-                <a:latin typeface="Calibri" pitchFamily="34" charset="0"/>
-                <a:ea typeface="Calibri" pitchFamily="34" charset="-122"/>
-                <a:cs typeface="Calibri" pitchFamily="34" charset="-120"/>
-              </a:rPr>
-              <a:t>() </a:t>
-            </a:r>
-            <a:r>
-              <a:rPr lang="es-ES" sz="1100" noProof="0" dirty="0" err="1">
-                <a:solidFill>
-                  <a:srgbClr val="1A202C"/>
-                </a:solidFill>
-                <a:latin typeface="Calibri" pitchFamily="34" charset="0"/>
-                <a:ea typeface="Calibri" pitchFamily="34" charset="-122"/>
-                <a:cs typeface="Calibri" pitchFamily="34" charset="-120"/>
-              </a:rPr>
-              <a:t>over</a:t>
-            </a:r>
-            <a:r>
-              <a:rPr lang="es-ES" sz="1100" noProof="0" dirty="0">
-                <a:solidFill>
-                  <a:srgbClr val="1A202C"/>
-                </a:solidFill>
-                <a:latin typeface="Calibri" pitchFamily="34" charset="0"/>
-                <a:ea typeface="Calibri" pitchFamily="34" charset="-122"/>
-                <a:cs typeface="Calibri" pitchFamily="34" charset="-120"/>
-              </a:rPr>
-              <a:t> (</a:t>
-            </a:r>
-            <a:r>
-              <a:rPr lang="es-ES" sz="1100" noProof="0" dirty="0" err="1">
-                <a:solidFill>
-                  <a:srgbClr val="1A202C"/>
-                </a:solidFill>
-                <a:latin typeface="Calibri" pitchFamily="34" charset="0"/>
-                <a:ea typeface="Calibri" pitchFamily="34" charset="-122"/>
-                <a:cs typeface="Calibri" pitchFamily="34" charset="-120"/>
-              </a:rPr>
-              <a:t>partition</a:t>
-            </a:r>
-            <a:r>
-              <a:rPr lang="es-ES" sz="1100" noProof="0" dirty="0">
-                <a:solidFill>
-                  <a:srgbClr val="1A202C"/>
-                </a:solidFill>
-                <a:latin typeface="Calibri" pitchFamily="34" charset="0"/>
-                <a:ea typeface="Calibri" pitchFamily="34" charset="-122"/>
-                <a:cs typeface="Calibri" pitchFamily="34" charset="-120"/>
-              </a:rPr>
-              <a:t> </a:t>
-            </a:r>
-            <a:r>
-              <a:rPr lang="es-ES" sz="1100" noProof="0" dirty="0" err="1">
-                <a:solidFill>
-                  <a:srgbClr val="1A202C"/>
-                </a:solidFill>
-                <a:latin typeface="Calibri" pitchFamily="34" charset="0"/>
-                <a:ea typeface="Calibri" pitchFamily="34" charset="-122"/>
-                <a:cs typeface="Calibri" pitchFamily="34" charset="-120"/>
-              </a:rPr>
-              <a:t>by</a:t>
-            </a:r>
-            <a:r>
-              <a:rPr lang="es-ES" sz="1100" noProof="0" dirty="0">
-                <a:solidFill>
-                  <a:srgbClr val="1A202C"/>
-                </a:solidFill>
-                <a:latin typeface="Calibri" pitchFamily="34" charset="0"/>
-                <a:ea typeface="Calibri" pitchFamily="34" charset="-122"/>
-                <a:cs typeface="Calibri" pitchFamily="34" charset="-120"/>
-              </a:rPr>
-              <a:t> </a:t>
-            </a:r>
-            <a:r>
-              <a:rPr lang="es-ES" sz="1100" noProof="0" dirty="0" err="1">
-                <a:solidFill>
-                  <a:srgbClr val="1A202C"/>
-                </a:solidFill>
-                <a:latin typeface="Calibri" pitchFamily="34" charset="0"/>
-                <a:ea typeface="Calibri" pitchFamily="34" charset="-122"/>
-                <a:cs typeface="Calibri" pitchFamily="34" charset="-120"/>
-              </a:rPr>
-              <a:t>city</a:t>
-            </a:r>
-            <a:r>
-              <a:rPr lang="es-ES" sz="1100" noProof="0" dirty="0">
-                <a:solidFill>
-                  <a:srgbClr val="1A202C"/>
-                </a:solidFill>
-                <a:latin typeface="Calibri" pitchFamily="34" charset="0"/>
-                <a:ea typeface="Calibri" pitchFamily="34" charset="-122"/>
-                <a:cs typeface="Calibri" pitchFamily="34" charset="-120"/>
-              </a:rPr>
-              <a:t>, </a:t>
-            </a:r>
-            <a:r>
-              <a:rPr lang="es-ES" sz="1100" noProof="0" dirty="0" err="1">
-                <a:solidFill>
-                  <a:srgbClr val="1A202C"/>
-                </a:solidFill>
-                <a:latin typeface="Calibri" pitchFamily="34" charset="0"/>
-                <a:ea typeface="Calibri" pitchFamily="34" charset="-122"/>
-                <a:cs typeface="Calibri" pitchFamily="34" charset="-120"/>
-              </a:rPr>
-              <a:t>nombre_mes</a:t>
-            </a:r>
-            <a:r>
-              <a:rPr lang="es-ES" sz="1100" noProof="0" dirty="0">
-                <a:solidFill>
-                  <a:srgbClr val="1A202C"/>
-                </a:solidFill>
-                <a:latin typeface="Calibri" pitchFamily="34" charset="0"/>
-                <a:ea typeface="Calibri" pitchFamily="34" charset="-122"/>
-                <a:cs typeface="Calibri" pitchFamily="34" charset="-120"/>
-              </a:rPr>
-              <a:t> </a:t>
-            </a:r>
-            <a:r>
-              <a:rPr lang="es-ES" sz="1100" noProof="0" dirty="0" err="1">
-                <a:solidFill>
-                  <a:srgbClr val="1A202C"/>
-                </a:solidFill>
-                <a:latin typeface="Calibri" pitchFamily="34" charset="0"/>
-                <a:ea typeface="Calibri" pitchFamily="34" charset="-122"/>
-                <a:cs typeface="Calibri" pitchFamily="34" charset="-120"/>
-              </a:rPr>
-              <a:t>order</a:t>
-            </a:r>
-            <a:r>
-              <a:rPr lang="es-ES" sz="1100" noProof="0" dirty="0">
-                <a:solidFill>
-                  <a:srgbClr val="1A202C"/>
-                </a:solidFill>
-                <a:latin typeface="Calibri" pitchFamily="34" charset="0"/>
-                <a:ea typeface="Calibri" pitchFamily="34" charset="-122"/>
-                <a:cs typeface="Calibri" pitchFamily="34" charset="-120"/>
-              </a:rPr>
-              <a:t> </a:t>
-            </a:r>
-            <a:r>
-              <a:rPr lang="es-ES" sz="1100" noProof="0" dirty="0" err="1">
-                <a:solidFill>
-                  <a:srgbClr val="1A202C"/>
-                </a:solidFill>
-                <a:latin typeface="Calibri" pitchFamily="34" charset="0"/>
-                <a:ea typeface="Calibri" pitchFamily="34" charset="-122"/>
-                <a:cs typeface="Calibri" pitchFamily="34" charset="-120"/>
-              </a:rPr>
-              <a:t>by</a:t>
-            </a:r>
-            <a:r>
-              <a:rPr lang="es-ES" sz="1100" noProof="0" dirty="0">
-                <a:solidFill>
-                  <a:srgbClr val="1A202C"/>
-                </a:solidFill>
-                <a:latin typeface="Calibri" pitchFamily="34" charset="0"/>
-                <a:ea typeface="Calibri" pitchFamily="34" charset="-122"/>
-                <a:cs typeface="Calibri" pitchFamily="34" charset="-120"/>
-              </a:rPr>
-              <a:t> </a:t>
-            </a:r>
-            <a:r>
-              <a:rPr lang="es-ES" sz="1100" noProof="0" dirty="0" err="1">
-                <a:solidFill>
-                  <a:srgbClr val="1A202C"/>
-                </a:solidFill>
-                <a:latin typeface="Calibri" pitchFamily="34" charset="0"/>
-                <a:ea typeface="Calibri" pitchFamily="34" charset="-122"/>
-                <a:cs typeface="Calibri" pitchFamily="34" charset="-120"/>
-              </a:rPr>
-              <a:t>predicted_n_trips</a:t>
-            </a:r>
-            <a:r>
-              <a:rPr lang="es-ES" sz="1100" noProof="0" dirty="0">
-                <a:solidFill>
-                  <a:srgbClr val="1A202C"/>
-                </a:solidFill>
-                <a:latin typeface="Calibri" pitchFamily="34" charset="0"/>
-                <a:ea typeface="Calibri" pitchFamily="34" charset="-122"/>
-                <a:cs typeface="Calibri" pitchFamily="34" charset="-120"/>
-              </a:rPr>
-              <a:t> </a:t>
-            </a:r>
-            <a:r>
-              <a:rPr lang="es-ES" sz="1100" noProof="0" dirty="0" err="1">
-                <a:solidFill>
-                  <a:srgbClr val="1A202C"/>
-                </a:solidFill>
-                <a:latin typeface="Calibri" pitchFamily="34" charset="0"/>
-                <a:ea typeface="Calibri" pitchFamily="34" charset="-122"/>
-                <a:cs typeface="Calibri" pitchFamily="34" charset="-120"/>
-              </a:rPr>
-              <a:t>desc</a:t>
-            </a:r>
-            <a:r>
-              <a:rPr lang="es-ES" sz="1100" noProof="0" dirty="0">
-                <a:solidFill>
-                  <a:srgbClr val="1A202C"/>
-                </a:solidFill>
-                <a:latin typeface="Calibri" pitchFamily="34" charset="0"/>
-                <a:ea typeface="Calibri" pitchFamily="34" charset="-122"/>
-                <a:cs typeface="Calibri" pitchFamily="34" charset="-120"/>
-              </a:rPr>
-              <a:t>) = 1.</a:t>
-            </a:r>
-            <a:endParaRPr lang="es-ES" sz="1100" noProof="0" dirty="0"/>
-          </a:p>
-          <a:p>
-            <a:pPr marL="0" indent="0">
-              <a:spcAft>
-                <a:spcPts val="400"/>
-              </a:spcAft>
-              <a:buNone/>
-            </a:pPr>
-            <a:r>
-              <a:rPr lang="es-ES" sz="1100" noProof="0" dirty="0">
-                <a:solidFill>
-                  <a:srgbClr val="64748B"/>
-                </a:solidFill>
-                <a:latin typeface="Calibri" pitchFamily="34" charset="0"/>
-                <a:ea typeface="Calibri" pitchFamily="34" charset="-122"/>
-                <a:cs typeface="Calibri" pitchFamily="34" charset="-120"/>
-              </a:rPr>
-              <a:t>Resultado: el </a:t>
-            </a:r>
-            <a:r>
-              <a:rPr lang="es-ES" sz="1100" noProof="0" dirty="0" err="1">
-                <a:solidFill>
-                  <a:srgbClr val="64748B"/>
-                </a:solidFill>
-                <a:latin typeface="Calibri" pitchFamily="34" charset="0"/>
-                <a:ea typeface="Calibri" pitchFamily="34" charset="-122"/>
-                <a:cs typeface="Calibri" pitchFamily="34" charset="-120"/>
-              </a:rPr>
-              <a:t>dia</a:t>
-            </a:r>
-            <a:r>
-              <a:rPr lang="es-ES" sz="1100" noProof="0" dirty="0">
-                <a:solidFill>
-                  <a:srgbClr val="64748B"/>
-                </a:solidFill>
-                <a:latin typeface="Calibri" pitchFamily="34" charset="0"/>
-                <a:ea typeface="Calibri" pitchFamily="34" charset="-122"/>
-                <a:cs typeface="Calibri" pitchFamily="34" charset="-120"/>
-              </a:rPr>
-              <a:t> pico esperado del mes, por ciudad, listo para visual "</a:t>
-            </a:r>
-            <a:r>
-              <a:rPr lang="es-ES" sz="1100" noProof="0" dirty="0" err="1">
-                <a:solidFill>
-                  <a:srgbClr val="64748B"/>
-                </a:solidFill>
-                <a:latin typeface="Calibri" pitchFamily="34" charset="0"/>
-                <a:ea typeface="Calibri" pitchFamily="34" charset="-122"/>
-                <a:cs typeface="Calibri" pitchFamily="34" charset="-120"/>
-              </a:rPr>
-              <a:t>best</a:t>
-            </a:r>
-            <a:r>
-              <a:rPr lang="es-ES" sz="1100" noProof="0" dirty="0">
-                <a:solidFill>
-                  <a:srgbClr val="64748B"/>
-                </a:solidFill>
-                <a:latin typeface="Calibri" pitchFamily="34" charset="0"/>
-                <a:ea typeface="Calibri" pitchFamily="34" charset="-122"/>
-                <a:cs typeface="Calibri" pitchFamily="34" charset="-120"/>
-              </a:rPr>
-              <a:t> </a:t>
-            </a:r>
-            <a:r>
-              <a:rPr lang="es-ES" sz="1100" noProof="0" dirty="0" err="1">
-                <a:solidFill>
-                  <a:srgbClr val="64748B"/>
-                </a:solidFill>
-                <a:latin typeface="Calibri" pitchFamily="34" charset="0"/>
-                <a:ea typeface="Calibri" pitchFamily="34" charset="-122"/>
-                <a:cs typeface="Calibri" pitchFamily="34" charset="-120"/>
-              </a:rPr>
-              <a:t>day</a:t>
-            </a:r>
-            <a:r>
-              <a:rPr lang="es-ES" sz="1100" noProof="0" dirty="0">
-                <a:solidFill>
-                  <a:srgbClr val="64748B"/>
-                </a:solidFill>
-                <a:latin typeface="Calibri" pitchFamily="34" charset="0"/>
-                <a:ea typeface="Calibri" pitchFamily="34" charset="-122"/>
-                <a:cs typeface="Calibri" pitchFamily="34" charset="-120"/>
-              </a:rPr>
-              <a:t> </a:t>
-            </a:r>
-            <a:r>
-              <a:rPr lang="es-ES" sz="1100" noProof="0" dirty="0" err="1">
-                <a:solidFill>
-                  <a:srgbClr val="64748B"/>
-                </a:solidFill>
-                <a:latin typeface="Calibri" pitchFamily="34" charset="0"/>
-                <a:ea typeface="Calibri" pitchFamily="34" charset="-122"/>
-                <a:cs typeface="Calibri" pitchFamily="34" charset="-120"/>
-              </a:rPr>
-              <a:t>to</a:t>
-            </a:r>
-            <a:r>
-              <a:rPr lang="es-ES" sz="1100" noProof="0" dirty="0">
-                <a:solidFill>
-                  <a:srgbClr val="64748B"/>
-                </a:solidFill>
-                <a:latin typeface="Calibri" pitchFamily="34" charset="0"/>
-                <a:ea typeface="Calibri" pitchFamily="34" charset="-122"/>
-                <a:cs typeface="Calibri" pitchFamily="34" charset="-120"/>
-              </a:rPr>
-              <a:t> </a:t>
-            </a:r>
-            <a:r>
-              <a:rPr lang="es-ES" sz="1100" noProof="0" dirty="0" err="1">
-                <a:solidFill>
-                  <a:srgbClr val="64748B"/>
-                </a:solidFill>
-                <a:latin typeface="Calibri" pitchFamily="34" charset="0"/>
-                <a:ea typeface="Calibri" pitchFamily="34" charset="-122"/>
-                <a:cs typeface="Calibri" pitchFamily="34" charset="-120"/>
-              </a:rPr>
-              <a:t>expect</a:t>
-            </a:r>
-            <a:r>
-              <a:rPr lang="es-ES" sz="1100" noProof="0" dirty="0">
-                <a:solidFill>
-                  <a:srgbClr val="64748B"/>
-                </a:solidFill>
-                <a:latin typeface="Calibri" pitchFamily="34" charset="0"/>
-                <a:ea typeface="Calibri" pitchFamily="34" charset="-122"/>
-                <a:cs typeface="Calibri" pitchFamily="34" charset="-120"/>
-              </a:rPr>
-              <a:t> </a:t>
-            </a:r>
-            <a:r>
-              <a:rPr lang="es-ES" sz="1100" noProof="0" dirty="0" err="1">
-                <a:solidFill>
-                  <a:srgbClr val="64748B"/>
-                </a:solidFill>
-                <a:latin typeface="Calibri" pitchFamily="34" charset="0"/>
-                <a:ea typeface="Calibri" pitchFamily="34" charset="-122"/>
-                <a:cs typeface="Calibri" pitchFamily="34" charset="-120"/>
-              </a:rPr>
-              <a:t>peak</a:t>
-            </a:r>
-            <a:r>
-              <a:rPr lang="es-ES" sz="1100" noProof="0" dirty="0">
-                <a:solidFill>
-                  <a:srgbClr val="64748B"/>
-                </a:solidFill>
-                <a:latin typeface="Calibri" pitchFamily="34" charset="0"/>
-                <a:ea typeface="Calibri" pitchFamily="34" charset="-122"/>
-                <a:cs typeface="Calibri" pitchFamily="34" charset="-120"/>
-              </a:rPr>
-              <a:t> </a:t>
-            </a:r>
-            <a:r>
-              <a:rPr lang="es-ES" sz="1100" noProof="0" dirty="0" err="1">
-                <a:solidFill>
-                  <a:srgbClr val="64748B"/>
-                </a:solidFill>
-                <a:latin typeface="Calibri" pitchFamily="34" charset="0"/>
-                <a:ea typeface="Calibri" pitchFamily="34" charset="-122"/>
-                <a:cs typeface="Calibri" pitchFamily="34" charset="-120"/>
-              </a:rPr>
-              <a:t>demand</a:t>
-            </a:r>
-            <a:r>
-              <a:rPr lang="es-ES" sz="1100" noProof="0" dirty="0">
-                <a:solidFill>
-                  <a:srgbClr val="64748B"/>
-                </a:solidFill>
-                <a:latin typeface="Calibri" pitchFamily="34" charset="0"/>
-                <a:ea typeface="Calibri" pitchFamily="34" charset="-122"/>
-                <a:cs typeface="Calibri" pitchFamily="34" charset="-120"/>
-              </a:rPr>
-              <a:t>" en Power BI.</a:t>
-            </a:r>
-            <a:endParaRPr lang="es-ES" sz="1100" noProof="0" dirty="0"/>
-          </a:p>
-          <a:p>
-            <a:pPr marL="0" indent="0">
-              <a:spcAft>
-                <a:spcPts val="400"/>
-              </a:spcAft>
-              <a:buNone/>
-            </a:pPr>
-            <a:r>
-              <a:rPr lang="es-ES" sz="1100" i="1" noProof="0" dirty="0" err="1">
-                <a:solidFill>
-                  <a:srgbClr val="64748B"/>
-                </a:solidFill>
-                <a:latin typeface="Calibri" pitchFamily="34" charset="0"/>
-                <a:ea typeface="Calibri" pitchFamily="34" charset="-122"/>
-                <a:cs typeface="Calibri" pitchFamily="34" charset="-120"/>
-              </a:rPr>
-              <a:t>Re-entrenamiento</a:t>
-            </a:r>
-            <a:r>
-              <a:rPr lang="es-ES" sz="1100" i="1" noProof="0" dirty="0">
-                <a:solidFill>
-                  <a:srgbClr val="64748B"/>
-                </a:solidFill>
-                <a:latin typeface="Calibri" pitchFamily="34" charset="0"/>
-                <a:ea typeface="Calibri" pitchFamily="34" charset="-122"/>
-                <a:cs typeface="Calibri" pitchFamily="34" charset="-120"/>
-              </a:rPr>
-              <a:t>: tras --full-</a:t>
-            </a:r>
-            <a:r>
-              <a:rPr lang="es-ES" sz="1100" i="1" noProof="0" dirty="0" err="1">
-                <a:solidFill>
-                  <a:srgbClr val="64748B"/>
-                </a:solidFill>
-                <a:latin typeface="Calibri" pitchFamily="34" charset="0"/>
-                <a:ea typeface="Calibri" pitchFamily="34" charset="-122"/>
-                <a:cs typeface="Calibri" pitchFamily="34" charset="-120"/>
-              </a:rPr>
-              <a:t>refresh</a:t>
-            </a:r>
-            <a:r>
-              <a:rPr lang="es-ES" sz="1100" i="1" noProof="0" dirty="0">
-                <a:solidFill>
-                  <a:srgbClr val="64748B"/>
-                </a:solidFill>
-                <a:latin typeface="Calibri" pitchFamily="34" charset="0"/>
-                <a:ea typeface="Calibri" pitchFamily="34" charset="-122"/>
-                <a:cs typeface="Calibri" pitchFamily="34" charset="-120"/>
-              </a:rPr>
-              <a:t> significativo, volver a correr </a:t>
-            </a:r>
-            <a:r>
-              <a:rPr lang="es-ES" sz="1100" i="1" noProof="0" dirty="0" err="1">
-                <a:solidFill>
-                  <a:srgbClr val="64748B"/>
-                </a:solidFill>
-                <a:latin typeface="Calibri" pitchFamily="34" charset="0"/>
-                <a:ea typeface="Calibri" pitchFamily="34" charset="-122"/>
-                <a:cs typeface="Calibri" pitchFamily="34" charset="-120"/>
-              </a:rPr>
-              <a:t>Forecast.sql</a:t>
-            </a:r>
-            <a:r>
-              <a:rPr lang="es-ES" sz="1100" i="1" noProof="0" dirty="0">
-                <a:solidFill>
-                  <a:srgbClr val="64748B"/>
-                </a:solidFill>
-                <a:latin typeface="Calibri" pitchFamily="34" charset="0"/>
-                <a:ea typeface="Calibri" pitchFamily="34" charset="-122"/>
-                <a:cs typeface="Calibri" pitchFamily="34" charset="-120"/>
-              </a:rPr>
-              <a:t> + </a:t>
-            </a:r>
-            <a:r>
-              <a:rPr lang="es-ES" sz="1100" i="1" noProof="0" dirty="0" err="1">
-                <a:solidFill>
-                  <a:srgbClr val="64748B"/>
-                </a:solidFill>
-                <a:latin typeface="Calibri" pitchFamily="34" charset="0"/>
-                <a:ea typeface="Calibri" pitchFamily="34" charset="-122"/>
-                <a:cs typeface="Calibri" pitchFamily="34" charset="-120"/>
-              </a:rPr>
-              <a:t>dbt</a:t>
-            </a:r>
-            <a:r>
-              <a:rPr lang="es-ES" sz="1100" i="1" noProof="0" dirty="0">
-                <a:solidFill>
-                  <a:srgbClr val="64748B"/>
-                </a:solidFill>
-                <a:latin typeface="Calibri" pitchFamily="34" charset="0"/>
-                <a:ea typeface="Calibri" pitchFamily="34" charset="-122"/>
-                <a:cs typeface="Calibri" pitchFamily="34" charset="-120"/>
-              </a:rPr>
-              <a:t> run.</a:t>
-            </a:r>
-            <a:endParaRPr lang="es-ES" sz="1100" noProof="0" dirty="0"/>
-          </a:p>
-        </p:txBody>
-      </p:sp>
-      <p:sp>
-        <p:nvSpPr>
-          <p:cNvPr id="37" name="Text 35"/>
-          <p:cNvSpPr/>
-          <p:nvPr/>
-        </p:nvSpPr>
-        <p:spPr>
-          <a:xfrm>
-            <a:off x="8229600" y="4800600"/>
-            <a:ext cx="822960" cy="228600"/>
-          </a:xfrm>
-          <a:prstGeom prst="rect">
-            <a:avLst/>
-          </a:prstGeom>
-          <a:noFill/>
-          <a:ln/>
-        </p:spPr>
-        <p:txBody>
-          <a:bodyPr wrap="square" lIns="0" tIns="0" rIns="0" bIns="0" rtlCol="0" anchor="ctr"/>
-          <a:lstStyle/>
-          <a:p>
-            <a:pPr marL="0" indent="0" algn="r">
-              <a:buNone/>
-            </a:pPr>
-            <a:r>
-              <a:rPr lang="es-ES" sz="900" noProof="0" dirty="0">
-                <a:solidFill>
-                  <a:srgbClr val="64748B"/>
-                </a:solidFill>
-                <a:latin typeface="Calibri" pitchFamily="34" charset="0"/>
-                <a:ea typeface="Calibri" pitchFamily="34" charset="-122"/>
-                <a:cs typeface="Calibri" pitchFamily="34" charset="-120"/>
-              </a:rPr>
-              <a:t>10 / 15</a:t>
-            </a:r>
-            <a:endParaRPr lang="es-ES" sz="900" noProof="0" dirty="0"/>
-          </a:p>
-        </p:txBody>
-      </p:sp>
-    </p:spTree>
-  </p:cSld>
-  <p:clrMapOvr>
-    <a:masterClrMapping/>
-  </p:clrMapOvr>
-</p:sld>
-</file>
-
-<file path=ppt/slides/slide11.xml><?xml version="1.0" encoding="utf-8"?>
-<p:sld xmlns:a="http://schemas.openxmlformats.org/drawingml/2006/main" xmlns:r="http://schemas.openxmlformats.org/officeDocument/2006/relationships" xmlns:p="http://schemas.openxmlformats.org/presentationml/2006/main">
-  <p:cSld name="Slide 11">
-    <p:bg>
-      <p:bgPr>
-        <a:solidFill>
-          <a:srgbClr val="F8FAFC"/>
-        </a:solidFill>
-        <a:effectLst/>
-      </p:bgPr>
-    </p:bg>
-    <p:spTree>
-      <p:nvGrpSpPr>
-        <p:cNvPr id="1" name=""/>
-        <p:cNvGrpSpPr/>
-        <p:nvPr/>
-      </p:nvGrpSpPr>
-      <p:grpSpPr>
-        <a:xfrm>
-          <a:off x="0" y="0"/>
-          <a:ext cx="0" cy="0"/>
-          <a:chOff x="0" y="0"/>
-          <a:chExt cx="0" cy="0"/>
-        </a:xfrm>
-      </p:grpSpPr>
-      <p:sp>
-        <p:nvSpPr>
-          <p:cNvPr id="2" name="Text 0"/>
-          <p:cNvSpPr/>
-          <p:nvPr/>
-        </p:nvSpPr>
-        <p:spPr>
-          <a:xfrm>
-            <a:off x="457200" y="274320"/>
-            <a:ext cx="8229600" cy="274320"/>
-          </a:xfrm>
-          <a:prstGeom prst="rect">
-            <a:avLst/>
-          </a:prstGeom>
-          <a:noFill/>
-          <a:ln/>
-        </p:spPr>
-        <p:txBody>
-          <a:bodyPr wrap="square" lIns="0" tIns="0" rIns="0" bIns="0" rtlCol="0" anchor="ctr"/>
-          <a:lstStyle/>
-          <a:p>
-            <a:pPr marL="0" indent="0">
-              <a:buNone/>
-            </a:pPr>
-            <a:r>
-              <a:rPr lang="es-ES" sz="1100" b="1" kern="0" spc="400" noProof="0" dirty="0">
-                <a:solidFill>
-                  <a:srgbClr val="F59E0B"/>
-                </a:solidFill>
-                <a:latin typeface="Calibri" pitchFamily="34" charset="0"/>
-                <a:ea typeface="Calibri" pitchFamily="34" charset="-122"/>
-                <a:cs typeface="Calibri" pitchFamily="34" charset="-120"/>
-              </a:rPr>
-              <a:t>10 · AISLAMIENTO DE ENTORNOS</a:t>
-            </a:r>
-            <a:endParaRPr lang="es-ES" sz="1100" noProof="0" dirty="0"/>
-          </a:p>
-        </p:txBody>
-      </p:sp>
-      <p:sp>
-        <p:nvSpPr>
-          <p:cNvPr id="3" name="Text 1"/>
-          <p:cNvSpPr/>
-          <p:nvPr/>
-        </p:nvSpPr>
-        <p:spPr>
-          <a:xfrm>
-            <a:off x="457200" y="502920"/>
-            <a:ext cx="8229600" cy="640080"/>
-          </a:xfrm>
-          <a:prstGeom prst="rect">
-            <a:avLst/>
-          </a:prstGeom>
-          <a:noFill/>
-          <a:ln/>
-        </p:spPr>
-        <p:txBody>
-          <a:bodyPr wrap="square" lIns="0" tIns="0" rIns="0" bIns="0" rtlCol="0" anchor="ctr"/>
-          <a:lstStyle/>
-          <a:p>
-            <a:pPr marL="0" indent="0">
-              <a:buNone/>
-            </a:pPr>
-            <a:r>
-              <a:rPr lang="es-ES" sz="2800" b="1" noProof="0" dirty="0">
-                <a:solidFill>
-                  <a:srgbClr val="1E2761"/>
-                </a:solidFill>
-                <a:latin typeface="Calibri" pitchFamily="34" charset="0"/>
-                <a:ea typeface="Calibri" pitchFamily="34" charset="-122"/>
-                <a:cs typeface="Calibri" pitchFamily="34" charset="-120"/>
-              </a:rPr>
-              <a:t>DevOps · DEV vs PRO</a:t>
-            </a:r>
-            <a:endParaRPr lang="es-ES" sz="2800" noProof="0" dirty="0"/>
-          </a:p>
-        </p:txBody>
-      </p:sp>
-      <p:sp>
-        <p:nvSpPr>
-          <p:cNvPr id="4" name="Shape 2"/>
-          <p:cNvSpPr/>
-          <p:nvPr/>
-        </p:nvSpPr>
-        <p:spPr>
-          <a:xfrm>
-            <a:off x="457200" y="1417320"/>
-            <a:ext cx="4069080" cy="3246120"/>
-          </a:xfrm>
-          <a:prstGeom prst="rect">
-            <a:avLst/>
-          </a:prstGeom>
-          <a:solidFill>
-            <a:srgbClr val="FFFFFF"/>
-          </a:solidFill>
-          <a:ln w="12700">
-            <a:solidFill>
-              <a:srgbClr val="E2E8F0"/>
-            </a:solidFill>
-            <a:prstDash val="solid"/>
-          </a:ln>
-          <a:effectLst>
-            <a:outerShdw blurRad="101600" dist="25400" dir="5400000" algn="bl" rotWithShape="0">
-              <a:srgbClr val="000000">
-                <a:alpha val="12000"/>
-              </a:srgbClr>
-            </a:outerShdw>
-          </a:effectLst>
-        </p:spPr>
-        <p:txBody>
-          <a:bodyPr/>
-          <a:lstStyle/>
-          <a:p>
-            <a:endParaRPr lang="es-ES" noProof="0" dirty="0"/>
-          </a:p>
-        </p:txBody>
-      </p:sp>
-      <p:sp>
-        <p:nvSpPr>
-          <p:cNvPr id="5" name="Shape 3"/>
-          <p:cNvSpPr/>
-          <p:nvPr/>
-        </p:nvSpPr>
-        <p:spPr>
-          <a:xfrm>
-            <a:off x="457200" y="1417320"/>
-            <a:ext cx="4069080" cy="457200"/>
-          </a:xfrm>
-          <a:prstGeom prst="rect">
-            <a:avLst/>
-          </a:prstGeom>
-          <a:solidFill>
-            <a:srgbClr val="64748B"/>
-          </a:solidFill>
-          <a:ln/>
-        </p:spPr>
-        <p:txBody>
-          <a:bodyPr/>
-          <a:lstStyle/>
-          <a:p>
-            <a:endParaRPr lang="es-ES" noProof="0" dirty="0"/>
-          </a:p>
-        </p:txBody>
-      </p:sp>
-      <p:sp>
-        <p:nvSpPr>
-          <p:cNvPr id="6" name="Text 4"/>
-          <p:cNvSpPr/>
-          <p:nvPr/>
-        </p:nvSpPr>
-        <p:spPr>
-          <a:xfrm>
-            <a:off x="457200" y="1417320"/>
-            <a:ext cx="4069080" cy="457200"/>
-          </a:xfrm>
-          <a:prstGeom prst="rect">
-            <a:avLst/>
-          </a:prstGeom>
-          <a:noFill/>
-          <a:ln/>
-        </p:spPr>
-        <p:txBody>
-          <a:bodyPr wrap="square" lIns="0" tIns="0" rIns="0" bIns="0" rtlCol="0" anchor="ctr"/>
-          <a:lstStyle/>
-          <a:p>
-            <a:pPr marL="0" indent="0" algn="ctr">
-              <a:buNone/>
-            </a:pPr>
-            <a:r>
-              <a:rPr lang="es-ES" sz="1400" b="1" noProof="0" dirty="0">
-                <a:solidFill>
-                  <a:srgbClr val="FFFFFF"/>
-                </a:solidFill>
-                <a:latin typeface="Calibri" pitchFamily="34" charset="0"/>
-                <a:ea typeface="Calibri" pitchFamily="34" charset="-122"/>
-                <a:cs typeface="Calibri" pitchFamily="34" charset="-120"/>
-              </a:rPr>
-              <a:t>DEV  (</a:t>
-            </a:r>
-            <a:r>
-              <a:rPr lang="es-ES" sz="1400" b="1" noProof="0" dirty="0" err="1">
-                <a:solidFill>
-                  <a:srgbClr val="FFFFFF"/>
-                </a:solidFill>
-                <a:latin typeface="Calibri" pitchFamily="34" charset="0"/>
-                <a:ea typeface="Calibri" pitchFamily="34" charset="-122"/>
-                <a:cs typeface="Calibri" pitchFamily="34" charset="-120"/>
-              </a:rPr>
-              <a:t>sandbox</a:t>
-            </a:r>
-            <a:r>
-              <a:rPr lang="es-ES" sz="1400" b="1" noProof="0" dirty="0">
-                <a:solidFill>
-                  <a:srgbClr val="FFFFFF"/>
-                </a:solidFill>
-                <a:latin typeface="Calibri" pitchFamily="34" charset="0"/>
-                <a:ea typeface="Calibri" pitchFamily="34" charset="-122"/>
-                <a:cs typeface="Calibri" pitchFamily="34" charset="-120"/>
-              </a:rPr>
-              <a:t> personal)</a:t>
-            </a:r>
-            <a:endParaRPr lang="es-ES" sz="1400" noProof="0" dirty="0"/>
-          </a:p>
-        </p:txBody>
-      </p:sp>
-      <p:sp>
-        <p:nvSpPr>
-          <p:cNvPr id="7" name="Text 5"/>
-          <p:cNvSpPr/>
-          <p:nvPr/>
-        </p:nvSpPr>
-        <p:spPr>
-          <a:xfrm>
-            <a:off x="640080" y="2011680"/>
-            <a:ext cx="3703320" cy="2560320"/>
-          </a:xfrm>
-          <a:prstGeom prst="rect">
-            <a:avLst/>
-          </a:prstGeom>
-          <a:noFill/>
-          <a:ln/>
-        </p:spPr>
-        <p:txBody>
-          <a:bodyPr wrap="square" lIns="0" tIns="0" rIns="0" bIns="0" rtlCol="0" anchor="t"/>
-          <a:lstStyle/>
-          <a:p>
-            <a:pPr marL="0" indent="0">
-              <a:spcAft>
-                <a:spcPts val="600"/>
-              </a:spcAft>
-              <a:buNone/>
-            </a:pPr>
-            <a:r>
-              <a:rPr lang="es-ES" sz="1100" noProof="0" dirty="0" err="1">
-                <a:solidFill>
-                  <a:srgbClr val="64748B"/>
-                </a:solidFill>
-                <a:latin typeface="Calibri" pitchFamily="34" charset="0"/>
-                <a:ea typeface="Calibri" pitchFamily="34" charset="-122"/>
-                <a:cs typeface="Calibri" pitchFamily="34" charset="-120"/>
-              </a:rPr>
-              <a:t>Database</a:t>
-            </a:r>
-            <a:r>
-              <a:rPr lang="es-ES" sz="1100" noProof="0" dirty="0">
-                <a:solidFill>
-                  <a:srgbClr val="64748B"/>
-                </a:solidFill>
-                <a:latin typeface="Calibri" pitchFamily="34" charset="0"/>
-                <a:ea typeface="Calibri" pitchFamily="34" charset="-122"/>
-                <a:cs typeface="Calibri" pitchFamily="34" charset="-120"/>
-              </a:rPr>
-              <a:t>: </a:t>
-            </a:r>
-            <a:r>
-              <a:rPr lang="es-ES" sz="1100" b="1" noProof="0" dirty="0">
-                <a:solidFill>
-                  <a:srgbClr val="1A202C"/>
-                </a:solidFill>
-                <a:latin typeface="Calibri" pitchFamily="34" charset="0"/>
-                <a:ea typeface="Calibri" pitchFamily="34" charset="-122"/>
-                <a:cs typeface="Calibri" pitchFamily="34" charset="-120"/>
-              </a:rPr>
-              <a:t>DEV_CITYBIKE_*</a:t>
-            </a:r>
-            <a:endParaRPr lang="es-ES" sz="1100" noProof="0" dirty="0"/>
-          </a:p>
-          <a:p>
-            <a:pPr marL="0" indent="0">
-              <a:spcAft>
-                <a:spcPts val="600"/>
-              </a:spcAft>
-              <a:buNone/>
-            </a:pPr>
-            <a:r>
-              <a:rPr lang="es-ES" sz="1100" noProof="0" dirty="0" err="1">
-                <a:solidFill>
-                  <a:srgbClr val="64748B"/>
-                </a:solidFill>
-                <a:latin typeface="Calibri" pitchFamily="34" charset="0"/>
-                <a:ea typeface="Calibri" pitchFamily="34" charset="-122"/>
-                <a:cs typeface="Calibri" pitchFamily="34" charset="-120"/>
-              </a:rPr>
-              <a:t>Warehouse</a:t>
-            </a:r>
-            <a:r>
-              <a:rPr lang="es-ES" sz="1100" noProof="0" dirty="0">
-                <a:solidFill>
-                  <a:srgbClr val="64748B"/>
-                </a:solidFill>
-                <a:latin typeface="Calibri" pitchFamily="34" charset="0"/>
-                <a:ea typeface="Calibri" pitchFamily="34" charset="-122"/>
-                <a:cs typeface="Calibri" pitchFamily="34" charset="-120"/>
-              </a:rPr>
-              <a:t>: </a:t>
-            </a:r>
-            <a:r>
-              <a:rPr lang="es-ES" sz="1100" b="1" noProof="0" dirty="0">
-                <a:solidFill>
-                  <a:srgbClr val="1A202C"/>
-                </a:solidFill>
-                <a:latin typeface="Calibri" pitchFamily="34" charset="0"/>
-                <a:ea typeface="Calibri" pitchFamily="34" charset="-122"/>
-                <a:cs typeface="Calibri" pitchFamily="34" charset="-120"/>
-              </a:rPr>
-              <a:t>WH_NYCBIKE_DEV</a:t>
-            </a:r>
-            <a:endParaRPr lang="es-ES" sz="1100" noProof="0" dirty="0"/>
-          </a:p>
-          <a:p>
-            <a:pPr marL="0" indent="0">
-              <a:spcAft>
-                <a:spcPts val="600"/>
-              </a:spcAft>
-              <a:buNone/>
-            </a:pPr>
-            <a:r>
-              <a:rPr lang="es-ES" sz="1100" noProof="0" dirty="0">
-                <a:solidFill>
-                  <a:srgbClr val="64748B"/>
-                </a:solidFill>
-                <a:latin typeface="Calibri" pitchFamily="34" charset="0"/>
-                <a:ea typeface="Calibri" pitchFamily="34" charset="-122"/>
-                <a:cs typeface="Calibri" pitchFamily="34" charset="-120"/>
-              </a:rPr>
-              <a:t>Schema </a:t>
-            </a:r>
-            <a:r>
-              <a:rPr lang="es-ES" sz="1100" noProof="0" dirty="0" err="1">
-                <a:solidFill>
-                  <a:srgbClr val="64748B"/>
-                </a:solidFill>
-                <a:latin typeface="Calibri" pitchFamily="34" charset="0"/>
-                <a:ea typeface="Calibri" pitchFamily="34" charset="-122"/>
-                <a:cs typeface="Calibri" pitchFamily="34" charset="-120"/>
-              </a:rPr>
-              <a:t>prefix</a:t>
-            </a:r>
-            <a:r>
-              <a:rPr lang="es-ES" sz="1100" noProof="0" dirty="0">
-                <a:solidFill>
-                  <a:srgbClr val="64748B"/>
-                </a:solidFill>
-                <a:latin typeface="Calibri" pitchFamily="34" charset="0"/>
-                <a:ea typeface="Calibri" pitchFamily="34" charset="-122"/>
-                <a:cs typeface="Calibri" pitchFamily="34" charset="-120"/>
-              </a:rPr>
-              <a:t>: </a:t>
-            </a:r>
-            <a:r>
-              <a:rPr lang="es-ES" sz="1100" b="1" noProof="0" dirty="0" err="1">
-                <a:solidFill>
-                  <a:srgbClr val="1A202C"/>
-                </a:solidFill>
-                <a:latin typeface="Calibri" pitchFamily="34" charset="0"/>
-                <a:ea typeface="Calibri" pitchFamily="34" charset="-122"/>
-                <a:cs typeface="Calibri" pitchFamily="34" charset="-120"/>
-              </a:rPr>
-              <a:t>dbt</a:t>
-            </a:r>
-            <a:r>
-              <a:rPr lang="es-ES" sz="1100" b="1" noProof="0" dirty="0">
-                <a:solidFill>
-                  <a:srgbClr val="1A202C"/>
-                </a:solidFill>
-                <a:latin typeface="Calibri" pitchFamily="34" charset="0"/>
-                <a:ea typeface="Calibri" pitchFamily="34" charset="-122"/>
-                <a:cs typeface="Calibri" pitchFamily="34" charset="-120"/>
-              </a:rPr>
-              <a:t>_&lt;usuario&gt;_&lt;</a:t>
-            </a:r>
-            <a:r>
-              <a:rPr lang="es-ES" sz="1100" b="1" noProof="0" dirty="0" err="1">
-                <a:solidFill>
-                  <a:srgbClr val="1A202C"/>
-                </a:solidFill>
-                <a:latin typeface="Calibri" pitchFamily="34" charset="0"/>
-                <a:ea typeface="Calibri" pitchFamily="34" charset="-122"/>
-                <a:cs typeface="Calibri" pitchFamily="34" charset="-120"/>
-              </a:rPr>
-              <a:t>custom</a:t>
-            </a:r>
-            <a:r>
-              <a:rPr lang="es-ES" sz="1100" b="1" noProof="0" dirty="0">
-                <a:solidFill>
-                  <a:srgbClr val="1A202C"/>
-                </a:solidFill>
-                <a:latin typeface="Calibri" pitchFamily="34" charset="0"/>
-                <a:ea typeface="Calibri" pitchFamily="34" charset="-122"/>
-                <a:cs typeface="Calibri" pitchFamily="34" charset="-120"/>
-              </a:rPr>
-              <a:t>&gt;</a:t>
-            </a:r>
-            <a:endParaRPr lang="es-ES" sz="1100" noProof="0" dirty="0"/>
-          </a:p>
-          <a:p>
-            <a:pPr marL="0" indent="0">
-              <a:spcAft>
-                <a:spcPts val="600"/>
-              </a:spcAft>
-              <a:buNone/>
-            </a:pPr>
-            <a:r>
-              <a:rPr lang="es-ES" sz="1100" noProof="0" dirty="0">
-                <a:solidFill>
-                  <a:srgbClr val="64748B"/>
-                </a:solidFill>
-                <a:latin typeface="Calibri" pitchFamily="34" charset="0"/>
-                <a:ea typeface="Calibri" pitchFamily="34" charset="-122"/>
-                <a:cs typeface="Calibri" pitchFamily="34" charset="-120"/>
-              </a:rPr>
-              <a:t>Ejemplo: </a:t>
-            </a:r>
-            <a:r>
-              <a:rPr lang="es-ES" sz="900" noProof="0" dirty="0">
-                <a:solidFill>
-                  <a:srgbClr val="1A202C"/>
-                </a:solidFill>
-                <a:latin typeface="Consolas" pitchFamily="34" charset="0"/>
-                <a:ea typeface="Consolas" pitchFamily="34" charset="-122"/>
-                <a:cs typeface="Consolas" pitchFamily="34" charset="-120"/>
-              </a:rPr>
-              <a:t>DEV_CITYBIKE_GOLD.DBT_RLIZARAN_MOBILITY.FCT_TRIPS</a:t>
-            </a:r>
-            <a:endParaRPr lang="es-ES" sz="1100" noProof="0" dirty="0"/>
-          </a:p>
-          <a:p>
-            <a:pPr marL="0" indent="0">
-              <a:spcAft>
-                <a:spcPts val="600"/>
-              </a:spcAft>
-              <a:buNone/>
-            </a:pPr>
-            <a:r>
-              <a:rPr lang="es-ES" sz="1100" i="1" noProof="0" dirty="0">
-                <a:solidFill>
-                  <a:srgbClr val="64748B"/>
-                </a:solidFill>
-                <a:latin typeface="Calibri" pitchFamily="34" charset="0"/>
-                <a:ea typeface="Calibri" pitchFamily="34" charset="-122"/>
-                <a:cs typeface="Calibri" pitchFamily="34" charset="-120"/>
-              </a:rPr>
-              <a:t>Cada </a:t>
-            </a:r>
-            <a:r>
-              <a:rPr lang="es-ES" sz="1100" i="1" noProof="0" dirty="0" err="1">
-                <a:solidFill>
-                  <a:srgbClr val="64748B"/>
-                </a:solidFill>
-                <a:latin typeface="Calibri" pitchFamily="34" charset="0"/>
-                <a:ea typeface="Calibri" pitchFamily="34" charset="-122"/>
-                <a:cs typeface="Calibri" pitchFamily="34" charset="-120"/>
-              </a:rPr>
-              <a:t>dev</a:t>
-            </a:r>
-            <a:r>
-              <a:rPr lang="es-ES" sz="1100" i="1" noProof="0" dirty="0">
-                <a:solidFill>
-                  <a:srgbClr val="64748B"/>
-                </a:solidFill>
-                <a:latin typeface="Calibri" pitchFamily="34" charset="0"/>
-                <a:ea typeface="Calibri" pitchFamily="34" charset="-122"/>
-                <a:cs typeface="Calibri" pitchFamily="34" charset="-120"/>
-              </a:rPr>
-              <a:t> tiene su </a:t>
-            </a:r>
-            <a:r>
-              <a:rPr lang="es-ES" sz="1100" i="1" noProof="0" dirty="0" err="1">
-                <a:solidFill>
-                  <a:srgbClr val="64748B"/>
-                </a:solidFill>
-                <a:latin typeface="Calibri" pitchFamily="34" charset="0"/>
-                <a:ea typeface="Calibri" pitchFamily="34" charset="-122"/>
-                <a:cs typeface="Calibri" pitchFamily="34" charset="-120"/>
-              </a:rPr>
-              <a:t>sandbox</a:t>
-            </a:r>
-            <a:r>
-              <a:rPr lang="es-ES" sz="1100" i="1" noProof="0" dirty="0">
-                <a:solidFill>
-                  <a:srgbClr val="64748B"/>
-                </a:solidFill>
-                <a:latin typeface="Calibri" pitchFamily="34" charset="0"/>
-                <a:ea typeface="Calibri" pitchFamily="34" charset="-122"/>
-                <a:cs typeface="Calibri" pitchFamily="34" charset="-120"/>
-              </a:rPr>
-              <a:t> sin pisar a los demás.</a:t>
-            </a:r>
-            <a:endParaRPr lang="es-ES" sz="1100" noProof="0" dirty="0"/>
-          </a:p>
-        </p:txBody>
-      </p:sp>
-      <p:sp>
-        <p:nvSpPr>
-          <p:cNvPr id="8" name="Shape 6"/>
-          <p:cNvSpPr/>
-          <p:nvPr/>
-        </p:nvSpPr>
-        <p:spPr>
-          <a:xfrm>
-            <a:off x="4617720" y="1417320"/>
-            <a:ext cx="4069080" cy="3246120"/>
-          </a:xfrm>
-          <a:prstGeom prst="rect">
-            <a:avLst/>
-          </a:prstGeom>
-          <a:solidFill>
-            <a:srgbClr val="FFFFFF"/>
-          </a:solidFill>
-          <a:ln w="12700">
-            <a:solidFill>
-              <a:srgbClr val="E2E8F0"/>
-            </a:solidFill>
-            <a:prstDash val="solid"/>
-          </a:ln>
-          <a:effectLst>
-            <a:outerShdw blurRad="101600" dist="25400" dir="5400000" algn="bl" rotWithShape="0">
-              <a:srgbClr val="000000">
-                <a:alpha val="12000"/>
-              </a:srgbClr>
-            </a:outerShdw>
-          </a:effectLst>
-        </p:spPr>
-        <p:txBody>
-          <a:bodyPr/>
-          <a:lstStyle/>
-          <a:p>
-            <a:endParaRPr lang="es-ES" noProof="0" dirty="0"/>
-          </a:p>
-        </p:txBody>
-      </p:sp>
-      <p:sp>
-        <p:nvSpPr>
-          <p:cNvPr id="9" name="Shape 7"/>
-          <p:cNvSpPr/>
-          <p:nvPr/>
-        </p:nvSpPr>
-        <p:spPr>
-          <a:xfrm>
-            <a:off x="4617720" y="1417320"/>
-            <a:ext cx="4069080" cy="457200"/>
-          </a:xfrm>
-          <a:prstGeom prst="rect">
-            <a:avLst/>
-          </a:prstGeom>
-          <a:solidFill>
-            <a:srgbClr val="1E2761"/>
-          </a:solidFill>
-          <a:ln/>
-        </p:spPr>
-        <p:txBody>
-          <a:bodyPr/>
-          <a:lstStyle/>
-          <a:p>
-            <a:endParaRPr lang="es-ES" noProof="0" dirty="0"/>
-          </a:p>
-        </p:txBody>
-      </p:sp>
-      <p:sp>
-        <p:nvSpPr>
-          <p:cNvPr id="10" name="Text 8"/>
-          <p:cNvSpPr/>
-          <p:nvPr/>
-        </p:nvSpPr>
-        <p:spPr>
-          <a:xfrm>
-            <a:off x="4617720" y="1417320"/>
-            <a:ext cx="4069080" cy="457200"/>
-          </a:xfrm>
-          <a:prstGeom prst="rect">
-            <a:avLst/>
-          </a:prstGeom>
-          <a:noFill/>
-          <a:ln/>
-        </p:spPr>
-        <p:txBody>
-          <a:bodyPr wrap="square" lIns="0" tIns="0" rIns="0" bIns="0" rtlCol="0" anchor="ctr"/>
-          <a:lstStyle/>
-          <a:p>
-            <a:pPr marL="0" indent="0" algn="ctr">
-              <a:buNone/>
-            </a:pPr>
-            <a:r>
-              <a:rPr lang="es-ES" sz="1400" b="1" noProof="0" dirty="0">
-                <a:solidFill>
-                  <a:srgbClr val="FFFFFF"/>
-                </a:solidFill>
-                <a:latin typeface="Calibri" pitchFamily="34" charset="0"/>
-                <a:ea typeface="Calibri" pitchFamily="34" charset="-122"/>
-                <a:cs typeface="Calibri" pitchFamily="34" charset="-120"/>
-              </a:rPr>
-              <a:t>PRO  (entorno de producción)</a:t>
-            </a:r>
-            <a:endParaRPr lang="es-ES" sz="1400" noProof="0" dirty="0"/>
-          </a:p>
-        </p:txBody>
-      </p:sp>
-      <p:sp>
-        <p:nvSpPr>
-          <p:cNvPr id="11" name="Text 9"/>
-          <p:cNvSpPr/>
-          <p:nvPr/>
-        </p:nvSpPr>
-        <p:spPr>
-          <a:xfrm>
-            <a:off x="4800600" y="2011680"/>
-            <a:ext cx="3703320" cy="2560320"/>
-          </a:xfrm>
-          <a:prstGeom prst="rect">
-            <a:avLst/>
-          </a:prstGeom>
-          <a:noFill/>
-          <a:ln/>
-        </p:spPr>
-        <p:txBody>
-          <a:bodyPr wrap="square" lIns="0" tIns="0" rIns="0" bIns="0" rtlCol="0" anchor="t"/>
-          <a:lstStyle/>
-          <a:p>
-            <a:pPr marL="0" indent="0">
-              <a:spcAft>
-                <a:spcPts val="600"/>
-              </a:spcAft>
-              <a:buNone/>
-            </a:pPr>
-            <a:r>
-              <a:rPr lang="es-ES" sz="1100" noProof="0" dirty="0" err="1">
-                <a:solidFill>
-                  <a:srgbClr val="64748B"/>
-                </a:solidFill>
-                <a:latin typeface="Calibri" pitchFamily="34" charset="0"/>
-                <a:ea typeface="Calibri" pitchFamily="34" charset="-122"/>
-                <a:cs typeface="Calibri" pitchFamily="34" charset="-120"/>
-              </a:rPr>
-              <a:t>Database</a:t>
-            </a:r>
-            <a:r>
-              <a:rPr lang="es-ES" sz="1100" noProof="0" dirty="0">
-                <a:solidFill>
-                  <a:srgbClr val="64748B"/>
-                </a:solidFill>
-                <a:latin typeface="Calibri" pitchFamily="34" charset="0"/>
-                <a:ea typeface="Calibri" pitchFamily="34" charset="-122"/>
-                <a:cs typeface="Calibri" pitchFamily="34" charset="-120"/>
-              </a:rPr>
-              <a:t>: </a:t>
-            </a:r>
-            <a:r>
-              <a:rPr lang="es-ES" sz="1100" b="1" noProof="0" dirty="0">
-                <a:solidFill>
-                  <a:srgbClr val="1A202C"/>
-                </a:solidFill>
-                <a:latin typeface="Calibri" pitchFamily="34" charset="0"/>
-                <a:ea typeface="Calibri" pitchFamily="34" charset="-122"/>
-                <a:cs typeface="Calibri" pitchFamily="34" charset="-120"/>
-              </a:rPr>
-              <a:t>PRO_CITYBIKE_*</a:t>
-            </a:r>
-            <a:endParaRPr lang="es-ES" sz="1100" noProof="0" dirty="0"/>
-          </a:p>
-          <a:p>
-            <a:pPr marL="0" indent="0">
-              <a:spcAft>
-                <a:spcPts val="600"/>
-              </a:spcAft>
-              <a:buNone/>
-            </a:pPr>
-            <a:r>
-              <a:rPr lang="es-ES" sz="1100" noProof="0" dirty="0" err="1">
-                <a:solidFill>
-                  <a:srgbClr val="64748B"/>
-                </a:solidFill>
-                <a:latin typeface="Calibri" pitchFamily="34" charset="0"/>
-                <a:ea typeface="Calibri" pitchFamily="34" charset="-122"/>
-                <a:cs typeface="Calibri" pitchFamily="34" charset="-120"/>
-              </a:rPr>
-              <a:t>Warehouse</a:t>
-            </a:r>
-            <a:r>
-              <a:rPr lang="es-ES" sz="1100" noProof="0" dirty="0">
-                <a:solidFill>
-                  <a:srgbClr val="64748B"/>
-                </a:solidFill>
-                <a:latin typeface="Calibri" pitchFamily="34" charset="0"/>
-                <a:ea typeface="Calibri" pitchFamily="34" charset="-122"/>
-                <a:cs typeface="Calibri" pitchFamily="34" charset="-120"/>
-              </a:rPr>
-              <a:t>: </a:t>
-            </a:r>
-            <a:r>
-              <a:rPr lang="es-ES" sz="1100" b="1" noProof="0" dirty="0">
-                <a:solidFill>
-                  <a:srgbClr val="1A202C"/>
-                </a:solidFill>
-                <a:latin typeface="Calibri" pitchFamily="34" charset="0"/>
-                <a:ea typeface="Calibri" pitchFamily="34" charset="-122"/>
-                <a:cs typeface="Calibri" pitchFamily="34" charset="-120"/>
-              </a:rPr>
-              <a:t>WH_NYCBIKE_PRO (separado para atribución costes)</a:t>
-            </a:r>
-            <a:endParaRPr lang="es-ES" sz="1100" noProof="0" dirty="0"/>
-          </a:p>
-          <a:p>
-            <a:pPr marL="0" indent="0">
-              <a:spcAft>
-                <a:spcPts val="600"/>
-              </a:spcAft>
-              <a:buNone/>
-            </a:pPr>
-            <a:r>
-              <a:rPr lang="es-ES" sz="1100" noProof="0" dirty="0">
-                <a:solidFill>
-                  <a:srgbClr val="64748B"/>
-                </a:solidFill>
-                <a:latin typeface="Calibri" pitchFamily="34" charset="0"/>
-                <a:ea typeface="Calibri" pitchFamily="34" charset="-122"/>
-                <a:cs typeface="Calibri" pitchFamily="34" charset="-120"/>
-              </a:rPr>
-              <a:t>Schema: </a:t>
-            </a:r>
-            <a:r>
-              <a:rPr lang="es-ES" sz="1100" b="1" noProof="0" dirty="0">
-                <a:solidFill>
-                  <a:srgbClr val="1A202C"/>
-                </a:solidFill>
-                <a:latin typeface="Calibri" pitchFamily="34" charset="0"/>
-                <a:ea typeface="Calibri" pitchFamily="34" charset="-122"/>
-                <a:cs typeface="Calibri" pitchFamily="34" charset="-120"/>
-              </a:rPr>
-              <a:t>directo (sin prefijo)</a:t>
-            </a:r>
-            <a:endParaRPr lang="es-ES" sz="1100" noProof="0" dirty="0"/>
-          </a:p>
-          <a:p>
-            <a:pPr marL="0" indent="0">
-              <a:spcAft>
-                <a:spcPts val="600"/>
-              </a:spcAft>
-              <a:buNone/>
-            </a:pPr>
-            <a:r>
-              <a:rPr lang="es-ES" sz="1100" noProof="0" dirty="0">
-                <a:solidFill>
-                  <a:srgbClr val="64748B"/>
-                </a:solidFill>
-                <a:latin typeface="Calibri" pitchFamily="34" charset="0"/>
-                <a:ea typeface="Calibri" pitchFamily="34" charset="-122"/>
-                <a:cs typeface="Calibri" pitchFamily="34" charset="-120"/>
-              </a:rPr>
-              <a:t>Ejemplo: </a:t>
-            </a:r>
-            <a:r>
-              <a:rPr lang="es-ES" sz="900" noProof="0" dirty="0">
-                <a:solidFill>
-                  <a:srgbClr val="1A202C"/>
-                </a:solidFill>
-                <a:latin typeface="Consolas" pitchFamily="34" charset="0"/>
-                <a:ea typeface="Consolas" pitchFamily="34" charset="-122"/>
-                <a:cs typeface="Consolas" pitchFamily="34" charset="-120"/>
-              </a:rPr>
-              <a:t>PRO_CITYBIKE_GOLD.MOBILITY.FCT_TRIPS</a:t>
-            </a:r>
-            <a:endParaRPr lang="es-ES" sz="1100" noProof="0" dirty="0"/>
-          </a:p>
-          <a:p>
-            <a:pPr marL="0" indent="0">
-              <a:spcAft>
-                <a:spcPts val="600"/>
-              </a:spcAft>
-              <a:buNone/>
-            </a:pPr>
-            <a:r>
-              <a:rPr lang="es-ES" sz="1100" i="1" noProof="0" dirty="0">
-                <a:solidFill>
-                  <a:srgbClr val="64748B"/>
-                </a:solidFill>
-                <a:latin typeface="Calibri" pitchFamily="34" charset="0"/>
-                <a:ea typeface="Calibri" pitchFamily="34" charset="-122"/>
-                <a:cs typeface="Calibri" pitchFamily="34" charset="-120"/>
-              </a:rPr>
-              <a:t>Lo consume Power BI + ML.FORECAST.</a:t>
-            </a:r>
-            <a:endParaRPr lang="es-ES" sz="1100" noProof="0" dirty="0"/>
-          </a:p>
-        </p:txBody>
-      </p:sp>
-      <p:sp>
-        <p:nvSpPr>
-          <p:cNvPr id="12" name="Text 10"/>
-          <p:cNvSpPr/>
-          <p:nvPr/>
-        </p:nvSpPr>
-        <p:spPr>
-          <a:xfrm>
-            <a:off x="8229600" y="4800600"/>
-            <a:ext cx="822960" cy="228600"/>
-          </a:xfrm>
-          <a:prstGeom prst="rect">
-            <a:avLst/>
-          </a:prstGeom>
-          <a:noFill/>
-          <a:ln/>
-        </p:spPr>
-        <p:txBody>
-          <a:bodyPr wrap="square" lIns="0" tIns="0" rIns="0" bIns="0" rtlCol="0" anchor="ctr"/>
-          <a:lstStyle/>
-          <a:p>
-            <a:pPr marL="0" indent="0" algn="r">
-              <a:buNone/>
-            </a:pPr>
-            <a:r>
-              <a:rPr lang="es-ES" sz="900" noProof="0" dirty="0">
-                <a:solidFill>
-                  <a:srgbClr val="64748B"/>
-                </a:solidFill>
-                <a:latin typeface="Calibri" pitchFamily="34" charset="0"/>
-                <a:ea typeface="Calibri" pitchFamily="34" charset="-122"/>
-                <a:cs typeface="Calibri" pitchFamily="34" charset="-120"/>
-              </a:rPr>
-              <a:t>11 / 15</a:t>
-            </a:r>
-            <a:endParaRPr lang="es-ES" sz="900" noProof="0" dirty="0"/>
-          </a:p>
-        </p:txBody>
-      </p:sp>
-    </p:spTree>
-  </p:cSld>
-  <p:clrMapOvr>
-    <a:masterClrMapping/>
-  </p:clrMapOvr>
-</p:sld>
-</file>
-
 <file path=ppt/slides/slide12.xml><?xml version="1.0" encoding="utf-8"?>
 <p:sld xmlns:a="http://schemas.openxmlformats.org/drawingml/2006/main" xmlns:r="http://schemas.openxmlformats.org/officeDocument/2006/relationships" xmlns:p="http://schemas.openxmlformats.org/presentationml/2006/main">
   <p:cSld name="Slide 12">
@@ -5668,7 +2205,7 @@
                 <a:ea typeface="Calibri" pitchFamily="34" charset="-122"/>
                 <a:cs typeface="Calibri" pitchFamily="34" charset="-120"/>
               </a:rPr>
-              <a:t>12 / 15</a:t>
+              <a:t>8 / 11</a:t>
             </a:r>
             <a:endParaRPr lang="es-ES" sz="900" noProof="0" dirty="0"/>
           </a:p>
@@ -5993,7 +2530,7 @@
                 <a:ea typeface="Calibri" pitchFamily="34" charset="-122"/>
                 <a:cs typeface="Calibri" pitchFamily="34" charset="-120"/>
               </a:rPr>
-              <a:t>13 / 15</a:t>
+              <a:t>9 / 11</a:t>
             </a:r>
             <a:endParaRPr lang="es-ES" sz="900" noProof="0" dirty="0"/>
           </a:p>
@@ -6370,7 +2907,7 @@
                 <a:ea typeface="Calibri" pitchFamily="34" charset="-122"/>
                 <a:cs typeface="Calibri" pitchFamily="34" charset="-120"/>
               </a:rPr>
-              <a:t>14 / 15</a:t>
+              <a:t>10 / 11</a:t>
             </a:r>
             <a:endParaRPr lang="es-ES" sz="900" noProof="0" dirty="0"/>
           </a:p>
@@ -6737,7 +3274,7 @@
                 <a:ea typeface="Calibri" pitchFamily="34" charset="-122"/>
                 <a:cs typeface="Calibri" pitchFamily="34" charset="-120"/>
               </a:rPr>
-              <a:t>Gold dividida en 4 dominios (CORE / MOBILITY / CLIMA / ANALYTICS)</a:t>
+              <a:t>Gold dividida en 5 dominios (CORE / MOBILITY / CLIMA / ANALYTICS/IA)</a:t>
             </a:r>
             <a:endParaRPr lang="es-ES" sz="1400" noProof="0" dirty="0"/>
           </a:p>
@@ -7940,1556 +4477,7 @@
                 <a:ea typeface="Calibri" pitchFamily="34" charset="-122"/>
                 <a:cs typeface="Calibri" pitchFamily="34" charset="-120"/>
               </a:rPr>
-              <a:t>2 / 15</a:t>
-            </a:r>
-            <a:endParaRPr lang="es-ES" sz="900" noProof="0" dirty="0"/>
-          </a:p>
-        </p:txBody>
-      </p:sp>
-    </p:spTree>
-  </p:cSld>
-  <p:clrMapOvr>
-    <a:masterClrMapping/>
-  </p:clrMapOvr>
-</p:sld>
-</file>
-
-<file path=ppt/slides/slide3.xml><?xml version="1.0" encoding="utf-8"?>
-<p:sld xmlns:a="http://schemas.openxmlformats.org/drawingml/2006/main" xmlns:r="http://schemas.openxmlformats.org/officeDocument/2006/relationships" xmlns:p="http://schemas.openxmlformats.org/presentationml/2006/main">
-  <p:cSld name="Slide 3">
-    <p:bg>
-      <p:bgPr>
-        <a:solidFill>
-          <a:srgbClr val="F8FAFC"/>
-        </a:solidFill>
-        <a:effectLst/>
-      </p:bgPr>
-    </p:bg>
-    <p:spTree>
-      <p:nvGrpSpPr>
-        <p:cNvPr id="1" name=""/>
-        <p:cNvGrpSpPr/>
-        <p:nvPr/>
-      </p:nvGrpSpPr>
-      <p:grpSpPr>
-        <a:xfrm>
-          <a:off x="0" y="0"/>
-          <a:ext cx="0" cy="0"/>
-          <a:chOff x="0" y="0"/>
-          <a:chExt cx="0" cy="0"/>
-        </a:xfrm>
-      </p:grpSpPr>
-      <p:sp>
-        <p:nvSpPr>
-          <p:cNvPr id="2" name="Text 0"/>
-          <p:cNvSpPr/>
-          <p:nvPr/>
-        </p:nvSpPr>
-        <p:spPr>
-          <a:xfrm>
-            <a:off x="457200" y="274320"/>
-            <a:ext cx="8229600" cy="274320"/>
-          </a:xfrm>
-          <a:prstGeom prst="rect">
-            <a:avLst/>
-          </a:prstGeom>
-          <a:noFill/>
-          <a:ln/>
-        </p:spPr>
-        <p:txBody>
-          <a:bodyPr wrap="square" lIns="0" tIns="0" rIns="0" bIns="0" rtlCol="0" anchor="ctr"/>
-          <a:lstStyle/>
-          <a:p>
-            <a:pPr marL="0" indent="0">
-              <a:buNone/>
-            </a:pPr>
-            <a:r>
-              <a:rPr lang="es-ES" sz="1100" b="1" kern="0" spc="400" noProof="0" dirty="0">
-                <a:solidFill>
-                  <a:srgbClr val="F59E0B"/>
-                </a:solidFill>
-                <a:latin typeface="Calibri" pitchFamily="34" charset="0"/>
-                <a:ea typeface="Calibri" pitchFamily="34" charset="-122"/>
-                <a:cs typeface="Calibri" pitchFamily="34" charset="-120"/>
-              </a:rPr>
-              <a:t>02 · TOOLS</a:t>
-            </a:r>
-            <a:endParaRPr lang="es-ES" sz="1100" noProof="0" dirty="0"/>
-          </a:p>
-        </p:txBody>
-      </p:sp>
-      <p:sp>
-        <p:nvSpPr>
-          <p:cNvPr id="3" name="Text 1"/>
-          <p:cNvSpPr/>
-          <p:nvPr/>
-        </p:nvSpPr>
-        <p:spPr>
-          <a:xfrm>
-            <a:off x="457200" y="502920"/>
-            <a:ext cx="8229600" cy="640080"/>
-          </a:xfrm>
-          <a:prstGeom prst="rect">
-            <a:avLst/>
-          </a:prstGeom>
-          <a:noFill/>
-          <a:ln/>
-        </p:spPr>
-        <p:txBody>
-          <a:bodyPr wrap="square" lIns="0" tIns="0" rIns="0" bIns="0" rtlCol="0" anchor="ctr"/>
-          <a:lstStyle/>
-          <a:p>
-            <a:pPr marL="0" indent="0">
-              <a:buNone/>
-            </a:pPr>
-            <a:r>
-              <a:rPr lang="es-ES" sz="2800" b="1" noProof="0" dirty="0">
-                <a:solidFill>
-                  <a:srgbClr val="1E2761"/>
-                </a:solidFill>
-                <a:latin typeface="Calibri" pitchFamily="34" charset="0"/>
-                <a:ea typeface="Calibri" pitchFamily="34" charset="-122"/>
-                <a:cs typeface="Calibri" pitchFamily="34" charset="-120"/>
-              </a:rPr>
-              <a:t>Stack técnico</a:t>
-            </a:r>
-            <a:endParaRPr lang="es-ES" sz="2800" noProof="0" dirty="0"/>
-          </a:p>
-        </p:txBody>
-      </p:sp>
-      <p:sp>
-        <p:nvSpPr>
-          <p:cNvPr id="4" name="Shape 2"/>
-          <p:cNvSpPr/>
-          <p:nvPr/>
-        </p:nvSpPr>
-        <p:spPr>
-          <a:xfrm>
-            <a:off x="457200" y="1417320"/>
-            <a:ext cx="1627632" cy="2743200"/>
-          </a:xfrm>
-          <a:prstGeom prst="rect">
-            <a:avLst/>
-          </a:prstGeom>
-          <a:solidFill>
-            <a:srgbClr val="FFFFFF"/>
-          </a:solidFill>
-          <a:ln w="12700">
-            <a:solidFill>
-              <a:srgbClr val="E2E8F0"/>
-            </a:solidFill>
-            <a:prstDash val="solid"/>
-          </a:ln>
-          <a:effectLst>
-            <a:outerShdw blurRad="101600" dist="25400" dir="5400000" algn="bl" rotWithShape="0">
-              <a:srgbClr val="000000">
-                <a:alpha val="12000"/>
-              </a:srgbClr>
-            </a:outerShdw>
-          </a:effectLst>
-        </p:spPr>
-        <p:txBody>
-          <a:bodyPr/>
-          <a:lstStyle/>
-          <a:p>
-            <a:endParaRPr lang="es-ES" noProof="0" dirty="0"/>
-          </a:p>
-        </p:txBody>
-      </p:sp>
-      <p:sp>
-        <p:nvSpPr>
-          <p:cNvPr id="5" name="Shape 3"/>
-          <p:cNvSpPr/>
-          <p:nvPr/>
-        </p:nvSpPr>
-        <p:spPr>
-          <a:xfrm>
-            <a:off x="457200" y="1417320"/>
-            <a:ext cx="1627632" cy="457200"/>
-          </a:xfrm>
-          <a:prstGeom prst="rect">
-            <a:avLst/>
-          </a:prstGeom>
-          <a:solidFill>
-            <a:srgbClr val="1E2761"/>
-          </a:solidFill>
-          <a:ln/>
-        </p:spPr>
-        <p:txBody>
-          <a:bodyPr/>
-          <a:lstStyle/>
-          <a:p>
-            <a:endParaRPr lang="es-ES" noProof="0" dirty="0"/>
-          </a:p>
-        </p:txBody>
-      </p:sp>
-      <p:sp>
-        <p:nvSpPr>
-          <p:cNvPr id="6" name="Text 4"/>
-          <p:cNvSpPr/>
-          <p:nvPr/>
-        </p:nvSpPr>
-        <p:spPr>
-          <a:xfrm>
-            <a:off x="457200" y="1417320"/>
-            <a:ext cx="1627632" cy="457200"/>
-          </a:xfrm>
-          <a:prstGeom prst="rect">
-            <a:avLst/>
-          </a:prstGeom>
-          <a:noFill/>
-          <a:ln/>
-        </p:spPr>
-        <p:txBody>
-          <a:bodyPr wrap="square" lIns="0" tIns="0" rIns="0" bIns="0" rtlCol="0" anchor="ctr"/>
-          <a:lstStyle/>
-          <a:p>
-            <a:pPr marL="0" indent="0" algn="ctr">
-              <a:buNone/>
-            </a:pPr>
-            <a:r>
-              <a:rPr lang="es-ES" sz="1400" b="1" noProof="0" dirty="0" err="1">
-                <a:solidFill>
-                  <a:srgbClr val="FFFFFF"/>
-                </a:solidFill>
-                <a:latin typeface="Calibri" pitchFamily="34" charset="0"/>
-                <a:ea typeface="Calibri" pitchFamily="34" charset="-122"/>
-                <a:cs typeface="Calibri" pitchFamily="34" charset="-120"/>
-              </a:rPr>
-              <a:t>Snowflake</a:t>
-            </a:r>
-            <a:endParaRPr lang="es-ES" sz="1400" noProof="0" dirty="0"/>
-          </a:p>
-        </p:txBody>
-      </p:sp>
-      <p:sp>
-        <p:nvSpPr>
-          <p:cNvPr id="7" name="Text 5"/>
-          <p:cNvSpPr/>
-          <p:nvPr/>
-        </p:nvSpPr>
-        <p:spPr>
-          <a:xfrm>
-            <a:off x="566928" y="1965960"/>
-            <a:ext cx="1408176" cy="365760"/>
-          </a:xfrm>
-          <a:prstGeom prst="rect">
-            <a:avLst/>
-          </a:prstGeom>
-          <a:noFill/>
-          <a:ln/>
-        </p:spPr>
-        <p:txBody>
-          <a:bodyPr wrap="square" lIns="0" tIns="0" rIns="0" bIns="0" rtlCol="0" anchor="ctr"/>
-          <a:lstStyle/>
-          <a:p>
-            <a:pPr marL="0" indent="0" algn="ctr">
-              <a:buNone/>
-            </a:pPr>
-            <a:r>
-              <a:rPr lang="es-ES" sz="1000" b="1" i="1" noProof="0" dirty="0" err="1">
-                <a:solidFill>
-                  <a:srgbClr val="F59E0B"/>
-                </a:solidFill>
-                <a:latin typeface="Calibri" pitchFamily="34" charset="0"/>
-                <a:ea typeface="Calibri" pitchFamily="34" charset="-122"/>
-                <a:cs typeface="Calibri" pitchFamily="34" charset="-120"/>
-              </a:rPr>
-              <a:t>Warehouse</a:t>
-            </a:r>
-            <a:r>
-              <a:rPr lang="es-ES" sz="1000" b="1" i="1" noProof="0" dirty="0">
-                <a:solidFill>
-                  <a:srgbClr val="F59E0B"/>
-                </a:solidFill>
-                <a:latin typeface="Calibri" pitchFamily="34" charset="0"/>
-                <a:ea typeface="Calibri" pitchFamily="34" charset="-122"/>
-                <a:cs typeface="Calibri" pitchFamily="34" charset="-120"/>
-              </a:rPr>
-              <a:t> + Streams + </a:t>
-            </a:r>
-            <a:r>
-              <a:rPr lang="es-ES" sz="1000" b="1" i="1" noProof="0" dirty="0" err="1">
-                <a:solidFill>
-                  <a:srgbClr val="F59E0B"/>
-                </a:solidFill>
-                <a:latin typeface="Calibri" pitchFamily="34" charset="0"/>
-                <a:ea typeface="Calibri" pitchFamily="34" charset="-122"/>
-                <a:cs typeface="Calibri" pitchFamily="34" charset="-120"/>
-              </a:rPr>
-              <a:t>Tasks</a:t>
-            </a:r>
-            <a:endParaRPr lang="es-ES" sz="1000" noProof="0" dirty="0"/>
-          </a:p>
-        </p:txBody>
-      </p:sp>
-      <p:sp>
-        <p:nvSpPr>
-          <p:cNvPr id="8" name="Text 6"/>
-          <p:cNvSpPr/>
-          <p:nvPr/>
-        </p:nvSpPr>
-        <p:spPr>
-          <a:xfrm>
-            <a:off x="566928" y="2331720"/>
-            <a:ext cx="1408176" cy="1737360"/>
-          </a:xfrm>
-          <a:prstGeom prst="rect">
-            <a:avLst/>
-          </a:prstGeom>
-          <a:noFill/>
-          <a:ln/>
-        </p:spPr>
-        <p:txBody>
-          <a:bodyPr wrap="square" lIns="0" tIns="0" rIns="0" bIns="0" rtlCol="0" anchor="t"/>
-          <a:lstStyle/>
-          <a:p>
-            <a:pPr marL="0" indent="0" algn="l">
-              <a:buNone/>
-            </a:pPr>
-            <a:r>
-              <a:rPr lang="es-ES" sz="1000" noProof="0" dirty="0">
-                <a:solidFill>
-                  <a:srgbClr val="1A202C"/>
-                </a:solidFill>
-                <a:latin typeface="Calibri" pitchFamily="34" charset="0"/>
-                <a:ea typeface="Calibri" pitchFamily="34" charset="-122"/>
-                <a:cs typeface="Calibri" pitchFamily="34" charset="-120"/>
-              </a:rPr>
-              <a:t>Almacenamiento, COPY INTO desde S3 publico, orquestación </a:t>
-            </a:r>
-            <a:r>
-              <a:rPr lang="es-ES" sz="1000" noProof="0" dirty="0" err="1">
-                <a:solidFill>
-                  <a:srgbClr val="1A202C"/>
-                </a:solidFill>
-                <a:latin typeface="Calibri" pitchFamily="34" charset="0"/>
-                <a:ea typeface="Calibri" pitchFamily="34" charset="-122"/>
-                <a:cs typeface="Calibri" pitchFamily="34" charset="-120"/>
-              </a:rPr>
-              <a:t>bronze</a:t>
-            </a:r>
-            <a:r>
-              <a:rPr lang="es-ES" sz="1000" noProof="0" dirty="0">
-                <a:solidFill>
-                  <a:srgbClr val="1A202C"/>
-                </a:solidFill>
-                <a:latin typeface="Calibri" pitchFamily="34" charset="0"/>
-                <a:ea typeface="Calibri" pitchFamily="34" charset="-122"/>
-                <a:cs typeface="Calibri" pitchFamily="34" charset="-120"/>
-              </a:rPr>
-              <a:t> con DAG de </a:t>
-            </a:r>
-            <a:r>
-              <a:rPr lang="es-ES" sz="1000" noProof="0" dirty="0" err="1">
-                <a:solidFill>
-                  <a:srgbClr val="1A202C"/>
-                </a:solidFill>
-                <a:latin typeface="Calibri" pitchFamily="34" charset="0"/>
-                <a:ea typeface="Calibri" pitchFamily="34" charset="-122"/>
-                <a:cs typeface="Calibri" pitchFamily="34" charset="-120"/>
-              </a:rPr>
-              <a:t>tasks</a:t>
-            </a:r>
-            <a:r>
-              <a:rPr lang="es-ES" sz="1000" noProof="0" dirty="0">
-                <a:solidFill>
-                  <a:srgbClr val="1A202C"/>
-                </a:solidFill>
-                <a:latin typeface="Calibri" pitchFamily="34" charset="0"/>
-                <a:ea typeface="Calibri" pitchFamily="34" charset="-122"/>
-                <a:cs typeface="Calibri" pitchFamily="34" charset="-120"/>
-              </a:rPr>
-              <a:t>.</a:t>
-            </a:r>
-            <a:endParaRPr lang="es-ES" sz="1000" noProof="0" dirty="0"/>
-          </a:p>
-        </p:txBody>
-      </p:sp>
-      <p:sp>
-        <p:nvSpPr>
-          <p:cNvPr id="9" name="Shape 7"/>
-          <p:cNvSpPr/>
-          <p:nvPr/>
-        </p:nvSpPr>
-        <p:spPr>
-          <a:xfrm>
-            <a:off x="2176272" y="1417320"/>
-            <a:ext cx="1627632" cy="2743200"/>
-          </a:xfrm>
-          <a:prstGeom prst="rect">
-            <a:avLst/>
-          </a:prstGeom>
-          <a:solidFill>
-            <a:srgbClr val="FFFFFF"/>
-          </a:solidFill>
-          <a:ln w="12700">
-            <a:solidFill>
-              <a:srgbClr val="E2E8F0"/>
-            </a:solidFill>
-            <a:prstDash val="solid"/>
-          </a:ln>
-          <a:effectLst>
-            <a:outerShdw blurRad="101600" dist="25400" dir="5400000" algn="bl" rotWithShape="0">
-              <a:srgbClr val="000000">
-                <a:alpha val="12000"/>
-              </a:srgbClr>
-            </a:outerShdw>
-          </a:effectLst>
-        </p:spPr>
-        <p:txBody>
-          <a:bodyPr/>
-          <a:lstStyle/>
-          <a:p>
-            <a:endParaRPr lang="es-ES" noProof="0" dirty="0"/>
-          </a:p>
-        </p:txBody>
-      </p:sp>
-      <p:sp>
-        <p:nvSpPr>
-          <p:cNvPr id="10" name="Shape 8"/>
-          <p:cNvSpPr/>
-          <p:nvPr/>
-        </p:nvSpPr>
-        <p:spPr>
-          <a:xfrm>
-            <a:off x="2176272" y="1417320"/>
-            <a:ext cx="1627632" cy="457200"/>
-          </a:xfrm>
-          <a:prstGeom prst="rect">
-            <a:avLst/>
-          </a:prstGeom>
-          <a:solidFill>
-            <a:srgbClr val="1E2761"/>
-          </a:solidFill>
-          <a:ln/>
-        </p:spPr>
-        <p:txBody>
-          <a:bodyPr/>
-          <a:lstStyle/>
-          <a:p>
-            <a:endParaRPr lang="es-ES" noProof="0" dirty="0"/>
-          </a:p>
-        </p:txBody>
-      </p:sp>
-      <p:sp>
-        <p:nvSpPr>
-          <p:cNvPr id="11" name="Text 9"/>
-          <p:cNvSpPr/>
-          <p:nvPr/>
-        </p:nvSpPr>
-        <p:spPr>
-          <a:xfrm>
-            <a:off x="2176272" y="1417320"/>
-            <a:ext cx="1627632" cy="457200"/>
-          </a:xfrm>
-          <a:prstGeom prst="rect">
-            <a:avLst/>
-          </a:prstGeom>
-          <a:noFill/>
-          <a:ln/>
-        </p:spPr>
-        <p:txBody>
-          <a:bodyPr wrap="square" lIns="0" tIns="0" rIns="0" bIns="0" rtlCol="0" anchor="ctr"/>
-          <a:lstStyle/>
-          <a:p>
-            <a:pPr marL="0" indent="0" algn="ctr">
-              <a:buNone/>
-            </a:pPr>
-            <a:r>
-              <a:rPr lang="es-ES" sz="1400" b="1" noProof="0" dirty="0" err="1">
-                <a:solidFill>
-                  <a:srgbClr val="FFFFFF"/>
-                </a:solidFill>
-                <a:latin typeface="Calibri" pitchFamily="34" charset="0"/>
-                <a:ea typeface="Calibri" pitchFamily="34" charset="-122"/>
-                <a:cs typeface="Calibri" pitchFamily="34" charset="-120"/>
-              </a:rPr>
-              <a:t>dbt</a:t>
-            </a:r>
-            <a:r>
-              <a:rPr lang="es-ES" sz="1400" b="1" noProof="0" dirty="0">
-                <a:solidFill>
-                  <a:srgbClr val="FFFFFF"/>
-                </a:solidFill>
-                <a:latin typeface="Calibri" pitchFamily="34" charset="0"/>
-                <a:ea typeface="Calibri" pitchFamily="34" charset="-122"/>
-                <a:cs typeface="Calibri" pitchFamily="34" charset="-120"/>
-              </a:rPr>
-              <a:t> 1.12</a:t>
-            </a:r>
-            <a:endParaRPr lang="es-ES" sz="1400" noProof="0" dirty="0"/>
-          </a:p>
-        </p:txBody>
-      </p:sp>
-      <p:sp>
-        <p:nvSpPr>
-          <p:cNvPr id="12" name="Text 10"/>
-          <p:cNvSpPr/>
-          <p:nvPr/>
-        </p:nvSpPr>
-        <p:spPr>
-          <a:xfrm>
-            <a:off x="2286000" y="1965960"/>
-            <a:ext cx="1408176" cy="365760"/>
-          </a:xfrm>
-          <a:prstGeom prst="rect">
-            <a:avLst/>
-          </a:prstGeom>
-          <a:noFill/>
-          <a:ln/>
-        </p:spPr>
-        <p:txBody>
-          <a:bodyPr wrap="square" lIns="0" tIns="0" rIns="0" bIns="0" rtlCol="0" anchor="ctr"/>
-          <a:lstStyle/>
-          <a:p>
-            <a:pPr marL="0" indent="0" algn="ctr">
-              <a:buNone/>
-            </a:pPr>
-            <a:r>
-              <a:rPr lang="es-ES" sz="1000" b="1" i="1" noProof="0" dirty="0">
-                <a:solidFill>
-                  <a:srgbClr val="F59E0B"/>
-                </a:solidFill>
-                <a:latin typeface="Calibri" pitchFamily="34" charset="0"/>
-                <a:ea typeface="Calibri" pitchFamily="34" charset="-122"/>
-                <a:cs typeface="Calibri" pitchFamily="34" charset="-120"/>
-              </a:rPr>
-              <a:t>Transformaciones + </a:t>
-            </a:r>
-            <a:r>
-              <a:rPr lang="es-ES" sz="1000" b="1" i="1" noProof="0" dirty="0" err="1">
-                <a:solidFill>
-                  <a:srgbClr val="F59E0B"/>
-                </a:solidFill>
-                <a:latin typeface="Calibri" pitchFamily="34" charset="0"/>
-                <a:ea typeface="Calibri" pitchFamily="34" charset="-122"/>
-                <a:cs typeface="Calibri" pitchFamily="34" charset="-120"/>
-              </a:rPr>
-              <a:t>Tests</a:t>
-            </a:r>
-            <a:endParaRPr lang="es-ES" sz="1000" noProof="0" dirty="0"/>
-          </a:p>
-        </p:txBody>
-      </p:sp>
-      <p:sp>
-        <p:nvSpPr>
-          <p:cNvPr id="13" name="Text 11"/>
-          <p:cNvSpPr/>
-          <p:nvPr/>
-        </p:nvSpPr>
-        <p:spPr>
-          <a:xfrm>
-            <a:off x="2286000" y="2331720"/>
-            <a:ext cx="1408176" cy="1737360"/>
-          </a:xfrm>
-          <a:prstGeom prst="rect">
-            <a:avLst/>
-          </a:prstGeom>
-          <a:noFill/>
-          <a:ln/>
-        </p:spPr>
-        <p:txBody>
-          <a:bodyPr wrap="square" lIns="0" tIns="0" rIns="0" bIns="0" rtlCol="0" anchor="t"/>
-          <a:lstStyle/>
-          <a:p>
-            <a:pPr marL="0" indent="0" algn="l">
-              <a:buNone/>
-            </a:pPr>
-            <a:r>
-              <a:rPr lang="es-ES" sz="1000" noProof="0" dirty="0">
-                <a:solidFill>
-                  <a:srgbClr val="1A202C"/>
-                </a:solidFill>
-                <a:latin typeface="Calibri" pitchFamily="34" charset="0"/>
-                <a:ea typeface="Calibri" pitchFamily="34" charset="-122"/>
-                <a:cs typeface="Calibri" pitchFamily="34" charset="-120"/>
-              </a:rPr>
-              <a:t>Modelos </a:t>
-            </a:r>
-            <a:r>
-              <a:rPr lang="es-ES" sz="1000" noProof="0" dirty="0" err="1">
-                <a:solidFill>
-                  <a:srgbClr val="1A202C"/>
-                </a:solidFill>
-                <a:latin typeface="Calibri" pitchFamily="34" charset="0"/>
-                <a:ea typeface="Calibri" pitchFamily="34" charset="-122"/>
-                <a:cs typeface="Calibri" pitchFamily="34" charset="-120"/>
-              </a:rPr>
-              <a:t>staging</a:t>
-            </a:r>
-            <a:r>
-              <a:rPr lang="es-ES" sz="1000" noProof="0" dirty="0">
-                <a:solidFill>
-                  <a:srgbClr val="1A202C"/>
-                </a:solidFill>
-                <a:latin typeface="Calibri" pitchFamily="34" charset="0"/>
-                <a:ea typeface="Calibri" pitchFamily="34" charset="-122"/>
-                <a:cs typeface="Calibri" pitchFamily="34" charset="-120"/>
-              </a:rPr>
-              <a:t>/</a:t>
-            </a:r>
-            <a:r>
-              <a:rPr lang="es-ES" sz="1000" noProof="0" dirty="0" err="1">
-                <a:solidFill>
-                  <a:srgbClr val="1A202C"/>
-                </a:solidFill>
-                <a:latin typeface="Calibri" pitchFamily="34" charset="0"/>
-                <a:ea typeface="Calibri" pitchFamily="34" charset="-122"/>
-                <a:cs typeface="Calibri" pitchFamily="34" charset="-120"/>
-              </a:rPr>
-              <a:t>silver</a:t>
-            </a:r>
-            <a:r>
-              <a:rPr lang="es-ES" sz="1000" noProof="0" dirty="0">
-                <a:solidFill>
-                  <a:srgbClr val="1A202C"/>
-                </a:solidFill>
-                <a:latin typeface="Calibri" pitchFamily="34" charset="0"/>
-                <a:ea typeface="Calibri" pitchFamily="34" charset="-122"/>
-                <a:cs typeface="Calibri" pitchFamily="34" charset="-120"/>
-              </a:rPr>
-              <a:t>/</a:t>
-            </a:r>
-            <a:r>
-              <a:rPr lang="es-ES" sz="1000" noProof="0" dirty="0" err="1">
-                <a:solidFill>
-                  <a:srgbClr val="1A202C"/>
-                </a:solidFill>
-                <a:latin typeface="Calibri" pitchFamily="34" charset="0"/>
-                <a:ea typeface="Calibri" pitchFamily="34" charset="-122"/>
-                <a:cs typeface="Calibri" pitchFamily="34" charset="-120"/>
-              </a:rPr>
-              <a:t>gold</a:t>
-            </a:r>
-            <a:r>
-              <a:rPr lang="es-ES" sz="1000" noProof="0" dirty="0">
-                <a:solidFill>
-                  <a:srgbClr val="1A202C"/>
-                </a:solidFill>
-                <a:latin typeface="Calibri" pitchFamily="34" charset="0"/>
-                <a:ea typeface="Calibri" pitchFamily="34" charset="-122"/>
-                <a:cs typeface="Calibri" pitchFamily="34" charset="-120"/>
-              </a:rPr>
-              <a:t>/IA, </a:t>
-            </a:r>
-            <a:r>
-              <a:rPr lang="es-ES" sz="1000" noProof="0" dirty="0" err="1">
-                <a:solidFill>
-                  <a:srgbClr val="1A202C"/>
-                </a:solidFill>
-                <a:latin typeface="Calibri" pitchFamily="34" charset="0"/>
-                <a:ea typeface="Calibri" pitchFamily="34" charset="-122"/>
-                <a:cs typeface="Calibri" pitchFamily="34" charset="-120"/>
-              </a:rPr>
-              <a:t>snapshot</a:t>
-            </a:r>
-            <a:r>
-              <a:rPr lang="es-ES" sz="1000" noProof="0" dirty="0">
-                <a:solidFill>
-                  <a:srgbClr val="1A202C"/>
-                </a:solidFill>
-                <a:latin typeface="Calibri" pitchFamily="34" charset="0"/>
-                <a:ea typeface="Calibri" pitchFamily="34" charset="-122"/>
-                <a:cs typeface="Calibri" pitchFamily="34" charset="-120"/>
-              </a:rPr>
-              <a:t> SCD2 NOAA, </a:t>
-            </a:r>
-            <a:r>
-              <a:rPr lang="es-ES" sz="1000" noProof="0" dirty="0" err="1">
-                <a:solidFill>
-                  <a:srgbClr val="1A202C"/>
-                </a:solidFill>
-                <a:latin typeface="Calibri" pitchFamily="34" charset="0"/>
-                <a:ea typeface="Calibri" pitchFamily="34" charset="-122"/>
-                <a:cs typeface="Calibri" pitchFamily="34" charset="-120"/>
-              </a:rPr>
-              <a:t>contracts</a:t>
-            </a:r>
-            <a:r>
-              <a:rPr lang="es-ES" sz="1000" noProof="0" dirty="0">
-                <a:solidFill>
-                  <a:srgbClr val="1A202C"/>
-                </a:solidFill>
-                <a:latin typeface="Calibri" pitchFamily="34" charset="0"/>
-                <a:ea typeface="Calibri" pitchFamily="34" charset="-122"/>
-                <a:cs typeface="Calibri" pitchFamily="34" charset="-120"/>
-              </a:rPr>
-              <a:t>, </a:t>
-            </a:r>
-            <a:r>
-              <a:rPr lang="es-ES" sz="1000" noProof="0" dirty="0" err="1">
-                <a:solidFill>
-                  <a:srgbClr val="1A202C"/>
-                </a:solidFill>
-                <a:latin typeface="Calibri" pitchFamily="34" charset="0"/>
-                <a:ea typeface="Calibri" pitchFamily="34" charset="-122"/>
-                <a:cs typeface="Calibri" pitchFamily="34" charset="-120"/>
-              </a:rPr>
-              <a:t>unit</a:t>
-            </a:r>
-            <a:r>
-              <a:rPr lang="es-ES" sz="1000" noProof="0" dirty="0">
-                <a:solidFill>
-                  <a:srgbClr val="1A202C"/>
-                </a:solidFill>
-                <a:latin typeface="Calibri" pitchFamily="34" charset="0"/>
-                <a:ea typeface="Calibri" pitchFamily="34" charset="-122"/>
-                <a:cs typeface="Calibri" pitchFamily="34" charset="-120"/>
-              </a:rPr>
-              <a:t> + singular </a:t>
-            </a:r>
-            <a:r>
-              <a:rPr lang="es-ES" sz="1000" noProof="0" dirty="0" err="1">
-                <a:solidFill>
-                  <a:srgbClr val="1A202C"/>
-                </a:solidFill>
-                <a:latin typeface="Calibri" pitchFamily="34" charset="0"/>
-                <a:ea typeface="Calibri" pitchFamily="34" charset="-122"/>
-                <a:cs typeface="Calibri" pitchFamily="34" charset="-120"/>
-              </a:rPr>
-              <a:t>tests</a:t>
-            </a:r>
-            <a:r>
-              <a:rPr lang="es-ES" sz="1000" noProof="0" dirty="0">
-                <a:solidFill>
-                  <a:srgbClr val="1A202C"/>
-                </a:solidFill>
-                <a:latin typeface="Calibri" pitchFamily="34" charset="0"/>
-                <a:ea typeface="Calibri" pitchFamily="34" charset="-122"/>
-                <a:cs typeface="Calibri" pitchFamily="34" charset="-120"/>
-              </a:rPr>
-              <a:t>.</a:t>
-            </a:r>
-            <a:endParaRPr lang="es-ES" sz="1000" noProof="0" dirty="0"/>
-          </a:p>
-        </p:txBody>
-      </p:sp>
-      <p:sp>
-        <p:nvSpPr>
-          <p:cNvPr id="14" name="Shape 12"/>
-          <p:cNvSpPr/>
-          <p:nvPr/>
-        </p:nvSpPr>
-        <p:spPr>
-          <a:xfrm>
-            <a:off x="3895344" y="1417320"/>
-            <a:ext cx="1627632" cy="2743200"/>
-          </a:xfrm>
-          <a:prstGeom prst="rect">
-            <a:avLst/>
-          </a:prstGeom>
-          <a:solidFill>
-            <a:srgbClr val="FFFFFF"/>
-          </a:solidFill>
-          <a:ln w="12700">
-            <a:solidFill>
-              <a:srgbClr val="E2E8F0"/>
-            </a:solidFill>
-            <a:prstDash val="solid"/>
-          </a:ln>
-          <a:effectLst>
-            <a:outerShdw blurRad="101600" dist="25400" dir="5400000" algn="bl" rotWithShape="0">
-              <a:srgbClr val="000000">
-                <a:alpha val="12000"/>
-              </a:srgbClr>
-            </a:outerShdw>
-          </a:effectLst>
-        </p:spPr>
-        <p:txBody>
-          <a:bodyPr/>
-          <a:lstStyle/>
-          <a:p>
-            <a:endParaRPr lang="es-ES" noProof="0" dirty="0"/>
-          </a:p>
-        </p:txBody>
-      </p:sp>
-      <p:sp>
-        <p:nvSpPr>
-          <p:cNvPr id="15" name="Shape 13"/>
-          <p:cNvSpPr/>
-          <p:nvPr/>
-        </p:nvSpPr>
-        <p:spPr>
-          <a:xfrm>
-            <a:off x="3895344" y="1417320"/>
-            <a:ext cx="1627632" cy="457200"/>
-          </a:xfrm>
-          <a:prstGeom prst="rect">
-            <a:avLst/>
-          </a:prstGeom>
-          <a:solidFill>
-            <a:srgbClr val="1E2761"/>
-          </a:solidFill>
-          <a:ln/>
-        </p:spPr>
-        <p:txBody>
-          <a:bodyPr/>
-          <a:lstStyle/>
-          <a:p>
-            <a:endParaRPr lang="es-ES" noProof="0" dirty="0"/>
-          </a:p>
-        </p:txBody>
-      </p:sp>
-      <p:sp>
-        <p:nvSpPr>
-          <p:cNvPr id="16" name="Text 14"/>
-          <p:cNvSpPr/>
-          <p:nvPr/>
-        </p:nvSpPr>
-        <p:spPr>
-          <a:xfrm>
-            <a:off x="3895344" y="1417320"/>
-            <a:ext cx="1627632" cy="457200"/>
-          </a:xfrm>
-          <a:prstGeom prst="rect">
-            <a:avLst/>
-          </a:prstGeom>
-          <a:noFill/>
-          <a:ln/>
-        </p:spPr>
-        <p:txBody>
-          <a:bodyPr wrap="square" lIns="0" tIns="0" rIns="0" bIns="0" rtlCol="0" anchor="ctr"/>
-          <a:lstStyle/>
-          <a:p>
-            <a:pPr marL="0" indent="0" algn="ctr">
-              <a:buNone/>
-            </a:pPr>
-            <a:r>
-              <a:rPr lang="es-ES" sz="1400" b="1" noProof="0" dirty="0">
-                <a:solidFill>
-                  <a:srgbClr val="FFFFFF"/>
-                </a:solidFill>
-                <a:latin typeface="Calibri" pitchFamily="34" charset="0"/>
-                <a:ea typeface="Calibri" pitchFamily="34" charset="-122"/>
-                <a:cs typeface="Calibri" pitchFamily="34" charset="-120"/>
-              </a:rPr>
-              <a:t>Python</a:t>
-            </a:r>
-            <a:endParaRPr lang="es-ES" sz="1400" noProof="0" dirty="0"/>
-          </a:p>
-        </p:txBody>
-      </p:sp>
-      <p:sp>
-        <p:nvSpPr>
-          <p:cNvPr id="17" name="Text 15"/>
-          <p:cNvSpPr/>
-          <p:nvPr/>
-        </p:nvSpPr>
-        <p:spPr>
-          <a:xfrm>
-            <a:off x="4005072" y="1965960"/>
-            <a:ext cx="1408176" cy="365760"/>
-          </a:xfrm>
-          <a:prstGeom prst="rect">
-            <a:avLst/>
-          </a:prstGeom>
-          <a:noFill/>
-          <a:ln/>
-        </p:spPr>
-        <p:txBody>
-          <a:bodyPr wrap="square" lIns="0" tIns="0" rIns="0" bIns="0" rtlCol="0" anchor="ctr"/>
-          <a:lstStyle/>
-          <a:p>
-            <a:pPr marL="0" indent="0" algn="ctr">
-              <a:buNone/>
-            </a:pPr>
-            <a:r>
-              <a:rPr lang="es-ES" sz="1000" b="1" i="1" noProof="0" dirty="0" err="1">
-                <a:solidFill>
-                  <a:srgbClr val="F59E0B"/>
-                </a:solidFill>
-                <a:latin typeface="Calibri" pitchFamily="34" charset="0"/>
-                <a:ea typeface="Calibri" pitchFamily="34" charset="-122"/>
-                <a:cs typeface="Calibri" pitchFamily="34" charset="-120"/>
-              </a:rPr>
-              <a:t>Ingestor</a:t>
-            </a:r>
-            <a:r>
-              <a:rPr lang="es-ES" sz="1000" b="1" i="1" noProof="0" dirty="0">
-                <a:solidFill>
-                  <a:srgbClr val="F59E0B"/>
-                </a:solidFill>
-                <a:latin typeface="Calibri" pitchFamily="34" charset="0"/>
-                <a:ea typeface="Calibri" pitchFamily="34" charset="-122"/>
-                <a:cs typeface="Calibri" pitchFamily="34" charset="-120"/>
-              </a:rPr>
-              <a:t> incremental</a:t>
-            </a:r>
-            <a:endParaRPr lang="es-ES" sz="1000" noProof="0" dirty="0"/>
-          </a:p>
-        </p:txBody>
-      </p:sp>
-      <p:sp>
-        <p:nvSpPr>
-          <p:cNvPr id="18" name="Text 16"/>
-          <p:cNvSpPr/>
-          <p:nvPr/>
-        </p:nvSpPr>
-        <p:spPr>
-          <a:xfrm>
-            <a:off x="4005072" y="2331720"/>
-            <a:ext cx="1408176" cy="1737360"/>
-          </a:xfrm>
-          <a:prstGeom prst="rect">
-            <a:avLst/>
-          </a:prstGeom>
-          <a:noFill/>
-          <a:ln/>
-        </p:spPr>
-        <p:txBody>
-          <a:bodyPr wrap="square" lIns="0" tIns="0" rIns="0" bIns="0" rtlCol="0" anchor="t"/>
-          <a:lstStyle/>
-          <a:p>
-            <a:pPr marL="0" indent="0" algn="l">
-              <a:buNone/>
-            </a:pPr>
-            <a:r>
-              <a:rPr lang="es-ES" sz="1000" noProof="0" dirty="0">
-                <a:solidFill>
-                  <a:srgbClr val="1A202C"/>
-                </a:solidFill>
-                <a:latin typeface="Calibri" pitchFamily="34" charset="0"/>
-                <a:ea typeface="Calibri" pitchFamily="34" charset="-122"/>
-                <a:cs typeface="Calibri" pitchFamily="34" charset="-120"/>
-              </a:rPr>
-              <a:t>extract_jc_to_stage.py: descarga </a:t>
-            </a:r>
-            <a:r>
-              <a:rPr lang="es-ES" sz="1000" noProof="0" dirty="0" err="1">
-                <a:solidFill>
-                  <a:srgbClr val="1A202C"/>
-                </a:solidFill>
-                <a:latin typeface="Calibri" pitchFamily="34" charset="0"/>
-                <a:ea typeface="Calibri" pitchFamily="34" charset="-122"/>
-                <a:cs typeface="Calibri" pitchFamily="34" charset="-120"/>
-              </a:rPr>
-              <a:t>zips</a:t>
-            </a:r>
-            <a:r>
-              <a:rPr lang="es-ES" sz="1000" noProof="0" dirty="0">
-                <a:solidFill>
-                  <a:srgbClr val="1A202C"/>
-                </a:solidFill>
-                <a:latin typeface="Calibri" pitchFamily="34" charset="0"/>
-                <a:ea typeface="Calibri" pitchFamily="34" charset="-122"/>
-                <a:cs typeface="Calibri" pitchFamily="34" charset="-120"/>
-              </a:rPr>
-              <a:t> Citi </a:t>
-            </a:r>
-            <a:r>
-              <a:rPr lang="es-ES" sz="1000" noProof="0" dirty="0" err="1">
-                <a:solidFill>
-                  <a:srgbClr val="1A202C"/>
-                </a:solidFill>
-                <a:latin typeface="Calibri" pitchFamily="34" charset="0"/>
-                <a:ea typeface="Calibri" pitchFamily="34" charset="-122"/>
-                <a:cs typeface="Calibri" pitchFamily="34" charset="-120"/>
-              </a:rPr>
-              <a:t>Bike</a:t>
-            </a:r>
-            <a:r>
-              <a:rPr lang="es-ES" sz="1000" noProof="0" dirty="0">
-                <a:solidFill>
-                  <a:srgbClr val="1A202C"/>
-                </a:solidFill>
-                <a:latin typeface="Calibri" pitchFamily="34" charset="0"/>
-                <a:ea typeface="Calibri" pitchFamily="34" charset="-122"/>
-                <a:cs typeface="Calibri" pitchFamily="34" charset="-120"/>
-              </a:rPr>
-              <a:t> y PUT al </a:t>
-            </a:r>
-            <a:r>
-              <a:rPr lang="es-ES" sz="1000" noProof="0" dirty="0" err="1">
-                <a:solidFill>
-                  <a:srgbClr val="1A202C"/>
-                </a:solidFill>
-                <a:latin typeface="Calibri" pitchFamily="34" charset="0"/>
-                <a:ea typeface="Calibri" pitchFamily="34" charset="-122"/>
-                <a:cs typeface="Calibri" pitchFamily="34" charset="-120"/>
-              </a:rPr>
-              <a:t>stage</a:t>
-            </a:r>
-            <a:r>
-              <a:rPr lang="es-ES" sz="1000" noProof="0" dirty="0">
-                <a:solidFill>
-                  <a:srgbClr val="1A202C"/>
-                </a:solidFill>
-                <a:latin typeface="Calibri" pitchFamily="34" charset="0"/>
-                <a:ea typeface="Calibri" pitchFamily="34" charset="-122"/>
-                <a:cs typeface="Calibri" pitchFamily="34" charset="-120"/>
-              </a:rPr>
-              <a:t> interno (NY 202604+, JC siempre).</a:t>
-            </a:r>
-            <a:endParaRPr lang="es-ES" sz="1000" noProof="0" dirty="0"/>
-          </a:p>
-        </p:txBody>
-      </p:sp>
-      <p:sp>
-        <p:nvSpPr>
-          <p:cNvPr id="19" name="Shape 17"/>
-          <p:cNvSpPr/>
-          <p:nvPr/>
-        </p:nvSpPr>
-        <p:spPr>
-          <a:xfrm>
-            <a:off x="5614416" y="1417320"/>
-            <a:ext cx="1627632" cy="2743200"/>
-          </a:xfrm>
-          <a:prstGeom prst="rect">
-            <a:avLst/>
-          </a:prstGeom>
-          <a:solidFill>
-            <a:srgbClr val="FFFFFF"/>
-          </a:solidFill>
-          <a:ln w="12700">
-            <a:solidFill>
-              <a:srgbClr val="E2E8F0"/>
-            </a:solidFill>
-            <a:prstDash val="solid"/>
-          </a:ln>
-          <a:effectLst>
-            <a:outerShdw blurRad="101600" dist="25400" dir="5400000" algn="bl" rotWithShape="0">
-              <a:srgbClr val="000000">
-                <a:alpha val="12000"/>
-              </a:srgbClr>
-            </a:outerShdw>
-          </a:effectLst>
-        </p:spPr>
-        <p:txBody>
-          <a:bodyPr/>
-          <a:lstStyle/>
-          <a:p>
-            <a:endParaRPr lang="es-ES" noProof="0" dirty="0"/>
-          </a:p>
-        </p:txBody>
-      </p:sp>
-      <p:sp>
-        <p:nvSpPr>
-          <p:cNvPr id="20" name="Shape 18"/>
-          <p:cNvSpPr/>
-          <p:nvPr/>
-        </p:nvSpPr>
-        <p:spPr>
-          <a:xfrm>
-            <a:off x="5614416" y="1417320"/>
-            <a:ext cx="1627632" cy="457200"/>
-          </a:xfrm>
-          <a:prstGeom prst="rect">
-            <a:avLst/>
-          </a:prstGeom>
-          <a:solidFill>
-            <a:srgbClr val="1E2761"/>
-          </a:solidFill>
-          <a:ln/>
-        </p:spPr>
-        <p:txBody>
-          <a:bodyPr/>
-          <a:lstStyle/>
-          <a:p>
-            <a:endParaRPr lang="es-ES" noProof="0" dirty="0"/>
-          </a:p>
-        </p:txBody>
-      </p:sp>
-      <p:sp>
-        <p:nvSpPr>
-          <p:cNvPr id="21" name="Text 19"/>
-          <p:cNvSpPr/>
-          <p:nvPr/>
-        </p:nvSpPr>
-        <p:spPr>
-          <a:xfrm>
-            <a:off x="5614416" y="1417320"/>
-            <a:ext cx="1627632" cy="457200"/>
-          </a:xfrm>
-          <a:prstGeom prst="rect">
-            <a:avLst/>
-          </a:prstGeom>
-          <a:noFill/>
-          <a:ln/>
-        </p:spPr>
-        <p:txBody>
-          <a:bodyPr wrap="square" lIns="0" tIns="0" rIns="0" bIns="0" rtlCol="0" anchor="ctr"/>
-          <a:lstStyle/>
-          <a:p>
-            <a:pPr marL="0" indent="0" algn="ctr">
-              <a:buNone/>
-            </a:pPr>
-            <a:r>
-              <a:rPr lang="es-ES" sz="1400" b="1" noProof="0" dirty="0" err="1">
-                <a:solidFill>
-                  <a:srgbClr val="FFFFFF"/>
-                </a:solidFill>
-                <a:latin typeface="Calibri" pitchFamily="34" charset="0"/>
-                <a:ea typeface="Calibri" pitchFamily="34" charset="-122"/>
-                <a:cs typeface="Calibri" pitchFamily="34" charset="-120"/>
-              </a:rPr>
-              <a:t>Cortex</a:t>
-            </a:r>
-            <a:r>
-              <a:rPr lang="es-ES" sz="1400" b="1" noProof="0" dirty="0">
-                <a:solidFill>
-                  <a:srgbClr val="FFFFFF"/>
-                </a:solidFill>
-                <a:latin typeface="Calibri" pitchFamily="34" charset="0"/>
-                <a:ea typeface="Calibri" pitchFamily="34" charset="-122"/>
-                <a:cs typeface="Calibri" pitchFamily="34" charset="-120"/>
-              </a:rPr>
-              <a:t> ML</a:t>
-            </a:r>
-            <a:endParaRPr lang="es-ES" sz="1400" noProof="0" dirty="0"/>
-          </a:p>
-        </p:txBody>
-      </p:sp>
-      <p:sp>
-        <p:nvSpPr>
-          <p:cNvPr id="22" name="Text 20"/>
-          <p:cNvSpPr/>
-          <p:nvPr/>
-        </p:nvSpPr>
-        <p:spPr>
-          <a:xfrm>
-            <a:off x="5724144" y="1965960"/>
-            <a:ext cx="1408176" cy="365760"/>
-          </a:xfrm>
-          <a:prstGeom prst="rect">
-            <a:avLst/>
-          </a:prstGeom>
-          <a:noFill/>
-          <a:ln/>
-        </p:spPr>
-        <p:txBody>
-          <a:bodyPr wrap="square" lIns="0" tIns="0" rIns="0" bIns="0" rtlCol="0" anchor="ctr"/>
-          <a:lstStyle/>
-          <a:p>
-            <a:pPr marL="0" indent="0" algn="ctr">
-              <a:buNone/>
-            </a:pPr>
-            <a:r>
-              <a:rPr lang="es-ES" sz="1000" b="1" i="1" noProof="0" dirty="0" err="1">
-                <a:solidFill>
-                  <a:srgbClr val="F59E0B"/>
-                </a:solidFill>
-                <a:latin typeface="Calibri" pitchFamily="34" charset="0"/>
-                <a:ea typeface="Calibri" pitchFamily="34" charset="-122"/>
-                <a:cs typeface="Calibri" pitchFamily="34" charset="-120"/>
-              </a:rPr>
-              <a:t>Forecast</a:t>
-            </a:r>
-            <a:r>
-              <a:rPr lang="es-ES" sz="1000" b="1" i="1" noProof="0" dirty="0">
-                <a:solidFill>
-                  <a:srgbClr val="F59E0B"/>
-                </a:solidFill>
-                <a:latin typeface="Calibri" pitchFamily="34" charset="0"/>
-                <a:ea typeface="Calibri" pitchFamily="34" charset="-122"/>
-                <a:cs typeface="Calibri" pitchFamily="34" charset="-120"/>
-              </a:rPr>
-              <a:t> nativo</a:t>
-            </a:r>
-            <a:endParaRPr lang="es-ES" sz="1000" noProof="0" dirty="0"/>
-          </a:p>
-        </p:txBody>
-      </p:sp>
-      <p:sp>
-        <p:nvSpPr>
-          <p:cNvPr id="23" name="Text 21"/>
-          <p:cNvSpPr/>
-          <p:nvPr/>
-        </p:nvSpPr>
-        <p:spPr>
-          <a:xfrm>
-            <a:off x="5724144" y="2331720"/>
-            <a:ext cx="1408176" cy="1737360"/>
-          </a:xfrm>
-          <a:prstGeom prst="rect">
-            <a:avLst/>
-          </a:prstGeom>
-          <a:noFill/>
-          <a:ln/>
-        </p:spPr>
-        <p:txBody>
-          <a:bodyPr wrap="square" lIns="0" tIns="0" rIns="0" bIns="0" rtlCol="0" anchor="t"/>
-          <a:lstStyle/>
-          <a:p>
-            <a:pPr marL="0" indent="0" algn="l">
-              <a:buNone/>
-            </a:pPr>
-            <a:r>
-              <a:rPr lang="es-ES" sz="1000" noProof="0" dirty="0">
-                <a:solidFill>
-                  <a:srgbClr val="1A202C"/>
-                </a:solidFill>
-                <a:latin typeface="Calibri" pitchFamily="34" charset="0"/>
-                <a:ea typeface="Calibri" pitchFamily="34" charset="-122"/>
-                <a:cs typeface="Calibri" pitchFamily="34" charset="-120"/>
-              </a:rPr>
-              <a:t>SNOWFLAKE.ML.FORECAST sobre </a:t>
-            </a:r>
-            <a:r>
-              <a:rPr lang="es-ES" sz="1000" noProof="0" dirty="0" err="1">
-                <a:solidFill>
-                  <a:srgbClr val="1A202C"/>
-                </a:solidFill>
-                <a:latin typeface="Calibri" pitchFamily="34" charset="0"/>
-                <a:ea typeface="Calibri" pitchFamily="34" charset="-122"/>
-                <a:cs typeface="Calibri" pitchFamily="34" charset="-120"/>
-              </a:rPr>
-              <a:t>fct_trips_daily</a:t>
-            </a:r>
-            <a:r>
-              <a:rPr lang="es-ES" sz="1000" noProof="0" dirty="0">
-                <a:solidFill>
-                  <a:srgbClr val="1A202C"/>
-                </a:solidFill>
-                <a:latin typeface="Calibri" pitchFamily="34" charset="0"/>
-                <a:ea typeface="Calibri" pitchFamily="34" charset="-122"/>
-                <a:cs typeface="Calibri" pitchFamily="34" charset="-120"/>
-              </a:rPr>
-              <a:t> — 30 </a:t>
-            </a:r>
-            <a:r>
-              <a:rPr lang="es-ES" sz="1000" noProof="0" dirty="0" err="1">
-                <a:solidFill>
-                  <a:srgbClr val="1A202C"/>
-                </a:solidFill>
-                <a:latin typeface="Calibri" pitchFamily="34" charset="0"/>
-                <a:ea typeface="Calibri" pitchFamily="34" charset="-122"/>
-                <a:cs typeface="Calibri" pitchFamily="34" charset="-120"/>
-              </a:rPr>
-              <a:t>dias</a:t>
-            </a:r>
-            <a:r>
-              <a:rPr lang="es-ES" sz="1000" noProof="0" dirty="0">
-                <a:solidFill>
-                  <a:srgbClr val="1A202C"/>
-                </a:solidFill>
-                <a:latin typeface="Calibri" pitchFamily="34" charset="0"/>
-                <a:ea typeface="Calibri" pitchFamily="34" charset="-122"/>
-                <a:cs typeface="Calibri" pitchFamily="34" charset="-120"/>
-              </a:rPr>
-              <a:t> x 8 series (</a:t>
-            </a:r>
-            <a:r>
-              <a:rPr lang="es-ES" sz="1000" noProof="0" dirty="0" err="1">
-                <a:solidFill>
-                  <a:srgbClr val="1A202C"/>
-                </a:solidFill>
-                <a:latin typeface="Calibri" pitchFamily="34" charset="0"/>
-                <a:ea typeface="Calibri" pitchFamily="34" charset="-122"/>
-                <a:cs typeface="Calibri" pitchFamily="34" charset="-120"/>
-              </a:rPr>
-              <a:t>city</a:t>
-            </a:r>
-            <a:r>
-              <a:rPr lang="es-ES" sz="1000" noProof="0" dirty="0">
-                <a:solidFill>
-                  <a:srgbClr val="1A202C"/>
-                </a:solidFill>
-                <a:latin typeface="Calibri" pitchFamily="34" charset="0"/>
-                <a:ea typeface="Calibri" pitchFamily="34" charset="-122"/>
-                <a:cs typeface="Calibri" pitchFamily="34" charset="-120"/>
-              </a:rPr>
-              <a:t> x </a:t>
-            </a:r>
-            <a:r>
-              <a:rPr lang="es-ES" sz="1000" noProof="0" dirty="0" err="1">
-                <a:solidFill>
-                  <a:srgbClr val="1A202C"/>
-                </a:solidFill>
-                <a:latin typeface="Calibri" pitchFamily="34" charset="0"/>
-                <a:ea typeface="Calibri" pitchFamily="34" charset="-122"/>
-                <a:cs typeface="Calibri" pitchFamily="34" charset="-120"/>
-              </a:rPr>
-              <a:t>bike</a:t>
-            </a:r>
-            <a:r>
-              <a:rPr lang="es-ES" sz="1000" noProof="0" dirty="0">
-                <a:solidFill>
-                  <a:srgbClr val="1A202C"/>
-                </a:solidFill>
-                <a:latin typeface="Calibri" pitchFamily="34" charset="0"/>
-                <a:ea typeface="Calibri" pitchFamily="34" charset="-122"/>
-                <a:cs typeface="Calibri" pitchFamily="34" charset="-120"/>
-              </a:rPr>
-              <a:t> x </a:t>
-            </a:r>
-            <a:r>
-              <a:rPr lang="es-ES" sz="1000" noProof="0" dirty="0" err="1">
-                <a:solidFill>
-                  <a:srgbClr val="1A202C"/>
-                </a:solidFill>
-                <a:latin typeface="Calibri" pitchFamily="34" charset="0"/>
-                <a:ea typeface="Calibri" pitchFamily="34" charset="-122"/>
-                <a:cs typeface="Calibri" pitchFamily="34" charset="-120"/>
-              </a:rPr>
-              <a:t>user</a:t>
-            </a:r>
-            <a:r>
-              <a:rPr lang="es-ES" sz="1000" noProof="0" dirty="0">
-                <a:solidFill>
-                  <a:srgbClr val="1A202C"/>
-                </a:solidFill>
-                <a:latin typeface="Calibri" pitchFamily="34" charset="0"/>
-                <a:ea typeface="Calibri" pitchFamily="34" charset="-122"/>
-                <a:cs typeface="Calibri" pitchFamily="34" charset="-120"/>
-              </a:rPr>
-              <a:t>).</a:t>
-            </a:r>
-            <a:endParaRPr lang="es-ES" sz="1000" noProof="0" dirty="0"/>
-          </a:p>
-        </p:txBody>
-      </p:sp>
-      <p:sp>
-        <p:nvSpPr>
-          <p:cNvPr id="24" name="Shape 22"/>
-          <p:cNvSpPr/>
-          <p:nvPr/>
-        </p:nvSpPr>
-        <p:spPr>
-          <a:xfrm>
-            <a:off x="7333488" y="1417320"/>
-            <a:ext cx="1627632" cy="2743200"/>
-          </a:xfrm>
-          <a:prstGeom prst="rect">
-            <a:avLst/>
-          </a:prstGeom>
-          <a:solidFill>
-            <a:srgbClr val="FFFFFF"/>
-          </a:solidFill>
-          <a:ln w="12700">
-            <a:solidFill>
-              <a:srgbClr val="E2E8F0"/>
-            </a:solidFill>
-            <a:prstDash val="solid"/>
-          </a:ln>
-          <a:effectLst>
-            <a:outerShdw blurRad="101600" dist="25400" dir="5400000" algn="bl" rotWithShape="0">
-              <a:srgbClr val="000000">
-                <a:alpha val="12000"/>
-              </a:srgbClr>
-            </a:outerShdw>
-          </a:effectLst>
-        </p:spPr>
-        <p:txBody>
-          <a:bodyPr/>
-          <a:lstStyle/>
-          <a:p>
-            <a:endParaRPr lang="es-ES" noProof="0" dirty="0"/>
-          </a:p>
-        </p:txBody>
-      </p:sp>
-      <p:sp>
-        <p:nvSpPr>
-          <p:cNvPr id="25" name="Shape 23"/>
-          <p:cNvSpPr/>
-          <p:nvPr/>
-        </p:nvSpPr>
-        <p:spPr>
-          <a:xfrm>
-            <a:off x="7333488" y="1417320"/>
-            <a:ext cx="1627632" cy="457200"/>
-          </a:xfrm>
-          <a:prstGeom prst="rect">
-            <a:avLst/>
-          </a:prstGeom>
-          <a:solidFill>
-            <a:srgbClr val="1E2761"/>
-          </a:solidFill>
-          <a:ln/>
-        </p:spPr>
-        <p:txBody>
-          <a:bodyPr/>
-          <a:lstStyle/>
-          <a:p>
-            <a:endParaRPr lang="es-ES" noProof="0" dirty="0"/>
-          </a:p>
-        </p:txBody>
-      </p:sp>
-      <p:sp>
-        <p:nvSpPr>
-          <p:cNvPr id="26" name="Text 24"/>
-          <p:cNvSpPr/>
-          <p:nvPr/>
-        </p:nvSpPr>
-        <p:spPr>
-          <a:xfrm>
-            <a:off x="7333488" y="1417320"/>
-            <a:ext cx="1627632" cy="457200"/>
-          </a:xfrm>
-          <a:prstGeom prst="rect">
-            <a:avLst/>
-          </a:prstGeom>
-          <a:noFill/>
-          <a:ln/>
-        </p:spPr>
-        <p:txBody>
-          <a:bodyPr wrap="square" lIns="0" tIns="0" rIns="0" bIns="0" rtlCol="0" anchor="ctr"/>
-          <a:lstStyle/>
-          <a:p>
-            <a:pPr marL="0" indent="0" algn="ctr">
-              <a:buNone/>
-            </a:pPr>
-            <a:r>
-              <a:rPr lang="es-ES" sz="1400" b="1" noProof="0" dirty="0">
-                <a:solidFill>
-                  <a:srgbClr val="FFFFFF"/>
-                </a:solidFill>
-                <a:latin typeface="Calibri" pitchFamily="34" charset="0"/>
-                <a:ea typeface="Calibri" pitchFamily="34" charset="-122"/>
-                <a:cs typeface="Calibri" pitchFamily="34" charset="-120"/>
-              </a:rPr>
-              <a:t>Power BI</a:t>
-            </a:r>
-            <a:endParaRPr lang="es-ES" sz="1400" noProof="0" dirty="0"/>
-          </a:p>
-        </p:txBody>
-      </p:sp>
-      <p:sp>
-        <p:nvSpPr>
-          <p:cNvPr id="27" name="Text 25"/>
-          <p:cNvSpPr/>
-          <p:nvPr/>
-        </p:nvSpPr>
-        <p:spPr>
-          <a:xfrm>
-            <a:off x="7443216" y="1965960"/>
-            <a:ext cx="1408176" cy="365760"/>
-          </a:xfrm>
-          <a:prstGeom prst="rect">
-            <a:avLst/>
-          </a:prstGeom>
-          <a:noFill/>
-          <a:ln/>
-        </p:spPr>
-        <p:txBody>
-          <a:bodyPr wrap="square" lIns="0" tIns="0" rIns="0" bIns="0" rtlCol="0" anchor="ctr"/>
-          <a:lstStyle/>
-          <a:p>
-            <a:pPr marL="0" indent="0" algn="ctr">
-              <a:buNone/>
-            </a:pPr>
-            <a:r>
-              <a:rPr lang="es-ES" sz="1000" b="1" i="1" noProof="0" dirty="0">
-                <a:solidFill>
-                  <a:srgbClr val="F59E0B"/>
-                </a:solidFill>
-                <a:latin typeface="Calibri" pitchFamily="34" charset="0"/>
-                <a:ea typeface="Calibri" pitchFamily="34" charset="-122"/>
-                <a:cs typeface="Calibri" pitchFamily="34" charset="-120"/>
-              </a:rPr>
-              <a:t>Consumo final</a:t>
-            </a:r>
-            <a:endParaRPr lang="es-ES" sz="1000" noProof="0" dirty="0"/>
-          </a:p>
-        </p:txBody>
-      </p:sp>
-      <p:sp>
-        <p:nvSpPr>
-          <p:cNvPr id="28" name="Text 26"/>
-          <p:cNvSpPr/>
-          <p:nvPr/>
-        </p:nvSpPr>
-        <p:spPr>
-          <a:xfrm>
-            <a:off x="7443216" y="2331720"/>
-            <a:ext cx="1408176" cy="1737360"/>
-          </a:xfrm>
-          <a:prstGeom prst="rect">
-            <a:avLst/>
-          </a:prstGeom>
-          <a:noFill/>
-          <a:ln/>
-        </p:spPr>
-        <p:txBody>
-          <a:bodyPr wrap="square" lIns="0" tIns="0" rIns="0" bIns="0" rtlCol="0" anchor="t"/>
-          <a:lstStyle/>
-          <a:p>
-            <a:pPr marL="0" indent="0" algn="l">
-              <a:buNone/>
-            </a:pPr>
-            <a:r>
-              <a:rPr lang="es-ES" sz="1000" noProof="0" dirty="0" err="1">
-                <a:solidFill>
-                  <a:srgbClr val="1A202C"/>
-                </a:solidFill>
-                <a:latin typeface="Calibri" pitchFamily="34" charset="0"/>
-                <a:ea typeface="Calibri" pitchFamily="34" charset="-122"/>
-                <a:cs typeface="Calibri" pitchFamily="34" charset="-120"/>
-              </a:rPr>
-              <a:t>Dashboards</a:t>
-            </a:r>
-            <a:r>
-              <a:rPr lang="es-ES" sz="1000" noProof="0" dirty="0">
-                <a:solidFill>
-                  <a:srgbClr val="1A202C"/>
-                </a:solidFill>
-                <a:latin typeface="Calibri" pitchFamily="34" charset="0"/>
-                <a:ea typeface="Calibri" pitchFamily="34" charset="-122"/>
-                <a:cs typeface="Calibri" pitchFamily="34" charset="-120"/>
-              </a:rPr>
-              <a:t> sobre </a:t>
-            </a:r>
-            <a:r>
-              <a:rPr lang="es-ES" sz="1000" noProof="0" dirty="0" err="1">
-                <a:solidFill>
-                  <a:srgbClr val="1A202C"/>
-                </a:solidFill>
-                <a:latin typeface="Calibri" pitchFamily="34" charset="0"/>
-                <a:ea typeface="Calibri" pitchFamily="34" charset="-122"/>
-                <a:cs typeface="Calibri" pitchFamily="34" charset="-120"/>
-              </a:rPr>
-              <a:t>schemas</a:t>
-            </a:r>
-            <a:r>
-              <a:rPr lang="es-ES" sz="1000" noProof="0" dirty="0">
-                <a:solidFill>
-                  <a:srgbClr val="1A202C"/>
-                </a:solidFill>
-                <a:latin typeface="Calibri" pitchFamily="34" charset="0"/>
-                <a:ea typeface="Calibri" pitchFamily="34" charset="-122"/>
-                <a:cs typeface="Calibri" pitchFamily="34" charset="-120"/>
-              </a:rPr>
-              <a:t> Gold. Se realizan las graficas con los datos finales.</a:t>
-            </a:r>
-            <a:endParaRPr lang="es-ES" sz="1000" noProof="0" dirty="0"/>
-          </a:p>
-        </p:txBody>
-      </p:sp>
-      <p:sp>
-        <p:nvSpPr>
-          <p:cNvPr id="29" name="Text 27"/>
-          <p:cNvSpPr/>
-          <p:nvPr/>
-        </p:nvSpPr>
-        <p:spPr>
-          <a:xfrm>
-            <a:off x="8229600" y="4800600"/>
-            <a:ext cx="822960" cy="228600"/>
-          </a:xfrm>
-          <a:prstGeom prst="rect">
-            <a:avLst/>
-          </a:prstGeom>
-          <a:noFill/>
-          <a:ln/>
-        </p:spPr>
-        <p:txBody>
-          <a:bodyPr wrap="square" lIns="0" tIns="0" rIns="0" bIns="0" rtlCol="0" anchor="ctr"/>
-          <a:lstStyle/>
-          <a:p>
-            <a:pPr marL="0" indent="0" algn="r">
-              <a:buNone/>
-            </a:pPr>
-            <a:r>
-              <a:rPr lang="es-ES" sz="900" noProof="0" dirty="0">
-                <a:solidFill>
-                  <a:srgbClr val="64748B"/>
-                </a:solidFill>
-                <a:latin typeface="Calibri" pitchFamily="34" charset="0"/>
-                <a:ea typeface="Calibri" pitchFamily="34" charset="-122"/>
-                <a:cs typeface="Calibri" pitchFamily="34" charset="-120"/>
-              </a:rPr>
-              <a:t>3 / 15</a:t>
+              <a:t>2 / 11</a:t>
             </a:r>
             <a:endParaRPr lang="es-ES" sz="900" noProof="0" dirty="0"/>
           </a:p>
@@ -11185,1104 +6173,7 @@
                 <a:ea typeface="Calibri" pitchFamily="34" charset="-122"/>
                 <a:cs typeface="Calibri" pitchFamily="34" charset="-120"/>
               </a:rPr>
-              <a:t>4 / 15</a:t>
-            </a:r>
-            <a:endParaRPr lang="es-ES" sz="900" noProof="0" dirty="0"/>
-          </a:p>
-        </p:txBody>
-      </p:sp>
-    </p:spTree>
-  </p:cSld>
-  <p:clrMapOvr>
-    <a:masterClrMapping/>
-  </p:clrMapOvr>
-</p:sld>
-</file>
-
-<file path=ppt/slides/slide5.xml><?xml version="1.0" encoding="utf-8"?>
-<p:sld xmlns:a="http://schemas.openxmlformats.org/drawingml/2006/main" xmlns:r="http://schemas.openxmlformats.org/officeDocument/2006/relationships" xmlns:p="http://schemas.openxmlformats.org/presentationml/2006/main">
-  <p:cSld name="Slide 5">
-    <p:bg>
-      <p:bgPr>
-        <a:solidFill>
-          <a:srgbClr val="F8FAFC"/>
-        </a:solidFill>
-        <a:effectLst/>
-      </p:bgPr>
-    </p:bg>
-    <p:spTree>
-      <p:nvGrpSpPr>
-        <p:cNvPr id="1" name=""/>
-        <p:cNvGrpSpPr/>
-        <p:nvPr/>
-      </p:nvGrpSpPr>
-      <p:grpSpPr>
-        <a:xfrm>
-          <a:off x="0" y="0"/>
-          <a:ext cx="0" cy="0"/>
-          <a:chOff x="0" y="0"/>
-          <a:chExt cx="0" cy="0"/>
-        </a:xfrm>
-      </p:grpSpPr>
-      <p:sp>
-        <p:nvSpPr>
-          <p:cNvPr id="2" name="Text 0"/>
-          <p:cNvSpPr/>
-          <p:nvPr/>
-        </p:nvSpPr>
-        <p:spPr>
-          <a:xfrm>
-            <a:off x="457200" y="274320"/>
-            <a:ext cx="8229600" cy="274320"/>
-          </a:xfrm>
-          <a:prstGeom prst="rect">
-            <a:avLst/>
-          </a:prstGeom>
-          <a:noFill/>
-          <a:ln/>
-        </p:spPr>
-        <p:txBody>
-          <a:bodyPr wrap="square" lIns="0" tIns="0" rIns="0" bIns="0" rtlCol="0" anchor="ctr"/>
-          <a:lstStyle/>
-          <a:p>
-            <a:pPr marL="0" indent="0">
-              <a:buNone/>
-            </a:pPr>
-            <a:r>
-              <a:rPr lang="es-ES" sz="1100" b="1" kern="0" spc="400" noProof="0" dirty="0">
-                <a:solidFill>
-                  <a:srgbClr val="F59E0B"/>
-                </a:solidFill>
-                <a:latin typeface="Calibri" pitchFamily="34" charset="0"/>
-                <a:ea typeface="Calibri" pitchFamily="34" charset="-122"/>
-                <a:cs typeface="Calibri" pitchFamily="34" charset="-120"/>
-              </a:rPr>
-              <a:t>04 · SNOWFLAKE STREAMS + TASKS</a:t>
-            </a:r>
-            <a:endParaRPr lang="es-ES" sz="1100" noProof="0" dirty="0"/>
-          </a:p>
-        </p:txBody>
-      </p:sp>
-      <p:sp>
-        <p:nvSpPr>
-          <p:cNvPr id="3" name="Text 1"/>
-          <p:cNvSpPr/>
-          <p:nvPr/>
-        </p:nvSpPr>
-        <p:spPr>
-          <a:xfrm>
-            <a:off x="457200" y="502920"/>
-            <a:ext cx="8229600" cy="640080"/>
-          </a:xfrm>
-          <a:prstGeom prst="rect">
-            <a:avLst/>
-          </a:prstGeom>
-          <a:noFill/>
-          <a:ln/>
-        </p:spPr>
-        <p:txBody>
-          <a:bodyPr wrap="square" lIns="0" tIns="0" rIns="0" bIns="0" rtlCol="0" anchor="ctr"/>
-          <a:lstStyle/>
-          <a:p>
-            <a:pPr marL="0" indent="0">
-              <a:buNone/>
-            </a:pPr>
-            <a:r>
-              <a:rPr lang="es-ES" sz="2800" b="1" noProof="0" dirty="0">
-                <a:solidFill>
-                  <a:srgbClr val="1E2761"/>
-                </a:solidFill>
-                <a:latin typeface="Calibri" pitchFamily="34" charset="0"/>
-                <a:ea typeface="Calibri" pitchFamily="34" charset="-122"/>
-                <a:cs typeface="Calibri" pitchFamily="34" charset="-120"/>
-              </a:rPr>
-              <a:t>Bronze · ingesta orquestada</a:t>
-            </a:r>
-            <a:endParaRPr lang="es-ES" sz="2800" noProof="0" dirty="0"/>
-          </a:p>
-        </p:txBody>
-      </p:sp>
-      <p:sp>
-        <p:nvSpPr>
-          <p:cNvPr id="4" name="Shape 2"/>
-          <p:cNvSpPr/>
-          <p:nvPr/>
-        </p:nvSpPr>
-        <p:spPr>
-          <a:xfrm>
-            <a:off x="4846320" y="1417320"/>
-            <a:ext cx="3840480" cy="3246120"/>
-          </a:xfrm>
-          <a:prstGeom prst="rect">
-            <a:avLst/>
-          </a:prstGeom>
-          <a:solidFill>
-            <a:srgbClr val="FFFFFF"/>
-          </a:solidFill>
-          <a:ln w="12700">
-            <a:solidFill>
-              <a:srgbClr val="E2E8F0"/>
-            </a:solidFill>
-            <a:prstDash val="solid"/>
-          </a:ln>
-          <a:effectLst>
-            <a:outerShdw blurRad="101600" dist="25400" dir="5400000" algn="bl" rotWithShape="0">
-              <a:srgbClr val="000000">
-                <a:alpha val="12000"/>
-              </a:srgbClr>
-            </a:outerShdw>
-          </a:effectLst>
-        </p:spPr>
-        <p:txBody>
-          <a:bodyPr/>
-          <a:lstStyle/>
-          <a:p>
-            <a:endParaRPr lang="es-ES" noProof="0" dirty="0"/>
-          </a:p>
-        </p:txBody>
-      </p:sp>
-      <p:sp>
-        <p:nvSpPr>
-          <p:cNvPr id="5" name="Text 3"/>
-          <p:cNvSpPr/>
-          <p:nvPr/>
-        </p:nvSpPr>
-        <p:spPr>
-          <a:xfrm>
-            <a:off x="4983480" y="1508760"/>
-            <a:ext cx="3566160" cy="320040"/>
-          </a:xfrm>
-          <a:prstGeom prst="rect">
-            <a:avLst/>
-          </a:prstGeom>
-          <a:noFill/>
-          <a:ln/>
-        </p:spPr>
-        <p:txBody>
-          <a:bodyPr wrap="square" lIns="0" tIns="0" rIns="0" bIns="0" rtlCol="0" anchor="ctr"/>
-          <a:lstStyle/>
-          <a:p>
-            <a:pPr marL="0" indent="0">
-              <a:buNone/>
-            </a:pPr>
-            <a:r>
-              <a:rPr lang="es-ES" sz="1200" b="1" noProof="0" dirty="0">
-                <a:solidFill>
-                  <a:srgbClr val="1E2761"/>
-                </a:solidFill>
-                <a:latin typeface="Calibri" pitchFamily="34" charset="0"/>
-                <a:ea typeface="Calibri" pitchFamily="34" charset="-122"/>
-                <a:cs typeface="Calibri" pitchFamily="34" charset="-120"/>
-              </a:rPr>
-              <a:t>DAG de </a:t>
-            </a:r>
-            <a:r>
-              <a:rPr lang="es-ES" sz="1200" b="1" noProof="0" dirty="0" err="1">
-                <a:solidFill>
-                  <a:srgbClr val="1E2761"/>
-                </a:solidFill>
-                <a:latin typeface="Calibri" pitchFamily="34" charset="0"/>
-                <a:ea typeface="Calibri" pitchFamily="34" charset="-122"/>
-                <a:cs typeface="Calibri" pitchFamily="34" charset="-120"/>
-              </a:rPr>
-              <a:t>tasks</a:t>
-            </a:r>
-            <a:r>
-              <a:rPr lang="es-ES" sz="1200" b="1" noProof="0" dirty="0">
-                <a:solidFill>
-                  <a:srgbClr val="1E2761"/>
-                </a:solidFill>
-                <a:latin typeface="Calibri" pitchFamily="34" charset="0"/>
-                <a:ea typeface="Calibri" pitchFamily="34" charset="-122"/>
-                <a:cs typeface="Calibri" pitchFamily="34" charset="-120"/>
-              </a:rPr>
-              <a:t> (cron </a:t>
-            </a:r>
-            <a:r>
-              <a:rPr lang="es-ES" sz="1200" b="1" noProof="0" dirty="0" err="1">
-                <a:solidFill>
-                  <a:srgbClr val="1E2761"/>
-                </a:solidFill>
-                <a:latin typeface="Calibri" pitchFamily="34" charset="0"/>
-                <a:ea typeface="Calibri" pitchFamily="34" charset="-122"/>
-                <a:cs typeface="Calibri" pitchFamily="34" charset="-120"/>
-              </a:rPr>
-              <a:t>dia</a:t>
-            </a:r>
-            <a:r>
-              <a:rPr lang="es-ES" sz="1200" b="1" noProof="0" dirty="0">
-                <a:solidFill>
-                  <a:srgbClr val="1E2761"/>
-                </a:solidFill>
-                <a:latin typeface="Calibri" pitchFamily="34" charset="0"/>
-                <a:ea typeface="Calibri" pitchFamily="34" charset="-122"/>
-                <a:cs typeface="Calibri" pitchFamily="34" charset="-120"/>
-              </a:rPr>
-              <a:t> 28, 03:00 NY)</a:t>
-            </a:r>
-            <a:endParaRPr lang="es-ES" sz="1200" noProof="0" dirty="0"/>
-          </a:p>
-        </p:txBody>
-      </p:sp>
-      <p:sp>
-        <p:nvSpPr>
-          <p:cNvPr id="6" name="Text 4"/>
-          <p:cNvSpPr/>
-          <p:nvPr/>
-        </p:nvSpPr>
-        <p:spPr>
-          <a:xfrm>
-            <a:off x="5029200" y="1874520"/>
-            <a:ext cx="3474720" cy="2743200"/>
-          </a:xfrm>
-          <a:prstGeom prst="rect">
-            <a:avLst/>
-          </a:prstGeom>
-          <a:noFill/>
-          <a:ln/>
-        </p:spPr>
-        <p:txBody>
-          <a:bodyPr wrap="square" lIns="0" tIns="0" rIns="0" bIns="0" rtlCol="0" anchor="t"/>
-          <a:lstStyle/>
-          <a:p>
-            <a:pPr marL="0" indent="0">
-              <a:spcAft>
-                <a:spcPts val="600"/>
-              </a:spcAft>
-              <a:buNone/>
-            </a:pPr>
-            <a:r>
-              <a:rPr lang="es-ES" sz="1100" b="1" noProof="0" dirty="0">
-                <a:solidFill>
-                  <a:srgbClr val="1A202C"/>
-                </a:solidFill>
-                <a:latin typeface="Consolas" pitchFamily="34" charset="0"/>
-                <a:ea typeface="Consolas" pitchFamily="34" charset="-122"/>
-                <a:cs typeface="Consolas" pitchFamily="34" charset="-120"/>
-              </a:rPr>
-              <a:t>TSK_BRONZE_MASTER  (</a:t>
-            </a:r>
-            <a:r>
-              <a:rPr lang="es-ES" sz="1100" b="1" noProof="0" dirty="0" err="1">
-                <a:solidFill>
-                  <a:srgbClr val="1A202C"/>
-                </a:solidFill>
-                <a:latin typeface="Consolas" pitchFamily="34" charset="0"/>
-                <a:ea typeface="Consolas" pitchFamily="34" charset="-122"/>
-                <a:cs typeface="Consolas" pitchFamily="34" charset="-120"/>
-              </a:rPr>
-              <a:t>root</a:t>
-            </a:r>
-            <a:r>
-              <a:rPr lang="es-ES" sz="1100" b="1" noProof="0" dirty="0">
-                <a:solidFill>
-                  <a:srgbClr val="1A202C"/>
-                </a:solidFill>
-                <a:latin typeface="Consolas" pitchFamily="34" charset="0"/>
-                <a:ea typeface="Consolas" pitchFamily="34" charset="-122"/>
-                <a:cs typeface="Consolas" pitchFamily="34" charset="-120"/>
-              </a:rPr>
-              <a:t> </a:t>
-            </a:r>
-            <a:r>
-              <a:rPr lang="es-ES" sz="1100" b="1" noProof="0" dirty="0" err="1">
-                <a:solidFill>
-                  <a:srgbClr val="1A202C"/>
-                </a:solidFill>
-                <a:latin typeface="Consolas" pitchFamily="34" charset="0"/>
-                <a:ea typeface="Consolas" pitchFamily="34" charset="-122"/>
-                <a:cs typeface="Consolas" pitchFamily="34" charset="-120"/>
-              </a:rPr>
-              <a:t>unico</a:t>
-            </a:r>
-            <a:r>
-              <a:rPr lang="es-ES" sz="1100" b="1" noProof="0" dirty="0">
-                <a:solidFill>
-                  <a:srgbClr val="1A202C"/>
-                </a:solidFill>
-                <a:latin typeface="Consolas" pitchFamily="34" charset="0"/>
-                <a:ea typeface="Consolas" pitchFamily="34" charset="-122"/>
-                <a:cs typeface="Consolas" pitchFamily="34" charset="-120"/>
-              </a:rPr>
-              <a:t> CRON)</a:t>
-            </a:r>
-            <a:endParaRPr lang="es-ES" sz="1100" noProof="0" dirty="0"/>
-          </a:p>
-          <a:p>
-            <a:pPr marL="0" indent="0">
-              <a:spcAft>
-                <a:spcPts val="600"/>
-              </a:spcAft>
-              <a:buNone/>
-            </a:pPr>
-            <a:r>
-              <a:rPr lang="es-ES" sz="1050" noProof="0" dirty="0">
-                <a:solidFill>
-                  <a:srgbClr val="1A202C"/>
-                </a:solidFill>
-                <a:latin typeface="Consolas" pitchFamily="34" charset="0"/>
-                <a:ea typeface="Consolas" pitchFamily="34" charset="-122"/>
-                <a:cs typeface="Consolas" pitchFamily="34" charset="-120"/>
-              </a:rPr>
-              <a:t>  ├── TSK_BRONZE_CITYBIKE_NY  (S3 publico 2024-202603)</a:t>
-            </a:r>
-            <a:endParaRPr lang="es-ES" sz="1100" noProof="0" dirty="0"/>
-          </a:p>
-          <a:p>
-            <a:pPr marL="0" indent="0">
-              <a:spcAft>
-                <a:spcPts val="600"/>
-              </a:spcAft>
-              <a:buNone/>
-            </a:pPr>
-            <a:r>
-              <a:rPr lang="es-ES" sz="1050" noProof="0" dirty="0">
-                <a:solidFill>
-                  <a:srgbClr val="1A202C"/>
-                </a:solidFill>
-                <a:latin typeface="Consolas" pitchFamily="34" charset="0"/>
-                <a:ea typeface="Consolas" pitchFamily="34" charset="-122"/>
-                <a:cs typeface="Consolas" pitchFamily="34" charset="-120"/>
-              </a:rPr>
-              <a:t>  ├── TSK_BRONZE_NY_INT_REFRESH  →  ONFILES  →  DRAIN</a:t>
-            </a:r>
-            <a:endParaRPr lang="es-ES" sz="1100" noProof="0" dirty="0"/>
-          </a:p>
-          <a:p>
-            <a:pPr marL="0" indent="0">
-              <a:spcAft>
-                <a:spcPts val="600"/>
-              </a:spcAft>
-              <a:buNone/>
-            </a:pPr>
-            <a:r>
-              <a:rPr lang="es-ES" sz="1050" noProof="0" dirty="0">
-                <a:solidFill>
-                  <a:srgbClr val="1A202C"/>
-                </a:solidFill>
-                <a:latin typeface="Consolas" pitchFamily="34" charset="0"/>
-                <a:ea typeface="Consolas" pitchFamily="34" charset="-122"/>
-                <a:cs typeface="Consolas" pitchFamily="34" charset="-120"/>
-              </a:rPr>
-              <a:t>  └── TSK_BRONZE_JC_REFRESH  →  ONFILES  →  DRAIN</a:t>
-            </a:r>
-            <a:endParaRPr lang="es-ES" sz="1100" noProof="0" dirty="0"/>
-          </a:p>
-          <a:p>
-            <a:pPr marL="0" indent="0" algn="ctr">
-              <a:spcAft>
-                <a:spcPts val="600"/>
-              </a:spcAft>
-              <a:buNone/>
-            </a:pPr>
-            <a:r>
-              <a:rPr lang="es-ES" sz="1100" noProof="0" dirty="0">
-                <a:solidFill>
-                  <a:srgbClr val="64748B"/>
-                </a:solidFill>
-                <a:latin typeface="Consolas" pitchFamily="34" charset="0"/>
-                <a:ea typeface="Consolas" pitchFamily="34" charset="-122"/>
-                <a:cs typeface="Consolas" pitchFamily="34" charset="-120"/>
-              </a:rPr>
-              <a:t>                ▼</a:t>
-            </a:r>
-            <a:endParaRPr lang="es-ES" sz="1100" noProof="0" dirty="0"/>
-          </a:p>
-          <a:p>
-            <a:pPr marL="0" indent="0">
-              <a:spcAft>
-                <a:spcPts val="600"/>
-              </a:spcAft>
-              <a:buNone/>
-            </a:pPr>
-            <a:r>
-              <a:rPr lang="es-ES" sz="1050" noProof="0" dirty="0">
-                <a:solidFill>
-                  <a:srgbClr val="1A202C"/>
-                </a:solidFill>
-                <a:latin typeface="Consolas" pitchFamily="34" charset="0"/>
-                <a:ea typeface="Consolas" pitchFamily="34" charset="-122"/>
-                <a:cs typeface="Consolas" pitchFamily="34" charset="-120"/>
-              </a:rPr>
-              <a:t>  TSK_BRONZE_NOAA  (WHEN </a:t>
-            </a:r>
-            <a:r>
-              <a:rPr lang="es-ES" sz="1050" noProof="0" dirty="0" err="1">
-                <a:solidFill>
-                  <a:srgbClr val="1A202C"/>
-                </a:solidFill>
-                <a:latin typeface="Consolas" pitchFamily="34" charset="0"/>
-                <a:ea typeface="Consolas" pitchFamily="34" charset="-122"/>
-                <a:cs typeface="Consolas" pitchFamily="34" charset="-120"/>
-              </a:rPr>
-              <a:t>stream</a:t>
-            </a:r>
-            <a:r>
-              <a:rPr lang="es-ES" sz="1050" noProof="0" dirty="0">
-                <a:solidFill>
-                  <a:srgbClr val="1A202C"/>
-                </a:solidFill>
-                <a:latin typeface="Consolas" pitchFamily="34" charset="0"/>
-                <a:ea typeface="Consolas" pitchFamily="34" charset="-122"/>
-                <a:cs typeface="Consolas" pitchFamily="34" charset="-120"/>
-              </a:rPr>
-              <a:t> NY OR JC tiene datos)</a:t>
-            </a:r>
-            <a:endParaRPr lang="es-ES" sz="1100" noProof="0" dirty="0"/>
-          </a:p>
-          <a:p>
-            <a:pPr marL="0" indent="0" algn="ctr">
-              <a:spcAft>
-                <a:spcPts val="600"/>
-              </a:spcAft>
-              <a:buNone/>
-            </a:pPr>
-            <a:r>
-              <a:rPr lang="es-ES" sz="1100" noProof="0" dirty="0">
-                <a:solidFill>
-                  <a:srgbClr val="64748B"/>
-                </a:solidFill>
-                <a:latin typeface="Consolas" pitchFamily="34" charset="0"/>
-                <a:ea typeface="Consolas" pitchFamily="34" charset="-122"/>
-                <a:cs typeface="Consolas" pitchFamily="34" charset="-120"/>
-              </a:rPr>
-              <a:t>                ▼</a:t>
-            </a:r>
-            <a:endParaRPr lang="es-ES" sz="1100" noProof="0" dirty="0"/>
-          </a:p>
-          <a:p>
-            <a:pPr marL="0" indent="0">
-              <a:spcAft>
-                <a:spcPts val="600"/>
-              </a:spcAft>
-              <a:buNone/>
-            </a:pPr>
-            <a:r>
-              <a:rPr lang="es-ES" sz="1050" i="1" noProof="0" dirty="0">
-                <a:solidFill>
-                  <a:srgbClr val="F59E0B"/>
-                </a:solidFill>
-                <a:latin typeface="Consolas" pitchFamily="34" charset="0"/>
-                <a:ea typeface="Consolas" pitchFamily="34" charset="-122"/>
-                <a:cs typeface="Consolas" pitchFamily="34" charset="-120"/>
-              </a:rPr>
-              <a:t>  TSK_BRONZE_CITYBIKE_STREAMS_DRAIN  (cierre </a:t>
-            </a:r>
-            <a:r>
-              <a:rPr lang="es-ES" sz="1050" i="1" noProof="0" dirty="0" err="1">
-                <a:solidFill>
-                  <a:srgbClr val="F59E0B"/>
-                </a:solidFill>
-                <a:latin typeface="Consolas" pitchFamily="34" charset="0"/>
-                <a:ea typeface="Consolas" pitchFamily="34" charset="-122"/>
-                <a:cs typeface="Consolas" pitchFamily="34" charset="-120"/>
-              </a:rPr>
-              <a:t>cycle</a:t>
-            </a:r>
-            <a:r>
-              <a:rPr lang="es-ES" sz="1050" i="1" noProof="0" dirty="0">
-                <a:solidFill>
-                  <a:srgbClr val="F59E0B"/>
-                </a:solidFill>
-                <a:latin typeface="Consolas" pitchFamily="34" charset="0"/>
-                <a:ea typeface="Consolas" pitchFamily="34" charset="-122"/>
-                <a:cs typeface="Consolas" pitchFamily="34" charset="-120"/>
-              </a:rPr>
-              <a:t>)</a:t>
-            </a:r>
-            <a:endParaRPr lang="es-ES" sz="1100" noProof="0" dirty="0"/>
-          </a:p>
-        </p:txBody>
-      </p:sp>
-      <p:sp>
-        <p:nvSpPr>
-          <p:cNvPr id="7" name="Text 5"/>
-          <p:cNvSpPr/>
-          <p:nvPr/>
-        </p:nvSpPr>
-        <p:spPr>
-          <a:xfrm>
-            <a:off x="457200" y="1417320"/>
-            <a:ext cx="4206240" cy="365760"/>
-          </a:xfrm>
-          <a:prstGeom prst="rect">
-            <a:avLst/>
-          </a:prstGeom>
-          <a:noFill/>
-          <a:ln/>
-        </p:spPr>
-        <p:txBody>
-          <a:bodyPr wrap="square" lIns="0" tIns="0" rIns="0" bIns="0" rtlCol="0" anchor="ctr"/>
-          <a:lstStyle/>
-          <a:p>
-            <a:pPr marL="0" indent="0">
-              <a:buNone/>
-            </a:pPr>
-            <a:r>
-              <a:rPr lang="es-ES" sz="1600" b="1" noProof="0" dirty="0">
-                <a:solidFill>
-                  <a:srgbClr val="1E2761"/>
-                </a:solidFill>
-                <a:latin typeface="Calibri" pitchFamily="34" charset="0"/>
-                <a:ea typeface="Calibri" pitchFamily="34" charset="-122"/>
-                <a:cs typeface="Calibri" pitchFamily="34" charset="-120"/>
-              </a:rPr>
-              <a:t>Patron general</a:t>
-            </a:r>
-            <a:endParaRPr lang="es-ES" sz="1600" noProof="0" dirty="0"/>
-          </a:p>
-        </p:txBody>
-      </p:sp>
-      <p:sp>
-        <p:nvSpPr>
-          <p:cNvPr id="8" name="Text 6"/>
-          <p:cNvSpPr/>
-          <p:nvPr/>
-        </p:nvSpPr>
-        <p:spPr>
-          <a:xfrm>
-            <a:off x="457200" y="1828800"/>
-            <a:ext cx="4206240" cy="2834640"/>
-          </a:xfrm>
-          <a:prstGeom prst="rect">
-            <a:avLst/>
-          </a:prstGeom>
-          <a:noFill/>
-          <a:ln/>
-        </p:spPr>
-        <p:txBody>
-          <a:bodyPr wrap="square" lIns="0" tIns="0" rIns="0" bIns="0" rtlCol="0" anchor="t"/>
-          <a:lstStyle/>
-          <a:p>
-            <a:pPr marL="0" indent="0">
-              <a:spcAft>
-                <a:spcPts val="800"/>
-              </a:spcAft>
-              <a:buNone/>
-            </a:pPr>
-            <a:r>
-              <a:rPr lang="es-ES" sz="1200" b="1" noProof="0" dirty="0" err="1">
-                <a:solidFill>
-                  <a:srgbClr val="1A202C"/>
-                </a:solidFill>
-                <a:latin typeface="Calibri" pitchFamily="34" charset="0"/>
-                <a:ea typeface="Calibri" pitchFamily="34" charset="-122"/>
-                <a:cs typeface="Calibri" pitchFamily="34" charset="-120"/>
-              </a:rPr>
-              <a:t>CityBike</a:t>
-            </a:r>
-            <a:r>
-              <a:rPr lang="es-ES" sz="1200" b="1" noProof="0" dirty="0">
-                <a:solidFill>
-                  <a:srgbClr val="1A202C"/>
-                </a:solidFill>
-                <a:latin typeface="Calibri" pitchFamily="34" charset="0"/>
-                <a:ea typeface="Calibri" pitchFamily="34" charset="-122"/>
-                <a:cs typeface="Calibri" pitchFamily="34" charset="-120"/>
-              </a:rPr>
-              <a:t> NY S3 publico </a:t>
-            </a:r>
-            <a:r>
-              <a:rPr lang="es-ES" sz="1200" noProof="0" dirty="0">
-                <a:solidFill>
-                  <a:srgbClr val="64748B"/>
-                </a:solidFill>
-                <a:latin typeface="Calibri" pitchFamily="34" charset="0"/>
-                <a:ea typeface="Calibri" pitchFamily="34" charset="-122"/>
-                <a:cs typeface="Calibri" pitchFamily="34" charset="-120"/>
-              </a:rPr>
-              <a:t>(2024-202603, datos cerrados).</a:t>
-            </a:r>
-            <a:endParaRPr lang="es-ES" sz="1200" noProof="0" dirty="0"/>
-          </a:p>
-          <a:p>
-            <a:pPr marL="0" indent="0">
-              <a:spcAft>
-                <a:spcPts val="800"/>
-              </a:spcAft>
-              <a:buNone/>
-            </a:pPr>
-            <a:r>
-              <a:rPr lang="es-ES" sz="1200" b="1" noProof="0" dirty="0" err="1">
-                <a:solidFill>
-                  <a:srgbClr val="1A202C"/>
-                </a:solidFill>
-                <a:latin typeface="Calibri" pitchFamily="34" charset="0"/>
-                <a:ea typeface="Calibri" pitchFamily="34" charset="-122"/>
-                <a:cs typeface="Calibri" pitchFamily="34" charset="-120"/>
-              </a:rPr>
-              <a:t>CityBike</a:t>
-            </a:r>
-            <a:r>
-              <a:rPr lang="es-ES" sz="1200" b="1" noProof="0" dirty="0">
-                <a:solidFill>
-                  <a:srgbClr val="1A202C"/>
-                </a:solidFill>
-                <a:latin typeface="Calibri" pitchFamily="34" charset="0"/>
-                <a:ea typeface="Calibri" pitchFamily="34" charset="-122"/>
-                <a:cs typeface="Calibri" pitchFamily="34" charset="-120"/>
-              </a:rPr>
-              <a:t> NY 202604+ </a:t>
-            </a:r>
-            <a:r>
-              <a:rPr lang="es-ES" sz="1200" noProof="0" dirty="0" err="1">
-                <a:solidFill>
-                  <a:srgbClr val="64748B"/>
-                </a:solidFill>
-                <a:latin typeface="Calibri" pitchFamily="34" charset="0"/>
-                <a:ea typeface="Calibri" pitchFamily="34" charset="-122"/>
-                <a:cs typeface="Calibri" pitchFamily="34" charset="-120"/>
-              </a:rPr>
-              <a:t>via</a:t>
-            </a:r>
-            <a:r>
-              <a:rPr lang="es-ES" sz="1200" noProof="0" dirty="0">
-                <a:solidFill>
-                  <a:srgbClr val="64748B"/>
-                </a:solidFill>
-                <a:latin typeface="Calibri" pitchFamily="34" charset="0"/>
-                <a:ea typeface="Calibri" pitchFamily="34" charset="-122"/>
-                <a:cs typeface="Calibri" pitchFamily="34" charset="-120"/>
-              </a:rPr>
-              <a:t> </a:t>
-            </a:r>
-            <a:r>
-              <a:rPr lang="es-ES" sz="1200" noProof="0" dirty="0" err="1">
-                <a:solidFill>
-                  <a:srgbClr val="64748B"/>
-                </a:solidFill>
-                <a:latin typeface="Calibri" pitchFamily="34" charset="0"/>
-                <a:ea typeface="Calibri" pitchFamily="34" charset="-122"/>
-                <a:cs typeface="Calibri" pitchFamily="34" charset="-120"/>
-              </a:rPr>
-              <a:t>stage</a:t>
-            </a:r>
-            <a:r>
-              <a:rPr lang="es-ES" sz="1200" noProof="0" dirty="0">
-                <a:solidFill>
-                  <a:srgbClr val="64748B"/>
-                </a:solidFill>
-                <a:latin typeface="Calibri" pitchFamily="34" charset="0"/>
-                <a:ea typeface="Calibri" pitchFamily="34" charset="-122"/>
-                <a:cs typeface="Calibri" pitchFamily="34" charset="-120"/>
-              </a:rPr>
-              <a:t> interno (Python PUT — </a:t>
-            </a:r>
-            <a:r>
-              <a:rPr lang="es-ES" sz="1200" noProof="0" dirty="0" err="1">
-                <a:solidFill>
-                  <a:srgbClr val="64748B"/>
-                </a:solidFill>
-                <a:latin typeface="Calibri" pitchFamily="34" charset="0"/>
-                <a:ea typeface="Calibri" pitchFamily="34" charset="-122"/>
-                <a:cs typeface="Calibri" pitchFamily="34" charset="-120"/>
-              </a:rPr>
-              <a:t>bucket</a:t>
-            </a:r>
-            <a:r>
-              <a:rPr lang="es-ES" sz="1200" noProof="0" dirty="0">
-                <a:solidFill>
-                  <a:srgbClr val="64748B"/>
-                </a:solidFill>
-                <a:latin typeface="Calibri" pitchFamily="34" charset="0"/>
-                <a:ea typeface="Calibri" pitchFamily="34" charset="-122"/>
-                <a:cs typeface="Calibri" pitchFamily="34" charset="-120"/>
-              </a:rPr>
-              <a:t> publico corrupto).</a:t>
-            </a:r>
-            <a:endParaRPr lang="es-ES" sz="1200" noProof="0" dirty="0"/>
-          </a:p>
-          <a:p>
-            <a:pPr marL="0" indent="0">
-              <a:spcAft>
-                <a:spcPts val="800"/>
-              </a:spcAft>
-              <a:buNone/>
-            </a:pPr>
-            <a:r>
-              <a:rPr lang="es-ES" sz="1200" b="1" noProof="0" dirty="0" err="1">
-                <a:solidFill>
-                  <a:srgbClr val="1A202C"/>
-                </a:solidFill>
-                <a:latin typeface="Calibri" pitchFamily="34" charset="0"/>
-                <a:ea typeface="Calibri" pitchFamily="34" charset="-122"/>
-                <a:cs typeface="Calibri" pitchFamily="34" charset="-120"/>
-              </a:rPr>
-              <a:t>CityBike</a:t>
-            </a:r>
-            <a:r>
-              <a:rPr lang="es-ES" sz="1200" b="1" noProof="0" dirty="0">
-                <a:solidFill>
-                  <a:srgbClr val="1A202C"/>
-                </a:solidFill>
-                <a:latin typeface="Calibri" pitchFamily="34" charset="0"/>
-                <a:ea typeface="Calibri" pitchFamily="34" charset="-122"/>
-                <a:cs typeface="Calibri" pitchFamily="34" charset="-120"/>
-              </a:rPr>
-              <a:t> JC </a:t>
-            </a:r>
-            <a:r>
-              <a:rPr lang="es-ES" sz="1200" noProof="0" dirty="0">
-                <a:solidFill>
-                  <a:srgbClr val="64748B"/>
-                </a:solidFill>
-                <a:latin typeface="Calibri" pitchFamily="34" charset="0"/>
-                <a:ea typeface="Calibri" pitchFamily="34" charset="-122"/>
-                <a:cs typeface="Calibri" pitchFamily="34" charset="-120"/>
-              </a:rPr>
-              <a:t>siempre </a:t>
-            </a:r>
-            <a:r>
-              <a:rPr lang="es-ES" sz="1200" noProof="0" dirty="0" err="1">
-                <a:solidFill>
-                  <a:srgbClr val="64748B"/>
-                </a:solidFill>
-                <a:latin typeface="Calibri" pitchFamily="34" charset="0"/>
-                <a:ea typeface="Calibri" pitchFamily="34" charset="-122"/>
-                <a:cs typeface="Calibri" pitchFamily="34" charset="-120"/>
-              </a:rPr>
-              <a:t>via</a:t>
-            </a:r>
-            <a:r>
-              <a:rPr lang="es-ES" sz="1200" noProof="0" dirty="0">
-                <a:solidFill>
-                  <a:srgbClr val="64748B"/>
-                </a:solidFill>
-                <a:latin typeface="Calibri" pitchFamily="34" charset="0"/>
-                <a:ea typeface="Calibri" pitchFamily="34" charset="-122"/>
-                <a:cs typeface="Calibri" pitchFamily="34" charset="-120"/>
-              </a:rPr>
-              <a:t> </a:t>
-            </a:r>
-            <a:r>
-              <a:rPr lang="es-ES" sz="1200" noProof="0" dirty="0" err="1">
-                <a:solidFill>
-                  <a:srgbClr val="64748B"/>
-                </a:solidFill>
-                <a:latin typeface="Calibri" pitchFamily="34" charset="0"/>
-                <a:ea typeface="Calibri" pitchFamily="34" charset="-122"/>
-                <a:cs typeface="Calibri" pitchFamily="34" charset="-120"/>
-              </a:rPr>
-              <a:t>stage</a:t>
-            </a:r>
-            <a:r>
-              <a:rPr lang="es-ES" sz="1200" noProof="0" dirty="0">
-                <a:solidFill>
-                  <a:srgbClr val="64748B"/>
-                </a:solidFill>
-                <a:latin typeface="Calibri" pitchFamily="34" charset="0"/>
-                <a:ea typeface="Calibri" pitchFamily="34" charset="-122"/>
-                <a:cs typeface="Calibri" pitchFamily="34" charset="-120"/>
-              </a:rPr>
-              <a:t> interno.</a:t>
-            </a:r>
-            <a:endParaRPr lang="es-ES" sz="1200" noProof="0" dirty="0"/>
-          </a:p>
-          <a:p>
-            <a:pPr marL="0" indent="0">
-              <a:spcAft>
-                <a:spcPts val="800"/>
-              </a:spcAft>
-              <a:buNone/>
-            </a:pPr>
-            <a:r>
-              <a:rPr lang="es-ES" sz="1200" b="1" noProof="0" dirty="0">
-                <a:solidFill>
-                  <a:srgbClr val="1A202C"/>
-                </a:solidFill>
-                <a:latin typeface="Calibri" pitchFamily="34" charset="0"/>
-                <a:ea typeface="Calibri" pitchFamily="34" charset="-122"/>
-                <a:cs typeface="Calibri" pitchFamily="34" charset="-120"/>
-              </a:rPr>
-              <a:t>NOAA </a:t>
-            </a:r>
-            <a:r>
-              <a:rPr lang="es-ES" sz="1200" noProof="0" dirty="0">
-                <a:solidFill>
-                  <a:srgbClr val="64748B"/>
-                </a:solidFill>
-                <a:latin typeface="Calibri" pitchFamily="34" charset="0"/>
-                <a:ea typeface="Calibri" pitchFamily="34" charset="-122"/>
-                <a:cs typeface="Calibri" pitchFamily="34" charset="-120"/>
-              </a:rPr>
-              <a:t>AFTER </a:t>
-            </a:r>
-            <a:r>
-              <a:rPr lang="es-ES" sz="1200" noProof="0" dirty="0" err="1">
-                <a:solidFill>
-                  <a:srgbClr val="64748B"/>
-                </a:solidFill>
-                <a:latin typeface="Calibri" pitchFamily="34" charset="0"/>
-                <a:ea typeface="Calibri" pitchFamily="34" charset="-122"/>
-                <a:cs typeface="Calibri" pitchFamily="34" charset="-120"/>
-              </a:rPr>
-              <a:t>citybike</a:t>
-            </a:r>
-            <a:r>
-              <a:rPr lang="es-ES" sz="1200" noProof="0" dirty="0">
-                <a:solidFill>
-                  <a:srgbClr val="64748B"/>
-                </a:solidFill>
-                <a:latin typeface="Calibri" pitchFamily="34" charset="0"/>
-                <a:ea typeface="Calibri" pitchFamily="34" charset="-122"/>
-                <a:cs typeface="Calibri" pitchFamily="34" charset="-120"/>
-              </a:rPr>
-              <a:t> + WHEN </a:t>
-            </a:r>
-            <a:r>
-              <a:rPr lang="es-ES" sz="1200" noProof="0" dirty="0" err="1">
-                <a:solidFill>
-                  <a:srgbClr val="64748B"/>
-                </a:solidFill>
-                <a:latin typeface="Calibri" pitchFamily="34" charset="0"/>
-                <a:ea typeface="Calibri" pitchFamily="34" charset="-122"/>
-                <a:cs typeface="Calibri" pitchFamily="34" charset="-120"/>
-              </a:rPr>
-              <a:t>streams</a:t>
-            </a:r>
-            <a:r>
-              <a:rPr lang="es-ES" sz="1200" noProof="0" dirty="0">
-                <a:solidFill>
-                  <a:srgbClr val="64748B"/>
-                </a:solidFill>
-                <a:latin typeface="Calibri" pitchFamily="34" charset="0"/>
-                <a:ea typeface="Calibri" pitchFamily="34" charset="-122"/>
-                <a:cs typeface="Calibri" pitchFamily="34" charset="-120"/>
-              </a:rPr>
-              <a:t>. Cierra con </a:t>
-            </a:r>
-            <a:r>
-              <a:rPr lang="es-ES" sz="1200" noProof="0" dirty="0" err="1">
-                <a:solidFill>
-                  <a:srgbClr val="64748B"/>
-                </a:solidFill>
-                <a:latin typeface="Calibri" pitchFamily="34" charset="0"/>
-                <a:ea typeface="Calibri" pitchFamily="34" charset="-122"/>
-                <a:cs typeface="Calibri" pitchFamily="34" charset="-120"/>
-              </a:rPr>
-              <a:t>drain</a:t>
-            </a:r>
-            <a:r>
-              <a:rPr lang="es-ES" sz="1200" noProof="0" dirty="0">
-                <a:solidFill>
-                  <a:srgbClr val="64748B"/>
-                </a:solidFill>
-                <a:latin typeface="Calibri" pitchFamily="34" charset="0"/>
-                <a:ea typeface="Calibri" pitchFamily="34" charset="-122"/>
-                <a:cs typeface="Calibri" pitchFamily="34" charset="-120"/>
-              </a:rPr>
-              <a:t> de </a:t>
-            </a:r>
-            <a:r>
-              <a:rPr lang="es-ES" sz="1200" noProof="0" dirty="0" err="1">
-                <a:solidFill>
-                  <a:srgbClr val="64748B"/>
-                </a:solidFill>
-                <a:latin typeface="Calibri" pitchFamily="34" charset="0"/>
-                <a:ea typeface="Calibri" pitchFamily="34" charset="-122"/>
-                <a:cs typeface="Calibri" pitchFamily="34" charset="-120"/>
-              </a:rPr>
-              <a:t>streams</a:t>
-            </a:r>
-            <a:r>
-              <a:rPr lang="es-ES" sz="1200" noProof="0" dirty="0">
-                <a:solidFill>
-                  <a:srgbClr val="64748B"/>
-                </a:solidFill>
-                <a:latin typeface="Calibri" pitchFamily="34" charset="0"/>
-                <a:ea typeface="Calibri" pitchFamily="34" charset="-122"/>
-                <a:cs typeface="Calibri" pitchFamily="34" charset="-120"/>
-              </a:rPr>
-              <a:t> para el </a:t>
-            </a:r>
-            <a:r>
-              <a:rPr lang="es-ES" sz="1200" noProof="0" dirty="0" err="1">
-                <a:solidFill>
-                  <a:srgbClr val="64748B"/>
-                </a:solidFill>
-                <a:latin typeface="Calibri" pitchFamily="34" charset="0"/>
-                <a:ea typeface="Calibri" pitchFamily="34" charset="-122"/>
-                <a:cs typeface="Calibri" pitchFamily="34" charset="-120"/>
-              </a:rPr>
-              <a:t>proximo</a:t>
-            </a:r>
-            <a:r>
-              <a:rPr lang="es-ES" sz="1200" noProof="0" dirty="0">
-                <a:solidFill>
-                  <a:srgbClr val="64748B"/>
-                </a:solidFill>
-                <a:latin typeface="Calibri" pitchFamily="34" charset="0"/>
-                <a:ea typeface="Calibri" pitchFamily="34" charset="-122"/>
-                <a:cs typeface="Calibri" pitchFamily="34" charset="-120"/>
-              </a:rPr>
-              <a:t> </a:t>
-            </a:r>
-            <a:r>
-              <a:rPr lang="es-ES" sz="1200" noProof="0" dirty="0" err="1">
-                <a:solidFill>
-                  <a:srgbClr val="64748B"/>
-                </a:solidFill>
-                <a:latin typeface="Calibri" pitchFamily="34" charset="0"/>
-                <a:ea typeface="Calibri" pitchFamily="34" charset="-122"/>
-                <a:cs typeface="Calibri" pitchFamily="34" charset="-120"/>
-              </a:rPr>
-              <a:t>cycle</a:t>
-            </a:r>
-            <a:r>
-              <a:rPr lang="es-ES" sz="1200" noProof="0" dirty="0">
-                <a:solidFill>
-                  <a:srgbClr val="64748B"/>
-                </a:solidFill>
-                <a:latin typeface="Calibri" pitchFamily="34" charset="0"/>
-                <a:ea typeface="Calibri" pitchFamily="34" charset="-122"/>
-                <a:cs typeface="Calibri" pitchFamily="34" charset="-120"/>
-              </a:rPr>
-              <a:t>.</a:t>
-            </a:r>
-            <a:endParaRPr lang="es-ES" sz="1200" noProof="0" dirty="0"/>
-          </a:p>
-          <a:p>
-            <a:pPr marL="0" indent="0">
-              <a:spcAft>
-                <a:spcPts val="800"/>
-              </a:spcAft>
-              <a:buNone/>
-            </a:pPr>
-            <a:r>
-              <a:rPr lang="es-ES" sz="1200" b="1" noProof="0" dirty="0">
-                <a:solidFill>
-                  <a:srgbClr val="1A202C"/>
-                </a:solidFill>
-                <a:latin typeface="Calibri" pitchFamily="34" charset="0"/>
-                <a:ea typeface="Calibri" pitchFamily="34" charset="-122"/>
-                <a:cs typeface="Calibri" pitchFamily="34" charset="-120"/>
-              </a:rPr>
-              <a:t>Idempotencia</a:t>
-            </a:r>
-            <a:endParaRPr lang="es-ES" sz="1200" noProof="0" dirty="0"/>
-          </a:p>
-          <a:p>
-            <a:pPr marL="0" indent="0">
-              <a:spcAft>
-                <a:spcPts val="800"/>
-              </a:spcAft>
-              <a:buNone/>
-            </a:pPr>
-            <a:r>
-              <a:rPr lang="es-ES" sz="1200" noProof="0" dirty="0">
-                <a:solidFill>
-                  <a:srgbClr val="64748B"/>
-                </a:solidFill>
-                <a:latin typeface="Calibri" pitchFamily="34" charset="0"/>
-                <a:ea typeface="Calibri" pitchFamily="34" charset="-122"/>
-                <a:cs typeface="Calibri" pitchFamily="34" charset="-120"/>
-              </a:rPr>
-              <a:t>COPY INTO con load </a:t>
-            </a:r>
-            <a:r>
-              <a:rPr lang="es-ES" sz="1200" noProof="0" dirty="0" err="1">
-                <a:solidFill>
-                  <a:srgbClr val="64748B"/>
-                </a:solidFill>
-                <a:latin typeface="Calibri" pitchFamily="34" charset="0"/>
-                <a:ea typeface="Calibri" pitchFamily="34" charset="-122"/>
-                <a:cs typeface="Calibri" pitchFamily="34" charset="-120"/>
-              </a:rPr>
-              <a:t>metadata</a:t>
-            </a:r>
-            <a:r>
-              <a:rPr lang="es-ES" sz="1200" noProof="0" dirty="0">
-                <a:solidFill>
-                  <a:srgbClr val="64748B"/>
-                </a:solidFill>
-                <a:latin typeface="Calibri" pitchFamily="34" charset="0"/>
-                <a:ea typeface="Calibri" pitchFamily="34" charset="-122"/>
-                <a:cs typeface="Calibri" pitchFamily="34" charset="-120"/>
-              </a:rPr>
-              <a:t>, ON_ERROR=CONTINUE, </a:t>
-            </a:r>
-            <a:r>
-              <a:rPr lang="es-ES" sz="1200" noProof="0" dirty="0" err="1">
-                <a:solidFill>
-                  <a:srgbClr val="64748B"/>
-                </a:solidFill>
-                <a:latin typeface="Calibri" pitchFamily="34" charset="0"/>
-                <a:ea typeface="Calibri" pitchFamily="34" charset="-122"/>
-                <a:cs typeface="Calibri" pitchFamily="34" charset="-120"/>
-              </a:rPr>
-              <a:t>snapshot</a:t>
-            </a:r>
-            <a:r>
-              <a:rPr lang="es-ES" sz="1200" noProof="0" dirty="0">
-                <a:solidFill>
-                  <a:srgbClr val="64748B"/>
-                </a:solidFill>
-                <a:latin typeface="Calibri" pitchFamily="34" charset="0"/>
-                <a:ea typeface="Calibri" pitchFamily="34" charset="-122"/>
-                <a:cs typeface="Calibri" pitchFamily="34" charset="-120"/>
-              </a:rPr>
-              <a:t> SCD2 </a:t>
-            </a:r>
-            <a:r>
-              <a:rPr lang="es-ES" sz="1200" noProof="0" dirty="0" err="1">
-                <a:solidFill>
-                  <a:srgbClr val="64748B"/>
-                </a:solidFill>
-                <a:latin typeface="Calibri" pitchFamily="34" charset="0"/>
-                <a:ea typeface="Calibri" pitchFamily="34" charset="-122"/>
-                <a:cs typeface="Calibri" pitchFamily="34" charset="-120"/>
-              </a:rPr>
-              <a:t>dedup</a:t>
-            </a:r>
-            <a:r>
-              <a:rPr lang="es-ES" sz="1200" noProof="0" dirty="0">
-                <a:solidFill>
-                  <a:srgbClr val="64748B"/>
-                </a:solidFill>
-                <a:latin typeface="Calibri" pitchFamily="34" charset="0"/>
-                <a:ea typeface="Calibri" pitchFamily="34" charset="-122"/>
-                <a:cs typeface="Calibri" pitchFamily="34" charset="-120"/>
-              </a:rPr>
-              <a:t>, MERGE incremental.</a:t>
-            </a:r>
-            <a:endParaRPr lang="es-ES" sz="1200" noProof="0" dirty="0"/>
-          </a:p>
-        </p:txBody>
-      </p:sp>
-      <p:sp>
-        <p:nvSpPr>
-          <p:cNvPr id="9" name="Text 7"/>
-          <p:cNvSpPr/>
-          <p:nvPr/>
-        </p:nvSpPr>
-        <p:spPr>
-          <a:xfrm>
-            <a:off x="8229600" y="4800600"/>
-            <a:ext cx="822960" cy="228600"/>
-          </a:xfrm>
-          <a:prstGeom prst="rect">
-            <a:avLst/>
-          </a:prstGeom>
-          <a:noFill/>
-          <a:ln/>
-        </p:spPr>
-        <p:txBody>
-          <a:bodyPr wrap="square" lIns="0" tIns="0" rIns="0" bIns="0" rtlCol="0" anchor="ctr"/>
-          <a:lstStyle/>
-          <a:p>
-            <a:pPr marL="0" indent="0" algn="r">
-              <a:buNone/>
-            </a:pPr>
-            <a:r>
-              <a:rPr lang="es-ES" sz="900" noProof="0" dirty="0">
-                <a:solidFill>
-                  <a:srgbClr val="64748B"/>
-                </a:solidFill>
-                <a:latin typeface="Calibri" pitchFamily="34" charset="0"/>
-                <a:ea typeface="Calibri" pitchFamily="34" charset="-122"/>
-                <a:cs typeface="Calibri" pitchFamily="34" charset="-120"/>
-              </a:rPr>
-              <a:t>5 / 15</a:t>
+              <a:t>3 / 11</a:t>
             </a:r>
             <a:endParaRPr lang="es-ES" sz="900" noProof="0" dirty="0"/>
           </a:p>
@@ -13638,7 +7529,7 @@
                 <a:ea typeface="Calibri" pitchFamily="34" charset="-122"/>
                 <a:cs typeface="Calibri" pitchFamily="34" charset="-120"/>
               </a:rPr>
-              <a:t>6 / 15</a:t>
+              <a:t>4 / 11</a:t>
             </a:r>
             <a:endParaRPr lang="es-ES" sz="900" noProof="0" dirty="0"/>
           </a:p>
@@ -15297,7 +9188,7 @@
                 <a:ea typeface="Calibri" pitchFamily="34" charset="-122"/>
                 <a:cs typeface="Calibri" pitchFamily="34" charset="-120"/>
               </a:rPr>
-              <a:t>7 / 15</a:t>
+              <a:t>5 / 11</a:t>
             </a:r>
             <a:endParaRPr lang="es-ES" sz="900" noProof="0" dirty="0"/>
           </a:p>
@@ -16642,7 +10533,7 @@
                 <a:ea typeface="Calibri" pitchFamily="34" charset="-122"/>
                 <a:cs typeface="Calibri" pitchFamily="34" charset="-120"/>
               </a:rPr>
-              <a:t>8 / 15</a:t>
+              <a:t>6 / 11</a:t>
             </a:r>
             <a:endParaRPr lang="es-ES" sz="900" noProof="0" dirty="0"/>
           </a:p>
@@ -16707,7 +10598,7 @@
         </p:nvSpPr>
         <p:spPr>
           <a:xfrm>
-            <a:off x="6687030" y="3527177"/>
+            <a:off x="6766560" y="3527177"/>
             <a:ext cx="1862610" cy="820738"/>
           </a:xfrm>
           <a:prstGeom prst="rect">
@@ -17659,27 +11550,6 @@
               <a:buChar char="•"/>
             </a:pPr>
             <a:r>
-              <a:rPr lang="es-ES" sz="1000" noProof="0" dirty="0" err="1">
-                <a:solidFill>
-                  <a:srgbClr val="1A202C"/>
-                </a:solidFill>
-                <a:latin typeface="Calibri" pitchFamily="34" charset="0"/>
-                <a:ea typeface="Calibri" pitchFamily="34" charset="-122"/>
-                <a:cs typeface="Calibri" pitchFamily="34" charset="-120"/>
-              </a:rPr>
-              <a:t>dbt_utils.expression_is_true</a:t>
-            </a:r>
-            <a:endParaRPr lang="es-ES" sz="1000" noProof="0" dirty="0"/>
-          </a:p>
-          <a:p>
-            <a:pPr marL="342900" indent="-342900">
-              <a:spcAft>
-                <a:spcPts val="400"/>
-              </a:spcAft>
-              <a:buSzPct val="100000"/>
-              <a:buChar char="•"/>
-            </a:pPr>
-            <a:r>
               <a:rPr lang="es-ES" sz="1000" noProof="0" dirty="0">
                 <a:solidFill>
                   <a:srgbClr val="1A202C"/>
@@ -18635,7 +12505,7 @@
                 <a:ea typeface="Calibri" pitchFamily="34" charset="-122"/>
                 <a:cs typeface="Calibri" pitchFamily="34" charset="-120"/>
               </a:rPr>
-              <a:t>9 / 15</a:t>
+              <a:t>7 / 11</a:t>
             </a:r>
             <a:endParaRPr lang="es-ES" sz="900" noProof="0" dirty="0"/>
           </a:p>

--- a/presentacion/Presentacion.pptx
+++ b/presentacion/Presentacion.pptx
@@ -10,11 +10,15 @@
   <p:sldIdLst>
     <p:sldId id="256" r:id="rId2"/>
     <p:sldId id="257" r:id="rId3"/>
+    <p:sldId id="258" r:id="rId4"/>
     <p:sldId id="259" r:id="rId5"/>
+    <p:sldId id="260" r:id="rId6"/>
     <p:sldId id="261" r:id="rId7"/>
     <p:sldId id="262" r:id="rId8"/>
     <p:sldId id="263" r:id="rId9"/>
     <p:sldId id="264" r:id="rId10"/>
+    <p:sldId id="265" r:id="rId11"/>
+    <p:sldId id="266" r:id="rId12"/>
     <p:sldId id="267" r:id="rId13"/>
     <p:sldId id="270" r:id="rId14"/>
     <p:sldId id="271" r:id="rId15"/>
@@ -331,6 +335,174 @@
 </p:notes>
 </file>
 
+<file path=ppt/notesSlides/notesSlide10.xml><?xml version="1.0" encoding="utf-8"?>
+<p:notes xmlns:a="http://schemas.openxmlformats.org/drawingml/2006/main" xmlns:r="http://schemas.openxmlformats.org/officeDocument/2006/relationships" xmlns:p="http://schemas.openxmlformats.org/presentationml/2006/main">
+  <p:cSld>
+    <p:spTree>
+      <p:nvGrpSpPr>
+        <p:cNvPr id="1" name=""/>
+        <p:cNvGrpSpPr/>
+        <p:nvPr/>
+      </p:nvGrpSpPr>
+      <p:grpSpPr>
+        <a:xfrm>
+          <a:off x="0" y="0"/>
+          <a:ext cx="0" cy="0"/>
+          <a:chOff x="0" y="0"/>
+          <a:chExt cx="0" cy="0"/>
+        </a:xfrm>
+      </p:grpSpPr>
+      <p:sp>
+        <p:nvSpPr>
+          <p:cNvPr id="2" name="Slide Image Placeholder 1"/>
+          <p:cNvSpPr>
+            <a:spLocks noGrp="1" noRot="1" noChangeAspect="1"/>
+          </p:cNvSpPr>
+          <p:nvPr>
+            <p:ph type="sldImg"/>
+          </p:nvPr>
+        </p:nvSpPr>
+        <p:spPr/>
+      </p:sp>
+      <p:sp>
+        <p:nvSpPr>
+          <p:cNvPr id="3" name="Notes Placeholder 2"/>
+          <p:cNvSpPr>
+            <a:spLocks noGrp="1"/>
+          </p:cNvSpPr>
+          <p:nvPr>
+            <p:ph type="body" idx="1"/>
+          </p:nvPr>
+        </p:nvSpPr>
+        <p:spPr/>
+        <p:txBody>
+          <a:bodyPr/>
+          <a:lstStyle/>
+          <a:p>
+            <a:endParaRPr lang="en-US" dirty="0"/>
+          </a:p>
+        </p:txBody>
+      </p:sp>
+      <p:sp>
+        <p:nvSpPr>
+          <p:cNvPr id="4" name="Slide Number Placeholder 3"/>
+          <p:cNvSpPr>
+            <a:spLocks noGrp="1"/>
+          </p:cNvSpPr>
+          <p:nvPr>
+            <p:ph type="sldNum" sz="quarter" idx="10"/>
+          </p:nvPr>
+        </p:nvSpPr>
+        <p:spPr/>
+        <p:txBody>
+          <a:bodyPr/>
+          <a:lstStyle/>
+          <a:p>
+            <a:fld id="{F7021451-1387-4CA6-816F-3879F97B5CBC}" type="slidenum">
+              <a:rPr lang="en-US"/>
+              <a:t>10</a:t>
+            </a:fld>
+            <a:endParaRPr lang="en-US"/>
+          </a:p>
+        </p:txBody>
+      </p:sp>
+    </p:spTree>
+    <p:extLst>
+      <p:ext uri="{BB962C8B-B14F-4D97-AF65-F5344CB8AC3E}">
+        <p14:creationId xmlns:p14="http://schemas.microsoft.com/office/powerpoint/2010/main" val="1024086991"/>
+      </p:ext>
+    </p:extLst>
+  </p:cSld>
+  <p:clrMapOvr>
+    <a:masterClrMapping/>
+  </p:clrMapOvr>
+</p:notes>
+</file>
+
+<file path=ppt/notesSlides/notesSlide11.xml><?xml version="1.0" encoding="utf-8"?>
+<p:notes xmlns:a="http://schemas.openxmlformats.org/drawingml/2006/main" xmlns:r="http://schemas.openxmlformats.org/officeDocument/2006/relationships" xmlns:p="http://schemas.openxmlformats.org/presentationml/2006/main">
+  <p:cSld>
+    <p:spTree>
+      <p:nvGrpSpPr>
+        <p:cNvPr id="1" name=""/>
+        <p:cNvGrpSpPr/>
+        <p:nvPr/>
+      </p:nvGrpSpPr>
+      <p:grpSpPr>
+        <a:xfrm>
+          <a:off x="0" y="0"/>
+          <a:ext cx="0" cy="0"/>
+          <a:chOff x="0" y="0"/>
+          <a:chExt cx="0" cy="0"/>
+        </a:xfrm>
+      </p:grpSpPr>
+      <p:sp>
+        <p:nvSpPr>
+          <p:cNvPr id="2" name="Slide Image Placeholder 1"/>
+          <p:cNvSpPr>
+            <a:spLocks noGrp="1" noRot="1" noChangeAspect="1"/>
+          </p:cNvSpPr>
+          <p:nvPr>
+            <p:ph type="sldImg"/>
+          </p:nvPr>
+        </p:nvSpPr>
+        <p:spPr/>
+      </p:sp>
+      <p:sp>
+        <p:nvSpPr>
+          <p:cNvPr id="3" name="Notes Placeholder 2"/>
+          <p:cNvSpPr>
+            <a:spLocks noGrp="1"/>
+          </p:cNvSpPr>
+          <p:nvPr>
+            <p:ph type="body" idx="1"/>
+          </p:nvPr>
+        </p:nvSpPr>
+        <p:spPr/>
+        <p:txBody>
+          <a:bodyPr/>
+          <a:lstStyle/>
+          <a:p>
+            <a:endParaRPr lang="en-US" dirty="0"/>
+          </a:p>
+        </p:txBody>
+      </p:sp>
+      <p:sp>
+        <p:nvSpPr>
+          <p:cNvPr id="4" name="Slide Number Placeholder 3"/>
+          <p:cNvSpPr>
+            <a:spLocks noGrp="1"/>
+          </p:cNvSpPr>
+          <p:nvPr>
+            <p:ph type="sldNum" sz="quarter" idx="10"/>
+          </p:nvPr>
+        </p:nvSpPr>
+        <p:spPr/>
+        <p:txBody>
+          <a:bodyPr/>
+          <a:lstStyle/>
+          <a:p>
+            <a:fld id="{F7021451-1387-4CA6-816F-3879F97B5CBC}" type="slidenum">
+              <a:rPr lang="en-US"/>
+              <a:t>11</a:t>
+            </a:fld>
+            <a:endParaRPr lang="en-US"/>
+          </a:p>
+        </p:txBody>
+      </p:sp>
+    </p:spTree>
+    <p:extLst>
+      <p:ext uri="{BB962C8B-B14F-4D97-AF65-F5344CB8AC3E}">
+        <p14:creationId xmlns:p14="http://schemas.microsoft.com/office/powerpoint/2010/main" val="1024086991"/>
+      </p:ext>
+    </p:extLst>
+  </p:cSld>
+  <p:clrMapOvr>
+    <a:masterClrMapping/>
+  </p:clrMapOvr>
+</p:notes>
+</file>
+
 <file path=ppt/notesSlides/notesSlide12.xml><?xml version="1.0" encoding="utf-8"?>
 <p:notes xmlns:a="http://schemas.openxmlformats.org/drawingml/2006/main" xmlns:r="http://schemas.openxmlformats.org/officeDocument/2006/relationships" xmlns:p="http://schemas.openxmlformats.org/presentationml/2006/main">
   <p:cSld>
@@ -799,6 +971,90 @@
 </p:notes>
 </file>
 
+<file path=ppt/notesSlides/notesSlide3.xml><?xml version="1.0" encoding="utf-8"?>
+<p:notes xmlns:a="http://schemas.openxmlformats.org/drawingml/2006/main" xmlns:r="http://schemas.openxmlformats.org/officeDocument/2006/relationships" xmlns:p="http://schemas.openxmlformats.org/presentationml/2006/main">
+  <p:cSld>
+    <p:spTree>
+      <p:nvGrpSpPr>
+        <p:cNvPr id="1" name=""/>
+        <p:cNvGrpSpPr/>
+        <p:nvPr/>
+      </p:nvGrpSpPr>
+      <p:grpSpPr>
+        <a:xfrm>
+          <a:off x="0" y="0"/>
+          <a:ext cx="0" cy="0"/>
+          <a:chOff x="0" y="0"/>
+          <a:chExt cx="0" cy="0"/>
+        </a:xfrm>
+      </p:grpSpPr>
+      <p:sp>
+        <p:nvSpPr>
+          <p:cNvPr id="2" name="Slide Image Placeholder 1"/>
+          <p:cNvSpPr>
+            <a:spLocks noGrp="1" noRot="1" noChangeAspect="1"/>
+          </p:cNvSpPr>
+          <p:nvPr>
+            <p:ph type="sldImg"/>
+          </p:nvPr>
+        </p:nvSpPr>
+        <p:spPr/>
+      </p:sp>
+      <p:sp>
+        <p:nvSpPr>
+          <p:cNvPr id="3" name="Notes Placeholder 2"/>
+          <p:cNvSpPr>
+            <a:spLocks noGrp="1"/>
+          </p:cNvSpPr>
+          <p:nvPr>
+            <p:ph type="body" idx="1"/>
+          </p:nvPr>
+        </p:nvSpPr>
+        <p:spPr/>
+        <p:txBody>
+          <a:bodyPr/>
+          <a:lstStyle/>
+          <a:p>
+            <a:endParaRPr lang="en-US" dirty="0"/>
+          </a:p>
+        </p:txBody>
+      </p:sp>
+      <p:sp>
+        <p:nvSpPr>
+          <p:cNvPr id="4" name="Slide Number Placeholder 3"/>
+          <p:cNvSpPr>
+            <a:spLocks noGrp="1"/>
+          </p:cNvSpPr>
+          <p:nvPr>
+            <p:ph type="sldNum" sz="quarter" idx="10"/>
+          </p:nvPr>
+        </p:nvSpPr>
+        <p:spPr/>
+        <p:txBody>
+          <a:bodyPr/>
+          <a:lstStyle/>
+          <a:p>
+            <a:fld id="{F7021451-1387-4CA6-816F-3879F97B5CBC}" type="slidenum">
+              <a:rPr lang="en-US"/>
+              <a:t>3</a:t>
+            </a:fld>
+            <a:endParaRPr lang="en-US" dirty="0"/>
+          </a:p>
+        </p:txBody>
+      </p:sp>
+    </p:spTree>
+    <p:extLst>
+      <p:ext uri="{BB962C8B-B14F-4D97-AF65-F5344CB8AC3E}">
+        <p14:creationId xmlns:p14="http://schemas.microsoft.com/office/powerpoint/2010/main" val="1024086991"/>
+      </p:ext>
+    </p:extLst>
+  </p:cSld>
+  <p:clrMapOvr>
+    <a:masterClrMapping/>
+  </p:clrMapOvr>
+</p:notes>
+</file>
+
 <file path=ppt/notesSlides/notesSlide4.xml><?xml version="1.0" encoding="utf-8"?>
 <p:notes xmlns:a="http://schemas.openxmlformats.org/drawingml/2006/main" xmlns:r="http://schemas.openxmlformats.org/officeDocument/2006/relationships" xmlns:p="http://schemas.openxmlformats.org/presentationml/2006/main">
   <p:cSld>
@@ -865,6 +1121,90 @@
             <a:fld id="{F7021451-1387-4CA6-816F-3879F97B5CBC}" type="slidenum">
               <a:rPr lang="en-US"/>
               <a:t>4</a:t>
+            </a:fld>
+            <a:endParaRPr lang="en-US"/>
+          </a:p>
+        </p:txBody>
+      </p:sp>
+    </p:spTree>
+    <p:extLst>
+      <p:ext uri="{BB962C8B-B14F-4D97-AF65-F5344CB8AC3E}">
+        <p14:creationId xmlns:p14="http://schemas.microsoft.com/office/powerpoint/2010/main" val="1024086991"/>
+      </p:ext>
+    </p:extLst>
+  </p:cSld>
+  <p:clrMapOvr>
+    <a:masterClrMapping/>
+  </p:clrMapOvr>
+</p:notes>
+</file>
+
+<file path=ppt/notesSlides/notesSlide5.xml><?xml version="1.0" encoding="utf-8"?>
+<p:notes xmlns:a="http://schemas.openxmlformats.org/drawingml/2006/main" xmlns:r="http://schemas.openxmlformats.org/officeDocument/2006/relationships" xmlns:p="http://schemas.openxmlformats.org/presentationml/2006/main">
+  <p:cSld>
+    <p:spTree>
+      <p:nvGrpSpPr>
+        <p:cNvPr id="1" name=""/>
+        <p:cNvGrpSpPr/>
+        <p:nvPr/>
+      </p:nvGrpSpPr>
+      <p:grpSpPr>
+        <a:xfrm>
+          <a:off x="0" y="0"/>
+          <a:ext cx="0" cy="0"/>
+          <a:chOff x="0" y="0"/>
+          <a:chExt cx="0" cy="0"/>
+        </a:xfrm>
+      </p:grpSpPr>
+      <p:sp>
+        <p:nvSpPr>
+          <p:cNvPr id="2" name="Slide Image Placeholder 1"/>
+          <p:cNvSpPr>
+            <a:spLocks noGrp="1" noRot="1" noChangeAspect="1"/>
+          </p:cNvSpPr>
+          <p:nvPr>
+            <p:ph type="sldImg"/>
+          </p:nvPr>
+        </p:nvSpPr>
+        <p:spPr/>
+      </p:sp>
+      <p:sp>
+        <p:nvSpPr>
+          <p:cNvPr id="3" name="Notes Placeholder 2"/>
+          <p:cNvSpPr>
+            <a:spLocks noGrp="1"/>
+          </p:cNvSpPr>
+          <p:nvPr>
+            <p:ph type="body" idx="1"/>
+          </p:nvPr>
+        </p:nvSpPr>
+        <p:spPr/>
+        <p:txBody>
+          <a:bodyPr/>
+          <a:lstStyle/>
+          <a:p>
+            <a:endParaRPr lang="en-US" dirty="0"/>
+          </a:p>
+        </p:txBody>
+      </p:sp>
+      <p:sp>
+        <p:nvSpPr>
+          <p:cNvPr id="4" name="Slide Number Placeholder 3"/>
+          <p:cNvSpPr>
+            <a:spLocks noGrp="1"/>
+          </p:cNvSpPr>
+          <p:nvPr>
+            <p:ph type="sldNum" sz="quarter" idx="10"/>
+          </p:nvPr>
+        </p:nvSpPr>
+        <p:spPr/>
+        <p:txBody>
+          <a:bodyPr/>
+          <a:lstStyle/>
+          <a:p>
+            <a:fld id="{F7021451-1387-4CA6-816F-3879F97B5CBC}" type="slidenum">
+              <a:rPr lang="en-US"/>
+              <a:t>5</a:t>
             </a:fld>
             <a:endParaRPr lang="en-US"/>
           </a:p>
@@ -1998,6 +2338,3129 @@
 </p:sld>
 </file>
 
+<file path=ppt/slides/slide10.xml><?xml version="1.0" encoding="utf-8"?>
+<p:sld xmlns:a="http://schemas.openxmlformats.org/drawingml/2006/main" xmlns:r="http://schemas.openxmlformats.org/officeDocument/2006/relationships" xmlns:p="http://schemas.openxmlformats.org/presentationml/2006/main">
+  <p:cSld name="Slide 10">
+    <p:bg>
+      <p:bgPr>
+        <a:solidFill>
+          <a:srgbClr val="F8FAFC"/>
+        </a:solidFill>
+        <a:effectLst/>
+      </p:bgPr>
+    </p:bg>
+    <p:spTree>
+      <p:nvGrpSpPr>
+        <p:cNvPr id="1" name=""/>
+        <p:cNvGrpSpPr/>
+        <p:nvPr/>
+      </p:nvGrpSpPr>
+      <p:grpSpPr>
+        <a:xfrm>
+          <a:off x="0" y="0"/>
+          <a:ext cx="0" cy="0"/>
+          <a:chOff x="0" y="0"/>
+          <a:chExt cx="0" cy="0"/>
+        </a:xfrm>
+      </p:grpSpPr>
+      <p:sp>
+        <p:nvSpPr>
+          <p:cNvPr id="2" name="Text 0"/>
+          <p:cNvSpPr/>
+          <p:nvPr/>
+        </p:nvSpPr>
+        <p:spPr>
+          <a:xfrm>
+            <a:off x="457200" y="274320"/>
+            <a:ext cx="8229600" cy="274320"/>
+          </a:xfrm>
+          <a:prstGeom prst="rect">
+            <a:avLst/>
+          </a:prstGeom>
+          <a:noFill/>
+          <a:ln/>
+        </p:spPr>
+        <p:txBody>
+          <a:bodyPr wrap="square" lIns="0" tIns="0" rIns="0" bIns="0" rtlCol="0" anchor="ctr"/>
+          <a:lstStyle/>
+          <a:p>
+            <a:pPr marL="0" indent="0">
+              <a:buNone/>
+            </a:pPr>
+            <a:r>
+              <a:rPr lang="es-ES" sz="1100" b="1" kern="0" spc="400" noProof="0" dirty="0">
+                <a:solidFill>
+                  <a:srgbClr val="F59E0B"/>
+                </a:solidFill>
+                <a:latin typeface="Calibri" pitchFamily="34" charset="0"/>
+                <a:ea typeface="Calibri" pitchFamily="34" charset="-122"/>
+                <a:cs typeface="Calibri" pitchFamily="34" charset="-120"/>
+              </a:rPr>
+              <a:t>09 · FORECAST 30 DIAS</a:t>
+            </a:r>
+            <a:endParaRPr lang="es-ES" sz="1100" noProof="0" dirty="0"/>
+          </a:p>
+        </p:txBody>
+      </p:sp>
+      <p:sp>
+        <p:nvSpPr>
+          <p:cNvPr id="3" name="Text 1"/>
+          <p:cNvSpPr/>
+          <p:nvPr/>
+        </p:nvSpPr>
+        <p:spPr>
+          <a:xfrm>
+            <a:off x="457200" y="502920"/>
+            <a:ext cx="8229600" cy="640080"/>
+          </a:xfrm>
+          <a:prstGeom prst="rect">
+            <a:avLst/>
+          </a:prstGeom>
+          <a:noFill/>
+          <a:ln/>
+        </p:spPr>
+        <p:txBody>
+          <a:bodyPr wrap="square" lIns="0" tIns="0" rIns="0" bIns="0" rtlCol="0" anchor="ctr"/>
+          <a:lstStyle/>
+          <a:p>
+            <a:pPr marL="0" indent="0">
+              <a:buNone/>
+            </a:pPr>
+            <a:r>
+              <a:rPr lang="es-ES" sz="2800" b="1" noProof="0" dirty="0">
+                <a:solidFill>
+                  <a:srgbClr val="1E2761"/>
+                </a:solidFill>
+                <a:latin typeface="Calibri" pitchFamily="34" charset="0"/>
+                <a:ea typeface="Calibri" pitchFamily="34" charset="-122"/>
+                <a:cs typeface="Calibri" pitchFamily="34" charset="-120"/>
+              </a:rPr>
+              <a:t>ML.FORECAST con </a:t>
+            </a:r>
+            <a:r>
+              <a:rPr lang="es-ES" sz="2800" b="1" noProof="0" dirty="0" err="1">
+                <a:solidFill>
+                  <a:srgbClr val="1E2761"/>
+                </a:solidFill>
+                <a:latin typeface="Calibri" pitchFamily="34" charset="0"/>
+                <a:ea typeface="Calibri" pitchFamily="34" charset="-122"/>
+                <a:cs typeface="Calibri" pitchFamily="34" charset="-120"/>
+              </a:rPr>
+              <a:t>Snowflake</a:t>
+            </a:r>
+            <a:r>
+              <a:rPr lang="es-ES" sz="2800" b="1" noProof="0" dirty="0">
+                <a:solidFill>
+                  <a:srgbClr val="1E2761"/>
+                </a:solidFill>
+                <a:latin typeface="Calibri" pitchFamily="34" charset="0"/>
+                <a:ea typeface="Calibri" pitchFamily="34" charset="-122"/>
+                <a:cs typeface="Calibri" pitchFamily="34" charset="-120"/>
+              </a:rPr>
+              <a:t> </a:t>
+            </a:r>
+            <a:r>
+              <a:rPr lang="es-ES" sz="2800" b="1" noProof="0" dirty="0" err="1">
+                <a:solidFill>
+                  <a:srgbClr val="1E2761"/>
+                </a:solidFill>
+                <a:latin typeface="Calibri" pitchFamily="34" charset="0"/>
+                <a:ea typeface="Calibri" pitchFamily="34" charset="-122"/>
+                <a:cs typeface="Calibri" pitchFamily="34" charset="-120"/>
+              </a:rPr>
+              <a:t>Cortex</a:t>
+            </a:r>
+            <a:endParaRPr lang="es-ES" sz="2800" noProof="0" dirty="0"/>
+          </a:p>
+        </p:txBody>
+      </p:sp>
+      <p:sp>
+        <p:nvSpPr>
+          <p:cNvPr id="4" name="Shape 2"/>
+          <p:cNvSpPr/>
+          <p:nvPr/>
+        </p:nvSpPr>
+        <p:spPr>
+          <a:xfrm>
+            <a:off x="457200" y="1554480"/>
+            <a:ext cx="1627632" cy="1371600"/>
+          </a:xfrm>
+          <a:prstGeom prst="rect">
+            <a:avLst/>
+          </a:prstGeom>
+          <a:solidFill>
+            <a:srgbClr val="FFFFFF"/>
+          </a:solidFill>
+          <a:ln w="12700">
+            <a:solidFill>
+              <a:srgbClr val="E2E8F0"/>
+            </a:solidFill>
+            <a:prstDash val="solid"/>
+          </a:ln>
+          <a:effectLst>
+            <a:outerShdw blurRad="101600" dist="25400" dir="5400000" algn="bl" rotWithShape="0">
+              <a:srgbClr val="000000">
+                <a:alpha val="12000"/>
+              </a:srgbClr>
+            </a:outerShdw>
+          </a:effectLst>
+        </p:spPr>
+        <p:txBody>
+          <a:bodyPr/>
+          <a:lstStyle/>
+          <a:p>
+            <a:endParaRPr lang="es-ES" noProof="0" dirty="0"/>
+          </a:p>
+        </p:txBody>
+      </p:sp>
+      <p:sp>
+        <p:nvSpPr>
+          <p:cNvPr id="5" name="Shape 3"/>
+          <p:cNvSpPr/>
+          <p:nvPr/>
+        </p:nvSpPr>
+        <p:spPr>
+          <a:xfrm>
+            <a:off x="457200" y="1554480"/>
+            <a:ext cx="1627632" cy="274320"/>
+          </a:xfrm>
+          <a:prstGeom prst="rect">
+            <a:avLst/>
+          </a:prstGeom>
+          <a:solidFill>
+            <a:srgbClr val="2C3E73"/>
+          </a:solidFill>
+          <a:ln/>
+        </p:spPr>
+        <p:txBody>
+          <a:bodyPr/>
+          <a:lstStyle/>
+          <a:p>
+            <a:endParaRPr lang="es-ES" noProof="0" dirty="0"/>
+          </a:p>
+        </p:txBody>
+      </p:sp>
+      <p:sp>
+        <p:nvSpPr>
+          <p:cNvPr id="6" name="Text 4"/>
+          <p:cNvSpPr/>
+          <p:nvPr/>
+        </p:nvSpPr>
+        <p:spPr>
+          <a:xfrm>
+            <a:off x="457200" y="1554480"/>
+            <a:ext cx="1627632" cy="274320"/>
+          </a:xfrm>
+          <a:prstGeom prst="rect">
+            <a:avLst/>
+          </a:prstGeom>
+          <a:noFill/>
+          <a:ln/>
+        </p:spPr>
+        <p:txBody>
+          <a:bodyPr wrap="square" lIns="0" tIns="0" rIns="0" bIns="0" rtlCol="0" anchor="ctr"/>
+          <a:lstStyle/>
+          <a:p>
+            <a:pPr marL="0" indent="0" algn="ctr">
+              <a:buNone/>
+            </a:pPr>
+            <a:r>
+              <a:rPr lang="es-ES" sz="1100" b="1" noProof="0" dirty="0">
+                <a:solidFill>
+                  <a:srgbClr val="FFFFFF"/>
+                </a:solidFill>
+                <a:latin typeface="Calibri" pitchFamily="34" charset="0"/>
+                <a:ea typeface="Calibri" pitchFamily="34" charset="-122"/>
+                <a:cs typeface="Calibri" pitchFamily="34" charset="-120"/>
+              </a:rPr>
+              <a:t>1</a:t>
+            </a:r>
+            <a:endParaRPr lang="es-ES" sz="1100" noProof="0" dirty="0"/>
+          </a:p>
+        </p:txBody>
+      </p:sp>
+      <p:sp>
+        <p:nvSpPr>
+          <p:cNvPr id="7" name="Text 5"/>
+          <p:cNvSpPr/>
+          <p:nvPr/>
+        </p:nvSpPr>
+        <p:spPr>
+          <a:xfrm>
+            <a:off x="548640" y="1874520"/>
+            <a:ext cx="1444752" cy="365760"/>
+          </a:xfrm>
+          <a:prstGeom prst="rect">
+            <a:avLst/>
+          </a:prstGeom>
+          <a:noFill/>
+          <a:ln/>
+        </p:spPr>
+        <p:txBody>
+          <a:bodyPr wrap="square" lIns="0" tIns="0" rIns="0" bIns="0" rtlCol="0" anchor="ctr"/>
+          <a:lstStyle/>
+          <a:p>
+            <a:pPr marL="0" indent="0">
+              <a:buNone/>
+            </a:pPr>
+            <a:r>
+              <a:rPr lang="es-ES" sz="1100" b="1" noProof="0" dirty="0" err="1">
+                <a:solidFill>
+                  <a:srgbClr val="1E2761"/>
+                </a:solidFill>
+                <a:latin typeface="Calibri" pitchFamily="34" charset="0"/>
+                <a:ea typeface="Calibri" pitchFamily="34" charset="-122"/>
+                <a:cs typeface="Calibri" pitchFamily="34" charset="-120"/>
+              </a:rPr>
+              <a:t>fct_trips_daily</a:t>
+            </a:r>
+            <a:endParaRPr lang="es-ES" sz="1100" noProof="0" dirty="0"/>
+          </a:p>
+        </p:txBody>
+      </p:sp>
+      <p:sp>
+        <p:nvSpPr>
+          <p:cNvPr id="8" name="Text 6"/>
+          <p:cNvSpPr/>
+          <p:nvPr/>
+        </p:nvSpPr>
+        <p:spPr>
+          <a:xfrm>
+            <a:off x="548640" y="2240280"/>
+            <a:ext cx="1444752" cy="640080"/>
+          </a:xfrm>
+          <a:prstGeom prst="rect">
+            <a:avLst/>
+          </a:prstGeom>
+          <a:noFill/>
+          <a:ln/>
+        </p:spPr>
+        <p:txBody>
+          <a:bodyPr wrap="square" lIns="0" tIns="0" rIns="0" bIns="0" rtlCol="0" anchor="t"/>
+          <a:lstStyle/>
+          <a:p>
+            <a:pPr marL="0" indent="0">
+              <a:buNone/>
+            </a:pPr>
+            <a:r>
+              <a:rPr lang="es-ES" sz="950" noProof="0" dirty="0" err="1">
+                <a:solidFill>
+                  <a:srgbClr val="1A202C"/>
+                </a:solidFill>
+                <a:latin typeface="Calibri" pitchFamily="34" charset="0"/>
+                <a:ea typeface="Calibri" pitchFamily="34" charset="-122"/>
+                <a:cs typeface="Calibri" pitchFamily="34" charset="-120"/>
+              </a:rPr>
+              <a:t>series_key</a:t>
+            </a:r>
+            <a:r>
+              <a:rPr lang="es-ES" sz="950" noProof="0" dirty="0">
+                <a:solidFill>
+                  <a:srgbClr val="1A202C"/>
+                </a:solidFill>
+                <a:latin typeface="Calibri" pitchFamily="34" charset="0"/>
+                <a:ea typeface="Calibri" pitchFamily="34" charset="-122"/>
+                <a:cs typeface="Calibri" pitchFamily="34" charset="-120"/>
+              </a:rPr>
+              <a:t> = </a:t>
+            </a:r>
+            <a:r>
+              <a:rPr lang="es-ES" sz="950" noProof="0" dirty="0" err="1">
+                <a:solidFill>
+                  <a:srgbClr val="1A202C"/>
+                </a:solidFill>
+                <a:latin typeface="Calibri" pitchFamily="34" charset="0"/>
+                <a:ea typeface="Calibri" pitchFamily="34" charset="-122"/>
+                <a:cs typeface="Calibri" pitchFamily="34" charset="-120"/>
+              </a:rPr>
+              <a:t>city|bike|user</a:t>
+            </a:r>
+            <a:r>
+              <a:rPr lang="es-ES" sz="950" noProof="0" dirty="0">
+                <a:solidFill>
+                  <a:srgbClr val="1A202C"/>
+                </a:solidFill>
+                <a:latin typeface="Calibri" pitchFamily="34" charset="0"/>
+                <a:ea typeface="Calibri" pitchFamily="34" charset="-122"/>
+                <a:cs typeface="Calibri" pitchFamily="34" charset="-120"/>
+              </a:rPr>
+              <a:t> → 8 series. </a:t>
+            </a:r>
+            <a:r>
+              <a:rPr lang="es-ES" sz="950" noProof="0" dirty="0" err="1">
+                <a:solidFill>
+                  <a:srgbClr val="1A202C"/>
+                </a:solidFill>
+                <a:latin typeface="Calibri" pitchFamily="34" charset="0"/>
+                <a:ea typeface="Calibri" pitchFamily="34" charset="-122"/>
+                <a:cs typeface="Calibri" pitchFamily="34" charset="-120"/>
+              </a:rPr>
+              <a:t>n_trips</a:t>
+            </a:r>
+            <a:r>
+              <a:rPr lang="es-ES" sz="950" noProof="0" dirty="0">
+                <a:solidFill>
+                  <a:srgbClr val="1A202C"/>
+                </a:solidFill>
+                <a:latin typeface="Calibri" pitchFamily="34" charset="0"/>
+                <a:ea typeface="Calibri" pitchFamily="34" charset="-122"/>
+                <a:cs typeface="Calibri" pitchFamily="34" charset="-120"/>
+              </a:rPr>
+              <a:t> por </a:t>
+            </a:r>
+            <a:r>
+              <a:rPr lang="es-ES" sz="950" noProof="0" dirty="0" err="1">
+                <a:solidFill>
+                  <a:srgbClr val="1A202C"/>
+                </a:solidFill>
+                <a:latin typeface="Calibri" pitchFamily="34" charset="0"/>
+                <a:ea typeface="Calibri" pitchFamily="34" charset="-122"/>
+                <a:cs typeface="Calibri" pitchFamily="34" charset="-120"/>
+              </a:rPr>
+              <a:t>dia</a:t>
+            </a:r>
+            <a:r>
+              <a:rPr lang="es-ES" sz="950" noProof="0" dirty="0">
+                <a:solidFill>
+                  <a:srgbClr val="1A202C"/>
+                </a:solidFill>
+                <a:latin typeface="Calibri" pitchFamily="34" charset="0"/>
+                <a:ea typeface="Calibri" pitchFamily="34" charset="-122"/>
+                <a:cs typeface="Calibri" pitchFamily="34" charset="-120"/>
+              </a:rPr>
+              <a:t>.</a:t>
+            </a:r>
+            <a:endParaRPr lang="es-ES" sz="950" noProof="0" dirty="0"/>
+          </a:p>
+        </p:txBody>
+      </p:sp>
+      <p:sp>
+        <p:nvSpPr>
+          <p:cNvPr id="9" name="Shape 7"/>
+          <p:cNvSpPr/>
+          <p:nvPr/>
+        </p:nvSpPr>
+        <p:spPr>
+          <a:xfrm>
+            <a:off x="2176272" y="1554480"/>
+            <a:ext cx="1627632" cy="1371600"/>
+          </a:xfrm>
+          <a:prstGeom prst="rect">
+            <a:avLst/>
+          </a:prstGeom>
+          <a:solidFill>
+            <a:srgbClr val="FFFFFF"/>
+          </a:solidFill>
+          <a:ln w="12700">
+            <a:solidFill>
+              <a:srgbClr val="E2E8F0"/>
+            </a:solidFill>
+            <a:prstDash val="solid"/>
+          </a:ln>
+          <a:effectLst>
+            <a:outerShdw blurRad="101600" dist="25400" dir="5400000" algn="bl" rotWithShape="0">
+              <a:srgbClr val="000000">
+                <a:alpha val="12000"/>
+              </a:srgbClr>
+            </a:outerShdw>
+          </a:effectLst>
+        </p:spPr>
+        <p:txBody>
+          <a:bodyPr/>
+          <a:lstStyle/>
+          <a:p>
+            <a:endParaRPr lang="es-ES" noProof="0" dirty="0"/>
+          </a:p>
+        </p:txBody>
+      </p:sp>
+      <p:sp>
+        <p:nvSpPr>
+          <p:cNvPr id="10" name="Shape 8"/>
+          <p:cNvSpPr/>
+          <p:nvPr/>
+        </p:nvSpPr>
+        <p:spPr>
+          <a:xfrm>
+            <a:off x="2176272" y="1554480"/>
+            <a:ext cx="1627632" cy="274320"/>
+          </a:xfrm>
+          <a:prstGeom prst="rect">
+            <a:avLst/>
+          </a:prstGeom>
+          <a:solidFill>
+            <a:srgbClr val="2C3E73"/>
+          </a:solidFill>
+          <a:ln/>
+        </p:spPr>
+        <p:txBody>
+          <a:bodyPr/>
+          <a:lstStyle/>
+          <a:p>
+            <a:endParaRPr lang="es-ES" noProof="0" dirty="0"/>
+          </a:p>
+        </p:txBody>
+      </p:sp>
+      <p:sp>
+        <p:nvSpPr>
+          <p:cNvPr id="11" name="Text 9"/>
+          <p:cNvSpPr/>
+          <p:nvPr/>
+        </p:nvSpPr>
+        <p:spPr>
+          <a:xfrm>
+            <a:off x="2176272" y="1554480"/>
+            <a:ext cx="1627632" cy="274320"/>
+          </a:xfrm>
+          <a:prstGeom prst="rect">
+            <a:avLst/>
+          </a:prstGeom>
+          <a:noFill/>
+          <a:ln/>
+        </p:spPr>
+        <p:txBody>
+          <a:bodyPr wrap="square" lIns="0" tIns="0" rIns="0" bIns="0" rtlCol="0" anchor="ctr"/>
+          <a:lstStyle/>
+          <a:p>
+            <a:pPr marL="0" indent="0" algn="ctr">
+              <a:buNone/>
+            </a:pPr>
+            <a:r>
+              <a:rPr lang="es-ES" sz="1100" b="1" noProof="0" dirty="0">
+                <a:solidFill>
+                  <a:srgbClr val="FFFFFF"/>
+                </a:solidFill>
+                <a:latin typeface="Calibri" pitchFamily="34" charset="0"/>
+                <a:ea typeface="Calibri" pitchFamily="34" charset="-122"/>
+                <a:cs typeface="Calibri" pitchFamily="34" charset="-120"/>
+              </a:rPr>
+              <a:t>2</a:t>
+            </a:r>
+            <a:endParaRPr lang="es-ES" sz="1100" noProof="0" dirty="0"/>
+          </a:p>
+        </p:txBody>
+      </p:sp>
+      <p:sp>
+        <p:nvSpPr>
+          <p:cNvPr id="12" name="Text 10"/>
+          <p:cNvSpPr/>
+          <p:nvPr/>
+        </p:nvSpPr>
+        <p:spPr>
+          <a:xfrm>
+            <a:off x="2267712" y="1874520"/>
+            <a:ext cx="1444752" cy="365760"/>
+          </a:xfrm>
+          <a:prstGeom prst="rect">
+            <a:avLst/>
+          </a:prstGeom>
+          <a:noFill/>
+          <a:ln/>
+        </p:spPr>
+        <p:txBody>
+          <a:bodyPr wrap="square" lIns="0" tIns="0" rIns="0" bIns="0" rtlCol="0" anchor="ctr"/>
+          <a:lstStyle/>
+          <a:p>
+            <a:pPr marL="0" indent="0">
+              <a:buNone/>
+            </a:pPr>
+            <a:r>
+              <a:rPr lang="es-ES" sz="1100" b="1" noProof="0" dirty="0">
+                <a:solidFill>
+                  <a:srgbClr val="1E2761"/>
+                </a:solidFill>
+                <a:latin typeface="Calibri" pitchFamily="34" charset="0"/>
+                <a:ea typeface="Calibri" pitchFamily="34" charset="-122"/>
+                <a:cs typeface="Calibri" pitchFamily="34" charset="-120"/>
+              </a:rPr>
+              <a:t>IA_PREP_DATA</a:t>
+            </a:r>
+            <a:endParaRPr lang="es-ES" sz="1100" noProof="0" dirty="0"/>
+          </a:p>
+        </p:txBody>
+      </p:sp>
+      <p:sp>
+        <p:nvSpPr>
+          <p:cNvPr id="13" name="Text 11"/>
+          <p:cNvSpPr/>
+          <p:nvPr/>
+        </p:nvSpPr>
+        <p:spPr>
+          <a:xfrm>
+            <a:off x="2267712" y="2240280"/>
+            <a:ext cx="1444752" cy="640080"/>
+          </a:xfrm>
+          <a:prstGeom prst="rect">
+            <a:avLst/>
+          </a:prstGeom>
+          <a:noFill/>
+          <a:ln/>
+        </p:spPr>
+        <p:txBody>
+          <a:bodyPr wrap="square" lIns="0" tIns="0" rIns="0" bIns="0" rtlCol="0" anchor="t"/>
+          <a:lstStyle/>
+          <a:p>
+            <a:pPr marL="0" indent="0">
+              <a:buNone/>
+            </a:pPr>
+            <a:r>
+              <a:rPr lang="es-ES" sz="950" noProof="0" dirty="0">
+                <a:solidFill>
+                  <a:srgbClr val="1A202C"/>
+                </a:solidFill>
+                <a:latin typeface="Calibri" pitchFamily="34" charset="0"/>
+                <a:ea typeface="Calibri" pitchFamily="34" charset="-122"/>
+                <a:cs typeface="Calibri" pitchFamily="34" charset="-120"/>
+              </a:rPr>
+              <a:t>Filtra </a:t>
+            </a:r>
+            <a:r>
+              <a:rPr lang="es-ES" sz="950" noProof="0" dirty="0" err="1">
+                <a:solidFill>
+                  <a:srgbClr val="1A202C"/>
+                </a:solidFill>
+                <a:latin typeface="Calibri" pitchFamily="34" charset="0"/>
+                <a:ea typeface="Calibri" pitchFamily="34" charset="-122"/>
+                <a:cs typeface="Calibri" pitchFamily="34" charset="-120"/>
+              </a:rPr>
+              <a:t>outliers</a:t>
+            </a:r>
+            <a:r>
+              <a:rPr lang="es-ES" sz="950" noProof="0" dirty="0">
+                <a:solidFill>
+                  <a:srgbClr val="1A202C"/>
+                </a:solidFill>
+                <a:latin typeface="Calibri" pitchFamily="34" charset="0"/>
+                <a:ea typeface="Calibri" pitchFamily="34" charset="-122"/>
+                <a:cs typeface="Calibri" pitchFamily="34" charset="-120"/>
+              </a:rPr>
+              <a:t> (</a:t>
+            </a:r>
+            <a:r>
+              <a:rPr lang="es-ES" sz="950" noProof="0" dirty="0" err="1">
+                <a:solidFill>
+                  <a:srgbClr val="1A202C"/>
+                </a:solidFill>
+                <a:latin typeface="Calibri" pitchFamily="34" charset="0"/>
+                <a:ea typeface="Calibri" pitchFamily="34" charset="-122"/>
+                <a:cs typeface="Calibri" pitchFamily="34" charset="-120"/>
+              </a:rPr>
+              <a:t>duration</a:t>
+            </a:r>
+            <a:r>
+              <a:rPr lang="es-ES" sz="950" noProof="0" dirty="0">
+                <a:solidFill>
+                  <a:srgbClr val="1A202C"/>
+                </a:solidFill>
+                <a:latin typeface="Calibri" pitchFamily="34" charset="0"/>
+                <a:ea typeface="Calibri" pitchFamily="34" charset="-122"/>
+                <a:cs typeface="Calibri" pitchFamily="34" charset="-120"/>
+              </a:rPr>
+              <a:t>, </a:t>
+            </a:r>
+            <a:r>
+              <a:rPr lang="es-ES" sz="950" noProof="0" dirty="0" err="1">
+                <a:solidFill>
+                  <a:srgbClr val="1A202C"/>
+                </a:solidFill>
+                <a:latin typeface="Calibri" pitchFamily="34" charset="0"/>
+                <a:ea typeface="Calibri" pitchFamily="34" charset="-122"/>
+                <a:cs typeface="Calibri" pitchFamily="34" charset="-120"/>
+              </a:rPr>
+              <a:t>distance</a:t>
+            </a:r>
+            <a:r>
+              <a:rPr lang="es-ES" sz="950" noProof="0" dirty="0">
+                <a:solidFill>
+                  <a:srgbClr val="1A202C"/>
+                </a:solidFill>
+                <a:latin typeface="Calibri" pitchFamily="34" charset="0"/>
+                <a:ea typeface="Calibri" pitchFamily="34" charset="-122"/>
+                <a:cs typeface="Calibri" pitchFamily="34" charset="-120"/>
+              </a:rPr>
+              <a:t>), formatea </a:t>
+            </a:r>
+            <a:r>
+              <a:rPr lang="es-ES" sz="950" noProof="0" dirty="0" err="1">
+                <a:solidFill>
+                  <a:srgbClr val="1A202C"/>
+                </a:solidFill>
+                <a:latin typeface="Calibri" pitchFamily="34" charset="0"/>
+                <a:ea typeface="Calibri" pitchFamily="34" charset="-122"/>
+                <a:cs typeface="Calibri" pitchFamily="34" charset="-120"/>
+              </a:rPr>
+              <a:t>timestamp</a:t>
+            </a:r>
+            <a:r>
+              <a:rPr lang="es-ES" sz="950" noProof="0" dirty="0">
+                <a:solidFill>
+                  <a:srgbClr val="1A202C"/>
+                </a:solidFill>
+                <a:latin typeface="Calibri" pitchFamily="34" charset="0"/>
+                <a:ea typeface="Calibri" pitchFamily="34" charset="-122"/>
+                <a:cs typeface="Calibri" pitchFamily="34" charset="-120"/>
+              </a:rPr>
+              <a:t>.</a:t>
+            </a:r>
+            <a:endParaRPr lang="es-ES" sz="950" noProof="0" dirty="0"/>
+          </a:p>
+        </p:txBody>
+      </p:sp>
+      <p:sp>
+        <p:nvSpPr>
+          <p:cNvPr id="14" name="Shape 12"/>
+          <p:cNvSpPr/>
+          <p:nvPr/>
+        </p:nvSpPr>
+        <p:spPr>
+          <a:xfrm>
+            <a:off x="3895344" y="1554480"/>
+            <a:ext cx="1627632" cy="1371600"/>
+          </a:xfrm>
+          <a:prstGeom prst="rect">
+            <a:avLst/>
+          </a:prstGeom>
+          <a:solidFill>
+            <a:srgbClr val="FFFFFF"/>
+          </a:solidFill>
+          <a:ln w="12700">
+            <a:solidFill>
+              <a:srgbClr val="E2E8F0"/>
+            </a:solidFill>
+            <a:prstDash val="solid"/>
+          </a:ln>
+          <a:effectLst>
+            <a:outerShdw blurRad="101600" dist="25400" dir="5400000" algn="bl" rotWithShape="0">
+              <a:srgbClr val="000000">
+                <a:alpha val="12000"/>
+              </a:srgbClr>
+            </a:outerShdw>
+          </a:effectLst>
+        </p:spPr>
+        <p:txBody>
+          <a:bodyPr/>
+          <a:lstStyle/>
+          <a:p>
+            <a:endParaRPr lang="es-ES" noProof="0" dirty="0"/>
+          </a:p>
+        </p:txBody>
+      </p:sp>
+      <p:sp>
+        <p:nvSpPr>
+          <p:cNvPr id="15" name="Shape 13"/>
+          <p:cNvSpPr/>
+          <p:nvPr/>
+        </p:nvSpPr>
+        <p:spPr>
+          <a:xfrm>
+            <a:off x="3895344" y="1554480"/>
+            <a:ext cx="1627632" cy="274320"/>
+          </a:xfrm>
+          <a:prstGeom prst="rect">
+            <a:avLst/>
+          </a:prstGeom>
+          <a:solidFill>
+            <a:srgbClr val="F59E0B"/>
+          </a:solidFill>
+          <a:ln/>
+        </p:spPr>
+        <p:txBody>
+          <a:bodyPr/>
+          <a:lstStyle/>
+          <a:p>
+            <a:endParaRPr lang="es-ES" noProof="0" dirty="0"/>
+          </a:p>
+        </p:txBody>
+      </p:sp>
+      <p:sp>
+        <p:nvSpPr>
+          <p:cNvPr id="16" name="Text 14"/>
+          <p:cNvSpPr/>
+          <p:nvPr/>
+        </p:nvSpPr>
+        <p:spPr>
+          <a:xfrm>
+            <a:off x="3895344" y="1554480"/>
+            <a:ext cx="1627632" cy="274320"/>
+          </a:xfrm>
+          <a:prstGeom prst="rect">
+            <a:avLst/>
+          </a:prstGeom>
+          <a:noFill/>
+          <a:ln/>
+        </p:spPr>
+        <p:txBody>
+          <a:bodyPr wrap="square" lIns="0" tIns="0" rIns="0" bIns="0" rtlCol="0" anchor="ctr"/>
+          <a:lstStyle/>
+          <a:p>
+            <a:pPr marL="0" indent="0" algn="ctr">
+              <a:buNone/>
+            </a:pPr>
+            <a:r>
+              <a:rPr lang="es-ES" sz="1100" b="1" noProof="0" dirty="0">
+                <a:solidFill>
+                  <a:srgbClr val="FFFFFF"/>
+                </a:solidFill>
+                <a:latin typeface="Calibri" pitchFamily="34" charset="0"/>
+                <a:ea typeface="Calibri" pitchFamily="34" charset="-122"/>
+                <a:cs typeface="Calibri" pitchFamily="34" charset="-120"/>
+              </a:rPr>
+              <a:t>3</a:t>
+            </a:r>
+            <a:endParaRPr lang="es-ES" sz="1100" noProof="0" dirty="0"/>
+          </a:p>
+        </p:txBody>
+      </p:sp>
+      <p:sp>
+        <p:nvSpPr>
+          <p:cNvPr id="17" name="Text 15"/>
+          <p:cNvSpPr/>
+          <p:nvPr/>
+        </p:nvSpPr>
+        <p:spPr>
+          <a:xfrm>
+            <a:off x="3986784" y="1874520"/>
+            <a:ext cx="1444752" cy="365760"/>
+          </a:xfrm>
+          <a:prstGeom prst="rect">
+            <a:avLst/>
+          </a:prstGeom>
+          <a:noFill/>
+          <a:ln/>
+        </p:spPr>
+        <p:txBody>
+          <a:bodyPr wrap="square" lIns="0" tIns="0" rIns="0" bIns="0" rtlCol="0" anchor="ctr"/>
+          <a:lstStyle/>
+          <a:p>
+            <a:pPr marL="0" indent="0">
+              <a:buNone/>
+            </a:pPr>
+            <a:r>
+              <a:rPr lang="es-ES" sz="1100" b="1" noProof="0" dirty="0">
+                <a:solidFill>
+                  <a:srgbClr val="1E2761"/>
+                </a:solidFill>
+                <a:latin typeface="Calibri" pitchFamily="34" charset="0"/>
+                <a:ea typeface="Calibri" pitchFamily="34" charset="-122"/>
+                <a:cs typeface="Calibri" pitchFamily="34" charset="-120"/>
+              </a:rPr>
+              <a:t>SNOWFLAKE.ML.FORECAST</a:t>
+            </a:r>
+            <a:endParaRPr lang="es-ES" sz="1100" noProof="0" dirty="0"/>
+          </a:p>
+        </p:txBody>
+      </p:sp>
+      <p:sp>
+        <p:nvSpPr>
+          <p:cNvPr id="18" name="Text 16"/>
+          <p:cNvSpPr/>
+          <p:nvPr/>
+        </p:nvSpPr>
+        <p:spPr>
+          <a:xfrm>
+            <a:off x="3986784" y="2240280"/>
+            <a:ext cx="1444752" cy="640080"/>
+          </a:xfrm>
+          <a:prstGeom prst="rect">
+            <a:avLst/>
+          </a:prstGeom>
+          <a:noFill/>
+          <a:ln/>
+        </p:spPr>
+        <p:txBody>
+          <a:bodyPr wrap="square" lIns="0" tIns="0" rIns="0" bIns="0" rtlCol="0" anchor="t"/>
+          <a:lstStyle/>
+          <a:p>
+            <a:pPr marL="0" indent="0">
+              <a:buNone/>
+            </a:pPr>
+            <a:r>
+              <a:rPr lang="es-ES" sz="950" noProof="0" dirty="0">
+                <a:solidFill>
+                  <a:srgbClr val="1A202C"/>
+                </a:solidFill>
+                <a:latin typeface="Calibri" pitchFamily="34" charset="0"/>
+                <a:ea typeface="Calibri" pitchFamily="34" charset="-122"/>
+                <a:cs typeface="Calibri" pitchFamily="34" charset="-120"/>
+              </a:rPr>
+              <a:t>Modelo </a:t>
+            </a:r>
+            <a:r>
+              <a:rPr lang="es-ES" sz="950" noProof="0" dirty="0" err="1">
+                <a:solidFill>
+                  <a:srgbClr val="1A202C"/>
+                </a:solidFill>
+                <a:latin typeface="Calibri" pitchFamily="34" charset="0"/>
+                <a:ea typeface="Calibri" pitchFamily="34" charset="-122"/>
+                <a:cs typeface="Calibri" pitchFamily="34" charset="-120"/>
+              </a:rPr>
+              <a:t>Cortex</a:t>
+            </a:r>
+            <a:r>
+              <a:rPr lang="es-ES" sz="950" noProof="0" dirty="0">
+                <a:solidFill>
+                  <a:srgbClr val="1A202C"/>
+                </a:solidFill>
+                <a:latin typeface="Calibri" pitchFamily="34" charset="0"/>
+                <a:ea typeface="Calibri" pitchFamily="34" charset="-122"/>
+                <a:cs typeface="Calibri" pitchFamily="34" charset="-120"/>
+              </a:rPr>
+              <a:t> sobre 10 series top + CALL </a:t>
+            </a:r>
+            <a:r>
+              <a:rPr lang="es-ES" sz="950" noProof="0" dirty="0" err="1">
+                <a:solidFill>
+                  <a:srgbClr val="1A202C"/>
+                </a:solidFill>
+                <a:latin typeface="Calibri" pitchFamily="34" charset="0"/>
+                <a:ea typeface="Calibri" pitchFamily="34" charset="-122"/>
+                <a:cs typeface="Calibri" pitchFamily="34" charset="-120"/>
+              </a:rPr>
+              <a:t>forecast</a:t>
+            </a:r>
+            <a:r>
+              <a:rPr lang="es-ES" sz="950" noProof="0" dirty="0">
+                <a:solidFill>
+                  <a:srgbClr val="1A202C"/>
+                </a:solidFill>
+                <a:latin typeface="Calibri" pitchFamily="34" charset="0"/>
+                <a:ea typeface="Calibri" pitchFamily="34" charset="-122"/>
+                <a:cs typeface="Calibri" pitchFamily="34" charset="-120"/>
+              </a:rPr>
+              <a:t> 30 </a:t>
+            </a:r>
+            <a:r>
+              <a:rPr lang="es-ES" sz="950" noProof="0" dirty="0" err="1">
+                <a:solidFill>
+                  <a:srgbClr val="1A202C"/>
+                </a:solidFill>
+                <a:latin typeface="Calibri" pitchFamily="34" charset="0"/>
+                <a:ea typeface="Calibri" pitchFamily="34" charset="-122"/>
+                <a:cs typeface="Calibri" pitchFamily="34" charset="-120"/>
+              </a:rPr>
+              <a:t>dias</a:t>
+            </a:r>
+            <a:r>
+              <a:rPr lang="es-ES" sz="950" noProof="0" dirty="0">
+                <a:solidFill>
+                  <a:srgbClr val="1A202C"/>
+                </a:solidFill>
+                <a:latin typeface="Calibri" pitchFamily="34" charset="0"/>
+                <a:ea typeface="Calibri" pitchFamily="34" charset="-122"/>
+                <a:cs typeface="Calibri" pitchFamily="34" charset="-120"/>
+              </a:rPr>
+              <a:t>.</a:t>
+            </a:r>
+            <a:endParaRPr lang="es-ES" sz="950" noProof="0" dirty="0"/>
+          </a:p>
+        </p:txBody>
+      </p:sp>
+      <p:sp>
+        <p:nvSpPr>
+          <p:cNvPr id="19" name="Shape 17"/>
+          <p:cNvSpPr/>
+          <p:nvPr/>
+        </p:nvSpPr>
+        <p:spPr>
+          <a:xfrm>
+            <a:off x="5614416" y="1554480"/>
+            <a:ext cx="1627632" cy="1371600"/>
+          </a:xfrm>
+          <a:prstGeom prst="rect">
+            <a:avLst/>
+          </a:prstGeom>
+          <a:solidFill>
+            <a:srgbClr val="FFFFFF"/>
+          </a:solidFill>
+          <a:ln w="12700">
+            <a:solidFill>
+              <a:srgbClr val="E2E8F0"/>
+            </a:solidFill>
+            <a:prstDash val="solid"/>
+          </a:ln>
+          <a:effectLst>
+            <a:outerShdw blurRad="101600" dist="25400" dir="5400000" algn="bl" rotWithShape="0">
+              <a:srgbClr val="000000">
+                <a:alpha val="12000"/>
+              </a:srgbClr>
+            </a:outerShdw>
+          </a:effectLst>
+        </p:spPr>
+        <p:txBody>
+          <a:bodyPr/>
+          <a:lstStyle/>
+          <a:p>
+            <a:endParaRPr lang="es-ES" noProof="0" dirty="0"/>
+          </a:p>
+        </p:txBody>
+      </p:sp>
+      <p:sp>
+        <p:nvSpPr>
+          <p:cNvPr id="20" name="Shape 18"/>
+          <p:cNvSpPr/>
+          <p:nvPr/>
+        </p:nvSpPr>
+        <p:spPr>
+          <a:xfrm>
+            <a:off x="5614416" y="1554480"/>
+            <a:ext cx="1627632" cy="274320"/>
+          </a:xfrm>
+          <a:prstGeom prst="rect">
+            <a:avLst/>
+          </a:prstGeom>
+          <a:solidFill>
+            <a:srgbClr val="2C3E73"/>
+          </a:solidFill>
+          <a:ln/>
+        </p:spPr>
+        <p:txBody>
+          <a:bodyPr/>
+          <a:lstStyle/>
+          <a:p>
+            <a:endParaRPr lang="es-ES" noProof="0" dirty="0"/>
+          </a:p>
+        </p:txBody>
+      </p:sp>
+      <p:sp>
+        <p:nvSpPr>
+          <p:cNvPr id="21" name="Text 19"/>
+          <p:cNvSpPr/>
+          <p:nvPr/>
+        </p:nvSpPr>
+        <p:spPr>
+          <a:xfrm>
+            <a:off x="5614416" y="1554480"/>
+            <a:ext cx="1627632" cy="274320"/>
+          </a:xfrm>
+          <a:prstGeom prst="rect">
+            <a:avLst/>
+          </a:prstGeom>
+          <a:noFill/>
+          <a:ln/>
+        </p:spPr>
+        <p:txBody>
+          <a:bodyPr wrap="square" lIns="0" tIns="0" rIns="0" bIns="0" rtlCol="0" anchor="ctr"/>
+          <a:lstStyle/>
+          <a:p>
+            <a:pPr marL="0" indent="0" algn="ctr">
+              <a:buNone/>
+            </a:pPr>
+            <a:r>
+              <a:rPr lang="es-ES" sz="1100" b="1" noProof="0" dirty="0">
+                <a:solidFill>
+                  <a:srgbClr val="FFFFFF"/>
+                </a:solidFill>
+                <a:latin typeface="Calibri" pitchFamily="34" charset="0"/>
+                <a:ea typeface="Calibri" pitchFamily="34" charset="-122"/>
+                <a:cs typeface="Calibri" pitchFamily="34" charset="-120"/>
+              </a:rPr>
+              <a:t>4</a:t>
+            </a:r>
+            <a:endParaRPr lang="es-ES" sz="1100" noProof="0" dirty="0"/>
+          </a:p>
+        </p:txBody>
+      </p:sp>
+      <p:sp>
+        <p:nvSpPr>
+          <p:cNvPr id="22" name="Text 20"/>
+          <p:cNvSpPr/>
+          <p:nvPr/>
+        </p:nvSpPr>
+        <p:spPr>
+          <a:xfrm>
+            <a:off x="5705856" y="1874520"/>
+            <a:ext cx="1444752" cy="365760"/>
+          </a:xfrm>
+          <a:prstGeom prst="rect">
+            <a:avLst/>
+          </a:prstGeom>
+          <a:noFill/>
+          <a:ln/>
+        </p:spPr>
+        <p:txBody>
+          <a:bodyPr wrap="square" lIns="0" tIns="0" rIns="0" bIns="0" rtlCol="0" anchor="ctr"/>
+          <a:lstStyle/>
+          <a:p>
+            <a:pPr marL="0" indent="0">
+              <a:buNone/>
+            </a:pPr>
+            <a:r>
+              <a:rPr lang="es-ES" sz="1100" b="1" noProof="0" dirty="0">
+                <a:solidFill>
+                  <a:srgbClr val="1E2761"/>
+                </a:solidFill>
+                <a:latin typeface="Calibri" pitchFamily="34" charset="0"/>
+                <a:ea typeface="Calibri" pitchFamily="34" charset="-122"/>
+                <a:cs typeface="Calibri" pitchFamily="34" charset="-120"/>
+              </a:rPr>
+              <a:t>PRONOSTICO_FINAL</a:t>
+            </a:r>
+            <a:endParaRPr lang="es-ES" sz="1100" noProof="0" dirty="0"/>
+          </a:p>
+        </p:txBody>
+      </p:sp>
+      <p:sp>
+        <p:nvSpPr>
+          <p:cNvPr id="23" name="Text 21"/>
+          <p:cNvSpPr/>
+          <p:nvPr/>
+        </p:nvSpPr>
+        <p:spPr>
+          <a:xfrm>
+            <a:off x="5705856" y="2240280"/>
+            <a:ext cx="1444752" cy="640080"/>
+          </a:xfrm>
+          <a:prstGeom prst="rect">
+            <a:avLst/>
+          </a:prstGeom>
+          <a:noFill/>
+          <a:ln/>
+        </p:spPr>
+        <p:txBody>
+          <a:bodyPr wrap="square" lIns="0" tIns="0" rIns="0" bIns="0" rtlCol="0" anchor="t"/>
+          <a:lstStyle/>
+          <a:p>
+            <a:pPr marL="0" indent="0">
+              <a:buNone/>
+            </a:pPr>
+            <a:r>
+              <a:rPr lang="es-ES" sz="950" noProof="0" dirty="0">
+                <a:solidFill>
+                  <a:srgbClr val="1A202C"/>
+                </a:solidFill>
+                <a:latin typeface="Calibri" pitchFamily="34" charset="0"/>
+                <a:ea typeface="Calibri" pitchFamily="34" charset="-122"/>
+                <a:cs typeface="Calibri" pitchFamily="34" charset="-120"/>
+              </a:rPr>
+              <a:t>Tabla </a:t>
+            </a:r>
+            <a:r>
+              <a:rPr lang="es-ES" sz="950" noProof="0" dirty="0" err="1">
+                <a:solidFill>
+                  <a:srgbClr val="1A202C"/>
+                </a:solidFill>
+                <a:latin typeface="Calibri" pitchFamily="34" charset="0"/>
+                <a:ea typeface="Calibri" pitchFamily="34" charset="-122"/>
+                <a:cs typeface="Calibri" pitchFamily="34" charset="-120"/>
+              </a:rPr>
+              <a:t>fisica</a:t>
+            </a:r>
+            <a:r>
+              <a:rPr lang="es-ES" sz="950" noProof="0" dirty="0">
+                <a:solidFill>
+                  <a:srgbClr val="1A202C"/>
+                </a:solidFill>
+                <a:latin typeface="Calibri" pitchFamily="34" charset="0"/>
+                <a:ea typeface="Calibri" pitchFamily="34" charset="-122"/>
+                <a:cs typeface="Calibri" pitchFamily="34" charset="-120"/>
+              </a:rPr>
+              <a:t> con SERIES/TS/FORECAST/LOWER/UPPER.</a:t>
+            </a:r>
+            <a:endParaRPr lang="es-ES" sz="950" noProof="0" dirty="0"/>
+          </a:p>
+        </p:txBody>
+      </p:sp>
+      <p:sp>
+        <p:nvSpPr>
+          <p:cNvPr id="24" name="Shape 22"/>
+          <p:cNvSpPr/>
+          <p:nvPr/>
+        </p:nvSpPr>
+        <p:spPr>
+          <a:xfrm>
+            <a:off x="7333488" y="1554480"/>
+            <a:ext cx="1627632" cy="1371600"/>
+          </a:xfrm>
+          <a:prstGeom prst="rect">
+            <a:avLst/>
+          </a:prstGeom>
+          <a:solidFill>
+            <a:srgbClr val="FFFFFF"/>
+          </a:solidFill>
+          <a:ln w="12700">
+            <a:solidFill>
+              <a:srgbClr val="E2E8F0"/>
+            </a:solidFill>
+            <a:prstDash val="solid"/>
+          </a:ln>
+          <a:effectLst>
+            <a:outerShdw blurRad="101600" dist="25400" dir="5400000" algn="bl" rotWithShape="0">
+              <a:srgbClr val="000000">
+                <a:alpha val="12000"/>
+              </a:srgbClr>
+            </a:outerShdw>
+          </a:effectLst>
+        </p:spPr>
+        <p:txBody>
+          <a:bodyPr/>
+          <a:lstStyle/>
+          <a:p>
+            <a:endParaRPr lang="es-ES" noProof="0" dirty="0"/>
+          </a:p>
+        </p:txBody>
+      </p:sp>
+      <p:sp>
+        <p:nvSpPr>
+          <p:cNvPr id="25" name="Shape 23"/>
+          <p:cNvSpPr/>
+          <p:nvPr/>
+        </p:nvSpPr>
+        <p:spPr>
+          <a:xfrm>
+            <a:off x="7333488" y="1554480"/>
+            <a:ext cx="1627632" cy="274320"/>
+          </a:xfrm>
+          <a:prstGeom prst="rect">
+            <a:avLst/>
+          </a:prstGeom>
+          <a:solidFill>
+            <a:srgbClr val="2C3E73"/>
+          </a:solidFill>
+          <a:ln/>
+        </p:spPr>
+        <p:txBody>
+          <a:bodyPr/>
+          <a:lstStyle/>
+          <a:p>
+            <a:endParaRPr lang="es-ES" noProof="0" dirty="0"/>
+          </a:p>
+        </p:txBody>
+      </p:sp>
+      <p:sp>
+        <p:nvSpPr>
+          <p:cNvPr id="26" name="Text 24"/>
+          <p:cNvSpPr/>
+          <p:nvPr/>
+        </p:nvSpPr>
+        <p:spPr>
+          <a:xfrm>
+            <a:off x="7333488" y="1554480"/>
+            <a:ext cx="1627632" cy="274320"/>
+          </a:xfrm>
+          <a:prstGeom prst="rect">
+            <a:avLst/>
+          </a:prstGeom>
+          <a:noFill/>
+          <a:ln/>
+        </p:spPr>
+        <p:txBody>
+          <a:bodyPr wrap="square" lIns="0" tIns="0" rIns="0" bIns="0" rtlCol="0" anchor="ctr"/>
+          <a:lstStyle/>
+          <a:p>
+            <a:pPr marL="0" indent="0" algn="ctr">
+              <a:buNone/>
+            </a:pPr>
+            <a:r>
+              <a:rPr lang="es-ES" sz="1100" b="1" noProof="0" dirty="0">
+                <a:solidFill>
+                  <a:srgbClr val="FFFFFF"/>
+                </a:solidFill>
+                <a:latin typeface="Calibri" pitchFamily="34" charset="0"/>
+                <a:ea typeface="Calibri" pitchFamily="34" charset="-122"/>
+                <a:cs typeface="Calibri" pitchFamily="34" charset="-120"/>
+              </a:rPr>
+              <a:t>5</a:t>
+            </a:r>
+            <a:endParaRPr lang="es-ES" sz="1100" noProof="0" dirty="0"/>
+          </a:p>
+        </p:txBody>
+      </p:sp>
+      <p:sp>
+        <p:nvSpPr>
+          <p:cNvPr id="27" name="Text 25"/>
+          <p:cNvSpPr/>
+          <p:nvPr/>
+        </p:nvSpPr>
+        <p:spPr>
+          <a:xfrm>
+            <a:off x="7424928" y="1874520"/>
+            <a:ext cx="1444752" cy="365760"/>
+          </a:xfrm>
+          <a:prstGeom prst="rect">
+            <a:avLst/>
+          </a:prstGeom>
+          <a:noFill/>
+          <a:ln/>
+        </p:spPr>
+        <p:txBody>
+          <a:bodyPr wrap="square" lIns="0" tIns="0" rIns="0" bIns="0" rtlCol="0" anchor="ctr"/>
+          <a:lstStyle/>
+          <a:p>
+            <a:pPr marL="0" indent="0">
+              <a:buNone/>
+            </a:pPr>
+            <a:r>
+              <a:rPr lang="es-ES" sz="1100" b="1" noProof="0" dirty="0" err="1">
+                <a:solidFill>
+                  <a:srgbClr val="1E2761"/>
+                </a:solidFill>
+                <a:latin typeface="Calibri" pitchFamily="34" charset="0"/>
+                <a:ea typeface="Calibri" pitchFamily="34" charset="-122"/>
+                <a:cs typeface="Calibri" pitchFamily="34" charset="-120"/>
+              </a:rPr>
+              <a:t>fct_forecast_trips</a:t>
+            </a:r>
+            <a:endParaRPr lang="es-ES" sz="1100" noProof="0" dirty="0"/>
+          </a:p>
+        </p:txBody>
+      </p:sp>
+      <p:sp>
+        <p:nvSpPr>
+          <p:cNvPr id="28" name="Text 26"/>
+          <p:cNvSpPr/>
+          <p:nvPr/>
+        </p:nvSpPr>
+        <p:spPr>
+          <a:xfrm>
+            <a:off x="7424928" y="2240280"/>
+            <a:ext cx="1444752" cy="640080"/>
+          </a:xfrm>
+          <a:prstGeom prst="rect">
+            <a:avLst/>
+          </a:prstGeom>
+          <a:noFill/>
+          <a:ln/>
+        </p:spPr>
+        <p:txBody>
+          <a:bodyPr wrap="square" lIns="0" tIns="0" rIns="0" bIns="0" rtlCol="0" anchor="t"/>
+          <a:lstStyle/>
+          <a:p>
+            <a:pPr marL="0" indent="0">
+              <a:buNone/>
+            </a:pPr>
+            <a:r>
+              <a:rPr lang="es-ES" sz="950" noProof="0" dirty="0" err="1">
+                <a:solidFill>
+                  <a:srgbClr val="1A202C"/>
+                </a:solidFill>
+                <a:latin typeface="Calibri" pitchFamily="34" charset="0"/>
+                <a:ea typeface="Calibri" pitchFamily="34" charset="-122"/>
+                <a:cs typeface="Calibri" pitchFamily="34" charset="-120"/>
+              </a:rPr>
+              <a:t>dbt</a:t>
+            </a:r>
+            <a:r>
+              <a:rPr lang="es-ES" sz="950" noProof="0" dirty="0">
+                <a:solidFill>
+                  <a:srgbClr val="1A202C"/>
+                </a:solidFill>
+                <a:latin typeface="Calibri" pitchFamily="34" charset="0"/>
+                <a:ea typeface="Calibri" pitchFamily="34" charset="-122"/>
+                <a:cs typeface="Calibri" pitchFamily="34" charset="-120"/>
+              </a:rPr>
+              <a:t> </a:t>
+            </a:r>
+            <a:r>
+              <a:rPr lang="es-ES" sz="950" noProof="0" dirty="0" err="1">
+                <a:solidFill>
+                  <a:srgbClr val="1A202C"/>
+                </a:solidFill>
+                <a:latin typeface="Calibri" pitchFamily="34" charset="0"/>
+                <a:ea typeface="Calibri" pitchFamily="34" charset="-122"/>
+                <a:cs typeface="Calibri" pitchFamily="34" charset="-120"/>
+              </a:rPr>
+              <a:t>model</a:t>
+            </a:r>
+            <a:r>
+              <a:rPr lang="es-ES" sz="950" noProof="0" dirty="0">
+                <a:solidFill>
+                  <a:srgbClr val="1A202C"/>
+                </a:solidFill>
+                <a:latin typeface="Calibri" pitchFamily="34" charset="0"/>
+                <a:ea typeface="Calibri" pitchFamily="34" charset="-122"/>
+                <a:cs typeface="Calibri" pitchFamily="34" charset="-120"/>
+              </a:rPr>
+              <a:t>: </a:t>
+            </a:r>
+            <a:r>
+              <a:rPr lang="es-ES" sz="950" noProof="0" dirty="0" err="1">
+                <a:solidFill>
+                  <a:srgbClr val="1A202C"/>
+                </a:solidFill>
+                <a:latin typeface="Calibri" pitchFamily="34" charset="0"/>
+                <a:ea typeface="Calibri" pitchFamily="34" charset="-122"/>
+                <a:cs typeface="Calibri" pitchFamily="34" charset="-120"/>
+              </a:rPr>
+              <a:t>denormaliza</a:t>
+            </a:r>
+            <a:r>
+              <a:rPr lang="es-ES" sz="950" noProof="0" dirty="0">
+                <a:solidFill>
+                  <a:srgbClr val="1A202C"/>
+                </a:solidFill>
+                <a:latin typeface="Calibri" pitchFamily="34" charset="0"/>
+                <a:ea typeface="Calibri" pitchFamily="34" charset="-122"/>
+                <a:cs typeface="Calibri" pitchFamily="34" charset="-120"/>
+              </a:rPr>
+              <a:t> vs </a:t>
+            </a:r>
+            <a:r>
+              <a:rPr lang="es-ES" sz="950" noProof="0" dirty="0" err="1">
+                <a:solidFill>
+                  <a:srgbClr val="1A202C"/>
+                </a:solidFill>
+                <a:latin typeface="Calibri" pitchFamily="34" charset="0"/>
+                <a:ea typeface="Calibri" pitchFamily="34" charset="-122"/>
+                <a:cs typeface="Calibri" pitchFamily="34" charset="-120"/>
+              </a:rPr>
+              <a:t>dim_city</a:t>
+            </a:r>
+            <a:r>
+              <a:rPr lang="es-ES" sz="950" noProof="0" dirty="0">
+                <a:solidFill>
+                  <a:srgbClr val="1A202C"/>
+                </a:solidFill>
+                <a:latin typeface="Calibri" pitchFamily="34" charset="0"/>
+                <a:ea typeface="Calibri" pitchFamily="34" charset="-122"/>
+                <a:cs typeface="Calibri" pitchFamily="34" charset="-120"/>
+              </a:rPr>
+              <a:t>/</a:t>
+            </a:r>
+            <a:r>
+              <a:rPr lang="es-ES" sz="950" noProof="0" dirty="0" err="1">
+                <a:solidFill>
+                  <a:srgbClr val="1A202C"/>
+                </a:solidFill>
+                <a:latin typeface="Calibri" pitchFamily="34" charset="0"/>
+                <a:ea typeface="Calibri" pitchFamily="34" charset="-122"/>
+                <a:cs typeface="Calibri" pitchFamily="34" charset="-120"/>
+              </a:rPr>
+              <a:t>bike</a:t>
+            </a:r>
+            <a:r>
+              <a:rPr lang="es-ES" sz="950" noProof="0" dirty="0">
+                <a:solidFill>
+                  <a:srgbClr val="1A202C"/>
+                </a:solidFill>
+                <a:latin typeface="Calibri" pitchFamily="34" charset="0"/>
+                <a:ea typeface="Calibri" pitchFamily="34" charset="-122"/>
+                <a:cs typeface="Calibri" pitchFamily="34" charset="-120"/>
+              </a:rPr>
+              <a:t>/</a:t>
+            </a:r>
+            <a:r>
+              <a:rPr lang="es-ES" sz="950" noProof="0" dirty="0" err="1">
+                <a:solidFill>
+                  <a:srgbClr val="1A202C"/>
+                </a:solidFill>
+                <a:latin typeface="Calibri" pitchFamily="34" charset="0"/>
+                <a:ea typeface="Calibri" pitchFamily="34" charset="-122"/>
+                <a:cs typeface="Calibri" pitchFamily="34" charset="-120"/>
+              </a:rPr>
+              <a:t>user</a:t>
+            </a:r>
+            <a:r>
+              <a:rPr lang="es-ES" sz="950" noProof="0" dirty="0">
+                <a:solidFill>
+                  <a:srgbClr val="1A202C"/>
+                </a:solidFill>
+                <a:latin typeface="Calibri" pitchFamily="34" charset="0"/>
+                <a:ea typeface="Calibri" pitchFamily="34" charset="-122"/>
+                <a:cs typeface="Calibri" pitchFamily="34" charset="-120"/>
+              </a:rPr>
+              <a:t>/fecha.</a:t>
+            </a:r>
+            <a:endParaRPr lang="es-ES" sz="950" noProof="0" dirty="0"/>
+          </a:p>
+        </p:txBody>
+      </p:sp>
+      <p:sp>
+        <p:nvSpPr>
+          <p:cNvPr id="29" name="Text 27"/>
+          <p:cNvSpPr/>
+          <p:nvPr/>
+        </p:nvSpPr>
+        <p:spPr>
+          <a:xfrm>
+            <a:off x="2039112" y="2103120"/>
+            <a:ext cx="182880" cy="274320"/>
+          </a:xfrm>
+          <a:prstGeom prst="rect">
+            <a:avLst/>
+          </a:prstGeom>
+          <a:noFill/>
+          <a:ln/>
+        </p:spPr>
+        <p:txBody>
+          <a:bodyPr wrap="square" lIns="0" tIns="0" rIns="0" bIns="0" rtlCol="0" anchor="ctr"/>
+          <a:lstStyle/>
+          <a:p>
+            <a:pPr marL="0" indent="0" algn="ctr">
+              <a:buNone/>
+            </a:pPr>
+            <a:r>
+              <a:rPr lang="es-ES" sz="1400" b="1" noProof="0" dirty="0">
+                <a:solidFill>
+                  <a:srgbClr val="F59E0B"/>
+                </a:solidFill>
+                <a:latin typeface="Calibri" pitchFamily="34" charset="0"/>
+                <a:ea typeface="Calibri" pitchFamily="34" charset="-122"/>
+                <a:cs typeface="Calibri" pitchFamily="34" charset="-120"/>
+              </a:rPr>
+              <a:t>▶</a:t>
+            </a:r>
+            <a:endParaRPr lang="es-ES" sz="1400" noProof="0" dirty="0"/>
+          </a:p>
+        </p:txBody>
+      </p:sp>
+      <p:sp>
+        <p:nvSpPr>
+          <p:cNvPr id="30" name="Text 28"/>
+          <p:cNvSpPr/>
+          <p:nvPr/>
+        </p:nvSpPr>
+        <p:spPr>
+          <a:xfrm>
+            <a:off x="3758184" y="2103120"/>
+            <a:ext cx="182880" cy="274320"/>
+          </a:xfrm>
+          <a:prstGeom prst="rect">
+            <a:avLst/>
+          </a:prstGeom>
+          <a:noFill/>
+          <a:ln/>
+        </p:spPr>
+        <p:txBody>
+          <a:bodyPr wrap="square" lIns="0" tIns="0" rIns="0" bIns="0" rtlCol="0" anchor="ctr"/>
+          <a:lstStyle/>
+          <a:p>
+            <a:pPr marL="0" indent="0" algn="ctr">
+              <a:buNone/>
+            </a:pPr>
+            <a:r>
+              <a:rPr lang="es-ES" sz="1400" b="1" noProof="0" dirty="0">
+                <a:solidFill>
+                  <a:srgbClr val="F59E0B"/>
+                </a:solidFill>
+                <a:latin typeface="Calibri" pitchFamily="34" charset="0"/>
+                <a:ea typeface="Calibri" pitchFamily="34" charset="-122"/>
+                <a:cs typeface="Calibri" pitchFamily="34" charset="-120"/>
+              </a:rPr>
+              <a:t>▶</a:t>
+            </a:r>
+            <a:endParaRPr lang="es-ES" sz="1400" noProof="0" dirty="0"/>
+          </a:p>
+        </p:txBody>
+      </p:sp>
+      <p:sp>
+        <p:nvSpPr>
+          <p:cNvPr id="31" name="Text 29"/>
+          <p:cNvSpPr/>
+          <p:nvPr/>
+        </p:nvSpPr>
+        <p:spPr>
+          <a:xfrm>
+            <a:off x="5477256" y="2103120"/>
+            <a:ext cx="182880" cy="274320"/>
+          </a:xfrm>
+          <a:prstGeom prst="rect">
+            <a:avLst/>
+          </a:prstGeom>
+          <a:noFill/>
+          <a:ln/>
+        </p:spPr>
+        <p:txBody>
+          <a:bodyPr wrap="square" lIns="0" tIns="0" rIns="0" bIns="0" rtlCol="0" anchor="ctr"/>
+          <a:lstStyle/>
+          <a:p>
+            <a:pPr marL="0" indent="0" algn="ctr">
+              <a:buNone/>
+            </a:pPr>
+            <a:r>
+              <a:rPr lang="es-ES" sz="1400" b="1" noProof="0" dirty="0">
+                <a:solidFill>
+                  <a:srgbClr val="F59E0B"/>
+                </a:solidFill>
+                <a:latin typeface="Calibri" pitchFamily="34" charset="0"/>
+                <a:ea typeface="Calibri" pitchFamily="34" charset="-122"/>
+                <a:cs typeface="Calibri" pitchFamily="34" charset="-120"/>
+              </a:rPr>
+              <a:t>▶</a:t>
+            </a:r>
+            <a:endParaRPr lang="es-ES" sz="1400" noProof="0" dirty="0"/>
+          </a:p>
+        </p:txBody>
+      </p:sp>
+      <p:sp>
+        <p:nvSpPr>
+          <p:cNvPr id="32" name="Text 30"/>
+          <p:cNvSpPr/>
+          <p:nvPr/>
+        </p:nvSpPr>
+        <p:spPr>
+          <a:xfrm>
+            <a:off x="7196328" y="2103120"/>
+            <a:ext cx="182880" cy="274320"/>
+          </a:xfrm>
+          <a:prstGeom prst="rect">
+            <a:avLst/>
+          </a:prstGeom>
+          <a:noFill/>
+          <a:ln/>
+        </p:spPr>
+        <p:txBody>
+          <a:bodyPr wrap="square" lIns="0" tIns="0" rIns="0" bIns="0" rtlCol="0" anchor="ctr"/>
+          <a:lstStyle/>
+          <a:p>
+            <a:pPr marL="0" indent="0" algn="ctr">
+              <a:buNone/>
+            </a:pPr>
+            <a:r>
+              <a:rPr lang="es-ES" sz="1400" b="1" noProof="0" dirty="0">
+                <a:solidFill>
+                  <a:srgbClr val="F59E0B"/>
+                </a:solidFill>
+                <a:latin typeface="Calibri" pitchFamily="34" charset="0"/>
+                <a:ea typeface="Calibri" pitchFamily="34" charset="-122"/>
+                <a:cs typeface="Calibri" pitchFamily="34" charset="-120"/>
+              </a:rPr>
+              <a:t>▶</a:t>
+            </a:r>
+            <a:endParaRPr lang="es-ES" sz="1400" noProof="0" dirty="0"/>
+          </a:p>
+        </p:txBody>
+      </p:sp>
+      <p:sp>
+        <p:nvSpPr>
+          <p:cNvPr id="33" name="Shape 31"/>
+          <p:cNvSpPr/>
+          <p:nvPr/>
+        </p:nvSpPr>
+        <p:spPr>
+          <a:xfrm>
+            <a:off x="457200" y="3200400"/>
+            <a:ext cx="8229600" cy="1417320"/>
+          </a:xfrm>
+          <a:prstGeom prst="rect">
+            <a:avLst/>
+          </a:prstGeom>
+          <a:solidFill>
+            <a:srgbClr val="FFFFFF"/>
+          </a:solidFill>
+          <a:ln w="12700">
+            <a:solidFill>
+              <a:srgbClr val="E2E8F0"/>
+            </a:solidFill>
+            <a:prstDash val="solid"/>
+          </a:ln>
+          <a:effectLst>
+            <a:outerShdw blurRad="101600" dist="25400" dir="5400000" algn="bl" rotWithShape="0">
+              <a:srgbClr val="000000">
+                <a:alpha val="12000"/>
+              </a:srgbClr>
+            </a:outerShdw>
+          </a:effectLst>
+        </p:spPr>
+        <p:txBody>
+          <a:bodyPr/>
+          <a:lstStyle/>
+          <a:p>
+            <a:endParaRPr lang="es-ES" noProof="0" dirty="0"/>
+          </a:p>
+        </p:txBody>
+      </p:sp>
+      <p:sp>
+        <p:nvSpPr>
+          <p:cNvPr id="34" name="Shape 32"/>
+          <p:cNvSpPr/>
+          <p:nvPr/>
+        </p:nvSpPr>
+        <p:spPr>
+          <a:xfrm>
+            <a:off x="457200" y="3200400"/>
+            <a:ext cx="73152" cy="1417320"/>
+          </a:xfrm>
+          <a:prstGeom prst="rect">
+            <a:avLst/>
+          </a:prstGeom>
+          <a:solidFill>
+            <a:srgbClr val="F59E0B"/>
+          </a:solidFill>
+          <a:ln/>
+        </p:spPr>
+        <p:txBody>
+          <a:bodyPr/>
+          <a:lstStyle/>
+          <a:p>
+            <a:endParaRPr lang="es-ES" noProof="0" dirty="0"/>
+          </a:p>
+        </p:txBody>
+      </p:sp>
+      <p:sp>
+        <p:nvSpPr>
+          <p:cNvPr id="35" name="Text 33"/>
+          <p:cNvSpPr/>
+          <p:nvPr/>
+        </p:nvSpPr>
+        <p:spPr>
+          <a:xfrm>
+            <a:off x="731520" y="3291840"/>
+            <a:ext cx="7772400" cy="365760"/>
+          </a:xfrm>
+          <a:prstGeom prst="rect">
+            <a:avLst/>
+          </a:prstGeom>
+          <a:noFill/>
+          <a:ln/>
+        </p:spPr>
+        <p:txBody>
+          <a:bodyPr wrap="square" lIns="0" tIns="0" rIns="0" bIns="0" rtlCol="0" anchor="ctr"/>
+          <a:lstStyle/>
+          <a:p>
+            <a:pPr marL="0" indent="0">
+              <a:buNone/>
+            </a:pPr>
+            <a:r>
+              <a:rPr lang="es-ES" sz="1400" b="1" noProof="0" dirty="0" err="1">
+                <a:solidFill>
+                  <a:srgbClr val="1E2761"/>
+                </a:solidFill>
+                <a:latin typeface="Calibri" pitchFamily="34" charset="0"/>
+                <a:ea typeface="Calibri" pitchFamily="34" charset="-122"/>
+                <a:cs typeface="Calibri" pitchFamily="34" charset="-120"/>
+              </a:rPr>
+              <a:t>rep_top_forecast_trips_monthly</a:t>
+            </a:r>
+            <a:endParaRPr lang="es-ES" sz="1400" noProof="0" dirty="0"/>
+          </a:p>
+        </p:txBody>
+      </p:sp>
+      <p:sp>
+        <p:nvSpPr>
+          <p:cNvPr id="36" name="Text 34"/>
+          <p:cNvSpPr/>
+          <p:nvPr/>
+        </p:nvSpPr>
+        <p:spPr>
+          <a:xfrm>
+            <a:off x="731520" y="3657600"/>
+            <a:ext cx="7772400" cy="914400"/>
+          </a:xfrm>
+          <a:prstGeom prst="rect">
+            <a:avLst/>
+          </a:prstGeom>
+          <a:noFill/>
+          <a:ln/>
+        </p:spPr>
+        <p:txBody>
+          <a:bodyPr wrap="square" lIns="0" tIns="0" rIns="0" bIns="0" rtlCol="0" anchor="t"/>
+          <a:lstStyle/>
+          <a:p>
+            <a:pPr marL="0" indent="0">
+              <a:spcAft>
+                <a:spcPts val="400"/>
+              </a:spcAft>
+              <a:buNone/>
+            </a:pPr>
+            <a:r>
+              <a:rPr lang="es-ES" sz="1100" noProof="0" dirty="0">
+                <a:solidFill>
+                  <a:srgbClr val="1A202C"/>
+                </a:solidFill>
+                <a:latin typeface="Calibri" pitchFamily="34" charset="0"/>
+                <a:ea typeface="Calibri" pitchFamily="34" charset="-122"/>
+                <a:cs typeface="Calibri" pitchFamily="34" charset="-120"/>
+              </a:rPr>
+              <a:t>View en ANALYTICS: </a:t>
+            </a:r>
+            <a:r>
+              <a:rPr lang="es-ES" sz="1100" noProof="0" dirty="0" err="1">
+                <a:solidFill>
+                  <a:srgbClr val="1A202C"/>
+                </a:solidFill>
+                <a:latin typeface="Calibri" pitchFamily="34" charset="0"/>
+                <a:ea typeface="Calibri" pitchFamily="34" charset="-122"/>
+                <a:cs typeface="Calibri" pitchFamily="34" charset="-120"/>
+              </a:rPr>
+              <a:t>row_number</a:t>
+            </a:r>
+            <a:r>
+              <a:rPr lang="es-ES" sz="1100" noProof="0" dirty="0">
+                <a:solidFill>
+                  <a:srgbClr val="1A202C"/>
+                </a:solidFill>
+                <a:latin typeface="Calibri" pitchFamily="34" charset="0"/>
+                <a:ea typeface="Calibri" pitchFamily="34" charset="-122"/>
+                <a:cs typeface="Calibri" pitchFamily="34" charset="-120"/>
+              </a:rPr>
+              <a:t>() </a:t>
+            </a:r>
+            <a:r>
+              <a:rPr lang="es-ES" sz="1100" noProof="0" dirty="0" err="1">
+                <a:solidFill>
+                  <a:srgbClr val="1A202C"/>
+                </a:solidFill>
+                <a:latin typeface="Calibri" pitchFamily="34" charset="0"/>
+                <a:ea typeface="Calibri" pitchFamily="34" charset="-122"/>
+                <a:cs typeface="Calibri" pitchFamily="34" charset="-120"/>
+              </a:rPr>
+              <a:t>over</a:t>
+            </a:r>
+            <a:r>
+              <a:rPr lang="es-ES" sz="1100" noProof="0" dirty="0">
+                <a:solidFill>
+                  <a:srgbClr val="1A202C"/>
+                </a:solidFill>
+                <a:latin typeface="Calibri" pitchFamily="34" charset="0"/>
+                <a:ea typeface="Calibri" pitchFamily="34" charset="-122"/>
+                <a:cs typeface="Calibri" pitchFamily="34" charset="-120"/>
+              </a:rPr>
+              <a:t> (</a:t>
+            </a:r>
+            <a:r>
+              <a:rPr lang="es-ES" sz="1100" noProof="0" dirty="0" err="1">
+                <a:solidFill>
+                  <a:srgbClr val="1A202C"/>
+                </a:solidFill>
+                <a:latin typeface="Calibri" pitchFamily="34" charset="0"/>
+                <a:ea typeface="Calibri" pitchFamily="34" charset="-122"/>
+                <a:cs typeface="Calibri" pitchFamily="34" charset="-120"/>
+              </a:rPr>
+              <a:t>partition</a:t>
+            </a:r>
+            <a:r>
+              <a:rPr lang="es-ES" sz="1100" noProof="0" dirty="0">
+                <a:solidFill>
+                  <a:srgbClr val="1A202C"/>
+                </a:solidFill>
+                <a:latin typeface="Calibri" pitchFamily="34" charset="0"/>
+                <a:ea typeface="Calibri" pitchFamily="34" charset="-122"/>
+                <a:cs typeface="Calibri" pitchFamily="34" charset="-120"/>
+              </a:rPr>
+              <a:t> </a:t>
+            </a:r>
+            <a:r>
+              <a:rPr lang="es-ES" sz="1100" noProof="0" dirty="0" err="1">
+                <a:solidFill>
+                  <a:srgbClr val="1A202C"/>
+                </a:solidFill>
+                <a:latin typeface="Calibri" pitchFamily="34" charset="0"/>
+                <a:ea typeface="Calibri" pitchFamily="34" charset="-122"/>
+                <a:cs typeface="Calibri" pitchFamily="34" charset="-120"/>
+              </a:rPr>
+              <a:t>by</a:t>
+            </a:r>
+            <a:r>
+              <a:rPr lang="es-ES" sz="1100" noProof="0" dirty="0">
+                <a:solidFill>
+                  <a:srgbClr val="1A202C"/>
+                </a:solidFill>
+                <a:latin typeface="Calibri" pitchFamily="34" charset="0"/>
+                <a:ea typeface="Calibri" pitchFamily="34" charset="-122"/>
+                <a:cs typeface="Calibri" pitchFamily="34" charset="-120"/>
+              </a:rPr>
+              <a:t> </a:t>
+            </a:r>
+            <a:r>
+              <a:rPr lang="es-ES" sz="1100" noProof="0" dirty="0" err="1">
+                <a:solidFill>
+                  <a:srgbClr val="1A202C"/>
+                </a:solidFill>
+                <a:latin typeface="Calibri" pitchFamily="34" charset="0"/>
+                <a:ea typeface="Calibri" pitchFamily="34" charset="-122"/>
+                <a:cs typeface="Calibri" pitchFamily="34" charset="-120"/>
+              </a:rPr>
+              <a:t>city</a:t>
+            </a:r>
+            <a:r>
+              <a:rPr lang="es-ES" sz="1100" noProof="0" dirty="0">
+                <a:solidFill>
+                  <a:srgbClr val="1A202C"/>
+                </a:solidFill>
+                <a:latin typeface="Calibri" pitchFamily="34" charset="0"/>
+                <a:ea typeface="Calibri" pitchFamily="34" charset="-122"/>
+                <a:cs typeface="Calibri" pitchFamily="34" charset="-120"/>
+              </a:rPr>
+              <a:t>, </a:t>
+            </a:r>
+            <a:r>
+              <a:rPr lang="es-ES" sz="1100" noProof="0" dirty="0" err="1">
+                <a:solidFill>
+                  <a:srgbClr val="1A202C"/>
+                </a:solidFill>
+                <a:latin typeface="Calibri" pitchFamily="34" charset="0"/>
+                <a:ea typeface="Calibri" pitchFamily="34" charset="-122"/>
+                <a:cs typeface="Calibri" pitchFamily="34" charset="-120"/>
+              </a:rPr>
+              <a:t>nombre_mes</a:t>
+            </a:r>
+            <a:r>
+              <a:rPr lang="es-ES" sz="1100" noProof="0" dirty="0">
+                <a:solidFill>
+                  <a:srgbClr val="1A202C"/>
+                </a:solidFill>
+                <a:latin typeface="Calibri" pitchFamily="34" charset="0"/>
+                <a:ea typeface="Calibri" pitchFamily="34" charset="-122"/>
+                <a:cs typeface="Calibri" pitchFamily="34" charset="-120"/>
+              </a:rPr>
+              <a:t> </a:t>
+            </a:r>
+            <a:r>
+              <a:rPr lang="es-ES" sz="1100" noProof="0" dirty="0" err="1">
+                <a:solidFill>
+                  <a:srgbClr val="1A202C"/>
+                </a:solidFill>
+                <a:latin typeface="Calibri" pitchFamily="34" charset="0"/>
+                <a:ea typeface="Calibri" pitchFamily="34" charset="-122"/>
+                <a:cs typeface="Calibri" pitchFamily="34" charset="-120"/>
+              </a:rPr>
+              <a:t>order</a:t>
+            </a:r>
+            <a:r>
+              <a:rPr lang="es-ES" sz="1100" noProof="0" dirty="0">
+                <a:solidFill>
+                  <a:srgbClr val="1A202C"/>
+                </a:solidFill>
+                <a:latin typeface="Calibri" pitchFamily="34" charset="0"/>
+                <a:ea typeface="Calibri" pitchFamily="34" charset="-122"/>
+                <a:cs typeface="Calibri" pitchFamily="34" charset="-120"/>
+              </a:rPr>
+              <a:t> </a:t>
+            </a:r>
+            <a:r>
+              <a:rPr lang="es-ES" sz="1100" noProof="0" dirty="0" err="1">
+                <a:solidFill>
+                  <a:srgbClr val="1A202C"/>
+                </a:solidFill>
+                <a:latin typeface="Calibri" pitchFamily="34" charset="0"/>
+                <a:ea typeface="Calibri" pitchFamily="34" charset="-122"/>
+                <a:cs typeface="Calibri" pitchFamily="34" charset="-120"/>
+              </a:rPr>
+              <a:t>by</a:t>
+            </a:r>
+            <a:r>
+              <a:rPr lang="es-ES" sz="1100" noProof="0" dirty="0">
+                <a:solidFill>
+                  <a:srgbClr val="1A202C"/>
+                </a:solidFill>
+                <a:latin typeface="Calibri" pitchFamily="34" charset="0"/>
+                <a:ea typeface="Calibri" pitchFamily="34" charset="-122"/>
+                <a:cs typeface="Calibri" pitchFamily="34" charset="-120"/>
+              </a:rPr>
+              <a:t> </a:t>
+            </a:r>
+            <a:r>
+              <a:rPr lang="es-ES" sz="1100" noProof="0" dirty="0" err="1">
+                <a:solidFill>
+                  <a:srgbClr val="1A202C"/>
+                </a:solidFill>
+                <a:latin typeface="Calibri" pitchFamily="34" charset="0"/>
+                <a:ea typeface="Calibri" pitchFamily="34" charset="-122"/>
+                <a:cs typeface="Calibri" pitchFamily="34" charset="-120"/>
+              </a:rPr>
+              <a:t>predicted_n_trips</a:t>
+            </a:r>
+            <a:r>
+              <a:rPr lang="es-ES" sz="1100" noProof="0" dirty="0">
+                <a:solidFill>
+                  <a:srgbClr val="1A202C"/>
+                </a:solidFill>
+                <a:latin typeface="Calibri" pitchFamily="34" charset="0"/>
+                <a:ea typeface="Calibri" pitchFamily="34" charset="-122"/>
+                <a:cs typeface="Calibri" pitchFamily="34" charset="-120"/>
+              </a:rPr>
+              <a:t> </a:t>
+            </a:r>
+            <a:r>
+              <a:rPr lang="es-ES" sz="1100" noProof="0" dirty="0" err="1">
+                <a:solidFill>
+                  <a:srgbClr val="1A202C"/>
+                </a:solidFill>
+                <a:latin typeface="Calibri" pitchFamily="34" charset="0"/>
+                <a:ea typeface="Calibri" pitchFamily="34" charset="-122"/>
+                <a:cs typeface="Calibri" pitchFamily="34" charset="-120"/>
+              </a:rPr>
+              <a:t>desc</a:t>
+            </a:r>
+            <a:r>
+              <a:rPr lang="es-ES" sz="1100" noProof="0" dirty="0">
+                <a:solidFill>
+                  <a:srgbClr val="1A202C"/>
+                </a:solidFill>
+                <a:latin typeface="Calibri" pitchFamily="34" charset="0"/>
+                <a:ea typeface="Calibri" pitchFamily="34" charset="-122"/>
+                <a:cs typeface="Calibri" pitchFamily="34" charset="-120"/>
+              </a:rPr>
+              <a:t>) = 1.</a:t>
+            </a:r>
+            <a:endParaRPr lang="es-ES" sz="1100" noProof="0" dirty="0"/>
+          </a:p>
+          <a:p>
+            <a:pPr marL="0" indent="0">
+              <a:spcAft>
+                <a:spcPts val="400"/>
+              </a:spcAft>
+              <a:buNone/>
+            </a:pPr>
+            <a:r>
+              <a:rPr lang="es-ES" sz="1100" noProof="0" dirty="0">
+                <a:solidFill>
+                  <a:srgbClr val="64748B"/>
+                </a:solidFill>
+                <a:latin typeface="Calibri" pitchFamily="34" charset="0"/>
+                <a:ea typeface="Calibri" pitchFamily="34" charset="-122"/>
+                <a:cs typeface="Calibri" pitchFamily="34" charset="-120"/>
+              </a:rPr>
+              <a:t>Resultado: el </a:t>
+            </a:r>
+            <a:r>
+              <a:rPr lang="es-ES" sz="1100" noProof="0" dirty="0" err="1">
+                <a:solidFill>
+                  <a:srgbClr val="64748B"/>
+                </a:solidFill>
+                <a:latin typeface="Calibri" pitchFamily="34" charset="0"/>
+                <a:ea typeface="Calibri" pitchFamily="34" charset="-122"/>
+                <a:cs typeface="Calibri" pitchFamily="34" charset="-120"/>
+              </a:rPr>
+              <a:t>dia</a:t>
+            </a:r>
+            <a:r>
+              <a:rPr lang="es-ES" sz="1100" noProof="0" dirty="0">
+                <a:solidFill>
+                  <a:srgbClr val="64748B"/>
+                </a:solidFill>
+                <a:latin typeface="Calibri" pitchFamily="34" charset="0"/>
+                <a:ea typeface="Calibri" pitchFamily="34" charset="-122"/>
+                <a:cs typeface="Calibri" pitchFamily="34" charset="-120"/>
+              </a:rPr>
+              <a:t> pico esperado del mes, por ciudad, listo para visual "</a:t>
+            </a:r>
+            <a:r>
+              <a:rPr lang="es-ES" sz="1100" noProof="0" dirty="0" err="1">
+                <a:solidFill>
+                  <a:srgbClr val="64748B"/>
+                </a:solidFill>
+                <a:latin typeface="Calibri" pitchFamily="34" charset="0"/>
+                <a:ea typeface="Calibri" pitchFamily="34" charset="-122"/>
+                <a:cs typeface="Calibri" pitchFamily="34" charset="-120"/>
+              </a:rPr>
+              <a:t>best</a:t>
+            </a:r>
+            <a:r>
+              <a:rPr lang="es-ES" sz="1100" noProof="0" dirty="0">
+                <a:solidFill>
+                  <a:srgbClr val="64748B"/>
+                </a:solidFill>
+                <a:latin typeface="Calibri" pitchFamily="34" charset="0"/>
+                <a:ea typeface="Calibri" pitchFamily="34" charset="-122"/>
+                <a:cs typeface="Calibri" pitchFamily="34" charset="-120"/>
+              </a:rPr>
+              <a:t> </a:t>
+            </a:r>
+            <a:r>
+              <a:rPr lang="es-ES" sz="1100" noProof="0" dirty="0" err="1">
+                <a:solidFill>
+                  <a:srgbClr val="64748B"/>
+                </a:solidFill>
+                <a:latin typeface="Calibri" pitchFamily="34" charset="0"/>
+                <a:ea typeface="Calibri" pitchFamily="34" charset="-122"/>
+                <a:cs typeface="Calibri" pitchFamily="34" charset="-120"/>
+              </a:rPr>
+              <a:t>day</a:t>
+            </a:r>
+            <a:r>
+              <a:rPr lang="es-ES" sz="1100" noProof="0" dirty="0">
+                <a:solidFill>
+                  <a:srgbClr val="64748B"/>
+                </a:solidFill>
+                <a:latin typeface="Calibri" pitchFamily="34" charset="0"/>
+                <a:ea typeface="Calibri" pitchFamily="34" charset="-122"/>
+                <a:cs typeface="Calibri" pitchFamily="34" charset="-120"/>
+              </a:rPr>
+              <a:t> </a:t>
+            </a:r>
+            <a:r>
+              <a:rPr lang="es-ES" sz="1100" noProof="0" dirty="0" err="1">
+                <a:solidFill>
+                  <a:srgbClr val="64748B"/>
+                </a:solidFill>
+                <a:latin typeface="Calibri" pitchFamily="34" charset="0"/>
+                <a:ea typeface="Calibri" pitchFamily="34" charset="-122"/>
+                <a:cs typeface="Calibri" pitchFamily="34" charset="-120"/>
+              </a:rPr>
+              <a:t>to</a:t>
+            </a:r>
+            <a:r>
+              <a:rPr lang="es-ES" sz="1100" noProof="0" dirty="0">
+                <a:solidFill>
+                  <a:srgbClr val="64748B"/>
+                </a:solidFill>
+                <a:latin typeface="Calibri" pitchFamily="34" charset="0"/>
+                <a:ea typeface="Calibri" pitchFamily="34" charset="-122"/>
+                <a:cs typeface="Calibri" pitchFamily="34" charset="-120"/>
+              </a:rPr>
+              <a:t> </a:t>
+            </a:r>
+            <a:r>
+              <a:rPr lang="es-ES" sz="1100" noProof="0" dirty="0" err="1">
+                <a:solidFill>
+                  <a:srgbClr val="64748B"/>
+                </a:solidFill>
+                <a:latin typeface="Calibri" pitchFamily="34" charset="0"/>
+                <a:ea typeface="Calibri" pitchFamily="34" charset="-122"/>
+                <a:cs typeface="Calibri" pitchFamily="34" charset="-120"/>
+              </a:rPr>
+              <a:t>expect</a:t>
+            </a:r>
+            <a:r>
+              <a:rPr lang="es-ES" sz="1100" noProof="0" dirty="0">
+                <a:solidFill>
+                  <a:srgbClr val="64748B"/>
+                </a:solidFill>
+                <a:latin typeface="Calibri" pitchFamily="34" charset="0"/>
+                <a:ea typeface="Calibri" pitchFamily="34" charset="-122"/>
+                <a:cs typeface="Calibri" pitchFamily="34" charset="-120"/>
+              </a:rPr>
+              <a:t> </a:t>
+            </a:r>
+            <a:r>
+              <a:rPr lang="es-ES" sz="1100" noProof="0" dirty="0" err="1">
+                <a:solidFill>
+                  <a:srgbClr val="64748B"/>
+                </a:solidFill>
+                <a:latin typeface="Calibri" pitchFamily="34" charset="0"/>
+                <a:ea typeface="Calibri" pitchFamily="34" charset="-122"/>
+                <a:cs typeface="Calibri" pitchFamily="34" charset="-120"/>
+              </a:rPr>
+              <a:t>peak</a:t>
+            </a:r>
+            <a:r>
+              <a:rPr lang="es-ES" sz="1100" noProof="0" dirty="0">
+                <a:solidFill>
+                  <a:srgbClr val="64748B"/>
+                </a:solidFill>
+                <a:latin typeface="Calibri" pitchFamily="34" charset="0"/>
+                <a:ea typeface="Calibri" pitchFamily="34" charset="-122"/>
+                <a:cs typeface="Calibri" pitchFamily="34" charset="-120"/>
+              </a:rPr>
+              <a:t> </a:t>
+            </a:r>
+            <a:r>
+              <a:rPr lang="es-ES" sz="1100" noProof="0" dirty="0" err="1">
+                <a:solidFill>
+                  <a:srgbClr val="64748B"/>
+                </a:solidFill>
+                <a:latin typeface="Calibri" pitchFamily="34" charset="0"/>
+                <a:ea typeface="Calibri" pitchFamily="34" charset="-122"/>
+                <a:cs typeface="Calibri" pitchFamily="34" charset="-120"/>
+              </a:rPr>
+              <a:t>demand</a:t>
+            </a:r>
+            <a:r>
+              <a:rPr lang="es-ES" sz="1100" noProof="0" dirty="0">
+                <a:solidFill>
+                  <a:srgbClr val="64748B"/>
+                </a:solidFill>
+                <a:latin typeface="Calibri" pitchFamily="34" charset="0"/>
+                <a:ea typeface="Calibri" pitchFamily="34" charset="-122"/>
+                <a:cs typeface="Calibri" pitchFamily="34" charset="-120"/>
+              </a:rPr>
+              <a:t>" en Power BI.</a:t>
+            </a:r>
+            <a:endParaRPr lang="es-ES" sz="1100" noProof="0" dirty="0"/>
+          </a:p>
+          <a:p>
+            <a:pPr marL="0" indent="0">
+              <a:spcAft>
+                <a:spcPts val="400"/>
+              </a:spcAft>
+              <a:buNone/>
+            </a:pPr>
+            <a:r>
+              <a:rPr lang="es-ES" sz="1100" i="1" noProof="0" dirty="0" err="1">
+                <a:solidFill>
+                  <a:srgbClr val="64748B"/>
+                </a:solidFill>
+                <a:latin typeface="Calibri" pitchFamily="34" charset="0"/>
+                <a:ea typeface="Calibri" pitchFamily="34" charset="-122"/>
+                <a:cs typeface="Calibri" pitchFamily="34" charset="-120"/>
+              </a:rPr>
+              <a:t>Re-entrenamiento</a:t>
+            </a:r>
+            <a:r>
+              <a:rPr lang="es-ES" sz="1100" i="1" noProof="0" dirty="0">
+                <a:solidFill>
+                  <a:srgbClr val="64748B"/>
+                </a:solidFill>
+                <a:latin typeface="Calibri" pitchFamily="34" charset="0"/>
+                <a:ea typeface="Calibri" pitchFamily="34" charset="-122"/>
+                <a:cs typeface="Calibri" pitchFamily="34" charset="-120"/>
+              </a:rPr>
+              <a:t>: tras --full-</a:t>
+            </a:r>
+            <a:r>
+              <a:rPr lang="es-ES" sz="1100" i="1" noProof="0" dirty="0" err="1">
+                <a:solidFill>
+                  <a:srgbClr val="64748B"/>
+                </a:solidFill>
+                <a:latin typeface="Calibri" pitchFamily="34" charset="0"/>
+                <a:ea typeface="Calibri" pitchFamily="34" charset="-122"/>
+                <a:cs typeface="Calibri" pitchFamily="34" charset="-120"/>
+              </a:rPr>
+              <a:t>refresh</a:t>
+            </a:r>
+            <a:r>
+              <a:rPr lang="es-ES" sz="1100" i="1" noProof="0" dirty="0">
+                <a:solidFill>
+                  <a:srgbClr val="64748B"/>
+                </a:solidFill>
+                <a:latin typeface="Calibri" pitchFamily="34" charset="0"/>
+                <a:ea typeface="Calibri" pitchFamily="34" charset="-122"/>
+                <a:cs typeface="Calibri" pitchFamily="34" charset="-120"/>
+              </a:rPr>
+              <a:t> significativo, volver a correr </a:t>
+            </a:r>
+            <a:r>
+              <a:rPr lang="es-ES" sz="1100" i="1" noProof="0" dirty="0" err="1">
+                <a:solidFill>
+                  <a:srgbClr val="64748B"/>
+                </a:solidFill>
+                <a:latin typeface="Calibri" pitchFamily="34" charset="0"/>
+                <a:ea typeface="Calibri" pitchFamily="34" charset="-122"/>
+                <a:cs typeface="Calibri" pitchFamily="34" charset="-120"/>
+              </a:rPr>
+              <a:t>Forecast.sql</a:t>
+            </a:r>
+            <a:r>
+              <a:rPr lang="es-ES" sz="1100" i="1" noProof="0" dirty="0">
+                <a:solidFill>
+                  <a:srgbClr val="64748B"/>
+                </a:solidFill>
+                <a:latin typeface="Calibri" pitchFamily="34" charset="0"/>
+                <a:ea typeface="Calibri" pitchFamily="34" charset="-122"/>
+                <a:cs typeface="Calibri" pitchFamily="34" charset="-120"/>
+              </a:rPr>
+              <a:t> + </a:t>
+            </a:r>
+            <a:r>
+              <a:rPr lang="es-ES" sz="1100" i="1" noProof="0" dirty="0" err="1">
+                <a:solidFill>
+                  <a:srgbClr val="64748B"/>
+                </a:solidFill>
+                <a:latin typeface="Calibri" pitchFamily="34" charset="0"/>
+                <a:ea typeface="Calibri" pitchFamily="34" charset="-122"/>
+                <a:cs typeface="Calibri" pitchFamily="34" charset="-120"/>
+              </a:rPr>
+              <a:t>dbt</a:t>
+            </a:r>
+            <a:r>
+              <a:rPr lang="es-ES" sz="1100" i="1" noProof="0" dirty="0">
+                <a:solidFill>
+                  <a:srgbClr val="64748B"/>
+                </a:solidFill>
+                <a:latin typeface="Calibri" pitchFamily="34" charset="0"/>
+                <a:ea typeface="Calibri" pitchFamily="34" charset="-122"/>
+                <a:cs typeface="Calibri" pitchFamily="34" charset="-120"/>
+              </a:rPr>
+              <a:t> run.</a:t>
+            </a:r>
+            <a:endParaRPr lang="es-ES" sz="1100" noProof="0" dirty="0"/>
+          </a:p>
+        </p:txBody>
+      </p:sp>
+      <p:sp>
+        <p:nvSpPr>
+          <p:cNvPr id="37" name="Text 35"/>
+          <p:cNvSpPr/>
+          <p:nvPr/>
+        </p:nvSpPr>
+        <p:spPr>
+          <a:xfrm>
+            <a:off x="8229600" y="4800600"/>
+            <a:ext cx="822960" cy="228600"/>
+          </a:xfrm>
+          <a:prstGeom prst="rect">
+            <a:avLst/>
+          </a:prstGeom>
+          <a:noFill/>
+          <a:ln/>
+        </p:spPr>
+        <p:txBody>
+          <a:bodyPr wrap="square" lIns="0" tIns="0" rIns="0" bIns="0" rtlCol="0" anchor="ctr"/>
+          <a:lstStyle/>
+          <a:p>
+            <a:pPr marL="0" indent="0" algn="r">
+              <a:buNone/>
+            </a:pPr>
+            <a:r>
+              <a:rPr lang="es-ES" sz="900" noProof="0" dirty="0">
+                <a:solidFill>
+                  <a:srgbClr val="64748B"/>
+                </a:solidFill>
+                <a:latin typeface="Calibri" pitchFamily="34" charset="0"/>
+                <a:ea typeface="Calibri" pitchFamily="34" charset="-122"/>
+                <a:cs typeface="Calibri" pitchFamily="34" charset="-120"/>
+              </a:rPr>
+              <a:t>10 / 15</a:t>
+            </a:r>
+            <a:endParaRPr lang="es-ES" sz="900" noProof="0" dirty="0"/>
+          </a:p>
+        </p:txBody>
+      </p:sp>
+    </p:spTree>
+  </p:cSld>
+  <p:clrMapOvr>
+    <a:masterClrMapping/>
+  </p:clrMapOvr>
+</p:sld>
+</file>
+
+<file path=ppt/slides/slide11.xml><?xml version="1.0" encoding="utf-8"?>
+<p:sld xmlns:a="http://schemas.openxmlformats.org/drawingml/2006/main" xmlns:r="http://schemas.openxmlformats.org/officeDocument/2006/relationships" xmlns:p="http://schemas.openxmlformats.org/presentationml/2006/main">
+  <p:cSld name="Slide 11">
+    <p:bg>
+      <p:bgPr>
+        <a:solidFill>
+          <a:srgbClr val="F8FAFC"/>
+        </a:solidFill>
+        <a:effectLst/>
+      </p:bgPr>
+    </p:bg>
+    <p:spTree>
+      <p:nvGrpSpPr>
+        <p:cNvPr id="1" name=""/>
+        <p:cNvGrpSpPr/>
+        <p:nvPr/>
+      </p:nvGrpSpPr>
+      <p:grpSpPr>
+        <a:xfrm>
+          <a:off x="0" y="0"/>
+          <a:ext cx="0" cy="0"/>
+          <a:chOff x="0" y="0"/>
+          <a:chExt cx="0" cy="0"/>
+        </a:xfrm>
+      </p:grpSpPr>
+      <p:sp>
+        <p:nvSpPr>
+          <p:cNvPr id="2" name="Text 0"/>
+          <p:cNvSpPr/>
+          <p:nvPr/>
+        </p:nvSpPr>
+        <p:spPr>
+          <a:xfrm>
+            <a:off x="457200" y="274320"/>
+            <a:ext cx="8229600" cy="274320"/>
+          </a:xfrm>
+          <a:prstGeom prst="rect">
+            <a:avLst/>
+          </a:prstGeom>
+          <a:noFill/>
+          <a:ln/>
+        </p:spPr>
+        <p:txBody>
+          <a:bodyPr wrap="square" lIns="0" tIns="0" rIns="0" bIns="0" rtlCol="0" anchor="ctr"/>
+          <a:lstStyle/>
+          <a:p>
+            <a:pPr marL="0" indent="0">
+              <a:buNone/>
+            </a:pPr>
+            <a:r>
+              <a:rPr lang="es-ES" sz="1100" b="1" kern="0" spc="400" noProof="0" dirty="0">
+                <a:solidFill>
+                  <a:srgbClr val="F59E0B"/>
+                </a:solidFill>
+                <a:latin typeface="Calibri" pitchFamily="34" charset="0"/>
+                <a:ea typeface="Calibri" pitchFamily="34" charset="-122"/>
+                <a:cs typeface="Calibri" pitchFamily="34" charset="-120"/>
+              </a:rPr>
+              <a:t>10 · AISLAMIENTO DE ENTORNOS</a:t>
+            </a:r>
+            <a:endParaRPr lang="es-ES" sz="1100" noProof="0" dirty="0"/>
+          </a:p>
+        </p:txBody>
+      </p:sp>
+      <p:sp>
+        <p:nvSpPr>
+          <p:cNvPr id="3" name="Text 1"/>
+          <p:cNvSpPr/>
+          <p:nvPr/>
+        </p:nvSpPr>
+        <p:spPr>
+          <a:xfrm>
+            <a:off x="457200" y="502920"/>
+            <a:ext cx="8229600" cy="640080"/>
+          </a:xfrm>
+          <a:prstGeom prst="rect">
+            <a:avLst/>
+          </a:prstGeom>
+          <a:noFill/>
+          <a:ln/>
+        </p:spPr>
+        <p:txBody>
+          <a:bodyPr wrap="square" lIns="0" tIns="0" rIns="0" bIns="0" rtlCol="0" anchor="ctr"/>
+          <a:lstStyle/>
+          <a:p>
+            <a:pPr marL="0" indent="0">
+              <a:buNone/>
+            </a:pPr>
+            <a:r>
+              <a:rPr lang="es-ES" sz="2800" b="1" noProof="0" dirty="0">
+                <a:solidFill>
+                  <a:srgbClr val="1E2761"/>
+                </a:solidFill>
+                <a:latin typeface="Calibri" pitchFamily="34" charset="0"/>
+                <a:ea typeface="Calibri" pitchFamily="34" charset="-122"/>
+                <a:cs typeface="Calibri" pitchFamily="34" charset="-120"/>
+              </a:rPr>
+              <a:t>DevOps · DEV vs PRO</a:t>
+            </a:r>
+            <a:endParaRPr lang="es-ES" sz="2800" noProof="0" dirty="0"/>
+          </a:p>
+        </p:txBody>
+      </p:sp>
+      <p:sp>
+        <p:nvSpPr>
+          <p:cNvPr id="4" name="Shape 2"/>
+          <p:cNvSpPr/>
+          <p:nvPr/>
+        </p:nvSpPr>
+        <p:spPr>
+          <a:xfrm>
+            <a:off x="457200" y="1417320"/>
+            <a:ext cx="4069080" cy="3246120"/>
+          </a:xfrm>
+          <a:prstGeom prst="rect">
+            <a:avLst/>
+          </a:prstGeom>
+          <a:solidFill>
+            <a:srgbClr val="FFFFFF"/>
+          </a:solidFill>
+          <a:ln w="12700">
+            <a:solidFill>
+              <a:srgbClr val="E2E8F0"/>
+            </a:solidFill>
+            <a:prstDash val="solid"/>
+          </a:ln>
+          <a:effectLst>
+            <a:outerShdw blurRad="101600" dist="25400" dir="5400000" algn="bl" rotWithShape="0">
+              <a:srgbClr val="000000">
+                <a:alpha val="12000"/>
+              </a:srgbClr>
+            </a:outerShdw>
+          </a:effectLst>
+        </p:spPr>
+        <p:txBody>
+          <a:bodyPr/>
+          <a:lstStyle/>
+          <a:p>
+            <a:endParaRPr lang="es-ES" noProof="0" dirty="0"/>
+          </a:p>
+        </p:txBody>
+      </p:sp>
+      <p:sp>
+        <p:nvSpPr>
+          <p:cNvPr id="5" name="Shape 3"/>
+          <p:cNvSpPr/>
+          <p:nvPr/>
+        </p:nvSpPr>
+        <p:spPr>
+          <a:xfrm>
+            <a:off x="457200" y="1417320"/>
+            <a:ext cx="4069080" cy="457200"/>
+          </a:xfrm>
+          <a:prstGeom prst="rect">
+            <a:avLst/>
+          </a:prstGeom>
+          <a:solidFill>
+            <a:srgbClr val="64748B"/>
+          </a:solidFill>
+          <a:ln/>
+        </p:spPr>
+        <p:txBody>
+          <a:bodyPr/>
+          <a:lstStyle/>
+          <a:p>
+            <a:endParaRPr lang="es-ES" noProof="0" dirty="0"/>
+          </a:p>
+        </p:txBody>
+      </p:sp>
+      <p:sp>
+        <p:nvSpPr>
+          <p:cNvPr id="6" name="Text 4"/>
+          <p:cNvSpPr/>
+          <p:nvPr/>
+        </p:nvSpPr>
+        <p:spPr>
+          <a:xfrm>
+            <a:off x="457200" y="1417320"/>
+            <a:ext cx="4069080" cy="457200"/>
+          </a:xfrm>
+          <a:prstGeom prst="rect">
+            <a:avLst/>
+          </a:prstGeom>
+          <a:noFill/>
+          <a:ln/>
+        </p:spPr>
+        <p:txBody>
+          <a:bodyPr wrap="square" lIns="0" tIns="0" rIns="0" bIns="0" rtlCol="0" anchor="ctr"/>
+          <a:lstStyle/>
+          <a:p>
+            <a:pPr marL="0" indent="0" algn="ctr">
+              <a:buNone/>
+            </a:pPr>
+            <a:r>
+              <a:rPr lang="es-ES" sz="1400" b="1" noProof="0" dirty="0">
+                <a:solidFill>
+                  <a:srgbClr val="FFFFFF"/>
+                </a:solidFill>
+                <a:latin typeface="Calibri" pitchFamily="34" charset="0"/>
+                <a:ea typeface="Calibri" pitchFamily="34" charset="-122"/>
+                <a:cs typeface="Calibri" pitchFamily="34" charset="-120"/>
+              </a:rPr>
+              <a:t>DEV  (</a:t>
+            </a:r>
+            <a:r>
+              <a:rPr lang="es-ES" sz="1400" b="1" noProof="0" dirty="0" err="1">
+                <a:solidFill>
+                  <a:srgbClr val="FFFFFF"/>
+                </a:solidFill>
+                <a:latin typeface="Calibri" pitchFamily="34" charset="0"/>
+                <a:ea typeface="Calibri" pitchFamily="34" charset="-122"/>
+                <a:cs typeface="Calibri" pitchFamily="34" charset="-120"/>
+              </a:rPr>
+              <a:t>sandbox</a:t>
+            </a:r>
+            <a:r>
+              <a:rPr lang="es-ES" sz="1400" b="1" noProof="0" dirty="0">
+                <a:solidFill>
+                  <a:srgbClr val="FFFFFF"/>
+                </a:solidFill>
+                <a:latin typeface="Calibri" pitchFamily="34" charset="0"/>
+                <a:ea typeface="Calibri" pitchFamily="34" charset="-122"/>
+                <a:cs typeface="Calibri" pitchFamily="34" charset="-120"/>
+              </a:rPr>
+              <a:t> personal)</a:t>
+            </a:r>
+            <a:endParaRPr lang="es-ES" sz="1400" noProof="0" dirty="0"/>
+          </a:p>
+        </p:txBody>
+      </p:sp>
+      <p:sp>
+        <p:nvSpPr>
+          <p:cNvPr id="7" name="Text 5"/>
+          <p:cNvSpPr/>
+          <p:nvPr/>
+        </p:nvSpPr>
+        <p:spPr>
+          <a:xfrm>
+            <a:off x="640080" y="2011680"/>
+            <a:ext cx="3703320" cy="2560320"/>
+          </a:xfrm>
+          <a:prstGeom prst="rect">
+            <a:avLst/>
+          </a:prstGeom>
+          <a:noFill/>
+          <a:ln/>
+        </p:spPr>
+        <p:txBody>
+          <a:bodyPr wrap="square" lIns="0" tIns="0" rIns="0" bIns="0" rtlCol="0" anchor="t"/>
+          <a:lstStyle/>
+          <a:p>
+            <a:pPr marL="0" indent="0">
+              <a:spcAft>
+                <a:spcPts val="600"/>
+              </a:spcAft>
+              <a:buNone/>
+            </a:pPr>
+            <a:r>
+              <a:rPr lang="es-ES" sz="1100" noProof="0" dirty="0" err="1">
+                <a:solidFill>
+                  <a:srgbClr val="64748B"/>
+                </a:solidFill>
+                <a:latin typeface="Calibri" pitchFamily="34" charset="0"/>
+                <a:ea typeface="Calibri" pitchFamily="34" charset="-122"/>
+                <a:cs typeface="Calibri" pitchFamily="34" charset="-120"/>
+              </a:rPr>
+              <a:t>Database</a:t>
+            </a:r>
+            <a:r>
+              <a:rPr lang="es-ES" sz="1100" noProof="0" dirty="0">
+                <a:solidFill>
+                  <a:srgbClr val="64748B"/>
+                </a:solidFill>
+                <a:latin typeface="Calibri" pitchFamily="34" charset="0"/>
+                <a:ea typeface="Calibri" pitchFamily="34" charset="-122"/>
+                <a:cs typeface="Calibri" pitchFamily="34" charset="-120"/>
+              </a:rPr>
+              <a:t>: </a:t>
+            </a:r>
+            <a:r>
+              <a:rPr lang="es-ES" sz="1100" b="1" noProof="0" dirty="0">
+                <a:solidFill>
+                  <a:srgbClr val="1A202C"/>
+                </a:solidFill>
+                <a:latin typeface="Calibri" pitchFamily="34" charset="0"/>
+                <a:ea typeface="Calibri" pitchFamily="34" charset="-122"/>
+                <a:cs typeface="Calibri" pitchFamily="34" charset="-120"/>
+              </a:rPr>
+              <a:t>DEV_CITYBIKE_*</a:t>
+            </a:r>
+            <a:endParaRPr lang="es-ES" sz="1100" noProof="0" dirty="0"/>
+          </a:p>
+          <a:p>
+            <a:pPr marL="0" indent="0">
+              <a:spcAft>
+                <a:spcPts val="600"/>
+              </a:spcAft>
+              <a:buNone/>
+            </a:pPr>
+            <a:r>
+              <a:rPr lang="es-ES" sz="1100" noProof="0" dirty="0" err="1">
+                <a:solidFill>
+                  <a:srgbClr val="64748B"/>
+                </a:solidFill>
+                <a:latin typeface="Calibri" pitchFamily="34" charset="0"/>
+                <a:ea typeface="Calibri" pitchFamily="34" charset="-122"/>
+                <a:cs typeface="Calibri" pitchFamily="34" charset="-120"/>
+              </a:rPr>
+              <a:t>Warehouse</a:t>
+            </a:r>
+            <a:r>
+              <a:rPr lang="es-ES" sz="1100" noProof="0" dirty="0">
+                <a:solidFill>
+                  <a:srgbClr val="64748B"/>
+                </a:solidFill>
+                <a:latin typeface="Calibri" pitchFamily="34" charset="0"/>
+                <a:ea typeface="Calibri" pitchFamily="34" charset="-122"/>
+                <a:cs typeface="Calibri" pitchFamily="34" charset="-120"/>
+              </a:rPr>
+              <a:t>: </a:t>
+            </a:r>
+            <a:r>
+              <a:rPr lang="es-ES" sz="1100" b="1" noProof="0" dirty="0">
+                <a:solidFill>
+                  <a:srgbClr val="1A202C"/>
+                </a:solidFill>
+                <a:latin typeface="Calibri" pitchFamily="34" charset="0"/>
+                <a:ea typeface="Calibri" pitchFamily="34" charset="-122"/>
+                <a:cs typeface="Calibri" pitchFamily="34" charset="-120"/>
+              </a:rPr>
+              <a:t>WH_NYCBIKE_DEV</a:t>
+            </a:r>
+            <a:endParaRPr lang="es-ES" sz="1100" noProof="0" dirty="0"/>
+          </a:p>
+          <a:p>
+            <a:pPr marL="0" indent="0">
+              <a:spcAft>
+                <a:spcPts val="600"/>
+              </a:spcAft>
+              <a:buNone/>
+            </a:pPr>
+            <a:r>
+              <a:rPr lang="es-ES" sz="1100" noProof="0" dirty="0">
+                <a:solidFill>
+                  <a:srgbClr val="64748B"/>
+                </a:solidFill>
+                <a:latin typeface="Calibri" pitchFamily="34" charset="0"/>
+                <a:ea typeface="Calibri" pitchFamily="34" charset="-122"/>
+                <a:cs typeface="Calibri" pitchFamily="34" charset="-120"/>
+              </a:rPr>
+              <a:t>Schema </a:t>
+            </a:r>
+            <a:r>
+              <a:rPr lang="es-ES" sz="1100" noProof="0" dirty="0" err="1">
+                <a:solidFill>
+                  <a:srgbClr val="64748B"/>
+                </a:solidFill>
+                <a:latin typeface="Calibri" pitchFamily="34" charset="0"/>
+                <a:ea typeface="Calibri" pitchFamily="34" charset="-122"/>
+                <a:cs typeface="Calibri" pitchFamily="34" charset="-120"/>
+              </a:rPr>
+              <a:t>prefix</a:t>
+            </a:r>
+            <a:r>
+              <a:rPr lang="es-ES" sz="1100" noProof="0" dirty="0">
+                <a:solidFill>
+                  <a:srgbClr val="64748B"/>
+                </a:solidFill>
+                <a:latin typeface="Calibri" pitchFamily="34" charset="0"/>
+                <a:ea typeface="Calibri" pitchFamily="34" charset="-122"/>
+                <a:cs typeface="Calibri" pitchFamily="34" charset="-120"/>
+              </a:rPr>
+              <a:t>: </a:t>
+            </a:r>
+            <a:r>
+              <a:rPr lang="es-ES" sz="1100" b="1" noProof="0" dirty="0" err="1">
+                <a:solidFill>
+                  <a:srgbClr val="1A202C"/>
+                </a:solidFill>
+                <a:latin typeface="Calibri" pitchFamily="34" charset="0"/>
+                <a:ea typeface="Calibri" pitchFamily="34" charset="-122"/>
+                <a:cs typeface="Calibri" pitchFamily="34" charset="-120"/>
+              </a:rPr>
+              <a:t>dbt</a:t>
+            </a:r>
+            <a:r>
+              <a:rPr lang="es-ES" sz="1100" b="1" noProof="0" dirty="0">
+                <a:solidFill>
+                  <a:srgbClr val="1A202C"/>
+                </a:solidFill>
+                <a:latin typeface="Calibri" pitchFamily="34" charset="0"/>
+                <a:ea typeface="Calibri" pitchFamily="34" charset="-122"/>
+                <a:cs typeface="Calibri" pitchFamily="34" charset="-120"/>
+              </a:rPr>
+              <a:t>_&lt;usuario&gt;_&lt;</a:t>
+            </a:r>
+            <a:r>
+              <a:rPr lang="es-ES" sz="1100" b="1" noProof="0" dirty="0" err="1">
+                <a:solidFill>
+                  <a:srgbClr val="1A202C"/>
+                </a:solidFill>
+                <a:latin typeface="Calibri" pitchFamily="34" charset="0"/>
+                <a:ea typeface="Calibri" pitchFamily="34" charset="-122"/>
+                <a:cs typeface="Calibri" pitchFamily="34" charset="-120"/>
+              </a:rPr>
+              <a:t>custom</a:t>
+            </a:r>
+            <a:r>
+              <a:rPr lang="es-ES" sz="1100" b="1" noProof="0" dirty="0">
+                <a:solidFill>
+                  <a:srgbClr val="1A202C"/>
+                </a:solidFill>
+                <a:latin typeface="Calibri" pitchFamily="34" charset="0"/>
+                <a:ea typeface="Calibri" pitchFamily="34" charset="-122"/>
+                <a:cs typeface="Calibri" pitchFamily="34" charset="-120"/>
+              </a:rPr>
+              <a:t>&gt;</a:t>
+            </a:r>
+            <a:endParaRPr lang="es-ES" sz="1100" noProof="0" dirty="0"/>
+          </a:p>
+          <a:p>
+            <a:pPr marL="0" indent="0">
+              <a:spcAft>
+                <a:spcPts val="600"/>
+              </a:spcAft>
+              <a:buNone/>
+            </a:pPr>
+            <a:r>
+              <a:rPr lang="es-ES" sz="1100" noProof="0" dirty="0">
+                <a:solidFill>
+                  <a:srgbClr val="64748B"/>
+                </a:solidFill>
+                <a:latin typeface="Calibri" pitchFamily="34" charset="0"/>
+                <a:ea typeface="Calibri" pitchFamily="34" charset="-122"/>
+                <a:cs typeface="Calibri" pitchFamily="34" charset="-120"/>
+              </a:rPr>
+              <a:t>Ejemplo: </a:t>
+            </a:r>
+            <a:r>
+              <a:rPr lang="es-ES" sz="900" noProof="0" dirty="0">
+                <a:solidFill>
+                  <a:srgbClr val="1A202C"/>
+                </a:solidFill>
+                <a:latin typeface="Consolas" pitchFamily="34" charset="0"/>
+                <a:ea typeface="Consolas" pitchFamily="34" charset="-122"/>
+                <a:cs typeface="Consolas" pitchFamily="34" charset="-120"/>
+              </a:rPr>
+              <a:t>DEV_CITYBIKE_GOLD.DBT_RLIZARAN_MOBILITY.FCT_TRIPS</a:t>
+            </a:r>
+            <a:endParaRPr lang="es-ES" sz="1100" noProof="0" dirty="0"/>
+          </a:p>
+          <a:p>
+            <a:pPr marL="0" indent="0">
+              <a:spcAft>
+                <a:spcPts val="600"/>
+              </a:spcAft>
+              <a:buNone/>
+            </a:pPr>
+            <a:r>
+              <a:rPr lang="es-ES" sz="1100" i="1" noProof="0" dirty="0">
+                <a:solidFill>
+                  <a:srgbClr val="64748B"/>
+                </a:solidFill>
+                <a:latin typeface="Calibri" pitchFamily="34" charset="0"/>
+                <a:ea typeface="Calibri" pitchFamily="34" charset="-122"/>
+                <a:cs typeface="Calibri" pitchFamily="34" charset="-120"/>
+              </a:rPr>
+              <a:t>Cada </a:t>
+            </a:r>
+            <a:r>
+              <a:rPr lang="es-ES" sz="1100" i="1" noProof="0" dirty="0" err="1">
+                <a:solidFill>
+                  <a:srgbClr val="64748B"/>
+                </a:solidFill>
+                <a:latin typeface="Calibri" pitchFamily="34" charset="0"/>
+                <a:ea typeface="Calibri" pitchFamily="34" charset="-122"/>
+                <a:cs typeface="Calibri" pitchFamily="34" charset="-120"/>
+              </a:rPr>
+              <a:t>dev</a:t>
+            </a:r>
+            <a:r>
+              <a:rPr lang="es-ES" sz="1100" i="1" noProof="0" dirty="0">
+                <a:solidFill>
+                  <a:srgbClr val="64748B"/>
+                </a:solidFill>
+                <a:latin typeface="Calibri" pitchFamily="34" charset="0"/>
+                <a:ea typeface="Calibri" pitchFamily="34" charset="-122"/>
+                <a:cs typeface="Calibri" pitchFamily="34" charset="-120"/>
+              </a:rPr>
+              <a:t> tiene su </a:t>
+            </a:r>
+            <a:r>
+              <a:rPr lang="es-ES" sz="1100" i="1" noProof="0" dirty="0" err="1">
+                <a:solidFill>
+                  <a:srgbClr val="64748B"/>
+                </a:solidFill>
+                <a:latin typeface="Calibri" pitchFamily="34" charset="0"/>
+                <a:ea typeface="Calibri" pitchFamily="34" charset="-122"/>
+                <a:cs typeface="Calibri" pitchFamily="34" charset="-120"/>
+              </a:rPr>
+              <a:t>sandbox</a:t>
+            </a:r>
+            <a:r>
+              <a:rPr lang="es-ES" sz="1100" i="1" noProof="0" dirty="0">
+                <a:solidFill>
+                  <a:srgbClr val="64748B"/>
+                </a:solidFill>
+                <a:latin typeface="Calibri" pitchFamily="34" charset="0"/>
+                <a:ea typeface="Calibri" pitchFamily="34" charset="-122"/>
+                <a:cs typeface="Calibri" pitchFamily="34" charset="-120"/>
+              </a:rPr>
+              <a:t> sin pisar a los demás.</a:t>
+            </a:r>
+            <a:endParaRPr lang="es-ES" sz="1100" noProof="0" dirty="0"/>
+          </a:p>
+        </p:txBody>
+      </p:sp>
+      <p:sp>
+        <p:nvSpPr>
+          <p:cNvPr id="8" name="Shape 6"/>
+          <p:cNvSpPr/>
+          <p:nvPr/>
+        </p:nvSpPr>
+        <p:spPr>
+          <a:xfrm>
+            <a:off x="4617720" y="1417320"/>
+            <a:ext cx="4069080" cy="3246120"/>
+          </a:xfrm>
+          <a:prstGeom prst="rect">
+            <a:avLst/>
+          </a:prstGeom>
+          <a:solidFill>
+            <a:srgbClr val="FFFFFF"/>
+          </a:solidFill>
+          <a:ln w="12700">
+            <a:solidFill>
+              <a:srgbClr val="E2E8F0"/>
+            </a:solidFill>
+            <a:prstDash val="solid"/>
+          </a:ln>
+          <a:effectLst>
+            <a:outerShdw blurRad="101600" dist="25400" dir="5400000" algn="bl" rotWithShape="0">
+              <a:srgbClr val="000000">
+                <a:alpha val="12000"/>
+              </a:srgbClr>
+            </a:outerShdw>
+          </a:effectLst>
+        </p:spPr>
+        <p:txBody>
+          <a:bodyPr/>
+          <a:lstStyle/>
+          <a:p>
+            <a:endParaRPr lang="es-ES" noProof="0" dirty="0"/>
+          </a:p>
+        </p:txBody>
+      </p:sp>
+      <p:sp>
+        <p:nvSpPr>
+          <p:cNvPr id="9" name="Shape 7"/>
+          <p:cNvSpPr/>
+          <p:nvPr/>
+        </p:nvSpPr>
+        <p:spPr>
+          <a:xfrm>
+            <a:off x="4617720" y="1417320"/>
+            <a:ext cx="4069080" cy="457200"/>
+          </a:xfrm>
+          <a:prstGeom prst="rect">
+            <a:avLst/>
+          </a:prstGeom>
+          <a:solidFill>
+            <a:srgbClr val="1E2761"/>
+          </a:solidFill>
+          <a:ln/>
+        </p:spPr>
+        <p:txBody>
+          <a:bodyPr/>
+          <a:lstStyle/>
+          <a:p>
+            <a:endParaRPr lang="es-ES" noProof="0" dirty="0"/>
+          </a:p>
+        </p:txBody>
+      </p:sp>
+      <p:sp>
+        <p:nvSpPr>
+          <p:cNvPr id="10" name="Text 8"/>
+          <p:cNvSpPr/>
+          <p:nvPr/>
+        </p:nvSpPr>
+        <p:spPr>
+          <a:xfrm>
+            <a:off x="4617720" y="1417320"/>
+            <a:ext cx="4069080" cy="457200"/>
+          </a:xfrm>
+          <a:prstGeom prst="rect">
+            <a:avLst/>
+          </a:prstGeom>
+          <a:noFill/>
+          <a:ln/>
+        </p:spPr>
+        <p:txBody>
+          <a:bodyPr wrap="square" lIns="0" tIns="0" rIns="0" bIns="0" rtlCol="0" anchor="ctr"/>
+          <a:lstStyle/>
+          <a:p>
+            <a:pPr marL="0" indent="0" algn="ctr">
+              <a:buNone/>
+            </a:pPr>
+            <a:r>
+              <a:rPr lang="es-ES" sz="1400" b="1" noProof="0" dirty="0">
+                <a:solidFill>
+                  <a:srgbClr val="FFFFFF"/>
+                </a:solidFill>
+                <a:latin typeface="Calibri" pitchFamily="34" charset="0"/>
+                <a:ea typeface="Calibri" pitchFamily="34" charset="-122"/>
+                <a:cs typeface="Calibri" pitchFamily="34" charset="-120"/>
+              </a:rPr>
+              <a:t>PRO  (entorno de producción)</a:t>
+            </a:r>
+            <a:endParaRPr lang="es-ES" sz="1400" noProof="0" dirty="0"/>
+          </a:p>
+        </p:txBody>
+      </p:sp>
+      <p:sp>
+        <p:nvSpPr>
+          <p:cNvPr id="11" name="Text 9"/>
+          <p:cNvSpPr/>
+          <p:nvPr/>
+        </p:nvSpPr>
+        <p:spPr>
+          <a:xfrm>
+            <a:off x="4800600" y="2011680"/>
+            <a:ext cx="3703320" cy="2560320"/>
+          </a:xfrm>
+          <a:prstGeom prst="rect">
+            <a:avLst/>
+          </a:prstGeom>
+          <a:noFill/>
+          <a:ln/>
+        </p:spPr>
+        <p:txBody>
+          <a:bodyPr wrap="square" lIns="0" tIns="0" rIns="0" bIns="0" rtlCol="0" anchor="t"/>
+          <a:lstStyle/>
+          <a:p>
+            <a:pPr marL="0" indent="0">
+              <a:spcAft>
+                <a:spcPts val="600"/>
+              </a:spcAft>
+              <a:buNone/>
+            </a:pPr>
+            <a:r>
+              <a:rPr lang="es-ES" sz="1100" noProof="0" dirty="0" err="1">
+                <a:solidFill>
+                  <a:srgbClr val="64748B"/>
+                </a:solidFill>
+                <a:latin typeface="Calibri" pitchFamily="34" charset="0"/>
+                <a:ea typeface="Calibri" pitchFamily="34" charset="-122"/>
+                <a:cs typeface="Calibri" pitchFamily="34" charset="-120"/>
+              </a:rPr>
+              <a:t>Database</a:t>
+            </a:r>
+            <a:r>
+              <a:rPr lang="es-ES" sz="1100" noProof="0" dirty="0">
+                <a:solidFill>
+                  <a:srgbClr val="64748B"/>
+                </a:solidFill>
+                <a:latin typeface="Calibri" pitchFamily="34" charset="0"/>
+                <a:ea typeface="Calibri" pitchFamily="34" charset="-122"/>
+                <a:cs typeface="Calibri" pitchFamily="34" charset="-120"/>
+              </a:rPr>
+              <a:t>: </a:t>
+            </a:r>
+            <a:r>
+              <a:rPr lang="es-ES" sz="1100" b="1" noProof="0" dirty="0">
+                <a:solidFill>
+                  <a:srgbClr val="1A202C"/>
+                </a:solidFill>
+                <a:latin typeface="Calibri" pitchFamily="34" charset="0"/>
+                <a:ea typeface="Calibri" pitchFamily="34" charset="-122"/>
+                <a:cs typeface="Calibri" pitchFamily="34" charset="-120"/>
+              </a:rPr>
+              <a:t>PRO_CITYBIKE_*</a:t>
+            </a:r>
+            <a:endParaRPr lang="es-ES" sz="1100" noProof="0" dirty="0"/>
+          </a:p>
+          <a:p>
+            <a:pPr marL="0" indent="0">
+              <a:spcAft>
+                <a:spcPts val="600"/>
+              </a:spcAft>
+              <a:buNone/>
+            </a:pPr>
+            <a:r>
+              <a:rPr lang="es-ES" sz="1100" noProof="0" dirty="0" err="1">
+                <a:solidFill>
+                  <a:srgbClr val="64748B"/>
+                </a:solidFill>
+                <a:latin typeface="Calibri" pitchFamily="34" charset="0"/>
+                <a:ea typeface="Calibri" pitchFamily="34" charset="-122"/>
+                <a:cs typeface="Calibri" pitchFamily="34" charset="-120"/>
+              </a:rPr>
+              <a:t>Warehouse</a:t>
+            </a:r>
+            <a:r>
+              <a:rPr lang="es-ES" sz="1100" noProof="0" dirty="0">
+                <a:solidFill>
+                  <a:srgbClr val="64748B"/>
+                </a:solidFill>
+                <a:latin typeface="Calibri" pitchFamily="34" charset="0"/>
+                <a:ea typeface="Calibri" pitchFamily="34" charset="-122"/>
+                <a:cs typeface="Calibri" pitchFamily="34" charset="-120"/>
+              </a:rPr>
+              <a:t>: </a:t>
+            </a:r>
+            <a:r>
+              <a:rPr lang="es-ES" sz="1100" b="1" noProof="0" dirty="0">
+                <a:solidFill>
+                  <a:srgbClr val="1A202C"/>
+                </a:solidFill>
+                <a:latin typeface="Calibri" pitchFamily="34" charset="0"/>
+                <a:ea typeface="Calibri" pitchFamily="34" charset="-122"/>
+                <a:cs typeface="Calibri" pitchFamily="34" charset="-120"/>
+              </a:rPr>
+              <a:t>WH_NYCBIKE_PRO (separado para atribución costes)</a:t>
+            </a:r>
+            <a:endParaRPr lang="es-ES" sz="1100" noProof="0" dirty="0"/>
+          </a:p>
+          <a:p>
+            <a:pPr marL="0" indent="0">
+              <a:spcAft>
+                <a:spcPts val="600"/>
+              </a:spcAft>
+              <a:buNone/>
+            </a:pPr>
+            <a:r>
+              <a:rPr lang="es-ES" sz="1100" noProof="0" dirty="0">
+                <a:solidFill>
+                  <a:srgbClr val="64748B"/>
+                </a:solidFill>
+                <a:latin typeface="Calibri" pitchFamily="34" charset="0"/>
+                <a:ea typeface="Calibri" pitchFamily="34" charset="-122"/>
+                <a:cs typeface="Calibri" pitchFamily="34" charset="-120"/>
+              </a:rPr>
+              <a:t>Schema: </a:t>
+            </a:r>
+            <a:r>
+              <a:rPr lang="es-ES" sz="1100" b="1" noProof="0" dirty="0">
+                <a:solidFill>
+                  <a:srgbClr val="1A202C"/>
+                </a:solidFill>
+                <a:latin typeface="Calibri" pitchFamily="34" charset="0"/>
+                <a:ea typeface="Calibri" pitchFamily="34" charset="-122"/>
+                <a:cs typeface="Calibri" pitchFamily="34" charset="-120"/>
+              </a:rPr>
+              <a:t>directo (sin prefijo)</a:t>
+            </a:r>
+            <a:endParaRPr lang="es-ES" sz="1100" noProof="0" dirty="0"/>
+          </a:p>
+          <a:p>
+            <a:pPr marL="0" indent="0">
+              <a:spcAft>
+                <a:spcPts val="600"/>
+              </a:spcAft>
+              <a:buNone/>
+            </a:pPr>
+            <a:r>
+              <a:rPr lang="es-ES" sz="1100" noProof="0" dirty="0">
+                <a:solidFill>
+                  <a:srgbClr val="64748B"/>
+                </a:solidFill>
+                <a:latin typeface="Calibri" pitchFamily="34" charset="0"/>
+                <a:ea typeface="Calibri" pitchFamily="34" charset="-122"/>
+                <a:cs typeface="Calibri" pitchFamily="34" charset="-120"/>
+              </a:rPr>
+              <a:t>Ejemplo: </a:t>
+            </a:r>
+            <a:r>
+              <a:rPr lang="es-ES" sz="900" noProof="0" dirty="0">
+                <a:solidFill>
+                  <a:srgbClr val="1A202C"/>
+                </a:solidFill>
+                <a:latin typeface="Consolas" pitchFamily="34" charset="0"/>
+                <a:ea typeface="Consolas" pitchFamily="34" charset="-122"/>
+                <a:cs typeface="Consolas" pitchFamily="34" charset="-120"/>
+              </a:rPr>
+              <a:t>PRO_CITYBIKE_GOLD.MOBILITY.FCT_TRIPS</a:t>
+            </a:r>
+            <a:endParaRPr lang="es-ES" sz="1100" noProof="0" dirty="0"/>
+          </a:p>
+          <a:p>
+            <a:pPr marL="0" indent="0">
+              <a:spcAft>
+                <a:spcPts val="600"/>
+              </a:spcAft>
+              <a:buNone/>
+            </a:pPr>
+            <a:r>
+              <a:rPr lang="es-ES" sz="1100" i="1" noProof="0" dirty="0">
+                <a:solidFill>
+                  <a:srgbClr val="64748B"/>
+                </a:solidFill>
+                <a:latin typeface="Calibri" pitchFamily="34" charset="0"/>
+                <a:ea typeface="Calibri" pitchFamily="34" charset="-122"/>
+                <a:cs typeface="Calibri" pitchFamily="34" charset="-120"/>
+              </a:rPr>
+              <a:t>Lo consume Power BI + ML.FORECAST.</a:t>
+            </a:r>
+            <a:endParaRPr lang="es-ES" sz="1100" noProof="0" dirty="0"/>
+          </a:p>
+        </p:txBody>
+      </p:sp>
+      <p:sp>
+        <p:nvSpPr>
+          <p:cNvPr id="12" name="Text 10"/>
+          <p:cNvSpPr/>
+          <p:nvPr/>
+        </p:nvSpPr>
+        <p:spPr>
+          <a:xfrm>
+            <a:off x="8229600" y="4800600"/>
+            <a:ext cx="822960" cy="228600"/>
+          </a:xfrm>
+          <a:prstGeom prst="rect">
+            <a:avLst/>
+          </a:prstGeom>
+          <a:noFill/>
+          <a:ln/>
+        </p:spPr>
+        <p:txBody>
+          <a:bodyPr wrap="square" lIns="0" tIns="0" rIns="0" bIns="0" rtlCol="0" anchor="ctr"/>
+          <a:lstStyle/>
+          <a:p>
+            <a:pPr marL="0" indent="0" algn="r">
+              <a:buNone/>
+            </a:pPr>
+            <a:r>
+              <a:rPr lang="es-ES" sz="900" noProof="0" dirty="0">
+                <a:solidFill>
+                  <a:srgbClr val="64748B"/>
+                </a:solidFill>
+                <a:latin typeface="Calibri" pitchFamily="34" charset="0"/>
+                <a:ea typeface="Calibri" pitchFamily="34" charset="-122"/>
+                <a:cs typeface="Calibri" pitchFamily="34" charset="-120"/>
+              </a:rPr>
+              <a:t>11 / 15</a:t>
+            </a:r>
+            <a:endParaRPr lang="es-ES" sz="900" noProof="0" dirty="0"/>
+          </a:p>
+        </p:txBody>
+      </p:sp>
+    </p:spTree>
+  </p:cSld>
+  <p:clrMapOvr>
+    <a:masterClrMapping/>
+  </p:clrMapOvr>
+</p:sld>
+</file>
+
 <file path=ppt/slides/slide12.xml><?xml version="1.0" encoding="utf-8"?>
 <p:sld xmlns:a="http://schemas.openxmlformats.org/drawingml/2006/main" xmlns:r="http://schemas.openxmlformats.org/officeDocument/2006/relationships" xmlns:p="http://schemas.openxmlformats.org/presentationml/2006/main">
   <p:cSld name="Slide 12">
@@ -2205,7 +5668,7 @@
                 <a:ea typeface="Calibri" pitchFamily="34" charset="-122"/>
                 <a:cs typeface="Calibri" pitchFamily="34" charset="-120"/>
               </a:rPr>
-              <a:t>8 / 11</a:t>
+              <a:t>12 / 15</a:t>
             </a:r>
             <a:endParaRPr lang="es-ES" sz="900" noProof="0" dirty="0"/>
           </a:p>
@@ -2530,7 +5993,7 @@
                 <a:ea typeface="Calibri" pitchFamily="34" charset="-122"/>
                 <a:cs typeface="Calibri" pitchFamily="34" charset="-120"/>
               </a:rPr>
-              <a:t>9 / 11</a:t>
+              <a:t>13 / 15</a:t>
             </a:r>
             <a:endParaRPr lang="es-ES" sz="900" noProof="0" dirty="0"/>
           </a:p>
@@ -2907,7 +6370,7 @@
                 <a:ea typeface="Calibri" pitchFamily="34" charset="-122"/>
                 <a:cs typeface="Calibri" pitchFamily="34" charset="-120"/>
               </a:rPr>
-              <a:t>10 / 11</a:t>
+              <a:t>14 / 15</a:t>
             </a:r>
             <a:endParaRPr lang="es-ES" sz="900" noProof="0" dirty="0"/>
           </a:p>
@@ -2927,8 +6390,8 @@
         </p:nvSpPr>
         <p:spPr>
           <a:xfrm>
-            <a:off x="1845787" y="4653263"/>
-            <a:ext cx="4601118" cy="228600"/>
+            <a:off x="1484636" y="4629635"/>
+            <a:ext cx="5377205" cy="228600"/>
           </a:xfrm>
           <a:prstGeom prst="rect">
             <a:avLst/>
@@ -2945,23 +6408,7 @@
             </a:pPr>
             <a:r>
               <a:rPr lang="es-ES" sz="1100" dirty="0"/>
-              <a:t>Total viajes &gt; 42.000 por estación. </a:t>
-            </a:r>
-            <a:r>
-              <a:rPr lang="es-ES" sz="1100" dirty="0" err="1"/>
-              <a:t>Bubble</a:t>
-            </a:r>
-            <a:r>
-              <a:rPr lang="es-ES" sz="1100" dirty="0"/>
-              <a:t> </a:t>
-            </a:r>
-            <a:r>
-              <a:rPr lang="es-ES" sz="1100" dirty="0" err="1"/>
-              <a:t>size</a:t>
-            </a:r>
-            <a:r>
-              <a:rPr lang="es-ES" sz="1100" dirty="0"/>
-              <a:t> y color por densidad de viajes</a:t>
+              <a:t>Total viajes &gt; 42.000 por estación. Tamaño de burbuja y color por densidad de viajes</a:t>
             </a:r>
             <a:endParaRPr lang="es-ES" sz="1100" noProof="0" dirty="0"/>
           </a:p>
@@ -3274,7 +6721,7 @@
                 <a:ea typeface="Calibri" pitchFamily="34" charset="-122"/>
                 <a:cs typeface="Calibri" pitchFamily="34" charset="-120"/>
               </a:rPr>
-              <a:t>Gold dividida en 5 dominios (CORE / MOBILITY / CLIMA / ANALYTICS/IA)</a:t>
+              <a:t>Gold dividida en 4 dominios (CORE / MOBILITY / CLIMA / ANALYTICS)</a:t>
             </a:r>
             <a:endParaRPr lang="es-ES" sz="1400" noProof="0" dirty="0"/>
           </a:p>
@@ -4383,29 +7830,7 @@
                 <a:ea typeface="Calibri" pitchFamily="34" charset="-122"/>
                 <a:cs typeface="Calibri" pitchFamily="34" charset="-120"/>
               </a:rPr>
-              <a:t> 30 </a:t>
-            </a:r>
-            <a:r>
-              <a:rPr lang="es-ES" sz="1200" b="1" noProof="0" dirty="0" err="1">
-                <a:solidFill>
-                  <a:srgbClr val="1A202C"/>
-                </a:solidFill>
-                <a:latin typeface="Calibri" pitchFamily="34" charset="0"/>
-                <a:ea typeface="Calibri" pitchFamily="34" charset="-122"/>
-                <a:cs typeface="Calibri" pitchFamily="34" charset="-120"/>
-              </a:rPr>
-              <a:t>dias</a:t>
-            </a:r>
-            <a:r>
-              <a:rPr lang="es-ES" sz="1200" b="1" noProof="0" dirty="0">
-                <a:solidFill>
-                  <a:srgbClr val="1A202C"/>
-                </a:solidFill>
-                <a:latin typeface="Calibri" pitchFamily="34" charset="0"/>
-                <a:ea typeface="Calibri" pitchFamily="34" charset="-122"/>
-                <a:cs typeface="Calibri" pitchFamily="34" charset="-120"/>
-              </a:rPr>
-              <a:t> </a:t>
+              <a:t> 30 “series” </a:t>
             </a:r>
             <a:r>
               <a:rPr lang="es-ES" sz="1200" noProof="0" dirty="0">
@@ -4477,7 +7902,1556 @@
                 <a:ea typeface="Calibri" pitchFamily="34" charset="-122"/>
                 <a:cs typeface="Calibri" pitchFamily="34" charset="-120"/>
               </a:rPr>
-              <a:t>2 / 11</a:t>
+              <a:t>2 / 15</a:t>
+            </a:r>
+            <a:endParaRPr lang="es-ES" sz="900" noProof="0" dirty="0"/>
+          </a:p>
+        </p:txBody>
+      </p:sp>
+    </p:spTree>
+  </p:cSld>
+  <p:clrMapOvr>
+    <a:masterClrMapping/>
+  </p:clrMapOvr>
+</p:sld>
+</file>
+
+<file path=ppt/slides/slide3.xml><?xml version="1.0" encoding="utf-8"?>
+<p:sld xmlns:a="http://schemas.openxmlformats.org/drawingml/2006/main" xmlns:r="http://schemas.openxmlformats.org/officeDocument/2006/relationships" xmlns:p="http://schemas.openxmlformats.org/presentationml/2006/main">
+  <p:cSld name="Slide 3">
+    <p:bg>
+      <p:bgPr>
+        <a:solidFill>
+          <a:srgbClr val="F8FAFC"/>
+        </a:solidFill>
+        <a:effectLst/>
+      </p:bgPr>
+    </p:bg>
+    <p:spTree>
+      <p:nvGrpSpPr>
+        <p:cNvPr id="1" name=""/>
+        <p:cNvGrpSpPr/>
+        <p:nvPr/>
+      </p:nvGrpSpPr>
+      <p:grpSpPr>
+        <a:xfrm>
+          <a:off x="0" y="0"/>
+          <a:ext cx="0" cy="0"/>
+          <a:chOff x="0" y="0"/>
+          <a:chExt cx="0" cy="0"/>
+        </a:xfrm>
+      </p:grpSpPr>
+      <p:sp>
+        <p:nvSpPr>
+          <p:cNvPr id="2" name="Text 0"/>
+          <p:cNvSpPr/>
+          <p:nvPr/>
+        </p:nvSpPr>
+        <p:spPr>
+          <a:xfrm>
+            <a:off x="457200" y="274320"/>
+            <a:ext cx="8229600" cy="274320"/>
+          </a:xfrm>
+          <a:prstGeom prst="rect">
+            <a:avLst/>
+          </a:prstGeom>
+          <a:noFill/>
+          <a:ln/>
+        </p:spPr>
+        <p:txBody>
+          <a:bodyPr wrap="square" lIns="0" tIns="0" rIns="0" bIns="0" rtlCol="0" anchor="ctr"/>
+          <a:lstStyle/>
+          <a:p>
+            <a:pPr marL="0" indent="0">
+              <a:buNone/>
+            </a:pPr>
+            <a:r>
+              <a:rPr lang="es-ES" sz="1100" b="1" kern="0" spc="400" noProof="0" dirty="0">
+                <a:solidFill>
+                  <a:srgbClr val="F59E0B"/>
+                </a:solidFill>
+                <a:latin typeface="Calibri" pitchFamily="34" charset="0"/>
+                <a:ea typeface="Calibri" pitchFamily="34" charset="-122"/>
+                <a:cs typeface="Calibri" pitchFamily="34" charset="-120"/>
+              </a:rPr>
+              <a:t>02 · TOOLS</a:t>
+            </a:r>
+            <a:endParaRPr lang="es-ES" sz="1100" noProof="0" dirty="0"/>
+          </a:p>
+        </p:txBody>
+      </p:sp>
+      <p:sp>
+        <p:nvSpPr>
+          <p:cNvPr id="3" name="Text 1"/>
+          <p:cNvSpPr/>
+          <p:nvPr/>
+        </p:nvSpPr>
+        <p:spPr>
+          <a:xfrm>
+            <a:off x="457200" y="502920"/>
+            <a:ext cx="8229600" cy="640080"/>
+          </a:xfrm>
+          <a:prstGeom prst="rect">
+            <a:avLst/>
+          </a:prstGeom>
+          <a:noFill/>
+          <a:ln/>
+        </p:spPr>
+        <p:txBody>
+          <a:bodyPr wrap="square" lIns="0" tIns="0" rIns="0" bIns="0" rtlCol="0" anchor="ctr"/>
+          <a:lstStyle/>
+          <a:p>
+            <a:pPr marL="0" indent="0">
+              <a:buNone/>
+            </a:pPr>
+            <a:r>
+              <a:rPr lang="es-ES" sz="2800" b="1" noProof="0" dirty="0">
+                <a:solidFill>
+                  <a:srgbClr val="1E2761"/>
+                </a:solidFill>
+                <a:latin typeface="Calibri" pitchFamily="34" charset="0"/>
+                <a:ea typeface="Calibri" pitchFamily="34" charset="-122"/>
+                <a:cs typeface="Calibri" pitchFamily="34" charset="-120"/>
+              </a:rPr>
+              <a:t>Stack técnico</a:t>
+            </a:r>
+            <a:endParaRPr lang="es-ES" sz="2800" noProof="0" dirty="0"/>
+          </a:p>
+        </p:txBody>
+      </p:sp>
+      <p:sp>
+        <p:nvSpPr>
+          <p:cNvPr id="4" name="Shape 2"/>
+          <p:cNvSpPr/>
+          <p:nvPr/>
+        </p:nvSpPr>
+        <p:spPr>
+          <a:xfrm>
+            <a:off x="457200" y="1417320"/>
+            <a:ext cx="1627632" cy="2743200"/>
+          </a:xfrm>
+          <a:prstGeom prst="rect">
+            <a:avLst/>
+          </a:prstGeom>
+          <a:solidFill>
+            <a:srgbClr val="FFFFFF"/>
+          </a:solidFill>
+          <a:ln w="12700">
+            <a:solidFill>
+              <a:srgbClr val="E2E8F0"/>
+            </a:solidFill>
+            <a:prstDash val="solid"/>
+          </a:ln>
+          <a:effectLst>
+            <a:outerShdw blurRad="101600" dist="25400" dir="5400000" algn="bl" rotWithShape="0">
+              <a:srgbClr val="000000">
+                <a:alpha val="12000"/>
+              </a:srgbClr>
+            </a:outerShdw>
+          </a:effectLst>
+        </p:spPr>
+        <p:txBody>
+          <a:bodyPr/>
+          <a:lstStyle/>
+          <a:p>
+            <a:endParaRPr lang="es-ES" noProof="0" dirty="0"/>
+          </a:p>
+        </p:txBody>
+      </p:sp>
+      <p:sp>
+        <p:nvSpPr>
+          <p:cNvPr id="5" name="Shape 3"/>
+          <p:cNvSpPr/>
+          <p:nvPr/>
+        </p:nvSpPr>
+        <p:spPr>
+          <a:xfrm>
+            <a:off x="457200" y="1417320"/>
+            <a:ext cx="1627632" cy="457200"/>
+          </a:xfrm>
+          <a:prstGeom prst="rect">
+            <a:avLst/>
+          </a:prstGeom>
+          <a:solidFill>
+            <a:srgbClr val="1E2761"/>
+          </a:solidFill>
+          <a:ln/>
+        </p:spPr>
+        <p:txBody>
+          <a:bodyPr/>
+          <a:lstStyle/>
+          <a:p>
+            <a:endParaRPr lang="es-ES" noProof="0" dirty="0"/>
+          </a:p>
+        </p:txBody>
+      </p:sp>
+      <p:sp>
+        <p:nvSpPr>
+          <p:cNvPr id="6" name="Text 4"/>
+          <p:cNvSpPr/>
+          <p:nvPr/>
+        </p:nvSpPr>
+        <p:spPr>
+          <a:xfrm>
+            <a:off x="457200" y="1417320"/>
+            <a:ext cx="1627632" cy="457200"/>
+          </a:xfrm>
+          <a:prstGeom prst="rect">
+            <a:avLst/>
+          </a:prstGeom>
+          <a:noFill/>
+          <a:ln/>
+        </p:spPr>
+        <p:txBody>
+          <a:bodyPr wrap="square" lIns="0" tIns="0" rIns="0" bIns="0" rtlCol="0" anchor="ctr"/>
+          <a:lstStyle/>
+          <a:p>
+            <a:pPr marL="0" indent="0" algn="ctr">
+              <a:buNone/>
+            </a:pPr>
+            <a:r>
+              <a:rPr lang="es-ES" sz="1400" b="1" noProof="0" dirty="0" err="1">
+                <a:solidFill>
+                  <a:srgbClr val="FFFFFF"/>
+                </a:solidFill>
+                <a:latin typeface="Calibri" pitchFamily="34" charset="0"/>
+                <a:ea typeface="Calibri" pitchFamily="34" charset="-122"/>
+                <a:cs typeface="Calibri" pitchFamily="34" charset="-120"/>
+              </a:rPr>
+              <a:t>Snowflake</a:t>
+            </a:r>
+            <a:endParaRPr lang="es-ES" sz="1400" noProof="0" dirty="0"/>
+          </a:p>
+        </p:txBody>
+      </p:sp>
+      <p:sp>
+        <p:nvSpPr>
+          <p:cNvPr id="7" name="Text 5"/>
+          <p:cNvSpPr/>
+          <p:nvPr/>
+        </p:nvSpPr>
+        <p:spPr>
+          <a:xfrm>
+            <a:off x="566928" y="1965960"/>
+            <a:ext cx="1408176" cy="365760"/>
+          </a:xfrm>
+          <a:prstGeom prst="rect">
+            <a:avLst/>
+          </a:prstGeom>
+          <a:noFill/>
+          <a:ln/>
+        </p:spPr>
+        <p:txBody>
+          <a:bodyPr wrap="square" lIns="0" tIns="0" rIns="0" bIns="0" rtlCol="0" anchor="ctr"/>
+          <a:lstStyle/>
+          <a:p>
+            <a:pPr marL="0" indent="0" algn="ctr">
+              <a:buNone/>
+            </a:pPr>
+            <a:r>
+              <a:rPr lang="es-ES" sz="1000" b="1" i="1" noProof="0" dirty="0" err="1">
+                <a:solidFill>
+                  <a:srgbClr val="F59E0B"/>
+                </a:solidFill>
+                <a:latin typeface="Calibri" pitchFamily="34" charset="0"/>
+                <a:ea typeface="Calibri" pitchFamily="34" charset="-122"/>
+                <a:cs typeface="Calibri" pitchFamily="34" charset="-120"/>
+              </a:rPr>
+              <a:t>Warehouse</a:t>
+            </a:r>
+            <a:r>
+              <a:rPr lang="es-ES" sz="1000" b="1" i="1" noProof="0" dirty="0">
+                <a:solidFill>
+                  <a:srgbClr val="F59E0B"/>
+                </a:solidFill>
+                <a:latin typeface="Calibri" pitchFamily="34" charset="0"/>
+                <a:ea typeface="Calibri" pitchFamily="34" charset="-122"/>
+                <a:cs typeface="Calibri" pitchFamily="34" charset="-120"/>
+              </a:rPr>
+              <a:t> + Streams + </a:t>
+            </a:r>
+            <a:r>
+              <a:rPr lang="es-ES" sz="1000" b="1" i="1" noProof="0" dirty="0" err="1">
+                <a:solidFill>
+                  <a:srgbClr val="F59E0B"/>
+                </a:solidFill>
+                <a:latin typeface="Calibri" pitchFamily="34" charset="0"/>
+                <a:ea typeface="Calibri" pitchFamily="34" charset="-122"/>
+                <a:cs typeface="Calibri" pitchFamily="34" charset="-120"/>
+              </a:rPr>
+              <a:t>Tasks</a:t>
+            </a:r>
+            <a:endParaRPr lang="es-ES" sz="1000" noProof="0" dirty="0"/>
+          </a:p>
+        </p:txBody>
+      </p:sp>
+      <p:sp>
+        <p:nvSpPr>
+          <p:cNvPr id="8" name="Text 6"/>
+          <p:cNvSpPr/>
+          <p:nvPr/>
+        </p:nvSpPr>
+        <p:spPr>
+          <a:xfrm>
+            <a:off x="566928" y="2331720"/>
+            <a:ext cx="1408176" cy="1737360"/>
+          </a:xfrm>
+          <a:prstGeom prst="rect">
+            <a:avLst/>
+          </a:prstGeom>
+          <a:noFill/>
+          <a:ln/>
+        </p:spPr>
+        <p:txBody>
+          <a:bodyPr wrap="square" lIns="0" tIns="0" rIns="0" bIns="0" rtlCol="0" anchor="t"/>
+          <a:lstStyle/>
+          <a:p>
+            <a:pPr marL="0" indent="0" algn="l">
+              <a:buNone/>
+            </a:pPr>
+            <a:r>
+              <a:rPr lang="es-ES" sz="1000" noProof="0" dirty="0">
+                <a:solidFill>
+                  <a:srgbClr val="1A202C"/>
+                </a:solidFill>
+                <a:latin typeface="Calibri" pitchFamily="34" charset="0"/>
+                <a:ea typeface="Calibri" pitchFamily="34" charset="-122"/>
+                <a:cs typeface="Calibri" pitchFamily="34" charset="-120"/>
+              </a:rPr>
+              <a:t>Almacenamiento, COPY INTO desde S3 publico, orquestación </a:t>
+            </a:r>
+            <a:r>
+              <a:rPr lang="es-ES" sz="1000" noProof="0" dirty="0" err="1">
+                <a:solidFill>
+                  <a:srgbClr val="1A202C"/>
+                </a:solidFill>
+                <a:latin typeface="Calibri" pitchFamily="34" charset="0"/>
+                <a:ea typeface="Calibri" pitchFamily="34" charset="-122"/>
+                <a:cs typeface="Calibri" pitchFamily="34" charset="-120"/>
+              </a:rPr>
+              <a:t>bronze</a:t>
+            </a:r>
+            <a:r>
+              <a:rPr lang="es-ES" sz="1000" noProof="0" dirty="0">
+                <a:solidFill>
+                  <a:srgbClr val="1A202C"/>
+                </a:solidFill>
+                <a:latin typeface="Calibri" pitchFamily="34" charset="0"/>
+                <a:ea typeface="Calibri" pitchFamily="34" charset="-122"/>
+                <a:cs typeface="Calibri" pitchFamily="34" charset="-120"/>
+              </a:rPr>
+              <a:t> con DAG de </a:t>
+            </a:r>
+            <a:r>
+              <a:rPr lang="es-ES" sz="1000" noProof="0" dirty="0" err="1">
+                <a:solidFill>
+                  <a:srgbClr val="1A202C"/>
+                </a:solidFill>
+                <a:latin typeface="Calibri" pitchFamily="34" charset="0"/>
+                <a:ea typeface="Calibri" pitchFamily="34" charset="-122"/>
+                <a:cs typeface="Calibri" pitchFamily="34" charset="-120"/>
+              </a:rPr>
+              <a:t>tasks</a:t>
+            </a:r>
+            <a:r>
+              <a:rPr lang="es-ES" sz="1000" noProof="0" dirty="0">
+                <a:solidFill>
+                  <a:srgbClr val="1A202C"/>
+                </a:solidFill>
+                <a:latin typeface="Calibri" pitchFamily="34" charset="0"/>
+                <a:ea typeface="Calibri" pitchFamily="34" charset="-122"/>
+                <a:cs typeface="Calibri" pitchFamily="34" charset="-120"/>
+              </a:rPr>
+              <a:t>.</a:t>
+            </a:r>
+            <a:endParaRPr lang="es-ES" sz="1000" noProof="0" dirty="0"/>
+          </a:p>
+        </p:txBody>
+      </p:sp>
+      <p:sp>
+        <p:nvSpPr>
+          <p:cNvPr id="9" name="Shape 7"/>
+          <p:cNvSpPr/>
+          <p:nvPr/>
+        </p:nvSpPr>
+        <p:spPr>
+          <a:xfrm>
+            <a:off x="2176272" y="1417320"/>
+            <a:ext cx="1627632" cy="2743200"/>
+          </a:xfrm>
+          <a:prstGeom prst="rect">
+            <a:avLst/>
+          </a:prstGeom>
+          <a:solidFill>
+            <a:srgbClr val="FFFFFF"/>
+          </a:solidFill>
+          <a:ln w="12700">
+            <a:solidFill>
+              <a:srgbClr val="E2E8F0"/>
+            </a:solidFill>
+            <a:prstDash val="solid"/>
+          </a:ln>
+          <a:effectLst>
+            <a:outerShdw blurRad="101600" dist="25400" dir="5400000" algn="bl" rotWithShape="0">
+              <a:srgbClr val="000000">
+                <a:alpha val="12000"/>
+              </a:srgbClr>
+            </a:outerShdw>
+          </a:effectLst>
+        </p:spPr>
+        <p:txBody>
+          <a:bodyPr/>
+          <a:lstStyle/>
+          <a:p>
+            <a:endParaRPr lang="es-ES" noProof="0" dirty="0"/>
+          </a:p>
+        </p:txBody>
+      </p:sp>
+      <p:sp>
+        <p:nvSpPr>
+          <p:cNvPr id="10" name="Shape 8"/>
+          <p:cNvSpPr/>
+          <p:nvPr/>
+        </p:nvSpPr>
+        <p:spPr>
+          <a:xfrm>
+            <a:off x="2176272" y="1417320"/>
+            <a:ext cx="1627632" cy="457200"/>
+          </a:xfrm>
+          <a:prstGeom prst="rect">
+            <a:avLst/>
+          </a:prstGeom>
+          <a:solidFill>
+            <a:srgbClr val="1E2761"/>
+          </a:solidFill>
+          <a:ln/>
+        </p:spPr>
+        <p:txBody>
+          <a:bodyPr/>
+          <a:lstStyle/>
+          <a:p>
+            <a:endParaRPr lang="es-ES" noProof="0" dirty="0"/>
+          </a:p>
+        </p:txBody>
+      </p:sp>
+      <p:sp>
+        <p:nvSpPr>
+          <p:cNvPr id="11" name="Text 9"/>
+          <p:cNvSpPr/>
+          <p:nvPr/>
+        </p:nvSpPr>
+        <p:spPr>
+          <a:xfrm>
+            <a:off x="2176272" y="1417320"/>
+            <a:ext cx="1627632" cy="457200"/>
+          </a:xfrm>
+          <a:prstGeom prst="rect">
+            <a:avLst/>
+          </a:prstGeom>
+          <a:noFill/>
+          <a:ln/>
+        </p:spPr>
+        <p:txBody>
+          <a:bodyPr wrap="square" lIns="0" tIns="0" rIns="0" bIns="0" rtlCol="0" anchor="ctr"/>
+          <a:lstStyle/>
+          <a:p>
+            <a:pPr marL="0" indent="0" algn="ctr">
+              <a:buNone/>
+            </a:pPr>
+            <a:r>
+              <a:rPr lang="es-ES" sz="1400" b="1" noProof="0" dirty="0" err="1">
+                <a:solidFill>
+                  <a:srgbClr val="FFFFFF"/>
+                </a:solidFill>
+                <a:latin typeface="Calibri" pitchFamily="34" charset="0"/>
+                <a:ea typeface="Calibri" pitchFamily="34" charset="-122"/>
+                <a:cs typeface="Calibri" pitchFamily="34" charset="-120"/>
+              </a:rPr>
+              <a:t>dbt</a:t>
+            </a:r>
+            <a:r>
+              <a:rPr lang="es-ES" sz="1400" b="1" noProof="0" dirty="0">
+                <a:solidFill>
+                  <a:srgbClr val="FFFFFF"/>
+                </a:solidFill>
+                <a:latin typeface="Calibri" pitchFamily="34" charset="0"/>
+                <a:ea typeface="Calibri" pitchFamily="34" charset="-122"/>
+                <a:cs typeface="Calibri" pitchFamily="34" charset="-120"/>
+              </a:rPr>
+              <a:t> 1.12</a:t>
+            </a:r>
+            <a:endParaRPr lang="es-ES" sz="1400" noProof="0" dirty="0"/>
+          </a:p>
+        </p:txBody>
+      </p:sp>
+      <p:sp>
+        <p:nvSpPr>
+          <p:cNvPr id="12" name="Text 10"/>
+          <p:cNvSpPr/>
+          <p:nvPr/>
+        </p:nvSpPr>
+        <p:spPr>
+          <a:xfrm>
+            <a:off x="2286000" y="1965960"/>
+            <a:ext cx="1408176" cy="365760"/>
+          </a:xfrm>
+          <a:prstGeom prst="rect">
+            <a:avLst/>
+          </a:prstGeom>
+          <a:noFill/>
+          <a:ln/>
+        </p:spPr>
+        <p:txBody>
+          <a:bodyPr wrap="square" lIns="0" tIns="0" rIns="0" bIns="0" rtlCol="0" anchor="ctr"/>
+          <a:lstStyle/>
+          <a:p>
+            <a:pPr marL="0" indent="0" algn="ctr">
+              <a:buNone/>
+            </a:pPr>
+            <a:r>
+              <a:rPr lang="es-ES" sz="1000" b="1" i="1" noProof="0" dirty="0">
+                <a:solidFill>
+                  <a:srgbClr val="F59E0B"/>
+                </a:solidFill>
+                <a:latin typeface="Calibri" pitchFamily="34" charset="0"/>
+                <a:ea typeface="Calibri" pitchFamily="34" charset="-122"/>
+                <a:cs typeface="Calibri" pitchFamily="34" charset="-120"/>
+              </a:rPr>
+              <a:t>Transformaciones + </a:t>
+            </a:r>
+            <a:r>
+              <a:rPr lang="es-ES" sz="1000" b="1" i="1" noProof="0" dirty="0" err="1">
+                <a:solidFill>
+                  <a:srgbClr val="F59E0B"/>
+                </a:solidFill>
+                <a:latin typeface="Calibri" pitchFamily="34" charset="0"/>
+                <a:ea typeface="Calibri" pitchFamily="34" charset="-122"/>
+                <a:cs typeface="Calibri" pitchFamily="34" charset="-120"/>
+              </a:rPr>
+              <a:t>Tests</a:t>
+            </a:r>
+            <a:endParaRPr lang="es-ES" sz="1000" noProof="0" dirty="0"/>
+          </a:p>
+        </p:txBody>
+      </p:sp>
+      <p:sp>
+        <p:nvSpPr>
+          <p:cNvPr id="13" name="Text 11"/>
+          <p:cNvSpPr/>
+          <p:nvPr/>
+        </p:nvSpPr>
+        <p:spPr>
+          <a:xfrm>
+            <a:off x="2286000" y="2331720"/>
+            <a:ext cx="1408176" cy="1737360"/>
+          </a:xfrm>
+          <a:prstGeom prst="rect">
+            <a:avLst/>
+          </a:prstGeom>
+          <a:noFill/>
+          <a:ln/>
+        </p:spPr>
+        <p:txBody>
+          <a:bodyPr wrap="square" lIns="0" tIns="0" rIns="0" bIns="0" rtlCol="0" anchor="t"/>
+          <a:lstStyle/>
+          <a:p>
+            <a:pPr marL="0" indent="0" algn="l">
+              <a:buNone/>
+            </a:pPr>
+            <a:r>
+              <a:rPr lang="es-ES" sz="1000" noProof="0" dirty="0">
+                <a:solidFill>
+                  <a:srgbClr val="1A202C"/>
+                </a:solidFill>
+                <a:latin typeface="Calibri" pitchFamily="34" charset="0"/>
+                <a:ea typeface="Calibri" pitchFamily="34" charset="-122"/>
+                <a:cs typeface="Calibri" pitchFamily="34" charset="-120"/>
+              </a:rPr>
+              <a:t>Modelos </a:t>
+            </a:r>
+            <a:r>
+              <a:rPr lang="es-ES" sz="1000" noProof="0" dirty="0" err="1">
+                <a:solidFill>
+                  <a:srgbClr val="1A202C"/>
+                </a:solidFill>
+                <a:latin typeface="Calibri" pitchFamily="34" charset="0"/>
+                <a:ea typeface="Calibri" pitchFamily="34" charset="-122"/>
+                <a:cs typeface="Calibri" pitchFamily="34" charset="-120"/>
+              </a:rPr>
+              <a:t>staging</a:t>
+            </a:r>
+            <a:r>
+              <a:rPr lang="es-ES" sz="1000" noProof="0" dirty="0">
+                <a:solidFill>
+                  <a:srgbClr val="1A202C"/>
+                </a:solidFill>
+                <a:latin typeface="Calibri" pitchFamily="34" charset="0"/>
+                <a:ea typeface="Calibri" pitchFamily="34" charset="-122"/>
+                <a:cs typeface="Calibri" pitchFamily="34" charset="-120"/>
+              </a:rPr>
+              <a:t>/</a:t>
+            </a:r>
+            <a:r>
+              <a:rPr lang="es-ES" sz="1000" noProof="0" dirty="0" err="1">
+                <a:solidFill>
+                  <a:srgbClr val="1A202C"/>
+                </a:solidFill>
+                <a:latin typeface="Calibri" pitchFamily="34" charset="0"/>
+                <a:ea typeface="Calibri" pitchFamily="34" charset="-122"/>
+                <a:cs typeface="Calibri" pitchFamily="34" charset="-120"/>
+              </a:rPr>
+              <a:t>silver</a:t>
+            </a:r>
+            <a:r>
+              <a:rPr lang="es-ES" sz="1000" noProof="0" dirty="0">
+                <a:solidFill>
+                  <a:srgbClr val="1A202C"/>
+                </a:solidFill>
+                <a:latin typeface="Calibri" pitchFamily="34" charset="0"/>
+                <a:ea typeface="Calibri" pitchFamily="34" charset="-122"/>
+                <a:cs typeface="Calibri" pitchFamily="34" charset="-120"/>
+              </a:rPr>
+              <a:t>/</a:t>
+            </a:r>
+            <a:r>
+              <a:rPr lang="es-ES" sz="1000" noProof="0" dirty="0" err="1">
+                <a:solidFill>
+                  <a:srgbClr val="1A202C"/>
+                </a:solidFill>
+                <a:latin typeface="Calibri" pitchFamily="34" charset="0"/>
+                <a:ea typeface="Calibri" pitchFamily="34" charset="-122"/>
+                <a:cs typeface="Calibri" pitchFamily="34" charset="-120"/>
+              </a:rPr>
+              <a:t>gold</a:t>
+            </a:r>
+            <a:r>
+              <a:rPr lang="es-ES" sz="1000" noProof="0" dirty="0">
+                <a:solidFill>
+                  <a:srgbClr val="1A202C"/>
+                </a:solidFill>
+                <a:latin typeface="Calibri" pitchFamily="34" charset="0"/>
+                <a:ea typeface="Calibri" pitchFamily="34" charset="-122"/>
+                <a:cs typeface="Calibri" pitchFamily="34" charset="-120"/>
+              </a:rPr>
+              <a:t>/IA, </a:t>
+            </a:r>
+            <a:r>
+              <a:rPr lang="es-ES" sz="1000" noProof="0" dirty="0" err="1">
+                <a:solidFill>
+                  <a:srgbClr val="1A202C"/>
+                </a:solidFill>
+                <a:latin typeface="Calibri" pitchFamily="34" charset="0"/>
+                <a:ea typeface="Calibri" pitchFamily="34" charset="-122"/>
+                <a:cs typeface="Calibri" pitchFamily="34" charset="-120"/>
+              </a:rPr>
+              <a:t>snapshot</a:t>
+            </a:r>
+            <a:r>
+              <a:rPr lang="es-ES" sz="1000" noProof="0" dirty="0">
+                <a:solidFill>
+                  <a:srgbClr val="1A202C"/>
+                </a:solidFill>
+                <a:latin typeface="Calibri" pitchFamily="34" charset="0"/>
+                <a:ea typeface="Calibri" pitchFamily="34" charset="-122"/>
+                <a:cs typeface="Calibri" pitchFamily="34" charset="-120"/>
+              </a:rPr>
+              <a:t> SCD2 NOAA, </a:t>
+            </a:r>
+            <a:r>
+              <a:rPr lang="es-ES" sz="1000" noProof="0" dirty="0" err="1">
+                <a:solidFill>
+                  <a:srgbClr val="1A202C"/>
+                </a:solidFill>
+                <a:latin typeface="Calibri" pitchFamily="34" charset="0"/>
+                <a:ea typeface="Calibri" pitchFamily="34" charset="-122"/>
+                <a:cs typeface="Calibri" pitchFamily="34" charset="-120"/>
+              </a:rPr>
+              <a:t>contracts</a:t>
+            </a:r>
+            <a:r>
+              <a:rPr lang="es-ES" sz="1000" noProof="0" dirty="0">
+                <a:solidFill>
+                  <a:srgbClr val="1A202C"/>
+                </a:solidFill>
+                <a:latin typeface="Calibri" pitchFamily="34" charset="0"/>
+                <a:ea typeface="Calibri" pitchFamily="34" charset="-122"/>
+                <a:cs typeface="Calibri" pitchFamily="34" charset="-120"/>
+              </a:rPr>
+              <a:t>, </a:t>
+            </a:r>
+            <a:r>
+              <a:rPr lang="es-ES" sz="1000" noProof="0" dirty="0" err="1">
+                <a:solidFill>
+                  <a:srgbClr val="1A202C"/>
+                </a:solidFill>
+                <a:latin typeface="Calibri" pitchFamily="34" charset="0"/>
+                <a:ea typeface="Calibri" pitchFamily="34" charset="-122"/>
+                <a:cs typeface="Calibri" pitchFamily="34" charset="-120"/>
+              </a:rPr>
+              <a:t>unit</a:t>
+            </a:r>
+            <a:r>
+              <a:rPr lang="es-ES" sz="1000" noProof="0" dirty="0">
+                <a:solidFill>
+                  <a:srgbClr val="1A202C"/>
+                </a:solidFill>
+                <a:latin typeface="Calibri" pitchFamily="34" charset="0"/>
+                <a:ea typeface="Calibri" pitchFamily="34" charset="-122"/>
+                <a:cs typeface="Calibri" pitchFamily="34" charset="-120"/>
+              </a:rPr>
+              <a:t> + singular </a:t>
+            </a:r>
+            <a:r>
+              <a:rPr lang="es-ES" sz="1000" noProof="0" dirty="0" err="1">
+                <a:solidFill>
+                  <a:srgbClr val="1A202C"/>
+                </a:solidFill>
+                <a:latin typeface="Calibri" pitchFamily="34" charset="0"/>
+                <a:ea typeface="Calibri" pitchFamily="34" charset="-122"/>
+                <a:cs typeface="Calibri" pitchFamily="34" charset="-120"/>
+              </a:rPr>
+              <a:t>tests</a:t>
+            </a:r>
+            <a:r>
+              <a:rPr lang="es-ES" sz="1000" noProof="0" dirty="0">
+                <a:solidFill>
+                  <a:srgbClr val="1A202C"/>
+                </a:solidFill>
+                <a:latin typeface="Calibri" pitchFamily="34" charset="0"/>
+                <a:ea typeface="Calibri" pitchFamily="34" charset="-122"/>
+                <a:cs typeface="Calibri" pitchFamily="34" charset="-120"/>
+              </a:rPr>
+              <a:t>.</a:t>
+            </a:r>
+            <a:endParaRPr lang="es-ES" sz="1000" noProof="0" dirty="0"/>
+          </a:p>
+        </p:txBody>
+      </p:sp>
+      <p:sp>
+        <p:nvSpPr>
+          <p:cNvPr id="14" name="Shape 12"/>
+          <p:cNvSpPr/>
+          <p:nvPr/>
+        </p:nvSpPr>
+        <p:spPr>
+          <a:xfrm>
+            <a:off x="3895344" y="1417320"/>
+            <a:ext cx="1627632" cy="2743200"/>
+          </a:xfrm>
+          <a:prstGeom prst="rect">
+            <a:avLst/>
+          </a:prstGeom>
+          <a:solidFill>
+            <a:srgbClr val="FFFFFF"/>
+          </a:solidFill>
+          <a:ln w="12700">
+            <a:solidFill>
+              <a:srgbClr val="E2E8F0"/>
+            </a:solidFill>
+            <a:prstDash val="solid"/>
+          </a:ln>
+          <a:effectLst>
+            <a:outerShdw blurRad="101600" dist="25400" dir="5400000" algn="bl" rotWithShape="0">
+              <a:srgbClr val="000000">
+                <a:alpha val="12000"/>
+              </a:srgbClr>
+            </a:outerShdw>
+          </a:effectLst>
+        </p:spPr>
+        <p:txBody>
+          <a:bodyPr/>
+          <a:lstStyle/>
+          <a:p>
+            <a:endParaRPr lang="es-ES" noProof="0" dirty="0"/>
+          </a:p>
+        </p:txBody>
+      </p:sp>
+      <p:sp>
+        <p:nvSpPr>
+          <p:cNvPr id="15" name="Shape 13"/>
+          <p:cNvSpPr/>
+          <p:nvPr/>
+        </p:nvSpPr>
+        <p:spPr>
+          <a:xfrm>
+            <a:off x="3895344" y="1417320"/>
+            <a:ext cx="1627632" cy="457200"/>
+          </a:xfrm>
+          <a:prstGeom prst="rect">
+            <a:avLst/>
+          </a:prstGeom>
+          <a:solidFill>
+            <a:srgbClr val="1E2761"/>
+          </a:solidFill>
+          <a:ln/>
+        </p:spPr>
+        <p:txBody>
+          <a:bodyPr/>
+          <a:lstStyle/>
+          <a:p>
+            <a:endParaRPr lang="es-ES" noProof="0" dirty="0"/>
+          </a:p>
+        </p:txBody>
+      </p:sp>
+      <p:sp>
+        <p:nvSpPr>
+          <p:cNvPr id="16" name="Text 14"/>
+          <p:cNvSpPr/>
+          <p:nvPr/>
+        </p:nvSpPr>
+        <p:spPr>
+          <a:xfrm>
+            <a:off x="3895344" y="1417320"/>
+            <a:ext cx="1627632" cy="457200"/>
+          </a:xfrm>
+          <a:prstGeom prst="rect">
+            <a:avLst/>
+          </a:prstGeom>
+          <a:noFill/>
+          <a:ln/>
+        </p:spPr>
+        <p:txBody>
+          <a:bodyPr wrap="square" lIns="0" tIns="0" rIns="0" bIns="0" rtlCol="0" anchor="ctr"/>
+          <a:lstStyle/>
+          <a:p>
+            <a:pPr marL="0" indent="0" algn="ctr">
+              <a:buNone/>
+            </a:pPr>
+            <a:r>
+              <a:rPr lang="es-ES" sz="1400" b="1" noProof="0" dirty="0">
+                <a:solidFill>
+                  <a:srgbClr val="FFFFFF"/>
+                </a:solidFill>
+                <a:latin typeface="Calibri" pitchFamily="34" charset="0"/>
+                <a:ea typeface="Calibri" pitchFamily="34" charset="-122"/>
+                <a:cs typeface="Calibri" pitchFamily="34" charset="-120"/>
+              </a:rPr>
+              <a:t>Python</a:t>
+            </a:r>
+            <a:endParaRPr lang="es-ES" sz="1400" noProof="0" dirty="0"/>
+          </a:p>
+        </p:txBody>
+      </p:sp>
+      <p:sp>
+        <p:nvSpPr>
+          <p:cNvPr id="17" name="Text 15"/>
+          <p:cNvSpPr/>
+          <p:nvPr/>
+        </p:nvSpPr>
+        <p:spPr>
+          <a:xfrm>
+            <a:off x="4005072" y="1965960"/>
+            <a:ext cx="1408176" cy="365760"/>
+          </a:xfrm>
+          <a:prstGeom prst="rect">
+            <a:avLst/>
+          </a:prstGeom>
+          <a:noFill/>
+          <a:ln/>
+        </p:spPr>
+        <p:txBody>
+          <a:bodyPr wrap="square" lIns="0" tIns="0" rIns="0" bIns="0" rtlCol="0" anchor="ctr"/>
+          <a:lstStyle/>
+          <a:p>
+            <a:pPr marL="0" indent="0" algn="ctr">
+              <a:buNone/>
+            </a:pPr>
+            <a:r>
+              <a:rPr lang="es-ES" sz="1000" b="1" i="1" noProof="0" dirty="0" err="1">
+                <a:solidFill>
+                  <a:srgbClr val="F59E0B"/>
+                </a:solidFill>
+                <a:latin typeface="Calibri" pitchFamily="34" charset="0"/>
+                <a:ea typeface="Calibri" pitchFamily="34" charset="-122"/>
+                <a:cs typeface="Calibri" pitchFamily="34" charset="-120"/>
+              </a:rPr>
+              <a:t>Ingestor</a:t>
+            </a:r>
+            <a:r>
+              <a:rPr lang="es-ES" sz="1000" b="1" i="1" noProof="0" dirty="0">
+                <a:solidFill>
+                  <a:srgbClr val="F59E0B"/>
+                </a:solidFill>
+                <a:latin typeface="Calibri" pitchFamily="34" charset="0"/>
+                <a:ea typeface="Calibri" pitchFamily="34" charset="-122"/>
+                <a:cs typeface="Calibri" pitchFamily="34" charset="-120"/>
+              </a:rPr>
+              <a:t> incremental</a:t>
+            </a:r>
+            <a:endParaRPr lang="es-ES" sz="1000" noProof="0" dirty="0"/>
+          </a:p>
+        </p:txBody>
+      </p:sp>
+      <p:sp>
+        <p:nvSpPr>
+          <p:cNvPr id="18" name="Text 16"/>
+          <p:cNvSpPr/>
+          <p:nvPr/>
+        </p:nvSpPr>
+        <p:spPr>
+          <a:xfrm>
+            <a:off x="4005072" y="2331720"/>
+            <a:ext cx="1408176" cy="1737360"/>
+          </a:xfrm>
+          <a:prstGeom prst="rect">
+            <a:avLst/>
+          </a:prstGeom>
+          <a:noFill/>
+          <a:ln/>
+        </p:spPr>
+        <p:txBody>
+          <a:bodyPr wrap="square" lIns="0" tIns="0" rIns="0" bIns="0" rtlCol="0" anchor="t"/>
+          <a:lstStyle/>
+          <a:p>
+            <a:pPr marL="0" indent="0" algn="l">
+              <a:buNone/>
+            </a:pPr>
+            <a:r>
+              <a:rPr lang="es-ES" sz="1000" noProof="0" dirty="0">
+                <a:solidFill>
+                  <a:srgbClr val="1A202C"/>
+                </a:solidFill>
+                <a:latin typeface="Calibri" pitchFamily="34" charset="0"/>
+                <a:ea typeface="Calibri" pitchFamily="34" charset="-122"/>
+                <a:cs typeface="Calibri" pitchFamily="34" charset="-120"/>
+              </a:rPr>
+              <a:t>extract_jc_to_stage.py: descarga </a:t>
+            </a:r>
+            <a:r>
+              <a:rPr lang="es-ES" sz="1000" noProof="0" dirty="0" err="1">
+                <a:solidFill>
+                  <a:srgbClr val="1A202C"/>
+                </a:solidFill>
+                <a:latin typeface="Calibri" pitchFamily="34" charset="0"/>
+                <a:ea typeface="Calibri" pitchFamily="34" charset="-122"/>
+                <a:cs typeface="Calibri" pitchFamily="34" charset="-120"/>
+              </a:rPr>
+              <a:t>zips</a:t>
+            </a:r>
+            <a:r>
+              <a:rPr lang="es-ES" sz="1000" noProof="0" dirty="0">
+                <a:solidFill>
+                  <a:srgbClr val="1A202C"/>
+                </a:solidFill>
+                <a:latin typeface="Calibri" pitchFamily="34" charset="0"/>
+                <a:ea typeface="Calibri" pitchFamily="34" charset="-122"/>
+                <a:cs typeface="Calibri" pitchFamily="34" charset="-120"/>
+              </a:rPr>
+              <a:t> Citi </a:t>
+            </a:r>
+            <a:r>
+              <a:rPr lang="es-ES" sz="1000" noProof="0" dirty="0" err="1">
+                <a:solidFill>
+                  <a:srgbClr val="1A202C"/>
+                </a:solidFill>
+                <a:latin typeface="Calibri" pitchFamily="34" charset="0"/>
+                <a:ea typeface="Calibri" pitchFamily="34" charset="-122"/>
+                <a:cs typeface="Calibri" pitchFamily="34" charset="-120"/>
+              </a:rPr>
+              <a:t>Bike</a:t>
+            </a:r>
+            <a:r>
+              <a:rPr lang="es-ES" sz="1000" noProof="0" dirty="0">
+                <a:solidFill>
+                  <a:srgbClr val="1A202C"/>
+                </a:solidFill>
+                <a:latin typeface="Calibri" pitchFamily="34" charset="0"/>
+                <a:ea typeface="Calibri" pitchFamily="34" charset="-122"/>
+                <a:cs typeface="Calibri" pitchFamily="34" charset="-120"/>
+              </a:rPr>
+              <a:t> y PUT al </a:t>
+            </a:r>
+            <a:r>
+              <a:rPr lang="es-ES" sz="1000" noProof="0" dirty="0" err="1">
+                <a:solidFill>
+                  <a:srgbClr val="1A202C"/>
+                </a:solidFill>
+                <a:latin typeface="Calibri" pitchFamily="34" charset="0"/>
+                <a:ea typeface="Calibri" pitchFamily="34" charset="-122"/>
+                <a:cs typeface="Calibri" pitchFamily="34" charset="-120"/>
+              </a:rPr>
+              <a:t>stage</a:t>
+            </a:r>
+            <a:r>
+              <a:rPr lang="es-ES" sz="1000" noProof="0" dirty="0">
+                <a:solidFill>
+                  <a:srgbClr val="1A202C"/>
+                </a:solidFill>
+                <a:latin typeface="Calibri" pitchFamily="34" charset="0"/>
+                <a:ea typeface="Calibri" pitchFamily="34" charset="-122"/>
+                <a:cs typeface="Calibri" pitchFamily="34" charset="-120"/>
+              </a:rPr>
+              <a:t> interno (NY 202604+, JC siempre).</a:t>
+            </a:r>
+            <a:endParaRPr lang="es-ES" sz="1000" noProof="0" dirty="0"/>
+          </a:p>
+        </p:txBody>
+      </p:sp>
+      <p:sp>
+        <p:nvSpPr>
+          <p:cNvPr id="19" name="Shape 17"/>
+          <p:cNvSpPr/>
+          <p:nvPr/>
+        </p:nvSpPr>
+        <p:spPr>
+          <a:xfrm>
+            <a:off x="5614416" y="1417320"/>
+            <a:ext cx="1627632" cy="2743200"/>
+          </a:xfrm>
+          <a:prstGeom prst="rect">
+            <a:avLst/>
+          </a:prstGeom>
+          <a:solidFill>
+            <a:srgbClr val="FFFFFF"/>
+          </a:solidFill>
+          <a:ln w="12700">
+            <a:solidFill>
+              <a:srgbClr val="E2E8F0"/>
+            </a:solidFill>
+            <a:prstDash val="solid"/>
+          </a:ln>
+          <a:effectLst>
+            <a:outerShdw blurRad="101600" dist="25400" dir="5400000" algn="bl" rotWithShape="0">
+              <a:srgbClr val="000000">
+                <a:alpha val="12000"/>
+              </a:srgbClr>
+            </a:outerShdw>
+          </a:effectLst>
+        </p:spPr>
+        <p:txBody>
+          <a:bodyPr/>
+          <a:lstStyle/>
+          <a:p>
+            <a:endParaRPr lang="es-ES" noProof="0" dirty="0"/>
+          </a:p>
+        </p:txBody>
+      </p:sp>
+      <p:sp>
+        <p:nvSpPr>
+          <p:cNvPr id="20" name="Shape 18"/>
+          <p:cNvSpPr/>
+          <p:nvPr/>
+        </p:nvSpPr>
+        <p:spPr>
+          <a:xfrm>
+            <a:off x="5614416" y="1417320"/>
+            <a:ext cx="1627632" cy="457200"/>
+          </a:xfrm>
+          <a:prstGeom prst="rect">
+            <a:avLst/>
+          </a:prstGeom>
+          <a:solidFill>
+            <a:srgbClr val="1E2761"/>
+          </a:solidFill>
+          <a:ln/>
+        </p:spPr>
+        <p:txBody>
+          <a:bodyPr/>
+          <a:lstStyle/>
+          <a:p>
+            <a:endParaRPr lang="es-ES" noProof="0" dirty="0"/>
+          </a:p>
+        </p:txBody>
+      </p:sp>
+      <p:sp>
+        <p:nvSpPr>
+          <p:cNvPr id="21" name="Text 19"/>
+          <p:cNvSpPr/>
+          <p:nvPr/>
+        </p:nvSpPr>
+        <p:spPr>
+          <a:xfrm>
+            <a:off x="5614416" y="1417320"/>
+            <a:ext cx="1627632" cy="457200"/>
+          </a:xfrm>
+          <a:prstGeom prst="rect">
+            <a:avLst/>
+          </a:prstGeom>
+          <a:noFill/>
+          <a:ln/>
+        </p:spPr>
+        <p:txBody>
+          <a:bodyPr wrap="square" lIns="0" tIns="0" rIns="0" bIns="0" rtlCol="0" anchor="ctr"/>
+          <a:lstStyle/>
+          <a:p>
+            <a:pPr marL="0" indent="0" algn="ctr">
+              <a:buNone/>
+            </a:pPr>
+            <a:r>
+              <a:rPr lang="es-ES" sz="1400" b="1" noProof="0" dirty="0" err="1">
+                <a:solidFill>
+                  <a:srgbClr val="FFFFFF"/>
+                </a:solidFill>
+                <a:latin typeface="Calibri" pitchFamily="34" charset="0"/>
+                <a:ea typeface="Calibri" pitchFamily="34" charset="-122"/>
+                <a:cs typeface="Calibri" pitchFamily="34" charset="-120"/>
+              </a:rPr>
+              <a:t>Cortex</a:t>
+            </a:r>
+            <a:r>
+              <a:rPr lang="es-ES" sz="1400" b="1" noProof="0" dirty="0">
+                <a:solidFill>
+                  <a:srgbClr val="FFFFFF"/>
+                </a:solidFill>
+                <a:latin typeface="Calibri" pitchFamily="34" charset="0"/>
+                <a:ea typeface="Calibri" pitchFamily="34" charset="-122"/>
+                <a:cs typeface="Calibri" pitchFamily="34" charset="-120"/>
+              </a:rPr>
+              <a:t> ML</a:t>
+            </a:r>
+            <a:endParaRPr lang="es-ES" sz="1400" noProof="0" dirty="0"/>
+          </a:p>
+        </p:txBody>
+      </p:sp>
+      <p:sp>
+        <p:nvSpPr>
+          <p:cNvPr id="22" name="Text 20"/>
+          <p:cNvSpPr/>
+          <p:nvPr/>
+        </p:nvSpPr>
+        <p:spPr>
+          <a:xfrm>
+            <a:off x="5724144" y="1965960"/>
+            <a:ext cx="1408176" cy="365760"/>
+          </a:xfrm>
+          <a:prstGeom prst="rect">
+            <a:avLst/>
+          </a:prstGeom>
+          <a:noFill/>
+          <a:ln/>
+        </p:spPr>
+        <p:txBody>
+          <a:bodyPr wrap="square" lIns="0" tIns="0" rIns="0" bIns="0" rtlCol="0" anchor="ctr"/>
+          <a:lstStyle/>
+          <a:p>
+            <a:pPr marL="0" indent="0" algn="ctr">
+              <a:buNone/>
+            </a:pPr>
+            <a:r>
+              <a:rPr lang="es-ES" sz="1000" b="1" i="1" noProof="0" dirty="0" err="1">
+                <a:solidFill>
+                  <a:srgbClr val="F59E0B"/>
+                </a:solidFill>
+                <a:latin typeface="Calibri" pitchFamily="34" charset="0"/>
+                <a:ea typeface="Calibri" pitchFamily="34" charset="-122"/>
+                <a:cs typeface="Calibri" pitchFamily="34" charset="-120"/>
+              </a:rPr>
+              <a:t>Forecast</a:t>
+            </a:r>
+            <a:r>
+              <a:rPr lang="es-ES" sz="1000" b="1" i="1" noProof="0" dirty="0">
+                <a:solidFill>
+                  <a:srgbClr val="F59E0B"/>
+                </a:solidFill>
+                <a:latin typeface="Calibri" pitchFamily="34" charset="0"/>
+                <a:ea typeface="Calibri" pitchFamily="34" charset="-122"/>
+                <a:cs typeface="Calibri" pitchFamily="34" charset="-120"/>
+              </a:rPr>
+              <a:t> nativo</a:t>
+            </a:r>
+            <a:endParaRPr lang="es-ES" sz="1000" noProof="0" dirty="0"/>
+          </a:p>
+        </p:txBody>
+      </p:sp>
+      <p:sp>
+        <p:nvSpPr>
+          <p:cNvPr id="23" name="Text 21"/>
+          <p:cNvSpPr/>
+          <p:nvPr/>
+        </p:nvSpPr>
+        <p:spPr>
+          <a:xfrm>
+            <a:off x="5724144" y="2331720"/>
+            <a:ext cx="1408176" cy="1737360"/>
+          </a:xfrm>
+          <a:prstGeom prst="rect">
+            <a:avLst/>
+          </a:prstGeom>
+          <a:noFill/>
+          <a:ln/>
+        </p:spPr>
+        <p:txBody>
+          <a:bodyPr wrap="square" lIns="0" tIns="0" rIns="0" bIns="0" rtlCol="0" anchor="t"/>
+          <a:lstStyle/>
+          <a:p>
+            <a:pPr marL="0" indent="0" algn="l">
+              <a:buNone/>
+            </a:pPr>
+            <a:r>
+              <a:rPr lang="es-ES" sz="1000" noProof="0" dirty="0">
+                <a:solidFill>
+                  <a:srgbClr val="1A202C"/>
+                </a:solidFill>
+                <a:latin typeface="Calibri" pitchFamily="34" charset="0"/>
+                <a:ea typeface="Calibri" pitchFamily="34" charset="-122"/>
+                <a:cs typeface="Calibri" pitchFamily="34" charset="-120"/>
+              </a:rPr>
+              <a:t>SNOWFLAKE.ML.FORECAST sobre </a:t>
+            </a:r>
+            <a:r>
+              <a:rPr lang="es-ES" sz="1000" noProof="0" dirty="0" err="1">
+                <a:solidFill>
+                  <a:srgbClr val="1A202C"/>
+                </a:solidFill>
+                <a:latin typeface="Calibri" pitchFamily="34" charset="0"/>
+                <a:ea typeface="Calibri" pitchFamily="34" charset="-122"/>
+                <a:cs typeface="Calibri" pitchFamily="34" charset="-120"/>
+              </a:rPr>
+              <a:t>fct_trips_daily</a:t>
+            </a:r>
+            <a:r>
+              <a:rPr lang="es-ES" sz="1000" noProof="0" dirty="0">
+                <a:solidFill>
+                  <a:srgbClr val="1A202C"/>
+                </a:solidFill>
+                <a:latin typeface="Calibri" pitchFamily="34" charset="0"/>
+                <a:ea typeface="Calibri" pitchFamily="34" charset="-122"/>
+                <a:cs typeface="Calibri" pitchFamily="34" charset="-120"/>
+              </a:rPr>
+              <a:t> — 30 </a:t>
+            </a:r>
+            <a:r>
+              <a:rPr lang="es-ES" sz="1000" noProof="0" dirty="0" err="1">
+                <a:solidFill>
+                  <a:srgbClr val="1A202C"/>
+                </a:solidFill>
+                <a:latin typeface="Calibri" pitchFamily="34" charset="0"/>
+                <a:ea typeface="Calibri" pitchFamily="34" charset="-122"/>
+                <a:cs typeface="Calibri" pitchFamily="34" charset="-120"/>
+              </a:rPr>
+              <a:t>dias</a:t>
+            </a:r>
+            <a:r>
+              <a:rPr lang="es-ES" sz="1000" noProof="0" dirty="0">
+                <a:solidFill>
+                  <a:srgbClr val="1A202C"/>
+                </a:solidFill>
+                <a:latin typeface="Calibri" pitchFamily="34" charset="0"/>
+                <a:ea typeface="Calibri" pitchFamily="34" charset="-122"/>
+                <a:cs typeface="Calibri" pitchFamily="34" charset="-120"/>
+              </a:rPr>
+              <a:t> x 8 series (</a:t>
+            </a:r>
+            <a:r>
+              <a:rPr lang="es-ES" sz="1000" noProof="0" dirty="0" err="1">
+                <a:solidFill>
+                  <a:srgbClr val="1A202C"/>
+                </a:solidFill>
+                <a:latin typeface="Calibri" pitchFamily="34" charset="0"/>
+                <a:ea typeface="Calibri" pitchFamily="34" charset="-122"/>
+                <a:cs typeface="Calibri" pitchFamily="34" charset="-120"/>
+              </a:rPr>
+              <a:t>city</a:t>
+            </a:r>
+            <a:r>
+              <a:rPr lang="es-ES" sz="1000" noProof="0" dirty="0">
+                <a:solidFill>
+                  <a:srgbClr val="1A202C"/>
+                </a:solidFill>
+                <a:latin typeface="Calibri" pitchFamily="34" charset="0"/>
+                <a:ea typeface="Calibri" pitchFamily="34" charset="-122"/>
+                <a:cs typeface="Calibri" pitchFamily="34" charset="-120"/>
+              </a:rPr>
+              <a:t> x </a:t>
+            </a:r>
+            <a:r>
+              <a:rPr lang="es-ES" sz="1000" noProof="0" dirty="0" err="1">
+                <a:solidFill>
+                  <a:srgbClr val="1A202C"/>
+                </a:solidFill>
+                <a:latin typeface="Calibri" pitchFamily="34" charset="0"/>
+                <a:ea typeface="Calibri" pitchFamily="34" charset="-122"/>
+                <a:cs typeface="Calibri" pitchFamily="34" charset="-120"/>
+              </a:rPr>
+              <a:t>bike</a:t>
+            </a:r>
+            <a:r>
+              <a:rPr lang="es-ES" sz="1000" noProof="0" dirty="0">
+                <a:solidFill>
+                  <a:srgbClr val="1A202C"/>
+                </a:solidFill>
+                <a:latin typeface="Calibri" pitchFamily="34" charset="0"/>
+                <a:ea typeface="Calibri" pitchFamily="34" charset="-122"/>
+                <a:cs typeface="Calibri" pitchFamily="34" charset="-120"/>
+              </a:rPr>
+              <a:t> x </a:t>
+            </a:r>
+            <a:r>
+              <a:rPr lang="es-ES" sz="1000" noProof="0" dirty="0" err="1">
+                <a:solidFill>
+                  <a:srgbClr val="1A202C"/>
+                </a:solidFill>
+                <a:latin typeface="Calibri" pitchFamily="34" charset="0"/>
+                <a:ea typeface="Calibri" pitchFamily="34" charset="-122"/>
+                <a:cs typeface="Calibri" pitchFamily="34" charset="-120"/>
+              </a:rPr>
+              <a:t>user</a:t>
+            </a:r>
+            <a:r>
+              <a:rPr lang="es-ES" sz="1000" noProof="0" dirty="0">
+                <a:solidFill>
+                  <a:srgbClr val="1A202C"/>
+                </a:solidFill>
+                <a:latin typeface="Calibri" pitchFamily="34" charset="0"/>
+                <a:ea typeface="Calibri" pitchFamily="34" charset="-122"/>
+                <a:cs typeface="Calibri" pitchFamily="34" charset="-120"/>
+              </a:rPr>
+              <a:t>).</a:t>
+            </a:r>
+            <a:endParaRPr lang="es-ES" sz="1000" noProof="0" dirty="0"/>
+          </a:p>
+        </p:txBody>
+      </p:sp>
+      <p:sp>
+        <p:nvSpPr>
+          <p:cNvPr id="24" name="Shape 22"/>
+          <p:cNvSpPr/>
+          <p:nvPr/>
+        </p:nvSpPr>
+        <p:spPr>
+          <a:xfrm>
+            <a:off x="7333488" y="1417320"/>
+            <a:ext cx="1627632" cy="2743200"/>
+          </a:xfrm>
+          <a:prstGeom prst="rect">
+            <a:avLst/>
+          </a:prstGeom>
+          <a:solidFill>
+            <a:srgbClr val="FFFFFF"/>
+          </a:solidFill>
+          <a:ln w="12700">
+            <a:solidFill>
+              <a:srgbClr val="E2E8F0"/>
+            </a:solidFill>
+            <a:prstDash val="solid"/>
+          </a:ln>
+          <a:effectLst>
+            <a:outerShdw blurRad="101600" dist="25400" dir="5400000" algn="bl" rotWithShape="0">
+              <a:srgbClr val="000000">
+                <a:alpha val="12000"/>
+              </a:srgbClr>
+            </a:outerShdw>
+          </a:effectLst>
+        </p:spPr>
+        <p:txBody>
+          <a:bodyPr/>
+          <a:lstStyle/>
+          <a:p>
+            <a:endParaRPr lang="es-ES" noProof="0" dirty="0"/>
+          </a:p>
+        </p:txBody>
+      </p:sp>
+      <p:sp>
+        <p:nvSpPr>
+          <p:cNvPr id="25" name="Shape 23"/>
+          <p:cNvSpPr/>
+          <p:nvPr/>
+        </p:nvSpPr>
+        <p:spPr>
+          <a:xfrm>
+            <a:off x="7333488" y="1417320"/>
+            <a:ext cx="1627632" cy="457200"/>
+          </a:xfrm>
+          <a:prstGeom prst="rect">
+            <a:avLst/>
+          </a:prstGeom>
+          <a:solidFill>
+            <a:srgbClr val="1E2761"/>
+          </a:solidFill>
+          <a:ln/>
+        </p:spPr>
+        <p:txBody>
+          <a:bodyPr/>
+          <a:lstStyle/>
+          <a:p>
+            <a:endParaRPr lang="es-ES" noProof="0" dirty="0"/>
+          </a:p>
+        </p:txBody>
+      </p:sp>
+      <p:sp>
+        <p:nvSpPr>
+          <p:cNvPr id="26" name="Text 24"/>
+          <p:cNvSpPr/>
+          <p:nvPr/>
+        </p:nvSpPr>
+        <p:spPr>
+          <a:xfrm>
+            <a:off x="7333488" y="1417320"/>
+            <a:ext cx="1627632" cy="457200"/>
+          </a:xfrm>
+          <a:prstGeom prst="rect">
+            <a:avLst/>
+          </a:prstGeom>
+          <a:noFill/>
+          <a:ln/>
+        </p:spPr>
+        <p:txBody>
+          <a:bodyPr wrap="square" lIns="0" tIns="0" rIns="0" bIns="0" rtlCol="0" anchor="ctr"/>
+          <a:lstStyle/>
+          <a:p>
+            <a:pPr marL="0" indent="0" algn="ctr">
+              <a:buNone/>
+            </a:pPr>
+            <a:r>
+              <a:rPr lang="es-ES" sz="1400" b="1" noProof="0" dirty="0">
+                <a:solidFill>
+                  <a:srgbClr val="FFFFFF"/>
+                </a:solidFill>
+                <a:latin typeface="Calibri" pitchFamily="34" charset="0"/>
+                <a:ea typeface="Calibri" pitchFamily="34" charset="-122"/>
+                <a:cs typeface="Calibri" pitchFamily="34" charset="-120"/>
+              </a:rPr>
+              <a:t>Power BI</a:t>
+            </a:r>
+            <a:endParaRPr lang="es-ES" sz="1400" noProof="0" dirty="0"/>
+          </a:p>
+        </p:txBody>
+      </p:sp>
+      <p:sp>
+        <p:nvSpPr>
+          <p:cNvPr id="27" name="Text 25"/>
+          <p:cNvSpPr/>
+          <p:nvPr/>
+        </p:nvSpPr>
+        <p:spPr>
+          <a:xfrm>
+            <a:off x="7443216" y="1965960"/>
+            <a:ext cx="1408176" cy="365760"/>
+          </a:xfrm>
+          <a:prstGeom prst="rect">
+            <a:avLst/>
+          </a:prstGeom>
+          <a:noFill/>
+          <a:ln/>
+        </p:spPr>
+        <p:txBody>
+          <a:bodyPr wrap="square" lIns="0" tIns="0" rIns="0" bIns="0" rtlCol="0" anchor="ctr"/>
+          <a:lstStyle/>
+          <a:p>
+            <a:pPr marL="0" indent="0" algn="ctr">
+              <a:buNone/>
+            </a:pPr>
+            <a:r>
+              <a:rPr lang="es-ES" sz="1000" b="1" i="1" noProof="0" dirty="0">
+                <a:solidFill>
+                  <a:srgbClr val="F59E0B"/>
+                </a:solidFill>
+                <a:latin typeface="Calibri" pitchFamily="34" charset="0"/>
+                <a:ea typeface="Calibri" pitchFamily="34" charset="-122"/>
+                <a:cs typeface="Calibri" pitchFamily="34" charset="-120"/>
+              </a:rPr>
+              <a:t>Consumo final</a:t>
+            </a:r>
+            <a:endParaRPr lang="es-ES" sz="1000" noProof="0" dirty="0"/>
+          </a:p>
+        </p:txBody>
+      </p:sp>
+      <p:sp>
+        <p:nvSpPr>
+          <p:cNvPr id="28" name="Text 26"/>
+          <p:cNvSpPr/>
+          <p:nvPr/>
+        </p:nvSpPr>
+        <p:spPr>
+          <a:xfrm>
+            <a:off x="7443216" y="2331720"/>
+            <a:ext cx="1408176" cy="1737360"/>
+          </a:xfrm>
+          <a:prstGeom prst="rect">
+            <a:avLst/>
+          </a:prstGeom>
+          <a:noFill/>
+          <a:ln/>
+        </p:spPr>
+        <p:txBody>
+          <a:bodyPr wrap="square" lIns="0" tIns="0" rIns="0" bIns="0" rtlCol="0" anchor="t"/>
+          <a:lstStyle/>
+          <a:p>
+            <a:pPr marL="0" indent="0" algn="l">
+              <a:buNone/>
+            </a:pPr>
+            <a:r>
+              <a:rPr lang="es-ES" sz="1000" noProof="0" dirty="0" err="1">
+                <a:solidFill>
+                  <a:srgbClr val="1A202C"/>
+                </a:solidFill>
+                <a:latin typeface="Calibri" pitchFamily="34" charset="0"/>
+                <a:ea typeface="Calibri" pitchFamily="34" charset="-122"/>
+                <a:cs typeface="Calibri" pitchFamily="34" charset="-120"/>
+              </a:rPr>
+              <a:t>Dashboards</a:t>
+            </a:r>
+            <a:r>
+              <a:rPr lang="es-ES" sz="1000" noProof="0" dirty="0">
+                <a:solidFill>
+                  <a:srgbClr val="1A202C"/>
+                </a:solidFill>
+                <a:latin typeface="Calibri" pitchFamily="34" charset="0"/>
+                <a:ea typeface="Calibri" pitchFamily="34" charset="-122"/>
+                <a:cs typeface="Calibri" pitchFamily="34" charset="-120"/>
+              </a:rPr>
+              <a:t> sobre </a:t>
+            </a:r>
+            <a:r>
+              <a:rPr lang="es-ES" sz="1000" noProof="0" dirty="0" err="1">
+                <a:solidFill>
+                  <a:srgbClr val="1A202C"/>
+                </a:solidFill>
+                <a:latin typeface="Calibri" pitchFamily="34" charset="0"/>
+                <a:ea typeface="Calibri" pitchFamily="34" charset="-122"/>
+                <a:cs typeface="Calibri" pitchFamily="34" charset="-120"/>
+              </a:rPr>
+              <a:t>schemas</a:t>
+            </a:r>
+            <a:r>
+              <a:rPr lang="es-ES" sz="1000" noProof="0" dirty="0">
+                <a:solidFill>
+                  <a:srgbClr val="1A202C"/>
+                </a:solidFill>
+                <a:latin typeface="Calibri" pitchFamily="34" charset="0"/>
+                <a:ea typeface="Calibri" pitchFamily="34" charset="-122"/>
+                <a:cs typeface="Calibri" pitchFamily="34" charset="-120"/>
+              </a:rPr>
+              <a:t> Gold. Se realizan las graficas con los datos finales.</a:t>
+            </a:r>
+            <a:endParaRPr lang="es-ES" sz="1000" noProof="0" dirty="0"/>
+          </a:p>
+        </p:txBody>
+      </p:sp>
+      <p:sp>
+        <p:nvSpPr>
+          <p:cNvPr id="29" name="Text 27"/>
+          <p:cNvSpPr/>
+          <p:nvPr/>
+        </p:nvSpPr>
+        <p:spPr>
+          <a:xfrm>
+            <a:off x="8229600" y="4800600"/>
+            <a:ext cx="822960" cy="228600"/>
+          </a:xfrm>
+          <a:prstGeom prst="rect">
+            <a:avLst/>
+          </a:prstGeom>
+          <a:noFill/>
+          <a:ln/>
+        </p:spPr>
+        <p:txBody>
+          <a:bodyPr wrap="square" lIns="0" tIns="0" rIns="0" bIns="0" rtlCol="0" anchor="ctr"/>
+          <a:lstStyle/>
+          <a:p>
+            <a:pPr marL="0" indent="0" algn="r">
+              <a:buNone/>
+            </a:pPr>
+            <a:r>
+              <a:rPr lang="es-ES" sz="900" noProof="0" dirty="0">
+                <a:solidFill>
+                  <a:srgbClr val="64748B"/>
+                </a:solidFill>
+                <a:latin typeface="Calibri" pitchFamily="34" charset="0"/>
+                <a:ea typeface="Calibri" pitchFamily="34" charset="-122"/>
+                <a:cs typeface="Calibri" pitchFamily="34" charset="-120"/>
+              </a:rPr>
+              <a:t>3 / 15</a:t>
             </a:r>
             <a:endParaRPr lang="es-ES" sz="900" noProof="0" dirty="0"/>
           </a:p>
@@ -6173,7 +11147,1104 @@
                 <a:ea typeface="Calibri" pitchFamily="34" charset="-122"/>
                 <a:cs typeface="Calibri" pitchFamily="34" charset="-120"/>
               </a:rPr>
-              <a:t>3 / 11</a:t>
+              <a:t>4 / 15</a:t>
+            </a:r>
+            <a:endParaRPr lang="es-ES" sz="900" noProof="0" dirty="0"/>
+          </a:p>
+        </p:txBody>
+      </p:sp>
+    </p:spTree>
+  </p:cSld>
+  <p:clrMapOvr>
+    <a:masterClrMapping/>
+  </p:clrMapOvr>
+</p:sld>
+</file>
+
+<file path=ppt/slides/slide5.xml><?xml version="1.0" encoding="utf-8"?>
+<p:sld xmlns:a="http://schemas.openxmlformats.org/drawingml/2006/main" xmlns:r="http://schemas.openxmlformats.org/officeDocument/2006/relationships" xmlns:p="http://schemas.openxmlformats.org/presentationml/2006/main">
+  <p:cSld name="Slide 5">
+    <p:bg>
+      <p:bgPr>
+        <a:solidFill>
+          <a:srgbClr val="F8FAFC"/>
+        </a:solidFill>
+        <a:effectLst/>
+      </p:bgPr>
+    </p:bg>
+    <p:spTree>
+      <p:nvGrpSpPr>
+        <p:cNvPr id="1" name=""/>
+        <p:cNvGrpSpPr/>
+        <p:nvPr/>
+      </p:nvGrpSpPr>
+      <p:grpSpPr>
+        <a:xfrm>
+          <a:off x="0" y="0"/>
+          <a:ext cx="0" cy="0"/>
+          <a:chOff x="0" y="0"/>
+          <a:chExt cx="0" cy="0"/>
+        </a:xfrm>
+      </p:grpSpPr>
+      <p:sp>
+        <p:nvSpPr>
+          <p:cNvPr id="2" name="Text 0"/>
+          <p:cNvSpPr/>
+          <p:nvPr/>
+        </p:nvSpPr>
+        <p:spPr>
+          <a:xfrm>
+            <a:off x="457200" y="274320"/>
+            <a:ext cx="8229600" cy="274320"/>
+          </a:xfrm>
+          <a:prstGeom prst="rect">
+            <a:avLst/>
+          </a:prstGeom>
+          <a:noFill/>
+          <a:ln/>
+        </p:spPr>
+        <p:txBody>
+          <a:bodyPr wrap="square" lIns="0" tIns="0" rIns="0" bIns="0" rtlCol="0" anchor="ctr"/>
+          <a:lstStyle/>
+          <a:p>
+            <a:pPr marL="0" indent="0">
+              <a:buNone/>
+            </a:pPr>
+            <a:r>
+              <a:rPr lang="es-ES" sz="1100" b="1" kern="0" spc="400" noProof="0" dirty="0">
+                <a:solidFill>
+                  <a:srgbClr val="F59E0B"/>
+                </a:solidFill>
+                <a:latin typeface="Calibri" pitchFamily="34" charset="0"/>
+                <a:ea typeface="Calibri" pitchFamily="34" charset="-122"/>
+                <a:cs typeface="Calibri" pitchFamily="34" charset="-120"/>
+              </a:rPr>
+              <a:t>04 · SNOWFLAKE STREAMS + TASKS</a:t>
+            </a:r>
+            <a:endParaRPr lang="es-ES" sz="1100" noProof="0" dirty="0"/>
+          </a:p>
+        </p:txBody>
+      </p:sp>
+      <p:sp>
+        <p:nvSpPr>
+          <p:cNvPr id="3" name="Text 1"/>
+          <p:cNvSpPr/>
+          <p:nvPr/>
+        </p:nvSpPr>
+        <p:spPr>
+          <a:xfrm>
+            <a:off x="457200" y="502920"/>
+            <a:ext cx="8229600" cy="640080"/>
+          </a:xfrm>
+          <a:prstGeom prst="rect">
+            <a:avLst/>
+          </a:prstGeom>
+          <a:noFill/>
+          <a:ln/>
+        </p:spPr>
+        <p:txBody>
+          <a:bodyPr wrap="square" lIns="0" tIns="0" rIns="0" bIns="0" rtlCol="0" anchor="ctr"/>
+          <a:lstStyle/>
+          <a:p>
+            <a:pPr marL="0" indent="0">
+              <a:buNone/>
+            </a:pPr>
+            <a:r>
+              <a:rPr lang="es-ES" sz="2800" b="1" noProof="0" dirty="0">
+                <a:solidFill>
+                  <a:srgbClr val="1E2761"/>
+                </a:solidFill>
+                <a:latin typeface="Calibri" pitchFamily="34" charset="0"/>
+                <a:ea typeface="Calibri" pitchFamily="34" charset="-122"/>
+                <a:cs typeface="Calibri" pitchFamily="34" charset="-120"/>
+              </a:rPr>
+              <a:t>Bronze · ingesta orquestada</a:t>
+            </a:r>
+            <a:endParaRPr lang="es-ES" sz="2800" noProof="0" dirty="0"/>
+          </a:p>
+        </p:txBody>
+      </p:sp>
+      <p:sp>
+        <p:nvSpPr>
+          <p:cNvPr id="4" name="Shape 2"/>
+          <p:cNvSpPr/>
+          <p:nvPr/>
+        </p:nvSpPr>
+        <p:spPr>
+          <a:xfrm>
+            <a:off x="4846320" y="1417320"/>
+            <a:ext cx="3840480" cy="3246120"/>
+          </a:xfrm>
+          <a:prstGeom prst="rect">
+            <a:avLst/>
+          </a:prstGeom>
+          <a:solidFill>
+            <a:srgbClr val="FFFFFF"/>
+          </a:solidFill>
+          <a:ln w="12700">
+            <a:solidFill>
+              <a:srgbClr val="E2E8F0"/>
+            </a:solidFill>
+            <a:prstDash val="solid"/>
+          </a:ln>
+          <a:effectLst>
+            <a:outerShdw blurRad="101600" dist="25400" dir="5400000" algn="bl" rotWithShape="0">
+              <a:srgbClr val="000000">
+                <a:alpha val="12000"/>
+              </a:srgbClr>
+            </a:outerShdw>
+          </a:effectLst>
+        </p:spPr>
+        <p:txBody>
+          <a:bodyPr/>
+          <a:lstStyle/>
+          <a:p>
+            <a:endParaRPr lang="es-ES" noProof="0" dirty="0"/>
+          </a:p>
+        </p:txBody>
+      </p:sp>
+      <p:sp>
+        <p:nvSpPr>
+          <p:cNvPr id="5" name="Text 3"/>
+          <p:cNvSpPr/>
+          <p:nvPr/>
+        </p:nvSpPr>
+        <p:spPr>
+          <a:xfrm>
+            <a:off x="4983480" y="1508760"/>
+            <a:ext cx="3566160" cy="320040"/>
+          </a:xfrm>
+          <a:prstGeom prst="rect">
+            <a:avLst/>
+          </a:prstGeom>
+          <a:noFill/>
+          <a:ln/>
+        </p:spPr>
+        <p:txBody>
+          <a:bodyPr wrap="square" lIns="0" tIns="0" rIns="0" bIns="0" rtlCol="0" anchor="ctr"/>
+          <a:lstStyle/>
+          <a:p>
+            <a:pPr marL="0" indent="0">
+              <a:buNone/>
+            </a:pPr>
+            <a:r>
+              <a:rPr lang="es-ES" sz="1200" b="1" noProof="0" dirty="0">
+                <a:solidFill>
+                  <a:srgbClr val="1E2761"/>
+                </a:solidFill>
+                <a:latin typeface="Calibri" pitchFamily="34" charset="0"/>
+                <a:ea typeface="Calibri" pitchFamily="34" charset="-122"/>
+                <a:cs typeface="Calibri" pitchFamily="34" charset="-120"/>
+              </a:rPr>
+              <a:t>DAG de </a:t>
+            </a:r>
+            <a:r>
+              <a:rPr lang="es-ES" sz="1200" b="1" noProof="0" dirty="0" err="1">
+                <a:solidFill>
+                  <a:srgbClr val="1E2761"/>
+                </a:solidFill>
+                <a:latin typeface="Calibri" pitchFamily="34" charset="0"/>
+                <a:ea typeface="Calibri" pitchFamily="34" charset="-122"/>
+                <a:cs typeface="Calibri" pitchFamily="34" charset="-120"/>
+              </a:rPr>
+              <a:t>tasks</a:t>
+            </a:r>
+            <a:r>
+              <a:rPr lang="es-ES" sz="1200" b="1" noProof="0" dirty="0">
+                <a:solidFill>
+                  <a:srgbClr val="1E2761"/>
+                </a:solidFill>
+                <a:latin typeface="Calibri" pitchFamily="34" charset="0"/>
+                <a:ea typeface="Calibri" pitchFamily="34" charset="-122"/>
+                <a:cs typeface="Calibri" pitchFamily="34" charset="-120"/>
+              </a:rPr>
+              <a:t> (cron </a:t>
+            </a:r>
+            <a:r>
+              <a:rPr lang="es-ES" sz="1200" b="1" noProof="0" dirty="0" err="1">
+                <a:solidFill>
+                  <a:srgbClr val="1E2761"/>
+                </a:solidFill>
+                <a:latin typeface="Calibri" pitchFamily="34" charset="0"/>
+                <a:ea typeface="Calibri" pitchFamily="34" charset="-122"/>
+                <a:cs typeface="Calibri" pitchFamily="34" charset="-120"/>
+              </a:rPr>
+              <a:t>dia</a:t>
+            </a:r>
+            <a:r>
+              <a:rPr lang="es-ES" sz="1200" b="1" noProof="0" dirty="0">
+                <a:solidFill>
+                  <a:srgbClr val="1E2761"/>
+                </a:solidFill>
+                <a:latin typeface="Calibri" pitchFamily="34" charset="0"/>
+                <a:ea typeface="Calibri" pitchFamily="34" charset="-122"/>
+                <a:cs typeface="Calibri" pitchFamily="34" charset="-120"/>
+              </a:rPr>
+              <a:t> 28, 03:00 NY)</a:t>
+            </a:r>
+            <a:endParaRPr lang="es-ES" sz="1200" noProof="0" dirty="0"/>
+          </a:p>
+        </p:txBody>
+      </p:sp>
+      <p:sp>
+        <p:nvSpPr>
+          <p:cNvPr id="6" name="Text 4"/>
+          <p:cNvSpPr/>
+          <p:nvPr/>
+        </p:nvSpPr>
+        <p:spPr>
+          <a:xfrm>
+            <a:off x="5029200" y="1874520"/>
+            <a:ext cx="3474720" cy="2743200"/>
+          </a:xfrm>
+          <a:prstGeom prst="rect">
+            <a:avLst/>
+          </a:prstGeom>
+          <a:noFill/>
+          <a:ln/>
+        </p:spPr>
+        <p:txBody>
+          <a:bodyPr wrap="square" lIns="0" tIns="0" rIns="0" bIns="0" rtlCol="0" anchor="t"/>
+          <a:lstStyle/>
+          <a:p>
+            <a:pPr marL="0" indent="0">
+              <a:spcAft>
+                <a:spcPts val="600"/>
+              </a:spcAft>
+              <a:buNone/>
+            </a:pPr>
+            <a:r>
+              <a:rPr lang="es-ES" sz="1100" b="1" noProof="0" dirty="0">
+                <a:solidFill>
+                  <a:srgbClr val="1A202C"/>
+                </a:solidFill>
+                <a:latin typeface="Consolas" pitchFamily="34" charset="0"/>
+                <a:ea typeface="Consolas" pitchFamily="34" charset="-122"/>
+                <a:cs typeface="Consolas" pitchFamily="34" charset="-120"/>
+              </a:rPr>
+              <a:t>TSK_BRONZE_MASTER  (</a:t>
+            </a:r>
+            <a:r>
+              <a:rPr lang="es-ES" sz="1100" b="1" noProof="0" dirty="0" err="1">
+                <a:solidFill>
+                  <a:srgbClr val="1A202C"/>
+                </a:solidFill>
+                <a:latin typeface="Consolas" pitchFamily="34" charset="0"/>
+                <a:ea typeface="Consolas" pitchFamily="34" charset="-122"/>
+                <a:cs typeface="Consolas" pitchFamily="34" charset="-120"/>
+              </a:rPr>
+              <a:t>root</a:t>
+            </a:r>
+            <a:r>
+              <a:rPr lang="es-ES" sz="1100" b="1" noProof="0" dirty="0">
+                <a:solidFill>
+                  <a:srgbClr val="1A202C"/>
+                </a:solidFill>
+                <a:latin typeface="Consolas" pitchFamily="34" charset="0"/>
+                <a:ea typeface="Consolas" pitchFamily="34" charset="-122"/>
+                <a:cs typeface="Consolas" pitchFamily="34" charset="-120"/>
+              </a:rPr>
+              <a:t> </a:t>
+            </a:r>
+            <a:r>
+              <a:rPr lang="es-ES" sz="1100" b="1" noProof="0" dirty="0" err="1">
+                <a:solidFill>
+                  <a:srgbClr val="1A202C"/>
+                </a:solidFill>
+                <a:latin typeface="Consolas" pitchFamily="34" charset="0"/>
+                <a:ea typeface="Consolas" pitchFamily="34" charset="-122"/>
+                <a:cs typeface="Consolas" pitchFamily="34" charset="-120"/>
+              </a:rPr>
+              <a:t>unico</a:t>
+            </a:r>
+            <a:r>
+              <a:rPr lang="es-ES" sz="1100" b="1" noProof="0" dirty="0">
+                <a:solidFill>
+                  <a:srgbClr val="1A202C"/>
+                </a:solidFill>
+                <a:latin typeface="Consolas" pitchFamily="34" charset="0"/>
+                <a:ea typeface="Consolas" pitchFamily="34" charset="-122"/>
+                <a:cs typeface="Consolas" pitchFamily="34" charset="-120"/>
+              </a:rPr>
+              <a:t> CRON)</a:t>
+            </a:r>
+            <a:endParaRPr lang="es-ES" sz="1100" noProof="0" dirty="0"/>
+          </a:p>
+          <a:p>
+            <a:pPr marL="0" indent="0">
+              <a:spcAft>
+                <a:spcPts val="600"/>
+              </a:spcAft>
+              <a:buNone/>
+            </a:pPr>
+            <a:r>
+              <a:rPr lang="es-ES" sz="1050" noProof="0" dirty="0">
+                <a:solidFill>
+                  <a:srgbClr val="1A202C"/>
+                </a:solidFill>
+                <a:latin typeface="Consolas" pitchFamily="34" charset="0"/>
+                <a:ea typeface="Consolas" pitchFamily="34" charset="-122"/>
+                <a:cs typeface="Consolas" pitchFamily="34" charset="-120"/>
+              </a:rPr>
+              <a:t>  ├── TSK_BRONZE_CITYBIKE_NY  (S3 publico 2024-202603)</a:t>
+            </a:r>
+            <a:endParaRPr lang="es-ES" sz="1100" noProof="0" dirty="0"/>
+          </a:p>
+          <a:p>
+            <a:pPr marL="0" indent="0">
+              <a:spcAft>
+                <a:spcPts val="600"/>
+              </a:spcAft>
+              <a:buNone/>
+            </a:pPr>
+            <a:r>
+              <a:rPr lang="es-ES" sz="1050" noProof="0" dirty="0">
+                <a:solidFill>
+                  <a:srgbClr val="1A202C"/>
+                </a:solidFill>
+                <a:latin typeface="Consolas" pitchFamily="34" charset="0"/>
+                <a:ea typeface="Consolas" pitchFamily="34" charset="-122"/>
+                <a:cs typeface="Consolas" pitchFamily="34" charset="-120"/>
+              </a:rPr>
+              <a:t>  ├── TSK_BRONZE_NY_INT_REFRESH  →  ONFILES  →  DRAIN</a:t>
+            </a:r>
+            <a:endParaRPr lang="es-ES" sz="1100" noProof="0" dirty="0"/>
+          </a:p>
+          <a:p>
+            <a:pPr marL="0" indent="0">
+              <a:spcAft>
+                <a:spcPts val="600"/>
+              </a:spcAft>
+              <a:buNone/>
+            </a:pPr>
+            <a:r>
+              <a:rPr lang="es-ES" sz="1050" noProof="0" dirty="0">
+                <a:solidFill>
+                  <a:srgbClr val="1A202C"/>
+                </a:solidFill>
+                <a:latin typeface="Consolas" pitchFamily="34" charset="0"/>
+                <a:ea typeface="Consolas" pitchFamily="34" charset="-122"/>
+                <a:cs typeface="Consolas" pitchFamily="34" charset="-120"/>
+              </a:rPr>
+              <a:t>  └── TSK_BRONZE_JC_REFRESH  →  ONFILES  →  DRAIN</a:t>
+            </a:r>
+            <a:endParaRPr lang="es-ES" sz="1100" noProof="0" dirty="0"/>
+          </a:p>
+          <a:p>
+            <a:pPr marL="0" indent="0" algn="ctr">
+              <a:spcAft>
+                <a:spcPts val="600"/>
+              </a:spcAft>
+              <a:buNone/>
+            </a:pPr>
+            <a:r>
+              <a:rPr lang="es-ES" sz="1100" noProof="0" dirty="0">
+                <a:solidFill>
+                  <a:srgbClr val="64748B"/>
+                </a:solidFill>
+                <a:latin typeface="Consolas" pitchFamily="34" charset="0"/>
+                <a:ea typeface="Consolas" pitchFamily="34" charset="-122"/>
+                <a:cs typeface="Consolas" pitchFamily="34" charset="-120"/>
+              </a:rPr>
+              <a:t>                ▼</a:t>
+            </a:r>
+            <a:endParaRPr lang="es-ES" sz="1100" noProof="0" dirty="0"/>
+          </a:p>
+          <a:p>
+            <a:pPr marL="0" indent="0">
+              <a:spcAft>
+                <a:spcPts val="600"/>
+              </a:spcAft>
+              <a:buNone/>
+            </a:pPr>
+            <a:r>
+              <a:rPr lang="es-ES" sz="1050" noProof="0" dirty="0">
+                <a:solidFill>
+                  <a:srgbClr val="1A202C"/>
+                </a:solidFill>
+                <a:latin typeface="Consolas" pitchFamily="34" charset="0"/>
+                <a:ea typeface="Consolas" pitchFamily="34" charset="-122"/>
+                <a:cs typeface="Consolas" pitchFamily="34" charset="-120"/>
+              </a:rPr>
+              <a:t>  TSK_BRONZE_NOAA  (WHEN </a:t>
+            </a:r>
+            <a:r>
+              <a:rPr lang="es-ES" sz="1050" noProof="0" dirty="0" err="1">
+                <a:solidFill>
+                  <a:srgbClr val="1A202C"/>
+                </a:solidFill>
+                <a:latin typeface="Consolas" pitchFamily="34" charset="0"/>
+                <a:ea typeface="Consolas" pitchFamily="34" charset="-122"/>
+                <a:cs typeface="Consolas" pitchFamily="34" charset="-120"/>
+              </a:rPr>
+              <a:t>stream</a:t>
+            </a:r>
+            <a:r>
+              <a:rPr lang="es-ES" sz="1050" noProof="0" dirty="0">
+                <a:solidFill>
+                  <a:srgbClr val="1A202C"/>
+                </a:solidFill>
+                <a:latin typeface="Consolas" pitchFamily="34" charset="0"/>
+                <a:ea typeface="Consolas" pitchFamily="34" charset="-122"/>
+                <a:cs typeface="Consolas" pitchFamily="34" charset="-120"/>
+              </a:rPr>
+              <a:t> NY OR JC tiene datos)</a:t>
+            </a:r>
+            <a:endParaRPr lang="es-ES" sz="1100" noProof="0" dirty="0"/>
+          </a:p>
+          <a:p>
+            <a:pPr marL="0" indent="0" algn="ctr">
+              <a:spcAft>
+                <a:spcPts val="600"/>
+              </a:spcAft>
+              <a:buNone/>
+            </a:pPr>
+            <a:r>
+              <a:rPr lang="es-ES" sz="1100" noProof="0" dirty="0">
+                <a:solidFill>
+                  <a:srgbClr val="64748B"/>
+                </a:solidFill>
+                <a:latin typeface="Consolas" pitchFamily="34" charset="0"/>
+                <a:ea typeface="Consolas" pitchFamily="34" charset="-122"/>
+                <a:cs typeface="Consolas" pitchFamily="34" charset="-120"/>
+              </a:rPr>
+              <a:t>                ▼</a:t>
+            </a:r>
+            <a:endParaRPr lang="es-ES" sz="1100" noProof="0" dirty="0"/>
+          </a:p>
+          <a:p>
+            <a:pPr marL="0" indent="0">
+              <a:spcAft>
+                <a:spcPts val="600"/>
+              </a:spcAft>
+              <a:buNone/>
+            </a:pPr>
+            <a:r>
+              <a:rPr lang="es-ES" sz="1050" i="1" noProof="0" dirty="0">
+                <a:solidFill>
+                  <a:srgbClr val="F59E0B"/>
+                </a:solidFill>
+                <a:latin typeface="Consolas" pitchFamily="34" charset="0"/>
+                <a:ea typeface="Consolas" pitchFamily="34" charset="-122"/>
+                <a:cs typeface="Consolas" pitchFamily="34" charset="-120"/>
+              </a:rPr>
+              <a:t>  TSK_BRONZE_CITYBIKE_STREAMS_DRAIN  (cierre </a:t>
+            </a:r>
+            <a:r>
+              <a:rPr lang="es-ES" sz="1050" i="1" noProof="0" dirty="0" err="1">
+                <a:solidFill>
+                  <a:srgbClr val="F59E0B"/>
+                </a:solidFill>
+                <a:latin typeface="Consolas" pitchFamily="34" charset="0"/>
+                <a:ea typeface="Consolas" pitchFamily="34" charset="-122"/>
+                <a:cs typeface="Consolas" pitchFamily="34" charset="-120"/>
+              </a:rPr>
+              <a:t>cycle</a:t>
+            </a:r>
+            <a:r>
+              <a:rPr lang="es-ES" sz="1050" i="1" noProof="0" dirty="0">
+                <a:solidFill>
+                  <a:srgbClr val="F59E0B"/>
+                </a:solidFill>
+                <a:latin typeface="Consolas" pitchFamily="34" charset="0"/>
+                <a:ea typeface="Consolas" pitchFamily="34" charset="-122"/>
+                <a:cs typeface="Consolas" pitchFamily="34" charset="-120"/>
+              </a:rPr>
+              <a:t>)</a:t>
+            </a:r>
+            <a:endParaRPr lang="es-ES" sz="1100" noProof="0" dirty="0"/>
+          </a:p>
+        </p:txBody>
+      </p:sp>
+      <p:sp>
+        <p:nvSpPr>
+          <p:cNvPr id="7" name="Text 5"/>
+          <p:cNvSpPr/>
+          <p:nvPr/>
+        </p:nvSpPr>
+        <p:spPr>
+          <a:xfrm>
+            <a:off x="457200" y="1417320"/>
+            <a:ext cx="4206240" cy="365760"/>
+          </a:xfrm>
+          <a:prstGeom prst="rect">
+            <a:avLst/>
+          </a:prstGeom>
+          <a:noFill/>
+          <a:ln/>
+        </p:spPr>
+        <p:txBody>
+          <a:bodyPr wrap="square" lIns="0" tIns="0" rIns="0" bIns="0" rtlCol="0" anchor="ctr"/>
+          <a:lstStyle/>
+          <a:p>
+            <a:pPr marL="0" indent="0">
+              <a:buNone/>
+            </a:pPr>
+            <a:r>
+              <a:rPr lang="es-ES" sz="1600" b="1" noProof="0" dirty="0">
+                <a:solidFill>
+                  <a:srgbClr val="1E2761"/>
+                </a:solidFill>
+                <a:latin typeface="Calibri" pitchFamily="34" charset="0"/>
+                <a:ea typeface="Calibri" pitchFamily="34" charset="-122"/>
+                <a:cs typeface="Calibri" pitchFamily="34" charset="-120"/>
+              </a:rPr>
+              <a:t>Patron general</a:t>
+            </a:r>
+            <a:endParaRPr lang="es-ES" sz="1600" noProof="0" dirty="0"/>
+          </a:p>
+        </p:txBody>
+      </p:sp>
+      <p:sp>
+        <p:nvSpPr>
+          <p:cNvPr id="8" name="Text 6"/>
+          <p:cNvSpPr/>
+          <p:nvPr/>
+        </p:nvSpPr>
+        <p:spPr>
+          <a:xfrm>
+            <a:off x="457200" y="1828800"/>
+            <a:ext cx="4206240" cy="2834640"/>
+          </a:xfrm>
+          <a:prstGeom prst="rect">
+            <a:avLst/>
+          </a:prstGeom>
+          <a:noFill/>
+          <a:ln/>
+        </p:spPr>
+        <p:txBody>
+          <a:bodyPr wrap="square" lIns="0" tIns="0" rIns="0" bIns="0" rtlCol="0" anchor="t"/>
+          <a:lstStyle/>
+          <a:p>
+            <a:pPr marL="0" indent="0">
+              <a:spcAft>
+                <a:spcPts val="800"/>
+              </a:spcAft>
+              <a:buNone/>
+            </a:pPr>
+            <a:r>
+              <a:rPr lang="es-ES" sz="1200" b="1" noProof="0" dirty="0" err="1">
+                <a:solidFill>
+                  <a:srgbClr val="1A202C"/>
+                </a:solidFill>
+                <a:latin typeface="Calibri" pitchFamily="34" charset="0"/>
+                <a:ea typeface="Calibri" pitchFamily="34" charset="-122"/>
+                <a:cs typeface="Calibri" pitchFamily="34" charset="-120"/>
+              </a:rPr>
+              <a:t>CityBike</a:t>
+            </a:r>
+            <a:r>
+              <a:rPr lang="es-ES" sz="1200" b="1" noProof="0" dirty="0">
+                <a:solidFill>
+                  <a:srgbClr val="1A202C"/>
+                </a:solidFill>
+                <a:latin typeface="Calibri" pitchFamily="34" charset="0"/>
+                <a:ea typeface="Calibri" pitchFamily="34" charset="-122"/>
+                <a:cs typeface="Calibri" pitchFamily="34" charset="-120"/>
+              </a:rPr>
+              <a:t> NY S3 publico </a:t>
+            </a:r>
+            <a:r>
+              <a:rPr lang="es-ES" sz="1200" noProof="0" dirty="0">
+                <a:solidFill>
+                  <a:srgbClr val="64748B"/>
+                </a:solidFill>
+                <a:latin typeface="Calibri" pitchFamily="34" charset="0"/>
+                <a:ea typeface="Calibri" pitchFamily="34" charset="-122"/>
+                <a:cs typeface="Calibri" pitchFamily="34" charset="-120"/>
+              </a:rPr>
+              <a:t>(2024-202603, datos cerrados).</a:t>
+            </a:r>
+            <a:endParaRPr lang="es-ES" sz="1200" noProof="0" dirty="0"/>
+          </a:p>
+          <a:p>
+            <a:pPr marL="0" indent="0">
+              <a:spcAft>
+                <a:spcPts val="800"/>
+              </a:spcAft>
+              <a:buNone/>
+            </a:pPr>
+            <a:r>
+              <a:rPr lang="es-ES" sz="1200" b="1" noProof="0" dirty="0" err="1">
+                <a:solidFill>
+                  <a:srgbClr val="1A202C"/>
+                </a:solidFill>
+                <a:latin typeface="Calibri" pitchFamily="34" charset="0"/>
+                <a:ea typeface="Calibri" pitchFamily="34" charset="-122"/>
+                <a:cs typeface="Calibri" pitchFamily="34" charset="-120"/>
+              </a:rPr>
+              <a:t>CityBike</a:t>
+            </a:r>
+            <a:r>
+              <a:rPr lang="es-ES" sz="1200" b="1" noProof="0" dirty="0">
+                <a:solidFill>
+                  <a:srgbClr val="1A202C"/>
+                </a:solidFill>
+                <a:latin typeface="Calibri" pitchFamily="34" charset="0"/>
+                <a:ea typeface="Calibri" pitchFamily="34" charset="-122"/>
+                <a:cs typeface="Calibri" pitchFamily="34" charset="-120"/>
+              </a:rPr>
+              <a:t> NY 202604+ </a:t>
+            </a:r>
+            <a:r>
+              <a:rPr lang="es-ES" sz="1200" noProof="0" dirty="0" err="1">
+                <a:solidFill>
+                  <a:srgbClr val="64748B"/>
+                </a:solidFill>
+                <a:latin typeface="Calibri" pitchFamily="34" charset="0"/>
+                <a:ea typeface="Calibri" pitchFamily="34" charset="-122"/>
+                <a:cs typeface="Calibri" pitchFamily="34" charset="-120"/>
+              </a:rPr>
+              <a:t>via</a:t>
+            </a:r>
+            <a:r>
+              <a:rPr lang="es-ES" sz="1200" noProof="0" dirty="0">
+                <a:solidFill>
+                  <a:srgbClr val="64748B"/>
+                </a:solidFill>
+                <a:latin typeface="Calibri" pitchFamily="34" charset="0"/>
+                <a:ea typeface="Calibri" pitchFamily="34" charset="-122"/>
+                <a:cs typeface="Calibri" pitchFamily="34" charset="-120"/>
+              </a:rPr>
+              <a:t> </a:t>
+            </a:r>
+            <a:r>
+              <a:rPr lang="es-ES" sz="1200" noProof="0" dirty="0" err="1">
+                <a:solidFill>
+                  <a:srgbClr val="64748B"/>
+                </a:solidFill>
+                <a:latin typeface="Calibri" pitchFamily="34" charset="0"/>
+                <a:ea typeface="Calibri" pitchFamily="34" charset="-122"/>
+                <a:cs typeface="Calibri" pitchFamily="34" charset="-120"/>
+              </a:rPr>
+              <a:t>stage</a:t>
+            </a:r>
+            <a:r>
+              <a:rPr lang="es-ES" sz="1200" noProof="0" dirty="0">
+                <a:solidFill>
+                  <a:srgbClr val="64748B"/>
+                </a:solidFill>
+                <a:latin typeface="Calibri" pitchFamily="34" charset="0"/>
+                <a:ea typeface="Calibri" pitchFamily="34" charset="-122"/>
+                <a:cs typeface="Calibri" pitchFamily="34" charset="-120"/>
+              </a:rPr>
+              <a:t> interno (Python PUT — </a:t>
+            </a:r>
+            <a:r>
+              <a:rPr lang="es-ES" sz="1200" noProof="0" dirty="0" err="1">
+                <a:solidFill>
+                  <a:srgbClr val="64748B"/>
+                </a:solidFill>
+                <a:latin typeface="Calibri" pitchFamily="34" charset="0"/>
+                <a:ea typeface="Calibri" pitchFamily="34" charset="-122"/>
+                <a:cs typeface="Calibri" pitchFamily="34" charset="-120"/>
+              </a:rPr>
+              <a:t>bucket</a:t>
+            </a:r>
+            <a:r>
+              <a:rPr lang="es-ES" sz="1200" noProof="0" dirty="0">
+                <a:solidFill>
+                  <a:srgbClr val="64748B"/>
+                </a:solidFill>
+                <a:latin typeface="Calibri" pitchFamily="34" charset="0"/>
+                <a:ea typeface="Calibri" pitchFamily="34" charset="-122"/>
+                <a:cs typeface="Calibri" pitchFamily="34" charset="-120"/>
+              </a:rPr>
+              <a:t> publico corrupto).</a:t>
+            </a:r>
+            <a:endParaRPr lang="es-ES" sz="1200" noProof="0" dirty="0"/>
+          </a:p>
+          <a:p>
+            <a:pPr marL="0" indent="0">
+              <a:spcAft>
+                <a:spcPts val="800"/>
+              </a:spcAft>
+              <a:buNone/>
+            </a:pPr>
+            <a:r>
+              <a:rPr lang="es-ES" sz="1200" b="1" noProof="0" dirty="0" err="1">
+                <a:solidFill>
+                  <a:srgbClr val="1A202C"/>
+                </a:solidFill>
+                <a:latin typeface="Calibri" pitchFamily="34" charset="0"/>
+                <a:ea typeface="Calibri" pitchFamily="34" charset="-122"/>
+                <a:cs typeface="Calibri" pitchFamily="34" charset="-120"/>
+              </a:rPr>
+              <a:t>CityBike</a:t>
+            </a:r>
+            <a:r>
+              <a:rPr lang="es-ES" sz="1200" b="1" noProof="0" dirty="0">
+                <a:solidFill>
+                  <a:srgbClr val="1A202C"/>
+                </a:solidFill>
+                <a:latin typeface="Calibri" pitchFamily="34" charset="0"/>
+                <a:ea typeface="Calibri" pitchFamily="34" charset="-122"/>
+                <a:cs typeface="Calibri" pitchFamily="34" charset="-120"/>
+              </a:rPr>
+              <a:t> JC </a:t>
+            </a:r>
+            <a:r>
+              <a:rPr lang="es-ES" sz="1200" noProof="0" dirty="0">
+                <a:solidFill>
+                  <a:srgbClr val="64748B"/>
+                </a:solidFill>
+                <a:latin typeface="Calibri" pitchFamily="34" charset="0"/>
+                <a:ea typeface="Calibri" pitchFamily="34" charset="-122"/>
+                <a:cs typeface="Calibri" pitchFamily="34" charset="-120"/>
+              </a:rPr>
+              <a:t>siempre </a:t>
+            </a:r>
+            <a:r>
+              <a:rPr lang="es-ES" sz="1200" noProof="0" dirty="0" err="1">
+                <a:solidFill>
+                  <a:srgbClr val="64748B"/>
+                </a:solidFill>
+                <a:latin typeface="Calibri" pitchFamily="34" charset="0"/>
+                <a:ea typeface="Calibri" pitchFamily="34" charset="-122"/>
+                <a:cs typeface="Calibri" pitchFamily="34" charset="-120"/>
+              </a:rPr>
+              <a:t>via</a:t>
+            </a:r>
+            <a:r>
+              <a:rPr lang="es-ES" sz="1200" noProof="0" dirty="0">
+                <a:solidFill>
+                  <a:srgbClr val="64748B"/>
+                </a:solidFill>
+                <a:latin typeface="Calibri" pitchFamily="34" charset="0"/>
+                <a:ea typeface="Calibri" pitchFamily="34" charset="-122"/>
+                <a:cs typeface="Calibri" pitchFamily="34" charset="-120"/>
+              </a:rPr>
+              <a:t> </a:t>
+            </a:r>
+            <a:r>
+              <a:rPr lang="es-ES" sz="1200" noProof="0" dirty="0" err="1">
+                <a:solidFill>
+                  <a:srgbClr val="64748B"/>
+                </a:solidFill>
+                <a:latin typeface="Calibri" pitchFamily="34" charset="0"/>
+                <a:ea typeface="Calibri" pitchFamily="34" charset="-122"/>
+                <a:cs typeface="Calibri" pitchFamily="34" charset="-120"/>
+              </a:rPr>
+              <a:t>stage</a:t>
+            </a:r>
+            <a:r>
+              <a:rPr lang="es-ES" sz="1200" noProof="0" dirty="0">
+                <a:solidFill>
+                  <a:srgbClr val="64748B"/>
+                </a:solidFill>
+                <a:latin typeface="Calibri" pitchFamily="34" charset="0"/>
+                <a:ea typeface="Calibri" pitchFamily="34" charset="-122"/>
+                <a:cs typeface="Calibri" pitchFamily="34" charset="-120"/>
+              </a:rPr>
+              <a:t> interno.</a:t>
+            </a:r>
+            <a:endParaRPr lang="es-ES" sz="1200" noProof="0" dirty="0"/>
+          </a:p>
+          <a:p>
+            <a:pPr marL="0" indent="0">
+              <a:spcAft>
+                <a:spcPts val="800"/>
+              </a:spcAft>
+              <a:buNone/>
+            </a:pPr>
+            <a:r>
+              <a:rPr lang="es-ES" sz="1200" b="1" noProof="0" dirty="0">
+                <a:solidFill>
+                  <a:srgbClr val="1A202C"/>
+                </a:solidFill>
+                <a:latin typeface="Calibri" pitchFamily="34" charset="0"/>
+                <a:ea typeface="Calibri" pitchFamily="34" charset="-122"/>
+                <a:cs typeface="Calibri" pitchFamily="34" charset="-120"/>
+              </a:rPr>
+              <a:t>NOAA </a:t>
+            </a:r>
+            <a:r>
+              <a:rPr lang="es-ES" sz="1200" noProof="0" dirty="0">
+                <a:solidFill>
+                  <a:srgbClr val="64748B"/>
+                </a:solidFill>
+                <a:latin typeface="Calibri" pitchFamily="34" charset="0"/>
+                <a:ea typeface="Calibri" pitchFamily="34" charset="-122"/>
+                <a:cs typeface="Calibri" pitchFamily="34" charset="-120"/>
+              </a:rPr>
+              <a:t>AFTER </a:t>
+            </a:r>
+            <a:r>
+              <a:rPr lang="es-ES" sz="1200" noProof="0" dirty="0" err="1">
+                <a:solidFill>
+                  <a:srgbClr val="64748B"/>
+                </a:solidFill>
+                <a:latin typeface="Calibri" pitchFamily="34" charset="0"/>
+                <a:ea typeface="Calibri" pitchFamily="34" charset="-122"/>
+                <a:cs typeface="Calibri" pitchFamily="34" charset="-120"/>
+              </a:rPr>
+              <a:t>citybike</a:t>
+            </a:r>
+            <a:r>
+              <a:rPr lang="es-ES" sz="1200" noProof="0" dirty="0">
+                <a:solidFill>
+                  <a:srgbClr val="64748B"/>
+                </a:solidFill>
+                <a:latin typeface="Calibri" pitchFamily="34" charset="0"/>
+                <a:ea typeface="Calibri" pitchFamily="34" charset="-122"/>
+                <a:cs typeface="Calibri" pitchFamily="34" charset="-120"/>
+              </a:rPr>
+              <a:t> + WHEN </a:t>
+            </a:r>
+            <a:r>
+              <a:rPr lang="es-ES" sz="1200" noProof="0" dirty="0" err="1">
+                <a:solidFill>
+                  <a:srgbClr val="64748B"/>
+                </a:solidFill>
+                <a:latin typeface="Calibri" pitchFamily="34" charset="0"/>
+                <a:ea typeface="Calibri" pitchFamily="34" charset="-122"/>
+                <a:cs typeface="Calibri" pitchFamily="34" charset="-120"/>
+              </a:rPr>
+              <a:t>streams</a:t>
+            </a:r>
+            <a:r>
+              <a:rPr lang="es-ES" sz="1200" noProof="0" dirty="0">
+                <a:solidFill>
+                  <a:srgbClr val="64748B"/>
+                </a:solidFill>
+                <a:latin typeface="Calibri" pitchFamily="34" charset="0"/>
+                <a:ea typeface="Calibri" pitchFamily="34" charset="-122"/>
+                <a:cs typeface="Calibri" pitchFamily="34" charset="-120"/>
+              </a:rPr>
+              <a:t>. Cierra con </a:t>
+            </a:r>
+            <a:r>
+              <a:rPr lang="es-ES" sz="1200" noProof="0" dirty="0" err="1">
+                <a:solidFill>
+                  <a:srgbClr val="64748B"/>
+                </a:solidFill>
+                <a:latin typeface="Calibri" pitchFamily="34" charset="0"/>
+                <a:ea typeface="Calibri" pitchFamily="34" charset="-122"/>
+                <a:cs typeface="Calibri" pitchFamily="34" charset="-120"/>
+              </a:rPr>
+              <a:t>drain</a:t>
+            </a:r>
+            <a:r>
+              <a:rPr lang="es-ES" sz="1200" noProof="0" dirty="0">
+                <a:solidFill>
+                  <a:srgbClr val="64748B"/>
+                </a:solidFill>
+                <a:latin typeface="Calibri" pitchFamily="34" charset="0"/>
+                <a:ea typeface="Calibri" pitchFamily="34" charset="-122"/>
+                <a:cs typeface="Calibri" pitchFamily="34" charset="-120"/>
+              </a:rPr>
+              <a:t> de </a:t>
+            </a:r>
+            <a:r>
+              <a:rPr lang="es-ES" sz="1200" noProof="0" dirty="0" err="1">
+                <a:solidFill>
+                  <a:srgbClr val="64748B"/>
+                </a:solidFill>
+                <a:latin typeface="Calibri" pitchFamily="34" charset="0"/>
+                <a:ea typeface="Calibri" pitchFamily="34" charset="-122"/>
+                <a:cs typeface="Calibri" pitchFamily="34" charset="-120"/>
+              </a:rPr>
+              <a:t>streams</a:t>
+            </a:r>
+            <a:r>
+              <a:rPr lang="es-ES" sz="1200" noProof="0" dirty="0">
+                <a:solidFill>
+                  <a:srgbClr val="64748B"/>
+                </a:solidFill>
+                <a:latin typeface="Calibri" pitchFamily="34" charset="0"/>
+                <a:ea typeface="Calibri" pitchFamily="34" charset="-122"/>
+                <a:cs typeface="Calibri" pitchFamily="34" charset="-120"/>
+              </a:rPr>
+              <a:t> para el </a:t>
+            </a:r>
+            <a:r>
+              <a:rPr lang="es-ES" sz="1200" noProof="0" dirty="0" err="1">
+                <a:solidFill>
+                  <a:srgbClr val="64748B"/>
+                </a:solidFill>
+                <a:latin typeface="Calibri" pitchFamily="34" charset="0"/>
+                <a:ea typeface="Calibri" pitchFamily="34" charset="-122"/>
+                <a:cs typeface="Calibri" pitchFamily="34" charset="-120"/>
+              </a:rPr>
+              <a:t>proximo</a:t>
+            </a:r>
+            <a:r>
+              <a:rPr lang="es-ES" sz="1200" noProof="0" dirty="0">
+                <a:solidFill>
+                  <a:srgbClr val="64748B"/>
+                </a:solidFill>
+                <a:latin typeface="Calibri" pitchFamily="34" charset="0"/>
+                <a:ea typeface="Calibri" pitchFamily="34" charset="-122"/>
+                <a:cs typeface="Calibri" pitchFamily="34" charset="-120"/>
+              </a:rPr>
+              <a:t> </a:t>
+            </a:r>
+            <a:r>
+              <a:rPr lang="es-ES" sz="1200" noProof="0" dirty="0" err="1">
+                <a:solidFill>
+                  <a:srgbClr val="64748B"/>
+                </a:solidFill>
+                <a:latin typeface="Calibri" pitchFamily="34" charset="0"/>
+                <a:ea typeface="Calibri" pitchFamily="34" charset="-122"/>
+                <a:cs typeface="Calibri" pitchFamily="34" charset="-120"/>
+              </a:rPr>
+              <a:t>cycle</a:t>
+            </a:r>
+            <a:r>
+              <a:rPr lang="es-ES" sz="1200" noProof="0" dirty="0">
+                <a:solidFill>
+                  <a:srgbClr val="64748B"/>
+                </a:solidFill>
+                <a:latin typeface="Calibri" pitchFamily="34" charset="0"/>
+                <a:ea typeface="Calibri" pitchFamily="34" charset="-122"/>
+                <a:cs typeface="Calibri" pitchFamily="34" charset="-120"/>
+              </a:rPr>
+              <a:t>.</a:t>
+            </a:r>
+            <a:endParaRPr lang="es-ES" sz="1200" noProof="0" dirty="0"/>
+          </a:p>
+          <a:p>
+            <a:pPr marL="0" indent="0">
+              <a:spcAft>
+                <a:spcPts val="800"/>
+              </a:spcAft>
+              <a:buNone/>
+            </a:pPr>
+            <a:r>
+              <a:rPr lang="es-ES" sz="1200" b="1" noProof="0" dirty="0">
+                <a:solidFill>
+                  <a:srgbClr val="1A202C"/>
+                </a:solidFill>
+                <a:latin typeface="Calibri" pitchFamily="34" charset="0"/>
+                <a:ea typeface="Calibri" pitchFamily="34" charset="-122"/>
+                <a:cs typeface="Calibri" pitchFamily="34" charset="-120"/>
+              </a:rPr>
+              <a:t>Idempotencia</a:t>
+            </a:r>
+            <a:endParaRPr lang="es-ES" sz="1200" noProof="0" dirty="0"/>
+          </a:p>
+          <a:p>
+            <a:pPr marL="0" indent="0">
+              <a:spcAft>
+                <a:spcPts val="800"/>
+              </a:spcAft>
+              <a:buNone/>
+            </a:pPr>
+            <a:r>
+              <a:rPr lang="es-ES" sz="1200" noProof="0" dirty="0">
+                <a:solidFill>
+                  <a:srgbClr val="64748B"/>
+                </a:solidFill>
+                <a:latin typeface="Calibri" pitchFamily="34" charset="0"/>
+                <a:ea typeface="Calibri" pitchFamily="34" charset="-122"/>
+                <a:cs typeface="Calibri" pitchFamily="34" charset="-120"/>
+              </a:rPr>
+              <a:t>COPY INTO con load </a:t>
+            </a:r>
+            <a:r>
+              <a:rPr lang="es-ES" sz="1200" noProof="0" dirty="0" err="1">
+                <a:solidFill>
+                  <a:srgbClr val="64748B"/>
+                </a:solidFill>
+                <a:latin typeface="Calibri" pitchFamily="34" charset="0"/>
+                <a:ea typeface="Calibri" pitchFamily="34" charset="-122"/>
+                <a:cs typeface="Calibri" pitchFamily="34" charset="-120"/>
+              </a:rPr>
+              <a:t>metadata</a:t>
+            </a:r>
+            <a:r>
+              <a:rPr lang="es-ES" sz="1200" noProof="0" dirty="0">
+                <a:solidFill>
+                  <a:srgbClr val="64748B"/>
+                </a:solidFill>
+                <a:latin typeface="Calibri" pitchFamily="34" charset="0"/>
+                <a:ea typeface="Calibri" pitchFamily="34" charset="-122"/>
+                <a:cs typeface="Calibri" pitchFamily="34" charset="-120"/>
+              </a:rPr>
+              <a:t>, ON_ERROR=CONTINUE, </a:t>
+            </a:r>
+            <a:r>
+              <a:rPr lang="es-ES" sz="1200" noProof="0" dirty="0" err="1">
+                <a:solidFill>
+                  <a:srgbClr val="64748B"/>
+                </a:solidFill>
+                <a:latin typeface="Calibri" pitchFamily="34" charset="0"/>
+                <a:ea typeface="Calibri" pitchFamily="34" charset="-122"/>
+                <a:cs typeface="Calibri" pitchFamily="34" charset="-120"/>
+              </a:rPr>
+              <a:t>snapshot</a:t>
+            </a:r>
+            <a:r>
+              <a:rPr lang="es-ES" sz="1200" noProof="0" dirty="0">
+                <a:solidFill>
+                  <a:srgbClr val="64748B"/>
+                </a:solidFill>
+                <a:latin typeface="Calibri" pitchFamily="34" charset="0"/>
+                <a:ea typeface="Calibri" pitchFamily="34" charset="-122"/>
+                <a:cs typeface="Calibri" pitchFamily="34" charset="-120"/>
+              </a:rPr>
+              <a:t> SCD2 </a:t>
+            </a:r>
+            <a:r>
+              <a:rPr lang="es-ES" sz="1200" noProof="0" dirty="0" err="1">
+                <a:solidFill>
+                  <a:srgbClr val="64748B"/>
+                </a:solidFill>
+                <a:latin typeface="Calibri" pitchFamily="34" charset="0"/>
+                <a:ea typeface="Calibri" pitchFamily="34" charset="-122"/>
+                <a:cs typeface="Calibri" pitchFamily="34" charset="-120"/>
+              </a:rPr>
+              <a:t>dedup</a:t>
+            </a:r>
+            <a:r>
+              <a:rPr lang="es-ES" sz="1200" noProof="0" dirty="0">
+                <a:solidFill>
+                  <a:srgbClr val="64748B"/>
+                </a:solidFill>
+                <a:latin typeface="Calibri" pitchFamily="34" charset="0"/>
+                <a:ea typeface="Calibri" pitchFamily="34" charset="-122"/>
+                <a:cs typeface="Calibri" pitchFamily="34" charset="-120"/>
+              </a:rPr>
+              <a:t>, MERGE incremental.</a:t>
+            </a:r>
+            <a:endParaRPr lang="es-ES" sz="1200" noProof="0" dirty="0"/>
+          </a:p>
+        </p:txBody>
+      </p:sp>
+      <p:sp>
+        <p:nvSpPr>
+          <p:cNvPr id="9" name="Text 7"/>
+          <p:cNvSpPr/>
+          <p:nvPr/>
+        </p:nvSpPr>
+        <p:spPr>
+          <a:xfrm>
+            <a:off x="8229600" y="4800600"/>
+            <a:ext cx="822960" cy="228600"/>
+          </a:xfrm>
+          <a:prstGeom prst="rect">
+            <a:avLst/>
+          </a:prstGeom>
+          <a:noFill/>
+          <a:ln/>
+        </p:spPr>
+        <p:txBody>
+          <a:bodyPr wrap="square" lIns="0" tIns="0" rIns="0" bIns="0" rtlCol="0" anchor="ctr"/>
+          <a:lstStyle/>
+          <a:p>
+            <a:pPr marL="0" indent="0" algn="r">
+              <a:buNone/>
+            </a:pPr>
+            <a:r>
+              <a:rPr lang="es-ES" sz="900" noProof="0" dirty="0">
+                <a:solidFill>
+                  <a:srgbClr val="64748B"/>
+                </a:solidFill>
+                <a:latin typeface="Calibri" pitchFamily="34" charset="0"/>
+                <a:ea typeface="Calibri" pitchFamily="34" charset="-122"/>
+                <a:cs typeface="Calibri" pitchFamily="34" charset="-120"/>
+              </a:rPr>
+              <a:t>5 / 15</a:t>
             </a:r>
             <a:endParaRPr lang="es-ES" sz="900" noProof="0" dirty="0"/>
           </a:p>
@@ -7529,7 +13600,7 @@
                 <a:ea typeface="Calibri" pitchFamily="34" charset="-122"/>
                 <a:cs typeface="Calibri" pitchFamily="34" charset="-120"/>
               </a:rPr>
-              <a:t>4 / 11</a:t>
+              <a:t>6 / 15</a:t>
             </a:r>
             <a:endParaRPr lang="es-ES" sz="900" noProof="0" dirty="0"/>
           </a:p>
@@ -9188,7 +15259,7 @@
                 <a:ea typeface="Calibri" pitchFamily="34" charset="-122"/>
                 <a:cs typeface="Calibri" pitchFamily="34" charset="-120"/>
               </a:rPr>
-              <a:t>5 / 11</a:t>
+              <a:t>7 / 15</a:t>
             </a:r>
             <a:endParaRPr lang="es-ES" sz="900" noProof="0" dirty="0"/>
           </a:p>
@@ -10533,7 +16604,7 @@
                 <a:ea typeface="Calibri" pitchFamily="34" charset="-122"/>
                 <a:cs typeface="Calibri" pitchFamily="34" charset="-120"/>
               </a:rPr>
-              <a:t>6 / 11</a:t>
+              <a:t>8 / 15</a:t>
             </a:r>
             <a:endParaRPr lang="es-ES" sz="900" noProof="0" dirty="0"/>
           </a:p>
@@ -10598,7 +16669,7 @@
         </p:nvSpPr>
         <p:spPr>
           <a:xfrm>
-            <a:off x="6766560" y="3527177"/>
+            <a:off x="6687030" y="3527177"/>
             <a:ext cx="1862610" cy="820738"/>
           </a:xfrm>
           <a:prstGeom prst="rect">
@@ -11550,6 +17621,27 @@
               <a:buChar char="•"/>
             </a:pPr>
             <a:r>
+              <a:rPr lang="es-ES" sz="1000" noProof="0" dirty="0" err="1">
+                <a:solidFill>
+                  <a:srgbClr val="1A202C"/>
+                </a:solidFill>
+                <a:latin typeface="Calibri" pitchFamily="34" charset="0"/>
+                <a:ea typeface="Calibri" pitchFamily="34" charset="-122"/>
+                <a:cs typeface="Calibri" pitchFamily="34" charset="-120"/>
+              </a:rPr>
+              <a:t>dbt_utils.expression_is_true</a:t>
+            </a:r>
+            <a:endParaRPr lang="es-ES" sz="1000" noProof="0" dirty="0"/>
+          </a:p>
+          <a:p>
+            <a:pPr marL="342900" indent="-342900">
+              <a:spcAft>
+                <a:spcPts val="400"/>
+              </a:spcAft>
+              <a:buSzPct val="100000"/>
+              <a:buChar char="•"/>
+            </a:pPr>
+            <a:r>
               <a:rPr lang="es-ES" sz="1000" noProof="0" dirty="0">
                 <a:solidFill>
                   <a:srgbClr val="1A202C"/>
@@ -11870,7 +17962,7 @@
                 <a:ea typeface="Calibri" pitchFamily="34" charset="-122"/>
                 <a:cs typeface="Calibri" pitchFamily="34" charset="-120"/>
               </a:rPr>
-              <a:t> (</a:t>
+              <a:t> </a:t>
             </a:r>
             <a:r>
               <a:rPr lang="es-ES" sz="1000" noProof="0" dirty="0" err="1">
@@ -11883,72 +17975,14 @@
               </a:rPr>
               <a:t>element</a:t>
             </a:r>
-            <a:r>
-              <a:rPr lang="es-ES" sz="1000" noProof="0" dirty="0">
-                <a:solidFill>
-                  <a:srgbClr val="1A202C"/>
-                </a:solidFill>
-                <a:latin typeface="Calibri" pitchFamily="34" charset="0"/>
-                <a:ea typeface="Calibri" pitchFamily="34" charset="-122"/>
-                <a:cs typeface="Calibri" pitchFamily="34" charset="-120"/>
-              </a:rPr>
-              <a:t> + </a:t>
-            </a:r>
-            <a:r>
-              <a:rPr lang="es-ES" sz="1000" noProof="0" dirty="0" err="1">
-                <a:solidFill>
-                  <a:srgbClr val="1A202C"/>
-                </a:solidFill>
-                <a:latin typeface="Calibri" pitchFamily="34" charset="0"/>
-                <a:ea typeface="Calibri" pitchFamily="34" charset="-122"/>
-                <a:cs typeface="Calibri" pitchFamily="34" charset="-120"/>
-              </a:rPr>
-              <a:t>station</a:t>
-            </a:r>
-            <a:r>
-              <a:rPr lang="es-ES" sz="1000" noProof="0" dirty="0">
-                <a:solidFill>
-                  <a:srgbClr val="1A202C"/>
-                </a:solidFill>
-                <a:latin typeface="Calibri" pitchFamily="34" charset="0"/>
-                <a:ea typeface="Calibri" pitchFamily="34" charset="-122"/>
-                <a:cs typeface="Calibri" pitchFamily="34" charset="-120"/>
-              </a:rPr>
-              <a:t>)</a:t>
-            </a:r>
-          </a:p>
-          <a:p>
-            <a:pPr marL="342900" indent="-342900">
-              <a:spcAft>
-                <a:spcPts val="400"/>
-              </a:spcAft>
-              <a:buSzPct val="100000"/>
-              <a:buFont typeface="+mj-lt"/>
-              <a:buAutoNum type="alphaLcParenR"/>
-            </a:pPr>
-            <a:r>
-              <a:rPr lang="es-ES" sz="1000" dirty="0">
-                <a:solidFill>
-                  <a:srgbClr val="1A202C"/>
-                </a:solidFill>
-                <a:latin typeface="Calibri" pitchFamily="34" charset="0"/>
-                <a:ea typeface="Calibri" pitchFamily="34" charset="-122"/>
-                <a:cs typeface="Calibri" pitchFamily="34" charset="-120"/>
-              </a:rPr>
-              <a:t>Macro </a:t>
-            </a:r>
-            <a:r>
-              <a:rPr lang="es-ES" sz="1000" dirty="0" err="1">
-                <a:solidFill>
-                  <a:srgbClr val="1A202C"/>
-                </a:solidFill>
-                <a:latin typeface="Calibri" pitchFamily="34" charset="0"/>
-                <a:ea typeface="Calibri" pitchFamily="34" charset="-122"/>
-                <a:cs typeface="Calibri" pitchFamily="34" charset="-120"/>
-              </a:rPr>
-              <a:t>bronze_silver_count_diff</a:t>
-            </a:r>
-            <a:endParaRPr lang="es-ES" sz="1000" noProof="0" dirty="0"/>
+            <a:endParaRPr lang="es-ES" sz="1000" noProof="0" dirty="0">
+              <a:solidFill>
+                <a:srgbClr val="1A202C"/>
+              </a:solidFill>
+              <a:latin typeface="Calibri" pitchFamily="34" charset="0"/>
+              <a:ea typeface="Calibri" pitchFamily="34" charset="-122"/>
+              <a:cs typeface="Calibri" pitchFamily="34" charset="-120"/>
+            </a:endParaRPr>
           </a:p>
           <a:p>
             <a:pPr marL="342900" indent="-342900">
@@ -11959,6 +17993,111 @@
               <a:buChar char="•"/>
             </a:pPr>
             <a:r>
+              <a:rPr lang="es-ES" sz="1000" dirty="0">
+                <a:solidFill>
+                  <a:srgbClr val="1A202C"/>
+                </a:solidFill>
+                <a:latin typeface="Calibri" pitchFamily="34" charset="0"/>
+                <a:ea typeface="Calibri" pitchFamily="34" charset="-122"/>
+                <a:cs typeface="Calibri" pitchFamily="34" charset="-120"/>
+              </a:rPr>
+              <a:t>NOAA </a:t>
+            </a:r>
+            <a:r>
+              <a:rPr lang="es-ES" sz="1000" dirty="0" err="1">
+                <a:solidFill>
+                  <a:srgbClr val="1A202C"/>
+                </a:solidFill>
+                <a:latin typeface="Calibri" pitchFamily="34" charset="0"/>
+                <a:ea typeface="Calibri" pitchFamily="34" charset="-122"/>
+                <a:cs typeface="Calibri" pitchFamily="34" charset="-120"/>
+              </a:rPr>
+              <a:t>bronze</a:t>
+            </a:r>
+            <a:r>
+              <a:rPr lang="es-ES" sz="1000" dirty="0">
+                <a:solidFill>
+                  <a:srgbClr val="1A202C"/>
+                </a:solidFill>
+                <a:latin typeface="Calibri" pitchFamily="34" charset="0"/>
+                <a:ea typeface="Calibri" pitchFamily="34" charset="-122"/>
+                <a:cs typeface="Calibri" pitchFamily="34" charset="-120"/>
+              </a:rPr>
+              <a:t> vs </a:t>
+            </a:r>
+            <a:r>
+              <a:rPr lang="es-ES" sz="1000" dirty="0" err="1">
+                <a:solidFill>
+                  <a:srgbClr val="1A202C"/>
+                </a:solidFill>
+                <a:latin typeface="Calibri" pitchFamily="34" charset="0"/>
+                <a:ea typeface="Calibri" pitchFamily="34" charset="-122"/>
+                <a:cs typeface="Calibri" pitchFamily="34" charset="-120"/>
+              </a:rPr>
+              <a:t>silver</a:t>
+            </a:r>
+            <a:r>
+              <a:rPr lang="es-ES" sz="1000" dirty="0">
+                <a:solidFill>
+                  <a:srgbClr val="1A202C"/>
+                </a:solidFill>
+                <a:latin typeface="Calibri" pitchFamily="34" charset="0"/>
+                <a:ea typeface="Calibri" pitchFamily="34" charset="-122"/>
+                <a:cs typeface="Calibri" pitchFamily="34" charset="-120"/>
+              </a:rPr>
+              <a:t> </a:t>
+            </a:r>
+            <a:r>
+              <a:rPr lang="es-ES" sz="1000" dirty="0" err="1">
+                <a:solidFill>
+                  <a:srgbClr val="1A202C"/>
+                </a:solidFill>
+                <a:latin typeface="Calibri" pitchFamily="34" charset="0"/>
+                <a:ea typeface="Calibri" pitchFamily="34" charset="-122"/>
+                <a:cs typeface="Calibri" pitchFamily="34" charset="-120"/>
+              </a:rPr>
+              <a:t>count</a:t>
+            </a:r>
+            <a:r>
+              <a:rPr lang="es-ES" sz="1000" dirty="0">
+                <a:solidFill>
+                  <a:srgbClr val="1A202C"/>
+                </a:solidFill>
+                <a:latin typeface="Calibri" pitchFamily="34" charset="0"/>
+                <a:ea typeface="Calibri" pitchFamily="34" charset="-122"/>
+                <a:cs typeface="Calibri" pitchFamily="34" charset="-120"/>
+              </a:rPr>
+              <a:t> </a:t>
+            </a:r>
+            <a:r>
+              <a:rPr lang="es-ES" sz="1000" dirty="0" err="1">
+                <a:solidFill>
+                  <a:srgbClr val="1A202C"/>
+                </a:solidFill>
+                <a:latin typeface="Calibri" pitchFamily="34" charset="0"/>
+                <a:ea typeface="Calibri" pitchFamily="34" charset="-122"/>
+                <a:cs typeface="Calibri" pitchFamily="34" charset="-120"/>
+              </a:rPr>
+              <a:t>station</a:t>
+            </a:r>
+            <a:endParaRPr lang="es-ES" sz="1000" noProof="0" dirty="0">
+              <a:solidFill>
+                <a:srgbClr val="1A202C"/>
+              </a:solidFill>
+              <a:latin typeface="Calibri" pitchFamily="34" charset="0"/>
+              <a:ea typeface="Calibri" pitchFamily="34" charset="-122"/>
+              <a:cs typeface="Calibri" pitchFamily="34" charset="-120"/>
+            </a:endParaRPr>
+          </a:p>
+          <a:p>
+            <a:pPr marL="342900" indent="-342900">
+              <a:spcAft>
+                <a:spcPts val="400"/>
+              </a:spcAft>
+              <a:buSzPct val="100000"/>
+              <a:buChar char="•"/>
+            </a:pPr>
+            <a:r>
               <a:rPr lang="es-ES" sz="1000" noProof="0" dirty="0" err="1">
                 <a:solidFill>
                   <a:srgbClr val="1A202C"/>
@@ -12046,6 +18185,74 @@
               </a:rPr>
               <a:t>)</a:t>
             </a:r>
+          </a:p>
+          <a:p>
+            <a:pPr marL="342900" indent="-342900">
+              <a:spcAft>
+                <a:spcPts val="400"/>
+              </a:spcAft>
+              <a:buSzPct val="100000"/>
+              <a:buChar char="•"/>
+            </a:pPr>
+            <a:endParaRPr lang="es-ES" sz="1000" noProof="0" dirty="0">
+              <a:solidFill>
+                <a:srgbClr val="1A202C"/>
+              </a:solidFill>
+              <a:latin typeface="Calibri" pitchFamily="34" charset="0"/>
+              <a:ea typeface="Calibri" pitchFamily="34" charset="-122"/>
+              <a:cs typeface="Calibri" pitchFamily="34" charset="-120"/>
+            </a:endParaRPr>
+          </a:p>
+          <a:p>
+            <a:pPr>
+              <a:spcAft>
+                <a:spcPts val="400"/>
+              </a:spcAft>
+              <a:buSzPct val="100000"/>
+            </a:pPr>
+            <a:r>
+              <a:rPr lang="es-ES" sz="1000" dirty="0">
+                <a:solidFill>
+                  <a:srgbClr val="1A202C"/>
+                </a:solidFill>
+                <a:latin typeface="Calibri" pitchFamily="34" charset="0"/>
+                <a:ea typeface="Calibri" pitchFamily="34" charset="-122"/>
+                <a:cs typeface="Calibri" pitchFamily="34" charset="-120"/>
+              </a:rPr>
+              <a:t>Macro (</a:t>
+            </a:r>
+            <a:r>
+              <a:rPr lang="es-ES" sz="1000" dirty="0" err="1">
+                <a:solidFill>
+                  <a:srgbClr val="1A202C"/>
+                </a:solidFill>
+                <a:latin typeface="Calibri" pitchFamily="34" charset="0"/>
+                <a:ea typeface="Calibri" pitchFamily="34" charset="-122"/>
+                <a:cs typeface="Calibri" pitchFamily="34" charset="-120"/>
+              </a:rPr>
+              <a:t>bronze_silver_count_diff</a:t>
+            </a:r>
+            <a:r>
+              <a:rPr lang="es-ES" sz="1000" dirty="0">
+                <a:solidFill>
+                  <a:srgbClr val="1A202C"/>
+                </a:solidFill>
+                <a:latin typeface="Calibri" pitchFamily="34" charset="0"/>
+                <a:ea typeface="Calibri" pitchFamily="34" charset="-122"/>
+                <a:cs typeface="Calibri" pitchFamily="34" charset="-120"/>
+              </a:rPr>
+              <a:t>)</a:t>
+            </a:r>
+            <a:endParaRPr lang="es-ES" sz="1000" dirty="0"/>
+          </a:p>
+          <a:p>
+            <a:pPr marL="342900" indent="-342900">
+              <a:spcAft>
+                <a:spcPts val="400"/>
+              </a:spcAft>
+              <a:buSzPct val="100000"/>
+              <a:buChar char="•"/>
+            </a:pPr>
             <a:endParaRPr lang="es-ES" sz="1000" noProof="0" dirty="0"/>
           </a:p>
         </p:txBody>
@@ -12505,7 +18712,7 @@
                 <a:ea typeface="Calibri" pitchFamily="34" charset="-122"/>
                 <a:cs typeface="Calibri" pitchFamily="34" charset="-120"/>
               </a:rPr>
-              <a:t>7 / 11</a:t>
+              <a:t>9 / 15</a:t>
             </a:r>
             <a:endParaRPr lang="es-ES" sz="900" noProof="0" dirty="0"/>
           </a:p>

--- a/presentacion/Presentacion.pptx
+++ b/presentacion/Presentacion.pptx
@@ -3993,7 +3993,7 @@
         </p:nvSpPr>
         <p:spPr>
           <a:xfrm>
-            <a:off x="731520" y="3291840"/>
+            <a:off x="731520" y="3360420"/>
             <a:ext cx="7772400" cy="365760"/>
           </a:xfrm>
           <a:prstGeom prst="rect">
@@ -4032,7 +4032,7 @@
         </p:nvSpPr>
         <p:spPr>
           <a:xfrm>
-            <a:off x="731520" y="3657600"/>
+            <a:off x="722376" y="3566160"/>
             <a:ext cx="7772400" cy="914400"/>
           </a:xfrm>
           <a:prstGeom prst="rect">
@@ -4051,238 +4051,14 @@
               </a:spcAft>
               <a:buNone/>
             </a:pPr>
-            <a:r>
-              <a:rPr lang="es-ES" sz="1100" noProof="0" dirty="0">
-                <a:solidFill>
-                  <a:srgbClr val="1A202C"/>
-                </a:solidFill>
-                <a:latin typeface="Calibri" pitchFamily="34" charset="0"/>
-                <a:ea typeface="Calibri" pitchFamily="34" charset="-122"/>
-                <a:cs typeface="Calibri" pitchFamily="34" charset="-120"/>
-              </a:rPr>
-              <a:t>View en ANALYTICS: </a:t>
-            </a:r>
-            <a:r>
-              <a:rPr lang="es-ES" sz="1100" noProof="0" dirty="0" err="1">
-                <a:solidFill>
-                  <a:srgbClr val="1A202C"/>
-                </a:solidFill>
-                <a:latin typeface="Calibri" pitchFamily="34" charset="0"/>
-                <a:ea typeface="Calibri" pitchFamily="34" charset="-122"/>
-                <a:cs typeface="Calibri" pitchFamily="34" charset="-120"/>
-              </a:rPr>
-              <a:t>row_number</a:t>
-            </a:r>
-            <a:r>
-              <a:rPr lang="es-ES" sz="1100" noProof="0" dirty="0">
-                <a:solidFill>
-                  <a:srgbClr val="1A202C"/>
-                </a:solidFill>
-                <a:latin typeface="Calibri" pitchFamily="34" charset="0"/>
-                <a:ea typeface="Calibri" pitchFamily="34" charset="-122"/>
-                <a:cs typeface="Calibri" pitchFamily="34" charset="-120"/>
-              </a:rPr>
-              <a:t>() </a:t>
-            </a:r>
-            <a:r>
-              <a:rPr lang="es-ES" sz="1100" noProof="0" dirty="0" err="1">
-                <a:solidFill>
-                  <a:srgbClr val="1A202C"/>
-                </a:solidFill>
-                <a:latin typeface="Calibri" pitchFamily="34" charset="0"/>
-                <a:ea typeface="Calibri" pitchFamily="34" charset="-122"/>
-                <a:cs typeface="Calibri" pitchFamily="34" charset="-120"/>
-              </a:rPr>
-              <a:t>over</a:t>
-            </a:r>
-            <a:r>
-              <a:rPr lang="es-ES" sz="1100" noProof="0" dirty="0">
-                <a:solidFill>
-                  <a:srgbClr val="1A202C"/>
-                </a:solidFill>
-                <a:latin typeface="Calibri" pitchFamily="34" charset="0"/>
-                <a:ea typeface="Calibri" pitchFamily="34" charset="-122"/>
-                <a:cs typeface="Calibri" pitchFamily="34" charset="-120"/>
-              </a:rPr>
-              <a:t> (</a:t>
-            </a:r>
-            <a:r>
-              <a:rPr lang="es-ES" sz="1100" noProof="0" dirty="0" err="1">
-                <a:solidFill>
-                  <a:srgbClr val="1A202C"/>
-                </a:solidFill>
-                <a:latin typeface="Calibri" pitchFamily="34" charset="0"/>
-                <a:ea typeface="Calibri" pitchFamily="34" charset="-122"/>
-                <a:cs typeface="Calibri" pitchFamily="34" charset="-120"/>
-              </a:rPr>
-              <a:t>partition</a:t>
-            </a:r>
-            <a:r>
-              <a:rPr lang="es-ES" sz="1100" noProof="0" dirty="0">
-                <a:solidFill>
-                  <a:srgbClr val="1A202C"/>
-                </a:solidFill>
-                <a:latin typeface="Calibri" pitchFamily="34" charset="0"/>
-                <a:ea typeface="Calibri" pitchFamily="34" charset="-122"/>
-                <a:cs typeface="Calibri" pitchFamily="34" charset="-120"/>
-              </a:rPr>
-              <a:t> </a:t>
-            </a:r>
-            <a:r>
-              <a:rPr lang="es-ES" sz="1100" noProof="0" dirty="0" err="1">
-                <a:solidFill>
-                  <a:srgbClr val="1A202C"/>
-                </a:solidFill>
-                <a:latin typeface="Calibri" pitchFamily="34" charset="0"/>
-                <a:ea typeface="Calibri" pitchFamily="34" charset="-122"/>
-                <a:cs typeface="Calibri" pitchFamily="34" charset="-120"/>
-              </a:rPr>
-              <a:t>by</a:t>
-            </a:r>
-            <a:r>
-              <a:rPr lang="es-ES" sz="1100" noProof="0" dirty="0">
-                <a:solidFill>
-                  <a:srgbClr val="1A202C"/>
-                </a:solidFill>
-                <a:latin typeface="Calibri" pitchFamily="34" charset="0"/>
-                <a:ea typeface="Calibri" pitchFamily="34" charset="-122"/>
-                <a:cs typeface="Calibri" pitchFamily="34" charset="-120"/>
-              </a:rPr>
-              <a:t> </a:t>
-            </a:r>
-            <a:r>
-              <a:rPr lang="es-ES" sz="1100" noProof="0" dirty="0" err="1">
-                <a:solidFill>
-                  <a:srgbClr val="1A202C"/>
-                </a:solidFill>
-                <a:latin typeface="Calibri" pitchFamily="34" charset="0"/>
-                <a:ea typeface="Calibri" pitchFamily="34" charset="-122"/>
-                <a:cs typeface="Calibri" pitchFamily="34" charset="-120"/>
-              </a:rPr>
-              <a:t>city</a:t>
-            </a:r>
-            <a:r>
-              <a:rPr lang="es-ES" sz="1100" noProof="0" dirty="0">
-                <a:solidFill>
-                  <a:srgbClr val="1A202C"/>
-                </a:solidFill>
-                <a:latin typeface="Calibri" pitchFamily="34" charset="0"/>
-                <a:ea typeface="Calibri" pitchFamily="34" charset="-122"/>
-                <a:cs typeface="Calibri" pitchFamily="34" charset="-120"/>
-              </a:rPr>
-              <a:t>, </a:t>
-            </a:r>
-            <a:r>
-              <a:rPr lang="es-ES" sz="1100" noProof="0" dirty="0" err="1">
-                <a:solidFill>
-                  <a:srgbClr val="1A202C"/>
-                </a:solidFill>
-                <a:latin typeface="Calibri" pitchFamily="34" charset="0"/>
-                <a:ea typeface="Calibri" pitchFamily="34" charset="-122"/>
-                <a:cs typeface="Calibri" pitchFamily="34" charset="-120"/>
-              </a:rPr>
-              <a:t>nombre_mes</a:t>
-            </a:r>
-            <a:r>
-              <a:rPr lang="es-ES" sz="1100" noProof="0" dirty="0">
-                <a:solidFill>
-                  <a:srgbClr val="1A202C"/>
-                </a:solidFill>
-                <a:latin typeface="Calibri" pitchFamily="34" charset="0"/>
-                <a:ea typeface="Calibri" pitchFamily="34" charset="-122"/>
-                <a:cs typeface="Calibri" pitchFamily="34" charset="-120"/>
-              </a:rPr>
-              <a:t> </a:t>
-            </a:r>
-            <a:r>
-              <a:rPr lang="es-ES" sz="1100" noProof="0" dirty="0" err="1">
-                <a:solidFill>
-                  <a:srgbClr val="1A202C"/>
-                </a:solidFill>
-                <a:latin typeface="Calibri" pitchFamily="34" charset="0"/>
-                <a:ea typeface="Calibri" pitchFamily="34" charset="-122"/>
-                <a:cs typeface="Calibri" pitchFamily="34" charset="-120"/>
-              </a:rPr>
-              <a:t>order</a:t>
-            </a:r>
-            <a:r>
-              <a:rPr lang="es-ES" sz="1100" noProof="0" dirty="0">
-                <a:solidFill>
-                  <a:srgbClr val="1A202C"/>
-                </a:solidFill>
-                <a:latin typeface="Calibri" pitchFamily="34" charset="0"/>
-                <a:ea typeface="Calibri" pitchFamily="34" charset="-122"/>
-                <a:cs typeface="Calibri" pitchFamily="34" charset="-120"/>
-              </a:rPr>
-              <a:t> </a:t>
-            </a:r>
-            <a:r>
-              <a:rPr lang="es-ES" sz="1100" noProof="0" dirty="0" err="1">
-                <a:solidFill>
-                  <a:srgbClr val="1A202C"/>
-                </a:solidFill>
-                <a:latin typeface="Calibri" pitchFamily="34" charset="0"/>
-                <a:ea typeface="Calibri" pitchFamily="34" charset="-122"/>
-                <a:cs typeface="Calibri" pitchFamily="34" charset="-120"/>
-              </a:rPr>
-              <a:t>by</a:t>
-            </a:r>
-            <a:r>
-              <a:rPr lang="es-ES" sz="1100" noProof="0" dirty="0">
-                <a:solidFill>
-                  <a:srgbClr val="1A202C"/>
-                </a:solidFill>
-                <a:latin typeface="Calibri" pitchFamily="34" charset="0"/>
-                <a:ea typeface="Calibri" pitchFamily="34" charset="-122"/>
-                <a:cs typeface="Calibri" pitchFamily="34" charset="-120"/>
-              </a:rPr>
-              <a:t> </a:t>
-            </a:r>
-            <a:r>
-              <a:rPr lang="es-ES" sz="1100" noProof="0" dirty="0" err="1">
-                <a:solidFill>
-                  <a:srgbClr val="1A202C"/>
-                </a:solidFill>
-                <a:latin typeface="Calibri" pitchFamily="34" charset="0"/>
-                <a:ea typeface="Calibri" pitchFamily="34" charset="-122"/>
-                <a:cs typeface="Calibri" pitchFamily="34" charset="-120"/>
-              </a:rPr>
-              <a:t>predicted_n_trips</a:t>
-            </a:r>
-            <a:r>
-              <a:rPr lang="es-ES" sz="1100" noProof="0" dirty="0">
-                <a:solidFill>
-                  <a:srgbClr val="1A202C"/>
-                </a:solidFill>
-                <a:latin typeface="Calibri" pitchFamily="34" charset="0"/>
-                <a:ea typeface="Calibri" pitchFamily="34" charset="-122"/>
-                <a:cs typeface="Calibri" pitchFamily="34" charset="-120"/>
-              </a:rPr>
-              <a:t> </a:t>
-            </a:r>
-            <a:r>
-              <a:rPr lang="es-ES" sz="1100" noProof="0" dirty="0" err="1">
-                <a:solidFill>
-                  <a:srgbClr val="1A202C"/>
-                </a:solidFill>
-                <a:latin typeface="Calibri" pitchFamily="34" charset="0"/>
-                <a:ea typeface="Calibri" pitchFamily="34" charset="-122"/>
-                <a:cs typeface="Calibri" pitchFamily="34" charset="-120"/>
-              </a:rPr>
-              <a:t>desc</a:t>
-            </a:r>
-            <a:r>
-              <a:rPr lang="es-ES" sz="1100" noProof="0" dirty="0">
-                <a:solidFill>
-                  <a:srgbClr val="1A202C"/>
-                </a:solidFill>
-                <a:latin typeface="Calibri" pitchFamily="34" charset="0"/>
-                <a:ea typeface="Calibri" pitchFamily="34" charset="-122"/>
-                <a:cs typeface="Calibri" pitchFamily="34" charset="-120"/>
-              </a:rPr>
-              <a:t>) = 1.</a:t>
-            </a:r>
-            <a:endParaRPr lang="es-ES" sz="1100" noProof="0" dirty="0"/>
+            <a:endParaRPr lang="es-ES" sz="1100" noProof="0" dirty="0">
+              <a:solidFill>
+                <a:srgbClr val="64748B"/>
+              </a:solidFill>
+              <a:latin typeface="Calibri" pitchFamily="34" charset="0"/>
+              <a:ea typeface="Calibri" pitchFamily="34" charset="-122"/>
+              <a:cs typeface="Calibri" pitchFamily="34" charset="-120"/>
+            </a:endParaRPr>
           </a:p>
           <a:p>
             <a:pPr marL="0" indent="0">
@@ -4300,161 +4076,7 @@
                 <a:ea typeface="Calibri" pitchFamily="34" charset="-122"/>
                 <a:cs typeface="Calibri" pitchFamily="34" charset="-120"/>
               </a:rPr>
-              <a:t>Resultado: el </a:t>
-            </a:r>
-            <a:r>
-              <a:rPr lang="es-ES" sz="1100" noProof="0" dirty="0" err="1">
-                <a:solidFill>
-                  <a:srgbClr val="64748B"/>
-                </a:solidFill>
-                <a:latin typeface="Calibri" pitchFamily="34" charset="0"/>
-                <a:ea typeface="Calibri" pitchFamily="34" charset="-122"/>
-                <a:cs typeface="Calibri" pitchFamily="34" charset="-120"/>
-              </a:rPr>
-              <a:t>dia</a:t>
-            </a:r>
-            <a:r>
-              <a:rPr lang="es-ES" sz="1100" noProof="0" dirty="0">
-                <a:solidFill>
-                  <a:srgbClr val="64748B"/>
-                </a:solidFill>
-                <a:latin typeface="Calibri" pitchFamily="34" charset="0"/>
-                <a:ea typeface="Calibri" pitchFamily="34" charset="-122"/>
-                <a:cs typeface="Calibri" pitchFamily="34" charset="-120"/>
-              </a:rPr>
-              <a:t> pico esperado del mes, por ciudad, listo para visual "</a:t>
-            </a:r>
-            <a:r>
-              <a:rPr lang="es-ES" sz="1100" noProof="0" dirty="0" err="1">
-                <a:solidFill>
-                  <a:srgbClr val="64748B"/>
-                </a:solidFill>
-                <a:latin typeface="Calibri" pitchFamily="34" charset="0"/>
-                <a:ea typeface="Calibri" pitchFamily="34" charset="-122"/>
-                <a:cs typeface="Calibri" pitchFamily="34" charset="-120"/>
-              </a:rPr>
-              <a:t>best</a:t>
-            </a:r>
-            <a:r>
-              <a:rPr lang="es-ES" sz="1100" noProof="0" dirty="0">
-                <a:solidFill>
-                  <a:srgbClr val="64748B"/>
-                </a:solidFill>
-                <a:latin typeface="Calibri" pitchFamily="34" charset="0"/>
-                <a:ea typeface="Calibri" pitchFamily="34" charset="-122"/>
-                <a:cs typeface="Calibri" pitchFamily="34" charset="-120"/>
-              </a:rPr>
-              <a:t> </a:t>
-            </a:r>
-            <a:r>
-              <a:rPr lang="es-ES" sz="1100" noProof="0" dirty="0" err="1">
-                <a:solidFill>
-                  <a:srgbClr val="64748B"/>
-                </a:solidFill>
-                <a:latin typeface="Calibri" pitchFamily="34" charset="0"/>
-                <a:ea typeface="Calibri" pitchFamily="34" charset="-122"/>
-                <a:cs typeface="Calibri" pitchFamily="34" charset="-120"/>
-              </a:rPr>
-              <a:t>day</a:t>
-            </a:r>
-            <a:r>
-              <a:rPr lang="es-ES" sz="1100" noProof="0" dirty="0">
-                <a:solidFill>
-                  <a:srgbClr val="64748B"/>
-                </a:solidFill>
-                <a:latin typeface="Calibri" pitchFamily="34" charset="0"/>
-                <a:ea typeface="Calibri" pitchFamily="34" charset="-122"/>
-                <a:cs typeface="Calibri" pitchFamily="34" charset="-120"/>
-              </a:rPr>
-              <a:t> </a:t>
-            </a:r>
-            <a:r>
-              <a:rPr lang="es-ES" sz="1100" noProof="0" dirty="0" err="1">
-                <a:solidFill>
-                  <a:srgbClr val="64748B"/>
-                </a:solidFill>
-                <a:latin typeface="Calibri" pitchFamily="34" charset="0"/>
-                <a:ea typeface="Calibri" pitchFamily="34" charset="-122"/>
-                <a:cs typeface="Calibri" pitchFamily="34" charset="-120"/>
-              </a:rPr>
-              <a:t>to</a:t>
-            </a:r>
-            <a:r>
-              <a:rPr lang="es-ES" sz="1100" noProof="0" dirty="0">
-                <a:solidFill>
-                  <a:srgbClr val="64748B"/>
-                </a:solidFill>
-                <a:latin typeface="Calibri" pitchFamily="34" charset="0"/>
-                <a:ea typeface="Calibri" pitchFamily="34" charset="-122"/>
-                <a:cs typeface="Calibri" pitchFamily="34" charset="-120"/>
-              </a:rPr>
-              <a:t> </a:t>
-            </a:r>
-            <a:r>
-              <a:rPr lang="es-ES" sz="1100" noProof="0" dirty="0" err="1">
-                <a:solidFill>
-                  <a:srgbClr val="64748B"/>
-                </a:solidFill>
-                <a:latin typeface="Calibri" pitchFamily="34" charset="0"/>
-                <a:ea typeface="Calibri" pitchFamily="34" charset="-122"/>
-                <a:cs typeface="Calibri" pitchFamily="34" charset="-120"/>
-              </a:rPr>
-              <a:t>expect</a:t>
-            </a:r>
-            <a:r>
-              <a:rPr lang="es-ES" sz="1100" noProof="0" dirty="0">
-                <a:solidFill>
-                  <a:srgbClr val="64748B"/>
-                </a:solidFill>
-                <a:latin typeface="Calibri" pitchFamily="34" charset="0"/>
-                <a:ea typeface="Calibri" pitchFamily="34" charset="-122"/>
-                <a:cs typeface="Calibri" pitchFamily="34" charset="-120"/>
-              </a:rPr>
-              <a:t> </a:t>
-            </a:r>
-            <a:r>
-              <a:rPr lang="es-ES" sz="1100" noProof="0" dirty="0" err="1">
-                <a:solidFill>
-                  <a:srgbClr val="64748B"/>
-                </a:solidFill>
-                <a:latin typeface="Calibri" pitchFamily="34" charset="0"/>
-                <a:ea typeface="Calibri" pitchFamily="34" charset="-122"/>
-                <a:cs typeface="Calibri" pitchFamily="34" charset="-120"/>
-              </a:rPr>
-              <a:t>peak</a:t>
-            </a:r>
-            <a:r>
-              <a:rPr lang="es-ES" sz="1100" noProof="0" dirty="0">
-                <a:solidFill>
-                  <a:srgbClr val="64748B"/>
-                </a:solidFill>
-                <a:latin typeface="Calibri" pitchFamily="34" charset="0"/>
-                <a:ea typeface="Calibri" pitchFamily="34" charset="-122"/>
-                <a:cs typeface="Calibri" pitchFamily="34" charset="-120"/>
-              </a:rPr>
-              <a:t> </a:t>
-            </a:r>
-            <a:r>
-              <a:rPr lang="es-ES" sz="1100" noProof="0" dirty="0" err="1">
-                <a:solidFill>
-                  <a:srgbClr val="64748B"/>
-                </a:solidFill>
-                <a:latin typeface="Calibri" pitchFamily="34" charset="0"/>
-                <a:ea typeface="Calibri" pitchFamily="34" charset="-122"/>
-                <a:cs typeface="Calibri" pitchFamily="34" charset="-120"/>
-              </a:rPr>
-              <a:t>demand</a:t>
-            </a:r>
-            <a:r>
-              <a:rPr lang="es-ES" sz="1100" noProof="0" dirty="0">
-                <a:solidFill>
-                  <a:srgbClr val="64748B"/>
-                </a:solidFill>
-                <a:latin typeface="Calibri" pitchFamily="34" charset="0"/>
-                <a:ea typeface="Calibri" pitchFamily="34" charset="-122"/>
-                <a:cs typeface="Calibri" pitchFamily="34" charset="-120"/>
-              </a:rPr>
-              <a:t>" en Power BI.</a:t>
+              <a:t>Resultado: el día pico esperado del mes, por ciudad, listo para visual en Power BI.</a:t>
             </a:r>
             <a:endParaRPr lang="es-ES" sz="1100" noProof="0" dirty="0"/>
           </a:p>
@@ -4529,7 +4151,40 @@
                 <a:ea typeface="Calibri" pitchFamily="34" charset="-122"/>
                 <a:cs typeface="Calibri" pitchFamily="34" charset="-120"/>
               </a:rPr>
-              <a:t> + </a:t>
+              <a:t> (en </a:t>
+            </a:r>
+            <a:r>
+              <a:rPr lang="es-ES" sz="1100" i="1" noProof="0" dirty="0" err="1">
+                <a:solidFill>
+                  <a:srgbClr val="64748B"/>
+                </a:solidFill>
+                <a:latin typeface="Calibri" pitchFamily="34" charset="0"/>
+                <a:ea typeface="Calibri" pitchFamily="34" charset="-122"/>
+                <a:cs typeface="Calibri" pitchFamily="34" charset="-120"/>
+              </a:rPr>
+              <a:t>snowflake</a:t>
+            </a:r>
+            <a:r>
+              <a:rPr lang="es-ES" sz="1100" i="1" noProof="0">
+                <a:solidFill>
+                  <a:srgbClr val="64748B"/>
+                </a:solidFill>
+                <a:latin typeface="Calibri" pitchFamily="34" charset="0"/>
+                <a:ea typeface="Calibri" pitchFamily="34" charset="-122"/>
+                <a:cs typeface="Calibri" pitchFamily="34" charset="-120"/>
+              </a:rPr>
+              <a:t>) </a:t>
+            </a:r>
+            <a:r>
+              <a:rPr lang="es-ES" sz="1100" i="1" noProof="0" dirty="0">
+                <a:solidFill>
+                  <a:srgbClr val="64748B"/>
+                </a:solidFill>
+                <a:latin typeface="Calibri" pitchFamily="34" charset="0"/>
+                <a:ea typeface="Calibri" pitchFamily="34" charset="-122"/>
+                <a:cs typeface="Calibri" pitchFamily="34" charset="-120"/>
+              </a:rPr>
+              <a:t>+ </a:t>
             </a:r>
             <a:r>
               <a:rPr lang="es-ES" sz="1100" i="1" noProof="0" dirty="0" err="1">
@@ -7641,7 +7296,7 @@
                 <a:ea typeface="Calibri" pitchFamily="34" charset="-122"/>
                 <a:cs typeface="Calibri" pitchFamily="34" charset="-120"/>
               </a:rPr>
-              <a:t>Cuando se usa mas? </a:t>
+              <a:t>Cuando hay mas viajes? </a:t>
             </a:r>
             <a:r>
               <a:rPr lang="es-ES" sz="1200" noProof="0" dirty="0">
@@ -17048,7 +16703,7 @@
                 <a:ea typeface="Calibri" pitchFamily="34" charset="-122"/>
                 <a:cs typeface="Calibri" pitchFamily="34" charset="-120"/>
               </a:rPr>
-              <a:t>4</a:t>
+              <a:t>6</a:t>
             </a:r>
             <a:r>
               <a:rPr lang="es-ES" sz="2800" b="1" noProof="0" dirty="0">
@@ -17059,7 +16714,7 @@
                 <a:ea typeface="Calibri" pitchFamily="34" charset="-122"/>
                 <a:cs typeface="Calibri" pitchFamily="34" charset="-120"/>
               </a:rPr>
-              <a:t> modelos</a:t>
+              <a:t> tablas</a:t>
             </a:r>
             <a:endParaRPr lang="es-ES" sz="2800" noProof="0" dirty="0"/>
           </a:p>
@@ -17094,17 +16749,6 @@
               <a:buChar char="•"/>
             </a:pPr>
             <a:r>
-              <a:rPr lang="es-ES" sz="1000" noProof="0" dirty="0">
-                <a:solidFill>
-                  <a:srgbClr val="1A202C"/>
-                </a:solidFill>
-                <a:latin typeface="Calibri" pitchFamily="34" charset="0"/>
-                <a:ea typeface="Calibri" pitchFamily="34" charset="-122"/>
-                <a:cs typeface="Calibri" pitchFamily="34" charset="-120"/>
-              </a:rPr>
-              <a:t>Toda tabla </a:t>
-            </a:r>
-            <a:r>
               <a:rPr lang="es-ES" sz="1000" noProof="0" dirty="0" err="1">
                 <a:solidFill>
                   <a:srgbClr val="1A202C"/>
@@ -17113,31 +16757,16 @@
                 <a:ea typeface="Calibri" pitchFamily="34" charset="-122"/>
                 <a:cs typeface="Calibri" pitchFamily="34" charset="-120"/>
               </a:rPr>
-              <a:t>gold</a:t>
-            </a:r>
-            <a:r>
-              <a:rPr lang="es-ES" sz="1000" noProof="0" dirty="0">
-                <a:solidFill>
-                  <a:srgbClr val="1A202C"/>
-                </a:solidFill>
-                <a:latin typeface="Calibri" pitchFamily="34" charset="0"/>
-                <a:ea typeface="Calibri" pitchFamily="34" charset="-122"/>
-                <a:cs typeface="Calibri" pitchFamily="34" charset="-120"/>
-              </a:rPr>
-              <a:t> + </a:t>
-            </a:r>
-            <a:r>
-              <a:rPr lang="es-ES" sz="1000" noProof="0" dirty="0" err="1">
-                <a:solidFill>
-                  <a:srgbClr val="1A202C"/>
-                </a:solidFill>
-                <a:latin typeface="Calibri" pitchFamily="34" charset="0"/>
-                <a:ea typeface="Calibri" pitchFamily="34" charset="-122"/>
-                <a:cs typeface="Calibri" pitchFamily="34" charset="-120"/>
-              </a:rPr>
-              <a:t>slv_trip</a:t>
-            </a:r>
-            <a:endParaRPr lang="es-ES" sz="1000" noProof="0" dirty="0"/>
+              <a:t>fct_noaa_corrections</a:t>
+            </a:r>
+            <a:endParaRPr lang="es-ES" sz="1000" noProof="0" dirty="0">
+              <a:solidFill>
+                <a:srgbClr val="1A202C"/>
+              </a:solidFill>
+              <a:latin typeface="Calibri" pitchFamily="34" charset="0"/>
+              <a:ea typeface="Calibri" pitchFamily="34" charset="-122"/>
+              <a:cs typeface="Calibri" pitchFamily="34" charset="-120"/>
+            </a:endParaRPr>
           </a:p>
           <a:p>
             <a:pPr marL="342900" indent="-342900">
@@ -17148,61 +16777,24 @@
               <a:buChar char="•"/>
             </a:pPr>
             <a:r>
-              <a:rPr lang="es-ES" sz="1000" noProof="0" dirty="0">
-                <a:solidFill>
-                  <a:srgbClr val="1A202C"/>
-                </a:solidFill>
-                <a:latin typeface="Calibri" pitchFamily="34" charset="0"/>
-                <a:ea typeface="Calibri" pitchFamily="34" charset="-122"/>
-                <a:cs typeface="Calibri" pitchFamily="34" charset="-120"/>
-              </a:rPr>
-              <a:t>+ </a:t>
-            </a:r>
-            <a:r>
-              <a:rPr lang="es-ES" sz="1000" noProof="0" dirty="0" err="1">
-                <a:solidFill>
-                  <a:srgbClr val="1A202C"/>
-                </a:solidFill>
-                <a:latin typeface="Calibri" pitchFamily="34" charset="0"/>
-                <a:ea typeface="Calibri" pitchFamily="34" charset="-122"/>
-                <a:cs typeface="Calibri" pitchFamily="34" charset="-120"/>
-              </a:rPr>
-              <a:t>contract</a:t>
-            </a:r>
-            <a:r>
-              <a:rPr lang="es-ES" sz="1000" noProof="0" dirty="0">
-                <a:solidFill>
-                  <a:srgbClr val="1A202C"/>
-                </a:solidFill>
-                <a:latin typeface="Calibri" pitchFamily="34" charset="0"/>
-                <a:ea typeface="Calibri" pitchFamily="34" charset="-122"/>
-                <a:cs typeface="Calibri" pitchFamily="34" charset="-120"/>
-              </a:rPr>
-              <a:t>: { </a:t>
-            </a:r>
-            <a:r>
-              <a:rPr lang="es-ES" sz="1000" noProof="0" dirty="0" err="1">
-                <a:solidFill>
-                  <a:srgbClr val="1A202C"/>
-                </a:solidFill>
-                <a:latin typeface="Calibri" pitchFamily="34" charset="0"/>
-                <a:ea typeface="Calibri" pitchFamily="34" charset="-122"/>
-                <a:cs typeface="Calibri" pitchFamily="34" charset="-120"/>
-              </a:rPr>
-              <a:t>enforced</a:t>
-            </a:r>
-            <a:r>
-              <a:rPr lang="es-ES" sz="1000" noProof="0" dirty="0">
-                <a:solidFill>
-                  <a:srgbClr val="1A202C"/>
-                </a:solidFill>
-                <a:latin typeface="Calibri" pitchFamily="34" charset="0"/>
-                <a:ea typeface="Calibri" pitchFamily="34" charset="-122"/>
-                <a:cs typeface="Calibri" pitchFamily="34" charset="-120"/>
-              </a:rPr>
-              <a:t>: true }</a:t>
-            </a:r>
-            <a:endParaRPr lang="es-ES" sz="1000" noProof="0" dirty="0"/>
+              <a:rPr lang="es-ES" sz="1000" dirty="0" err="1">
+                <a:solidFill>
+                  <a:srgbClr val="1A202C"/>
+                </a:solidFill>
+                <a:latin typeface="Calibri" pitchFamily="34" charset="0"/>
+                <a:ea typeface="Calibri" pitchFamily="34" charset="-122"/>
+                <a:cs typeface="Calibri" pitchFamily="34" charset="-120"/>
+              </a:rPr>
+              <a:t>Fct_trips</a:t>
+            </a:r>
+            <a:endParaRPr lang="es-ES" sz="1000" noProof="0" dirty="0">
+              <a:solidFill>
+                <a:srgbClr val="1A202C"/>
+              </a:solidFill>
+              <a:latin typeface="Calibri" pitchFamily="34" charset="0"/>
+              <a:ea typeface="Calibri" pitchFamily="34" charset="-122"/>
+              <a:cs typeface="Calibri" pitchFamily="34" charset="-120"/>
+            </a:endParaRPr>
           </a:p>
           <a:p>
             <a:pPr marL="342900" indent="-342900">
@@ -17213,17 +16805,24 @@
               <a:buChar char="•"/>
             </a:pPr>
             <a:r>
-              <a:rPr lang="es-ES" sz="1000" noProof="0" dirty="0">
-                <a:solidFill>
-                  <a:srgbClr val="1A202C"/>
-                </a:solidFill>
-                <a:latin typeface="Calibri" pitchFamily="34" charset="0"/>
-                <a:ea typeface="Calibri" pitchFamily="34" charset="-122"/>
-                <a:cs typeface="Calibri" pitchFamily="34" charset="-120"/>
-              </a:rPr>
-              <a:t>+ PK / NOT NULL a nivel tabla</a:t>
-            </a:r>
-            <a:endParaRPr lang="es-ES" sz="1000" noProof="0" dirty="0"/>
+              <a:rPr lang="es-ES" sz="1000" dirty="0" err="1">
+                <a:solidFill>
+                  <a:srgbClr val="1A202C"/>
+                </a:solidFill>
+                <a:latin typeface="Calibri" pitchFamily="34" charset="0"/>
+                <a:ea typeface="Calibri" pitchFamily="34" charset="-122"/>
+                <a:cs typeface="Calibri" pitchFamily="34" charset="-120"/>
+              </a:rPr>
+              <a:t>Fct_trips_daily</a:t>
+            </a:r>
+            <a:endParaRPr lang="es-ES" sz="1000" noProof="0" dirty="0">
+              <a:solidFill>
+                <a:srgbClr val="1A202C"/>
+              </a:solidFill>
+              <a:latin typeface="Calibri" pitchFamily="34" charset="0"/>
+              <a:ea typeface="Calibri" pitchFamily="34" charset="-122"/>
+              <a:cs typeface="Calibri" pitchFamily="34" charset="-120"/>
+            </a:endParaRPr>
           </a:p>
           <a:p>
             <a:pPr marL="342900" indent="-342900">
@@ -17234,15 +16833,15 @@
               <a:buChar char="•"/>
             </a:pPr>
             <a:r>
-              <a:rPr lang="es-ES" sz="1000" noProof="0" dirty="0" err="1">
-                <a:solidFill>
-                  <a:srgbClr val="1A202C"/>
-                </a:solidFill>
-                <a:latin typeface="Calibri" pitchFamily="34" charset="0"/>
-                <a:ea typeface="Calibri" pitchFamily="34" charset="-122"/>
-                <a:cs typeface="Calibri" pitchFamily="34" charset="-120"/>
-              </a:rPr>
-              <a:t>Snowflake</a:t>
+              <a:rPr lang="es-ES" sz="1000" dirty="0" err="1">
+                <a:solidFill>
+                  <a:srgbClr val="1A202C"/>
+                </a:solidFill>
+                <a:latin typeface="Calibri" pitchFamily="34" charset="0"/>
+                <a:ea typeface="Calibri" pitchFamily="34" charset="-122"/>
+                <a:cs typeface="Calibri" pitchFamily="34" charset="-120"/>
+              </a:rPr>
+              <a:t>Fct_weather_daily</a:t>
             </a:r>
             <a:r>
               <a:rPr lang="es-ES" sz="1000" noProof="0" dirty="0">
@@ -17253,31 +16852,8 @@
                 <a:ea typeface="Calibri" pitchFamily="34" charset="-122"/>
                 <a:cs typeface="Calibri" pitchFamily="34" charset="-120"/>
               </a:rPr>
-              <a:t> </a:t>
-            </a:r>
-            <a:r>
-              <a:rPr lang="es-ES" sz="1000" noProof="0" dirty="0" err="1">
-                <a:solidFill>
-                  <a:srgbClr val="1A202C"/>
-                </a:solidFill>
-                <a:latin typeface="Calibri" pitchFamily="34" charset="0"/>
-                <a:ea typeface="Calibri" pitchFamily="34" charset="-122"/>
-                <a:cs typeface="Calibri" pitchFamily="34" charset="-120"/>
-              </a:rPr>
-              <a:t>enforce</a:t>
-            </a:r>
-            <a:r>
-              <a:rPr lang="es-ES" sz="1000" noProof="0" dirty="0">
-                <a:solidFill>
-                  <a:srgbClr val="1A202C"/>
-                </a:solidFill>
-                <a:latin typeface="Calibri" pitchFamily="34" charset="0"/>
-                <a:ea typeface="Calibri" pitchFamily="34" charset="-122"/>
-                <a:cs typeface="Calibri" pitchFamily="34" charset="-120"/>
-              </a:rPr>
-              <a:t> NOT NULL;</a:t>
-            </a:r>
-            <a:endParaRPr lang="es-ES" sz="1000" noProof="0" dirty="0"/>
+              <a:t>  </a:t>
+            </a:r>
           </a:p>
           <a:p>
             <a:pPr marL="342900" indent="-342900">
@@ -17288,16 +16864,61 @@
               <a:buChar char="•"/>
             </a:pPr>
             <a:r>
-              <a:rPr lang="es-ES" sz="1000" noProof="0" dirty="0">
-                <a:solidFill>
-                  <a:srgbClr val="1A202C"/>
-                </a:solidFill>
-                <a:latin typeface="Calibri" pitchFamily="34" charset="0"/>
-                <a:ea typeface="Calibri" pitchFamily="34" charset="-122"/>
-                <a:cs typeface="Calibri" pitchFamily="34" charset="-120"/>
-              </a:rPr>
-              <a:t>PK/FK informativos</a:t>
-            </a:r>
+              <a:rPr lang="es-ES" sz="1000" noProof="0" dirty="0" err="1">
+                <a:solidFill>
+                  <a:srgbClr val="1A202C"/>
+                </a:solidFill>
+                <a:latin typeface="Calibri" pitchFamily="34" charset="0"/>
+                <a:ea typeface="Calibri" pitchFamily="34" charset="-122"/>
+                <a:cs typeface="Calibri" pitchFamily="34" charset="-120"/>
+              </a:rPr>
+              <a:t>slv_trip</a:t>
+            </a:r>
+            <a:endParaRPr lang="es-ES" sz="1000" noProof="0" dirty="0">
+              <a:solidFill>
+                <a:srgbClr val="1A202C"/>
+              </a:solidFill>
+              <a:latin typeface="Calibri" pitchFamily="34" charset="0"/>
+              <a:ea typeface="Calibri" pitchFamily="34" charset="-122"/>
+              <a:cs typeface="Calibri" pitchFamily="34" charset="-120"/>
+            </a:endParaRPr>
+          </a:p>
+          <a:p>
+            <a:pPr marL="342900" indent="-342900">
+              <a:spcAft>
+                <a:spcPts val="400"/>
+              </a:spcAft>
+              <a:buSzPct val="100000"/>
+              <a:buChar char="•"/>
+            </a:pPr>
+            <a:r>
+              <a:rPr lang="es-ES" sz="1000" noProof="0" dirty="0" err="1">
+                <a:solidFill>
+                  <a:srgbClr val="1A202C"/>
+                </a:solidFill>
+                <a:latin typeface="Calibri" pitchFamily="34" charset="0"/>
+                <a:ea typeface="Calibri" pitchFamily="34" charset="-122"/>
+                <a:cs typeface="Calibri" pitchFamily="34" charset="-120"/>
+              </a:rPr>
+              <a:t>fct_trips_weather</a:t>
+            </a:r>
+            <a:endParaRPr lang="es-ES" sz="1000" noProof="0" dirty="0">
+              <a:solidFill>
+                <a:srgbClr val="1A202C"/>
+              </a:solidFill>
+              <a:latin typeface="Calibri" pitchFamily="34" charset="0"/>
+              <a:ea typeface="Calibri" pitchFamily="34" charset="-122"/>
+              <a:cs typeface="Calibri" pitchFamily="34" charset="-120"/>
+            </a:endParaRPr>
+          </a:p>
+          <a:p>
+            <a:pPr marL="342900" indent="-342900">
+              <a:spcAft>
+                <a:spcPts val="400"/>
+              </a:spcAft>
+              <a:buSzPct val="100000"/>
+              <a:buChar char="•"/>
+            </a:pPr>
             <a:endParaRPr lang="es-ES" sz="1000" noProof="0" dirty="0"/>
           </a:p>
         </p:txBody>
